--- a/usecases/portfolio/TCS-Agentic-AI-Use-Case-Summary.pptx
+++ b/usecases/portfolio/TCS-Agentic-AI-Use-Case-Summary.pptx
@@ -2473,7 +2473,7 @@
         <p:spPr>
           <a:xfrm>
             <a:off x="0" y="0"/>
-            <a:ext cx="12188952" cy="1005840"/>
+            <a:ext cx="12188952" cy="1060704"/>
           </a:xfrm>
           <a:prstGeom prst="rect">
             <a:avLst/>
@@ -2492,12 +2492,129 @@
         </p:nvSpPr>
         <p:spPr>
           <a:xfrm>
-            <a:off x="411480" y="164592"/>
-            <a:ext cx="1188720" cy="310896"/>
+            <a:off x="411480" y="118872"/>
+            <a:ext cx="4572000" cy="219456"/>
+          </a:xfrm>
+          <a:prstGeom prst="rect">
+            <a:avLst/>
+          </a:prstGeom>
+          <a:noFill/>
+          <a:ln/>
+        </p:spPr>
+        <p:txBody>
+          <a:bodyPr wrap="square" rtlCol="0" anchor="ctr"/>
+          <a:lstStyle/>
+          <a:p>
+            <a:pPr indent="0" marL="0">
+              <a:buNone/>
+            </a:pPr>
+            <a:r>
+              <a:rPr lang="en-US" sz="1000" b="1" spc="220" kern="0" dirty="0">
+                <a:solidFill>
+                  <a:srgbClr val="0891B2"/>
+                </a:solidFill>
+                <a:latin typeface="Inter" pitchFamily="34" charset="0"/>
+                <a:ea typeface="Inter" pitchFamily="34" charset="-122"/>
+                <a:cs typeface="Inter" pitchFamily="34" charset="-120"/>
+              </a:rPr>
+              <a:t>TCS AGENTIC AI</a:t>
+            </a:r>
+            <a:endParaRPr lang="en-US" sz="1000" dirty="0"/>
+          </a:p>
+        </p:txBody>
+      </p:sp>
+      <p:sp>
+        <p:nvSpPr>
+          <p:cNvPr id="4" name="Text 2"/>
+          <p:cNvSpPr/>
+          <p:nvPr/>
+        </p:nvSpPr>
+        <p:spPr>
+          <a:xfrm>
+            <a:off x="411480" y="329184"/>
+            <a:ext cx="9692640" cy="402336"/>
+          </a:xfrm>
+          <a:prstGeom prst="rect">
+            <a:avLst/>
+          </a:prstGeom>
+          <a:noFill/>
+          <a:ln/>
+        </p:spPr>
+        <p:txBody>
+          <a:bodyPr wrap="square" rtlCol="0" anchor="ctr"/>
+          <a:lstStyle/>
+          <a:p>
+            <a:pPr indent="0" marL="0">
+              <a:buNone/>
+            </a:pPr>
+            <a:r>
+              <a:rPr lang="en-US" sz="2300" b="1" dirty="0">
+                <a:solidFill>
+                  <a:srgbClr val="FFFFFF"/>
+                </a:solidFill>
+                <a:latin typeface="Inter" pitchFamily="34" charset="0"/>
+                <a:ea typeface="Inter" pitchFamily="34" charset="-122"/>
+                <a:cs typeface="Inter" pitchFamily="34" charset="-120"/>
+              </a:rPr>
+              <a:t>Incident Response Agent</a:t>
+            </a:r>
+            <a:endParaRPr lang="en-US" sz="2300" dirty="0"/>
+          </a:p>
+        </p:txBody>
+      </p:sp>
+      <p:sp>
+        <p:nvSpPr>
+          <p:cNvPr id="5" name="Text 3"/>
+          <p:cNvSpPr/>
+          <p:nvPr/>
+        </p:nvSpPr>
+        <p:spPr>
+          <a:xfrm>
+            <a:off x="411480" y="749808"/>
+            <a:ext cx="9692640" cy="256032"/>
+          </a:xfrm>
+          <a:prstGeom prst="rect">
+            <a:avLst/>
+          </a:prstGeom>
+          <a:noFill/>
+          <a:ln/>
+        </p:spPr>
+        <p:txBody>
+          <a:bodyPr wrap="square" rtlCol="0" anchor="ctr"/>
+          <a:lstStyle/>
+          <a:p>
+            <a:pPr indent="0" marL="0">
+              <a:buNone/>
+            </a:pPr>
+            <a:r>
+              <a:rPr lang="en-US" sz="1050" i="1" dirty="0">
+                <a:solidFill>
+                  <a:srgbClr val="94A3B8"/>
+                </a:solidFill>
+                <a:latin typeface="Inter" pitchFamily="34" charset="0"/>
+                <a:ea typeface="Inter" pitchFamily="34" charset="-122"/>
+                <a:cs typeface="Inter" pitchFamily="34" charset="-120"/>
+              </a:rPr>
+              <a:t>End-to-end incident response — “why is my pod crashing?” to diagnosis, ticket and a dry-run fix</a:t>
+            </a:r>
+            <a:endParaRPr lang="en-US" sz="1050" dirty="0"/>
+          </a:p>
+        </p:txBody>
+      </p:sp>
+      <p:sp>
+        <p:nvSpPr>
+          <p:cNvPr id="6" name="Text 4"/>
+          <p:cNvSpPr/>
+          <p:nvPr/>
+        </p:nvSpPr>
+        <p:spPr>
+          <a:xfrm>
+            <a:off x="10561320" y="310896"/>
+            <a:ext cx="1234440" cy="365760"/>
           </a:xfrm>
           <a:prstGeom prst="rect">
             <a:avLst>
-              <a:gd name="adj" fmla="val 14706"/>
+              <a:gd name="adj" fmla="val 12500"/>
             </a:avLst>
           </a:prstGeom>
           <a:solidFill>
@@ -2513,7 +2630,7 @@
               <a:buNone/>
             </a:pPr>
             <a:r>
-              <a:rPr lang="en-US" sz="1300" b="1" dirty="0">
+              <a:rPr lang="en-US" sz="1500" b="1" dirty="0">
                 <a:solidFill>
                   <a:srgbClr val="FFFFFF"/>
                 </a:solidFill>
@@ -2523,20 +2640,20 @@
               </a:rPr>
               <a:t>UC-09</a:t>
             </a:r>
-            <a:endParaRPr lang="en-US" sz="1300" dirty="0"/>
-          </a:p>
-        </p:txBody>
-      </p:sp>
-      <p:sp>
-        <p:nvSpPr>
-          <p:cNvPr id="4" name="Text 2"/>
-          <p:cNvSpPr/>
-          <p:nvPr/>
-        </p:nvSpPr>
-        <p:spPr>
-          <a:xfrm>
-            <a:off x="1737360" y="128016"/>
-            <a:ext cx="10058400" cy="402336"/>
+            <a:endParaRPr lang="en-US" sz="1500" dirty="0"/>
+          </a:p>
+        </p:txBody>
+      </p:sp>
+      <p:sp>
+        <p:nvSpPr>
+          <p:cNvPr id="7" name="Text 5"/>
+          <p:cNvSpPr/>
+          <p:nvPr/>
+        </p:nvSpPr>
+        <p:spPr>
+          <a:xfrm>
+            <a:off x="411480" y="1188720"/>
+            <a:ext cx="3657600" cy="182880"/>
           </a:xfrm>
           <a:prstGeom prst="rect">
             <a:avLst/>
@@ -2552,69 +2669,30 @@
               <a:buNone/>
             </a:pPr>
             <a:r>
-              <a:rPr lang="en-US" sz="2200" b="1" dirty="0">
-                <a:solidFill>
-                  <a:srgbClr val="FFFFFF"/>
-                </a:solidFill>
-                <a:latin typeface="Inter" pitchFamily="34" charset="0"/>
-                <a:ea typeface="Inter" pitchFamily="34" charset="-122"/>
-                <a:cs typeface="Inter" pitchFamily="34" charset="-120"/>
-              </a:rPr>
-              <a:t>End-to-End Incident Response</a:t>
-            </a:r>
-            <a:endParaRPr lang="en-US" sz="2200" dirty="0"/>
-          </a:p>
-        </p:txBody>
-      </p:sp>
-      <p:sp>
-        <p:nvSpPr>
-          <p:cNvPr id="5" name="Text 3"/>
-          <p:cNvSpPr/>
-          <p:nvPr/>
-        </p:nvSpPr>
-        <p:spPr>
-          <a:xfrm>
-            <a:off x="1737360" y="548640"/>
-            <a:ext cx="10058400" cy="274320"/>
-          </a:xfrm>
-          <a:prstGeom prst="rect">
-            <a:avLst/>
-          </a:prstGeom>
-          <a:noFill/>
-          <a:ln/>
-        </p:spPr>
-        <p:txBody>
-          <a:bodyPr wrap="square" rtlCol="0" anchor="ctr"/>
-          <a:lstStyle/>
-          <a:p>
-            <a:pPr indent="0" marL="0">
-              <a:buNone/>
-            </a:pPr>
-            <a:r>
-              <a:rPr lang="en-US" sz="1100" i="1" dirty="0">
-                <a:solidFill>
-                  <a:srgbClr val="0891B2"/>
-                </a:solidFill>
-                <a:latin typeface="Inter" pitchFamily="34" charset="0"/>
-                <a:ea typeface="Inter" pitchFamily="34" charset="-122"/>
-                <a:cs typeface="Inter" pitchFamily="34" charset="-120"/>
-              </a:rPr>
-              <a:t>“Why is my pod crashing?” → diagnosis, ticket, and a dry-run fix</a:t>
-            </a:r>
-            <a:endParaRPr lang="en-US" sz="1100" dirty="0"/>
-          </a:p>
-        </p:txBody>
-      </p:sp>
-      <p:sp>
-        <p:nvSpPr>
-          <p:cNvPr id="6" name="Text 4"/>
-          <p:cNvSpPr/>
-          <p:nvPr/>
-        </p:nvSpPr>
-        <p:spPr>
-          <a:xfrm>
-            <a:off x="411480" y="1170432"/>
-            <a:ext cx="11384280" cy="1051560"/>
+              <a:rPr lang="en-US" sz="850" b="1" spc="140" kern="0" dirty="0">
+                <a:solidFill>
+                  <a:srgbClr val="64748B"/>
+                </a:solidFill>
+                <a:latin typeface="Inter" pitchFamily="34" charset="0"/>
+                <a:ea typeface="Inter" pitchFamily="34" charset="-122"/>
+                <a:cs typeface="Inter" pitchFamily="34" charset="-120"/>
+              </a:rPr>
+              <a:t>USE CASE DESCRIPTION</a:t>
+            </a:r>
+            <a:endParaRPr lang="en-US" sz="850" dirty="0"/>
+          </a:p>
+        </p:txBody>
+      </p:sp>
+      <p:sp>
+        <p:nvSpPr>
+          <p:cNvPr id="8" name="Text 6"/>
+          <p:cNvSpPr/>
+          <p:nvPr/>
+        </p:nvSpPr>
+        <p:spPr>
+          <a:xfrm>
+            <a:off x="411480" y="1389888"/>
+            <a:ext cx="11384280" cy="914400"/>
           </a:xfrm>
           <a:prstGeom prst="rect">
             <a:avLst/>
@@ -2628,12 +2706,12 @@
           <a:p>
             <a:pPr indent="0" marL="0">
               <a:lnSpc>
-                <a:spcPct val="122000"/>
+                <a:spcPct val="120000"/>
               </a:lnSpc>
               <a:buNone/>
             </a:pPr>
             <a:r>
-              <a:rPr lang="en-US" sz="1250" dirty="0">
+              <a:rPr lang="en-US" sz="1200" dirty="0">
                 <a:solidFill>
                   <a:srgbClr val="1E293B"/>
                 </a:solidFill>
@@ -2643,19 +2721,19 @@
               </a:rPr>
               <a:t>A natural-language question triggers the full incident pipeline: the agent recognises the error pattern, diagnoses root cause from parallel cluster queries, assesses severity, creates the ServiceNow incident, and proposes a targeted fix — presented with a dry-run result attached, so the operator approves an action whose effect is already known.</a:t>
             </a:r>
-            <a:endParaRPr lang="en-US" sz="1250" dirty="0"/>
-          </a:p>
-        </p:txBody>
-      </p:sp>
-      <p:sp>
-        <p:nvSpPr>
-          <p:cNvPr id="7" name="Text 5"/>
-          <p:cNvSpPr/>
-          <p:nvPr/>
-        </p:nvSpPr>
-        <p:spPr>
-          <a:xfrm>
-            <a:off x="411480" y="2157984"/>
+            <a:endParaRPr lang="en-US" sz="1200" dirty="0"/>
+          </a:p>
+        </p:txBody>
+      </p:sp>
+      <p:sp>
+        <p:nvSpPr>
+          <p:cNvPr id="9" name="Text 7"/>
+          <p:cNvSpPr/>
+          <p:nvPr/>
+        </p:nvSpPr>
+        <p:spPr>
+          <a:xfrm>
+            <a:off x="411480" y="2176272"/>
             <a:ext cx="3657600" cy="201168"/>
           </a:xfrm>
           <a:prstGeom prst="rect">
@@ -2672,7 +2750,7 @@
               <a:buNone/>
             </a:pPr>
             <a:r>
-              <a:rPr lang="en-US" sz="900" b="1" spc="150" kern="0" dirty="0">
+              <a:rPr lang="en-US" sz="850" b="1" spc="140" kern="0" dirty="0">
                 <a:solidFill>
                   <a:srgbClr val="2563EB"/>
                 </a:solidFill>
@@ -2680,15 +2758,15 @@
                 <a:ea typeface="Inter" pitchFamily="34" charset="-122"/>
                 <a:cs typeface="Inter" pitchFamily="34" charset="-120"/>
               </a:rPr>
-              <a:t>MASTER WORKFLOW</a:t>
-            </a:r>
-            <a:endParaRPr lang="en-US" sz="900" dirty="0"/>
-          </a:p>
-        </p:txBody>
-      </p:sp>
-      <p:sp>
-        <p:nvSpPr>
-          <p:cNvPr id="8" name="Text 6"/>
+              <a:t>END-TO-END WORKFLOW</a:t>
+            </a:r>
+            <a:endParaRPr lang="en-US" sz="850" dirty="0"/>
+          </a:p>
+        </p:txBody>
+      </p:sp>
+      <p:sp>
+        <p:nvSpPr>
+          <p:cNvPr id="10" name="Text 8"/>
           <p:cNvSpPr/>
           <p:nvPr/>
         </p:nvSpPr>
@@ -2727,7 +2805,7 @@
       </p:sp>
       <p:sp>
         <p:nvSpPr>
-          <p:cNvPr id="9" name="Shape 7"/>
+          <p:cNvPr id="11" name="Shape 9"/>
           <p:cNvSpPr/>
           <p:nvPr/>
         </p:nvSpPr>
@@ -2754,7 +2832,7 @@
       </p:sp>
       <p:sp>
         <p:nvSpPr>
-          <p:cNvPr id="10" name="Text 8"/>
+          <p:cNvPr id="12" name="Text 10"/>
           <p:cNvSpPr/>
           <p:nvPr/>
         </p:nvSpPr>
@@ -2793,7 +2871,7 @@
       </p:sp>
       <p:sp>
         <p:nvSpPr>
-          <p:cNvPr id="11" name="Text 9"/>
+          <p:cNvPr id="13" name="Text 11"/>
           <p:cNvSpPr/>
           <p:nvPr/>
         </p:nvSpPr>
@@ -2832,7 +2910,7 @@
       </p:sp>
       <p:sp>
         <p:nvSpPr>
-          <p:cNvPr id="12" name="Text 10"/>
+          <p:cNvPr id="14" name="Text 12"/>
           <p:cNvSpPr/>
           <p:nvPr/>
         </p:nvSpPr>
@@ -2871,7 +2949,7 @@
       </p:sp>
       <p:sp>
         <p:nvSpPr>
-          <p:cNvPr id="13" name="Shape 11"/>
+          <p:cNvPr id="15" name="Shape 13"/>
           <p:cNvSpPr/>
           <p:nvPr/>
         </p:nvSpPr>
@@ -2898,7 +2976,7 @@
       </p:sp>
       <p:sp>
         <p:nvSpPr>
-          <p:cNvPr id="14" name="Text 12"/>
+          <p:cNvPr id="16" name="Text 14"/>
           <p:cNvSpPr/>
           <p:nvPr/>
         </p:nvSpPr>
@@ -2937,7 +3015,7 @@
       </p:sp>
       <p:sp>
         <p:nvSpPr>
-          <p:cNvPr id="15" name="Text 13"/>
+          <p:cNvPr id="17" name="Text 15"/>
           <p:cNvSpPr/>
           <p:nvPr/>
         </p:nvSpPr>
@@ -2976,7 +3054,7 @@
       </p:sp>
       <p:sp>
         <p:nvSpPr>
-          <p:cNvPr id="16" name="Text 14"/>
+          <p:cNvPr id="18" name="Text 16"/>
           <p:cNvSpPr/>
           <p:nvPr/>
         </p:nvSpPr>
@@ -3015,7 +3093,7 @@
       </p:sp>
       <p:sp>
         <p:nvSpPr>
-          <p:cNvPr id="17" name="Shape 15"/>
+          <p:cNvPr id="19" name="Shape 17"/>
           <p:cNvSpPr/>
           <p:nvPr/>
         </p:nvSpPr>
@@ -3042,7 +3120,7 @@
       </p:sp>
       <p:sp>
         <p:nvSpPr>
-          <p:cNvPr id="18" name="Text 16"/>
+          <p:cNvPr id="20" name="Text 18"/>
           <p:cNvSpPr/>
           <p:nvPr/>
         </p:nvSpPr>
@@ -3081,7 +3159,7 @@
       </p:sp>
       <p:sp>
         <p:nvSpPr>
-          <p:cNvPr id="19" name="Text 17"/>
+          <p:cNvPr id="21" name="Text 19"/>
           <p:cNvSpPr/>
           <p:nvPr/>
         </p:nvSpPr>
@@ -3120,7 +3198,7 @@
       </p:sp>
       <p:sp>
         <p:nvSpPr>
-          <p:cNvPr id="20" name="Text 18"/>
+          <p:cNvPr id="22" name="Text 20"/>
           <p:cNvSpPr/>
           <p:nvPr/>
         </p:nvSpPr>
@@ -3159,7 +3237,7 @@
       </p:sp>
       <p:sp>
         <p:nvSpPr>
-          <p:cNvPr id="21" name="Shape 19"/>
+          <p:cNvPr id="23" name="Shape 21"/>
           <p:cNvSpPr/>
           <p:nvPr/>
         </p:nvSpPr>
@@ -3186,7 +3264,7 @@
       </p:sp>
       <p:sp>
         <p:nvSpPr>
-          <p:cNvPr id="22" name="Text 20"/>
+          <p:cNvPr id="24" name="Text 22"/>
           <p:cNvSpPr/>
           <p:nvPr/>
         </p:nvSpPr>
@@ -3225,7 +3303,7 @@
       </p:sp>
       <p:sp>
         <p:nvSpPr>
-          <p:cNvPr id="23" name="Text 21"/>
+          <p:cNvPr id="25" name="Text 23"/>
           <p:cNvSpPr/>
           <p:nvPr/>
         </p:nvSpPr>
@@ -3264,7 +3342,7 @@
       </p:sp>
       <p:sp>
         <p:nvSpPr>
-          <p:cNvPr id="24" name="Text 22"/>
+          <p:cNvPr id="26" name="Text 24"/>
           <p:cNvSpPr/>
           <p:nvPr/>
         </p:nvSpPr>
@@ -3303,7 +3381,7 @@
       </p:sp>
       <p:sp>
         <p:nvSpPr>
-          <p:cNvPr id="25" name="Shape 23"/>
+          <p:cNvPr id="27" name="Shape 25"/>
           <p:cNvSpPr/>
           <p:nvPr/>
         </p:nvSpPr>
@@ -3330,7 +3408,7 @@
       </p:sp>
       <p:sp>
         <p:nvSpPr>
-          <p:cNvPr id="26" name="Text 24"/>
+          <p:cNvPr id="28" name="Text 26"/>
           <p:cNvSpPr/>
           <p:nvPr/>
         </p:nvSpPr>
@@ -3369,7 +3447,7 @@
       </p:sp>
       <p:sp>
         <p:nvSpPr>
-          <p:cNvPr id="27" name="Text 25"/>
+          <p:cNvPr id="29" name="Text 27"/>
           <p:cNvSpPr/>
           <p:nvPr/>
         </p:nvSpPr>
@@ -3408,7 +3486,7 @@
       </p:sp>
       <p:sp>
         <p:nvSpPr>
-          <p:cNvPr id="28" name="Text 26"/>
+          <p:cNvPr id="30" name="Text 28"/>
           <p:cNvSpPr/>
           <p:nvPr/>
         </p:nvSpPr>
@@ -3447,7 +3525,7 @@
       </p:sp>
       <p:sp>
         <p:nvSpPr>
-          <p:cNvPr id="29" name="Shape 27"/>
+          <p:cNvPr id="31" name="Shape 29"/>
           <p:cNvSpPr/>
           <p:nvPr/>
         </p:nvSpPr>
@@ -3474,7 +3552,7 @@
       </p:sp>
       <p:sp>
         <p:nvSpPr>
-          <p:cNvPr id="30" name="Text 28"/>
+          <p:cNvPr id="32" name="Text 30"/>
           <p:cNvSpPr/>
           <p:nvPr/>
         </p:nvSpPr>
@@ -3513,7 +3591,7 @@
       </p:sp>
       <p:sp>
         <p:nvSpPr>
-          <p:cNvPr id="31" name="Text 29"/>
+          <p:cNvPr id="33" name="Text 31"/>
           <p:cNvSpPr/>
           <p:nvPr/>
         </p:nvSpPr>
@@ -3552,7 +3630,7 @@
       </p:sp>
       <p:sp>
         <p:nvSpPr>
-          <p:cNvPr id="32" name="Text 30"/>
+          <p:cNvPr id="34" name="Text 32"/>
           <p:cNvSpPr/>
           <p:nvPr/>
         </p:nvSpPr>
@@ -3591,7 +3669,7 @@
       </p:sp>
       <p:sp>
         <p:nvSpPr>
-          <p:cNvPr id="33" name="Shape 31"/>
+          <p:cNvPr id="35" name="Shape 33"/>
           <p:cNvSpPr/>
           <p:nvPr/>
         </p:nvSpPr>
@@ -3618,7 +3696,7 @@
       </p:sp>
       <p:sp>
         <p:nvSpPr>
-          <p:cNvPr id="34" name="Text 32"/>
+          <p:cNvPr id="36" name="Text 34"/>
           <p:cNvSpPr/>
           <p:nvPr/>
         </p:nvSpPr>
@@ -3657,7 +3735,7 @@
       </p:sp>
       <p:sp>
         <p:nvSpPr>
-          <p:cNvPr id="35" name="Text 33"/>
+          <p:cNvPr id="37" name="Text 35"/>
           <p:cNvSpPr/>
           <p:nvPr/>
         </p:nvSpPr>
@@ -3696,7 +3774,7 @@
       </p:sp>
       <p:sp>
         <p:nvSpPr>
-          <p:cNvPr id="36" name="Text 34"/>
+          <p:cNvPr id="38" name="Text 36"/>
           <p:cNvSpPr/>
           <p:nvPr/>
         </p:nvSpPr>
@@ -3735,7 +3813,7 @@
       </p:sp>
       <p:sp>
         <p:nvSpPr>
-          <p:cNvPr id="37" name="Shape 35"/>
+          <p:cNvPr id="39" name="Shape 37"/>
           <p:cNvSpPr/>
           <p:nvPr/>
         </p:nvSpPr>
@@ -3762,7 +3840,7 @@
       </p:sp>
       <p:sp>
         <p:nvSpPr>
-          <p:cNvPr id="38" name="Text 36"/>
+          <p:cNvPr id="40" name="Text 38"/>
           <p:cNvSpPr/>
           <p:nvPr/>
         </p:nvSpPr>
@@ -3801,7 +3879,7 @@
       </p:sp>
       <p:sp>
         <p:nvSpPr>
-          <p:cNvPr id="39" name="Text 37"/>
+          <p:cNvPr id="41" name="Text 39"/>
           <p:cNvSpPr/>
           <p:nvPr/>
         </p:nvSpPr>
@@ -3840,7 +3918,7 @@
       </p:sp>
       <p:sp>
         <p:nvSpPr>
-          <p:cNvPr id="40" name="Shape 38"/>
+          <p:cNvPr id="42" name="Shape 40"/>
           <p:cNvSpPr/>
           <p:nvPr/>
         </p:nvSpPr>
@@ -3867,7 +3945,7 @@
       </p:sp>
       <p:sp>
         <p:nvSpPr>
-          <p:cNvPr id="41" name="Text 39"/>
+          <p:cNvPr id="43" name="Text 41"/>
           <p:cNvSpPr/>
           <p:nvPr/>
         </p:nvSpPr>
@@ -3906,7 +3984,7 @@
       </p:sp>
       <p:sp>
         <p:nvSpPr>
-          <p:cNvPr id="42" name="Shape 40"/>
+          <p:cNvPr id="44" name="Shape 42"/>
           <p:cNvSpPr/>
           <p:nvPr/>
         </p:nvSpPr>
@@ -3933,7 +4011,7 @@
       </p:sp>
       <p:sp>
         <p:nvSpPr>
-          <p:cNvPr id="43" name="Text 41"/>
+          <p:cNvPr id="45" name="Text 43"/>
           <p:cNvSpPr/>
           <p:nvPr/>
         </p:nvSpPr>
@@ -3972,7 +4050,7 @@
       </p:sp>
       <p:sp>
         <p:nvSpPr>
-          <p:cNvPr id="44" name="Shape 42"/>
+          <p:cNvPr id="46" name="Shape 44"/>
           <p:cNvSpPr/>
           <p:nvPr/>
         </p:nvSpPr>
@@ -3999,7 +4077,7 @@
       </p:sp>
       <p:sp>
         <p:nvSpPr>
-          <p:cNvPr id="45" name="Text 43"/>
+          <p:cNvPr id="47" name="Text 45"/>
           <p:cNvSpPr/>
           <p:nvPr/>
         </p:nvSpPr>
@@ -4038,7 +4116,7 @@
       </p:sp>
       <p:sp>
         <p:nvSpPr>
-          <p:cNvPr id="46" name="Shape 44"/>
+          <p:cNvPr id="48" name="Shape 46"/>
           <p:cNvSpPr/>
           <p:nvPr/>
         </p:nvSpPr>
@@ -4065,7 +4143,7 @@
       </p:sp>
       <p:sp>
         <p:nvSpPr>
-          <p:cNvPr id="47" name="Text 45"/>
+          <p:cNvPr id="49" name="Text 47"/>
           <p:cNvSpPr/>
           <p:nvPr/>
         </p:nvSpPr>
@@ -4104,7 +4182,7 @@
       </p:sp>
       <p:sp>
         <p:nvSpPr>
-          <p:cNvPr id="48" name="Text 46"/>
+          <p:cNvPr id="50" name="Text 48"/>
           <p:cNvSpPr/>
           <p:nvPr/>
         </p:nvSpPr>
@@ -4366,7 +4444,7 @@
         <p:spPr>
           <a:xfrm>
             <a:off x="0" y="0"/>
-            <a:ext cx="12188952" cy="1005840"/>
+            <a:ext cx="12188952" cy="1060704"/>
           </a:xfrm>
           <a:prstGeom prst="rect">
             <a:avLst/>
@@ -4385,12 +4463,129 @@
         </p:nvSpPr>
         <p:spPr>
           <a:xfrm>
-            <a:off x="411480" y="164592"/>
-            <a:ext cx="1188720" cy="310896"/>
+            <a:off x="411480" y="118872"/>
+            <a:ext cx="4572000" cy="219456"/>
+          </a:xfrm>
+          <a:prstGeom prst="rect">
+            <a:avLst/>
+          </a:prstGeom>
+          <a:noFill/>
+          <a:ln/>
+        </p:spPr>
+        <p:txBody>
+          <a:bodyPr wrap="square" rtlCol="0" anchor="ctr"/>
+          <a:lstStyle/>
+          <a:p>
+            <a:pPr indent="0" marL="0">
+              <a:buNone/>
+            </a:pPr>
+            <a:r>
+              <a:rPr lang="en-US" sz="1000" b="1" spc="220" kern="0" dirty="0">
+                <a:solidFill>
+                  <a:srgbClr val="0891B2"/>
+                </a:solidFill>
+                <a:latin typeface="Inter" pitchFamily="34" charset="0"/>
+                <a:ea typeface="Inter" pitchFamily="34" charset="-122"/>
+                <a:cs typeface="Inter" pitchFamily="34" charset="-120"/>
+              </a:rPr>
+              <a:t>TCS AGENTIC AI</a:t>
+            </a:r>
+            <a:endParaRPr lang="en-US" sz="1000" dirty="0"/>
+          </a:p>
+        </p:txBody>
+      </p:sp>
+      <p:sp>
+        <p:nvSpPr>
+          <p:cNvPr id="4" name="Text 2"/>
+          <p:cNvSpPr/>
+          <p:nvPr/>
+        </p:nvSpPr>
+        <p:spPr>
+          <a:xfrm>
+            <a:off x="411480" y="329184"/>
+            <a:ext cx="9692640" cy="402336"/>
+          </a:xfrm>
+          <a:prstGeom prst="rect">
+            <a:avLst/>
+          </a:prstGeom>
+          <a:noFill/>
+          <a:ln/>
+        </p:spPr>
+        <p:txBody>
+          <a:bodyPr wrap="square" rtlCol="0" anchor="ctr"/>
+          <a:lstStyle/>
+          <a:p>
+            <a:pPr indent="0" marL="0">
+              <a:buNone/>
+            </a:pPr>
+            <a:r>
+              <a:rPr lang="en-US" sz="2300" b="1" dirty="0">
+                <a:solidFill>
+                  <a:srgbClr val="FFFFFF"/>
+                </a:solidFill>
+                <a:latin typeface="Inter" pitchFamily="34" charset="0"/>
+                <a:ea typeface="Inter" pitchFamily="34" charset="-122"/>
+                <a:cs typeface="Inter" pitchFamily="34" charset="-120"/>
+              </a:rPr>
+              <a:t>Container Troubleshooting Agent</a:t>
+            </a:r>
+            <a:endParaRPr lang="en-US" sz="2300" dirty="0"/>
+          </a:p>
+        </p:txBody>
+      </p:sp>
+      <p:sp>
+        <p:nvSpPr>
+          <p:cNvPr id="5" name="Text 3"/>
+          <p:cNvSpPr/>
+          <p:nvPr/>
+        </p:nvSpPr>
+        <p:spPr>
+          <a:xfrm>
+            <a:off x="411480" y="749808"/>
+            <a:ext cx="9692640" cy="256032"/>
+          </a:xfrm>
+          <a:prstGeom prst="rect">
+            <a:avLst/>
+          </a:prstGeom>
+          <a:noFill/>
+          <a:ln/>
+        </p:spPr>
+        <p:txBody>
+          <a:bodyPr wrap="square" rtlCol="0" anchor="ctr"/>
+          <a:lstStyle/>
+          <a:p>
+            <a:pPr indent="0" marL="0">
+              <a:buNone/>
+            </a:pPr>
+            <a:r>
+              <a:rPr lang="en-US" sz="1050" i="1" dirty="0">
+                <a:solidFill>
+                  <a:srgbClr val="94A3B8"/>
+                </a:solidFill>
+                <a:latin typeface="Inter" pitchFamily="34" charset="0"/>
+                <a:ea typeface="Inter" pitchFamily="34" charset="-122"/>
+                <a:cs typeface="Inter" pitchFamily="34" charset="-120"/>
+              </a:rPr>
+              <a:t>AI-powered pod troubleshooting — ask in plain language, get a diagnosis backed by live cluster evidence</a:t>
+            </a:r>
+            <a:endParaRPr lang="en-US" sz="1050" dirty="0"/>
+          </a:p>
+        </p:txBody>
+      </p:sp>
+      <p:sp>
+        <p:nvSpPr>
+          <p:cNvPr id="6" name="Text 4"/>
+          <p:cNvSpPr/>
+          <p:nvPr/>
+        </p:nvSpPr>
+        <p:spPr>
+          <a:xfrm>
+            <a:off x="10561320" y="310896"/>
+            <a:ext cx="1234440" cy="365760"/>
           </a:xfrm>
           <a:prstGeom prst="rect">
             <a:avLst>
-              <a:gd name="adj" fmla="val 14706"/>
+              <a:gd name="adj" fmla="val 12500"/>
             </a:avLst>
           </a:prstGeom>
           <a:solidFill>
@@ -4406,7 +4601,7 @@
               <a:buNone/>
             </a:pPr>
             <a:r>
-              <a:rPr lang="en-US" sz="1300" b="1" dirty="0">
+              <a:rPr lang="en-US" sz="1500" b="1" dirty="0">
                 <a:solidFill>
                   <a:srgbClr val="FFFFFF"/>
                 </a:solidFill>
@@ -4416,20 +4611,20 @@
               </a:rPr>
               <a:t>UC-01</a:t>
             </a:r>
-            <a:endParaRPr lang="en-US" sz="1300" dirty="0"/>
-          </a:p>
-        </p:txBody>
-      </p:sp>
-      <p:sp>
-        <p:nvSpPr>
-          <p:cNvPr id="4" name="Text 2"/>
-          <p:cNvSpPr/>
-          <p:nvPr/>
-        </p:nvSpPr>
-        <p:spPr>
-          <a:xfrm>
-            <a:off x="1737360" y="128016"/>
-            <a:ext cx="10058400" cy="402336"/>
+            <a:endParaRPr lang="en-US" sz="1500" dirty="0"/>
+          </a:p>
+        </p:txBody>
+      </p:sp>
+      <p:sp>
+        <p:nvSpPr>
+          <p:cNvPr id="7" name="Text 5"/>
+          <p:cNvSpPr/>
+          <p:nvPr/>
+        </p:nvSpPr>
+        <p:spPr>
+          <a:xfrm>
+            <a:off x="411480" y="1188720"/>
+            <a:ext cx="3657600" cy="182880"/>
           </a:xfrm>
           <a:prstGeom prst="rect">
             <a:avLst/>
@@ -4445,69 +4640,30 @@
               <a:buNone/>
             </a:pPr>
             <a:r>
-              <a:rPr lang="en-US" sz="2200" b="1" dirty="0">
-                <a:solidFill>
-                  <a:srgbClr val="FFFFFF"/>
-                </a:solidFill>
-                <a:latin typeface="Inter" pitchFamily="34" charset="0"/>
-                <a:ea typeface="Inter" pitchFamily="34" charset="-122"/>
-                <a:cs typeface="Inter" pitchFamily="34" charset="-120"/>
-              </a:rPr>
-              <a:t>AI-Powered Pod Troubleshooting</a:t>
-            </a:r>
-            <a:endParaRPr lang="en-US" sz="2200" dirty="0"/>
-          </a:p>
-        </p:txBody>
-      </p:sp>
-      <p:sp>
-        <p:nvSpPr>
-          <p:cNvPr id="5" name="Text 3"/>
-          <p:cNvSpPr/>
-          <p:nvPr/>
-        </p:nvSpPr>
-        <p:spPr>
-          <a:xfrm>
-            <a:off x="1737360" y="548640"/>
-            <a:ext cx="10058400" cy="274320"/>
-          </a:xfrm>
-          <a:prstGeom prst="rect">
-            <a:avLst/>
-          </a:prstGeom>
-          <a:noFill/>
-          <a:ln/>
-        </p:spPr>
-        <p:txBody>
-          <a:bodyPr wrap="square" rtlCol="0" anchor="ctr"/>
-          <a:lstStyle/>
-          <a:p>
-            <a:pPr indent="0" marL="0">
-              <a:buNone/>
-            </a:pPr>
-            <a:r>
-              <a:rPr lang="en-US" sz="1100" i="1" dirty="0">
-                <a:solidFill>
-                  <a:srgbClr val="0891B2"/>
-                </a:solidFill>
-                <a:latin typeface="Inter" pitchFamily="34" charset="0"/>
-                <a:ea typeface="Inter" pitchFamily="34" charset="-122"/>
-                <a:cs typeface="Inter" pitchFamily="34" charset="-120"/>
-              </a:rPr>
-              <a:t>Ask in plain language; get a diagnosis backed by live cluster evidence</a:t>
-            </a:r>
-            <a:endParaRPr lang="en-US" sz="1100" dirty="0"/>
-          </a:p>
-        </p:txBody>
-      </p:sp>
-      <p:sp>
-        <p:nvSpPr>
-          <p:cNvPr id="6" name="Text 4"/>
-          <p:cNvSpPr/>
-          <p:nvPr/>
-        </p:nvSpPr>
-        <p:spPr>
-          <a:xfrm>
-            <a:off x="411480" y="1170432"/>
-            <a:ext cx="11384280" cy="1051560"/>
+              <a:rPr lang="en-US" sz="850" b="1" spc="140" kern="0" dirty="0">
+                <a:solidFill>
+                  <a:srgbClr val="64748B"/>
+                </a:solidFill>
+                <a:latin typeface="Inter" pitchFamily="34" charset="0"/>
+                <a:ea typeface="Inter" pitchFamily="34" charset="-122"/>
+                <a:cs typeface="Inter" pitchFamily="34" charset="-120"/>
+              </a:rPr>
+              <a:t>USE CASE DESCRIPTION</a:t>
+            </a:r>
+            <a:endParaRPr lang="en-US" sz="850" dirty="0"/>
+          </a:p>
+        </p:txBody>
+      </p:sp>
+      <p:sp>
+        <p:nvSpPr>
+          <p:cNvPr id="8" name="Text 6"/>
+          <p:cNvSpPr/>
+          <p:nvPr/>
+        </p:nvSpPr>
+        <p:spPr>
+          <a:xfrm>
+            <a:off x="411480" y="1389888"/>
+            <a:ext cx="11384280" cy="914400"/>
           </a:xfrm>
           <a:prstGeom prst="rect">
             <a:avLst/>
@@ -4521,12 +4677,12 @@
           <a:p>
             <a:pPr indent="0" marL="0">
               <a:lnSpc>
-                <a:spcPct val="122000"/>
+                <a:spcPct val="120000"/>
               </a:lnSpc>
               <a:buNone/>
             </a:pPr>
             <a:r>
-              <a:rPr lang="en-US" sz="1250" dirty="0">
+              <a:rPr lang="en-US" sz="1200" dirty="0">
                 <a:solidFill>
                   <a:srgbClr val="1E293B"/>
                 </a:solidFill>
@@ -4536,19 +4692,19 @@
               </a:rPr>
               <a:t>An engineer asks “why is my pod crashing?” in natural language. The agent gathers real evidence from the cluster — pod status, container logs, events, resource limits and exit codes — and returns a root cause with the supporting data attached, instead of a list of commands to run. This is the conversational surface every other use case is reached through.</a:t>
             </a:r>
-            <a:endParaRPr lang="en-US" sz="1250" dirty="0"/>
-          </a:p>
-        </p:txBody>
-      </p:sp>
-      <p:sp>
-        <p:nvSpPr>
-          <p:cNvPr id="7" name="Text 5"/>
-          <p:cNvSpPr/>
-          <p:nvPr/>
-        </p:nvSpPr>
-        <p:spPr>
-          <a:xfrm>
-            <a:off x="411480" y="2157984"/>
+            <a:endParaRPr lang="en-US" sz="1200" dirty="0"/>
+          </a:p>
+        </p:txBody>
+      </p:sp>
+      <p:sp>
+        <p:nvSpPr>
+          <p:cNvPr id="9" name="Text 7"/>
+          <p:cNvSpPr/>
+          <p:nvPr/>
+        </p:nvSpPr>
+        <p:spPr>
+          <a:xfrm>
+            <a:off x="411480" y="2176272"/>
             <a:ext cx="3657600" cy="201168"/>
           </a:xfrm>
           <a:prstGeom prst="rect">
@@ -4565,7 +4721,7 @@
               <a:buNone/>
             </a:pPr>
             <a:r>
-              <a:rPr lang="en-US" sz="900" b="1" spc="150" kern="0" dirty="0">
+              <a:rPr lang="en-US" sz="850" b="1" spc="140" kern="0" dirty="0">
                 <a:solidFill>
                   <a:srgbClr val="2563EB"/>
                 </a:solidFill>
@@ -4573,15 +4729,15 @@
                 <a:ea typeface="Inter" pitchFamily="34" charset="-122"/>
                 <a:cs typeface="Inter" pitchFamily="34" charset="-120"/>
               </a:rPr>
-              <a:t>MASTER WORKFLOW</a:t>
-            </a:r>
-            <a:endParaRPr lang="en-US" sz="900" dirty="0"/>
-          </a:p>
-        </p:txBody>
-      </p:sp>
-      <p:sp>
-        <p:nvSpPr>
-          <p:cNvPr id="8" name="Text 6"/>
+              <a:t>END-TO-END WORKFLOW</a:t>
+            </a:r>
+            <a:endParaRPr lang="en-US" sz="850" dirty="0"/>
+          </a:p>
+        </p:txBody>
+      </p:sp>
+      <p:sp>
+        <p:nvSpPr>
+          <p:cNvPr id="10" name="Text 8"/>
           <p:cNvSpPr/>
           <p:nvPr/>
         </p:nvSpPr>
@@ -4620,7 +4776,7 @@
       </p:sp>
       <p:sp>
         <p:nvSpPr>
-          <p:cNvPr id="9" name="Shape 7"/>
+          <p:cNvPr id="11" name="Shape 9"/>
           <p:cNvSpPr/>
           <p:nvPr/>
         </p:nvSpPr>
@@ -4647,7 +4803,7 @@
       </p:sp>
       <p:sp>
         <p:nvSpPr>
-          <p:cNvPr id="10" name="Text 8"/>
+          <p:cNvPr id="12" name="Text 10"/>
           <p:cNvSpPr/>
           <p:nvPr/>
         </p:nvSpPr>
@@ -4686,7 +4842,7 @@
       </p:sp>
       <p:sp>
         <p:nvSpPr>
-          <p:cNvPr id="11" name="Text 9"/>
+          <p:cNvPr id="13" name="Text 11"/>
           <p:cNvSpPr/>
           <p:nvPr/>
         </p:nvSpPr>
@@ -4725,7 +4881,7 @@
       </p:sp>
       <p:sp>
         <p:nvSpPr>
-          <p:cNvPr id="12" name="Text 10"/>
+          <p:cNvPr id="14" name="Text 12"/>
           <p:cNvSpPr/>
           <p:nvPr/>
         </p:nvSpPr>
@@ -4764,7 +4920,7 @@
       </p:sp>
       <p:sp>
         <p:nvSpPr>
-          <p:cNvPr id="13" name="Shape 11"/>
+          <p:cNvPr id="15" name="Shape 13"/>
           <p:cNvSpPr/>
           <p:nvPr/>
         </p:nvSpPr>
@@ -4791,7 +4947,7 @@
       </p:sp>
       <p:sp>
         <p:nvSpPr>
-          <p:cNvPr id="14" name="Text 12"/>
+          <p:cNvPr id="16" name="Text 14"/>
           <p:cNvSpPr/>
           <p:nvPr/>
         </p:nvSpPr>
@@ -4830,7 +4986,7 @@
       </p:sp>
       <p:sp>
         <p:nvSpPr>
-          <p:cNvPr id="15" name="Text 13"/>
+          <p:cNvPr id="17" name="Text 15"/>
           <p:cNvSpPr/>
           <p:nvPr/>
         </p:nvSpPr>
@@ -4869,7 +5025,7 @@
       </p:sp>
       <p:sp>
         <p:nvSpPr>
-          <p:cNvPr id="16" name="Text 14"/>
+          <p:cNvPr id="18" name="Text 16"/>
           <p:cNvSpPr/>
           <p:nvPr/>
         </p:nvSpPr>
@@ -4908,7 +5064,7 @@
       </p:sp>
       <p:sp>
         <p:nvSpPr>
-          <p:cNvPr id="17" name="Shape 15"/>
+          <p:cNvPr id="19" name="Shape 17"/>
           <p:cNvSpPr/>
           <p:nvPr/>
         </p:nvSpPr>
@@ -4935,7 +5091,7 @@
       </p:sp>
       <p:sp>
         <p:nvSpPr>
-          <p:cNvPr id="18" name="Text 16"/>
+          <p:cNvPr id="20" name="Text 18"/>
           <p:cNvSpPr/>
           <p:nvPr/>
         </p:nvSpPr>
@@ -4974,7 +5130,7 @@
       </p:sp>
       <p:sp>
         <p:nvSpPr>
-          <p:cNvPr id="19" name="Text 17"/>
+          <p:cNvPr id="21" name="Text 19"/>
           <p:cNvSpPr/>
           <p:nvPr/>
         </p:nvSpPr>
@@ -5013,7 +5169,7 @@
       </p:sp>
       <p:sp>
         <p:nvSpPr>
-          <p:cNvPr id="20" name="Text 18"/>
+          <p:cNvPr id="22" name="Text 20"/>
           <p:cNvSpPr/>
           <p:nvPr/>
         </p:nvSpPr>
@@ -5052,7 +5208,7 @@
       </p:sp>
       <p:sp>
         <p:nvSpPr>
-          <p:cNvPr id="21" name="Shape 19"/>
+          <p:cNvPr id="23" name="Shape 21"/>
           <p:cNvSpPr/>
           <p:nvPr/>
         </p:nvSpPr>
@@ -5079,7 +5235,7 @@
       </p:sp>
       <p:sp>
         <p:nvSpPr>
-          <p:cNvPr id="22" name="Text 20"/>
+          <p:cNvPr id="24" name="Text 22"/>
           <p:cNvSpPr/>
           <p:nvPr/>
         </p:nvSpPr>
@@ -5118,7 +5274,7 @@
       </p:sp>
       <p:sp>
         <p:nvSpPr>
-          <p:cNvPr id="23" name="Text 21"/>
+          <p:cNvPr id="25" name="Text 23"/>
           <p:cNvSpPr/>
           <p:nvPr/>
         </p:nvSpPr>
@@ -5157,7 +5313,7 @@
       </p:sp>
       <p:sp>
         <p:nvSpPr>
-          <p:cNvPr id="24" name="Text 22"/>
+          <p:cNvPr id="26" name="Text 24"/>
           <p:cNvSpPr/>
           <p:nvPr/>
         </p:nvSpPr>
@@ -5196,7 +5352,7 @@
       </p:sp>
       <p:sp>
         <p:nvSpPr>
-          <p:cNvPr id="25" name="Shape 23"/>
+          <p:cNvPr id="27" name="Shape 25"/>
           <p:cNvSpPr/>
           <p:nvPr/>
         </p:nvSpPr>
@@ -5223,7 +5379,7 @@
       </p:sp>
       <p:sp>
         <p:nvSpPr>
-          <p:cNvPr id="26" name="Text 24"/>
+          <p:cNvPr id="28" name="Text 26"/>
           <p:cNvSpPr/>
           <p:nvPr/>
         </p:nvSpPr>
@@ -5262,7 +5418,7 @@
       </p:sp>
       <p:sp>
         <p:nvSpPr>
-          <p:cNvPr id="27" name="Text 25"/>
+          <p:cNvPr id="29" name="Text 27"/>
           <p:cNvSpPr/>
           <p:nvPr/>
         </p:nvSpPr>
@@ -5301,7 +5457,7 @@
       </p:sp>
       <p:sp>
         <p:nvSpPr>
-          <p:cNvPr id="28" name="Text 26"/>
+          <p:cNvPr id="30" name="Text 28"/>
           <p:cNvSpPr/>
           <p:nvPr/>
         </p:nvSpPr>
@@ -5340,7 +5496,7 @@
       </p:sp>
       <p:sp>
         <p:nvSpPr>
-          <p:cNvPr id="29" name="Shape 27"/>
+          <p:cNvPr id="31" name="Shape 29"/>
           <p:cNvSpPr/>
           <p:nvPr/>
         </p:nvSpPr>
@@ -5367,7 +5523,7 @@
       </p:sp>
       <p:sp>
         <p:nvSpPr>
-          <p:cNvPr id="30" name="Text 28"/>
+          <p:cNvPr id="32" name="Text 30"/>
           <p:cNvSpPr/>
           <p:nvPr/>
         </p:nvSpPr>
@@ -5406,7 +5562,7 @@
       </p:sp>
       <p:sp>
         <p:nvSpPr>
-          <p:cNvPr id="31" name="Text 29"/>
+          <p:cNvPr id="33" name="Text 31"/>
           <p:cNvSpPr/>
           <p:nvPr/>
         </p:nvSpPr>
@@ -5445,7 +5601,7 @@
       </p:sp>
       <p:sp>
         <p:nvSpPr>
-          <p:cNvPr id="32" name="Text 30"/>
+          <p:cNvPr id="34" name="Text 32"/>
           <p:cNvSpPr/>
           <p:nvPr/>
         </p:nvSpPr>
@@ -5484,7 +5640,7 @@
       </p:sp>
       <p:sp>
         <p:nvSpPr>
-          <p:cNvPr id="33" name="Shape 31"/>
+          <p:cNvPr id="35" name="Shape 33"/>
           <p:cNvSpPr/>
           <p:nvPr/>
         </p:nvSpPr>
@@ -5511,7 +5667,7 @@
       </p:sp>
       <p:sp>
         <p:nvSpPr>
-          <p:cNvPr id="34" name="Text 32"/>
+          <p:cNvPr id="36" name="Text 34"/>
           <p:cNvSpPr/>
           <p:nvPr/>
         </p:nvSpPr>
@@ -5550,7 +5706,7 @@
       </p:sp>
       <p:sp>
         <p:nvSpPr>
-          <p:cNvPr id="35" name="Shape 33"/>
+          <p:cNvPr id="37" name="Shape 35"/>
           <p:cNvSpPr/>
           <p:nvPr/>
         </p:nvSpPr>
@@ -5577,7 +5733,7 @@
       </p:sp>
       <p:sp>
         <p:nvSpPr>
-          <p:cNvPr id="36" name="Text 34"/>
+          <p:cNvPr id="38" name="Text 36"/>
           <p:cNvSpPr/>
           <p:nvPr/>
         </p:nvSpPr>
@@ -5616,7 +5772,7 @@
       </p:sp>
       <p:sp>
         <p:nvSpPr>
-          <p:cNvPr id="37" name="Shape 35"/>
+          <p:cNvPr id="39" name="Shape 37"/>
           <p:cNvSpPr/>
           <p:nvPr/>
         </p:nvSpPr>
@@ -5643,7 +5799,7 @@
       </p:sp>
       <p:sp>
         <p:nvSpPr>
-          <p:cNvPr id="38" name="Text 36"/>
+          <p:cNvPr id="40" name="Text 38"/>
           <p:cNvSpPr/>
           <p:nvPr/>
         </p:nvSpPr>
@@ -5682,7 +5838,7 @@
       </p:sp>
       <p:sp>
         <p:nvSpPr>
-          <p:cNvPr id="39" name="Shape 37"/>
+          <p:cNvPr id="41" name="Shape 39"/>
           <p:cNvSpPr/>
           <p:nvPr/>
         </p:nvSpPr>
@@ -5709,7 +5865,7 @@
       </p:sp>
       <p:sp>
         <p:nvSpPr>
-          <p:cNvPr id="40" name="Text 38"/>
+          <p:cNvPr id="42" name="Text 40"/>
           <p:cNvSpPr/>
           <p:nvPr/>
         </p:nvSpPr>
@@ -5748,7 +5904,7 @@
       </p:sp>
       <p:sp>
         <p:nvSpPr>
-          <p:cNvPr id="41" name="Shape 39"/>
+          <p:cNvPr id="43" name="Shape 41"/>
           <p:cNvSpPr/>
           <p:nvPr/>
         </p:nvSpPr>
@@ -5775,7 +5931,7 @@
       </p:sp>
       <p:sp>
         <p:nvSpPr>
-          <p:cNvPr id="42" name="Text 40"/>
+          <p:cNvPr id="44" name="Text 42"/>
           <p:cNvSpPr/>
           <p:nvPr/>
         </p:nvSpPr>
@@ -5814,7 +5970,7 @@
       </p:sp>
       <p:sp>
         <p:nvSpPr>
-          <p:cNvPr id="43" name="Shape 41"/>
+          <p:cNvPr id="45" name="Shape 43"/>
           <p:cNvSpPr/>
           <p:nvPr/>
         </p:nvSpPr>
@@ -5841,7 +5997,7 @@
       </p:sp>
       <p:sp>
         <p:nvSpPr>
-          <p:cNvPr id="44" name="Text 42"/>
+          <p:cNvPr id="46" name="Text 44"/>
           <p:cNvSpPr/>
           <p:nvPr/>
         </p:nvSpPr>
@@ -5880,7 +6036,7 @@
       </p:sp>
       <p:sp>
         <p:nvSpPr>
-          <p:cNvPr id="45" name="Shape 43"/>
+          <p:cNvPr id="47" name="Shape 45"/>
           <p:cNvSpPr/>
           <p:nvPr/>
         </p:nvSpPr>
@@ -5907,7 +6063,7 @@
       </p:sp>
       <p:sp>
         <p:nvSpPr>
-          <p:cNvPr id="46" name="Text 44"/>
+          <p:cNvPr id="48" name="Text 46"/>
           <p:cNvSpPr/>
           <p:nvPr/>
         </p:nvSpPr>
@@ -5946,7 +6102,7 @@
       </p:sp>
       <p:sp>
         <p:nvSpPr>
-          <p:cNvPr id="47" name="Text 45"/>
+          <p:cNvPr id="49" name="Text 47"/>
           <p:cNvSpPr/>
           <p:nvPr/>
         </p:nvSpPr>
@@ -6017,7 +6173,7 @@
         <p:spPr>
           <a:xfrm>
             <a:off x="0" y="0"/>
-            <a:ext cx="12188952" cy="1005840"/>
+            <a:ext cx="12188952" cy="1060704"/>
           </a:xfrm>
           <a:prstGeom prst="rect">
             <a:avLst/>
@@ -6036,12 +6192,129 @@
         </p:nvSpPr>
         <p:spPr>
           <a:xfrm>
-            <a:off x="411480" y="164592"/>
-            <a:ext cx="1188720" cy="310896"/>
+            <a:off x="411480" y="118872"/>
+            <a:ext cx="4572000" cy="219456"/>
+          </a:xfrm>
+          <a:prstGeom prst="rect">
+            <a:avLst/>
+          </a:prstGeom>
+          <a:noFill/>
+          <a:ln/>
+        </p:spPr>
+        <p:txBody>
+          <a:bodyPr wrap="square" rtlCol="0" anchor="ctr"/>
+          <a:lstStyle/>
+          <a:p>
+            <a:pPr indent="0" marL="0">
+              <a:buNone/>
+            </a:pPr>
+            <a:r>
+              <a:rPr lang="en-US" sz="1000" b="1" spc="220" kern="0" dirty="0">
+                <a:solidFill>
+                  <a:srgbClr val="0891B2"/>
+                </a:solidFill>
+                <a:latin typeface="Inter" pitchFamily="34" charset="0"/>
+                <a:ea typeface="Inter" pitchFamily="34" charset="-122"/>
+                <a:cs typeface="Inter" pitchFamily="34" charset="-120"/>
+              </a:rPr>
+              <a:t>TCS AGENTIC AI</a:t>
+            </a:r>
+            <a:endParaRPr lang="en-US" sz="1000" dirty="0"/>
+          </a:p>
+        </p:txBody>
+      </p:sp>
+      <p:sp>
+        <p:nvSpPr>
+          <p:cNvPr id="4" name="Text 2"/>
+          <p:cNvSpPr/>
+          <p:nvPr/>
+        </p:nvSpPr>
+        <p:spPr>
+          <a:xfrm>
+            <a:off x="411480" y="329184"/>
+            <a:ext cx="9692640" cy="402336"/>
+          </a:xfrm>
+          <a:prstGeom prst="rect">
+            <a:avLst/>
+          </a:prstGeom>
+          <a:noFill/>
+          <a:ln/>
+        </p:spPr>
+        <p:txBody>
+          <a:bodyPr wrap="square" rtlCol="0" anchor="ctr"/>
+          <a:lstStyle/>
+          <a:p>
+            <a:pPr indent="0" marL="0">
+              <a:buNone/>
+            </a:pPr>
+            <a:r>
+              <a:rPr lang="en-US" sz="2300" b="1" dirty="0">
+                <a:solidFill>
+                  <a:srgbClr val="FFFFFF"/>
+                </a:solidFill>
+                <a:latin typeface="Inter" pitchFamily="34" charset="0"/>
+                <a:ea typeface="Inter" pitchFamily="34" charset="-122"/>
+                <a:cs typeface="Inter" pitchFamily="34" charset="-120"/>
+              </a:rPr>
+              <a:t>Cluster Upgrade Agent</a:t>
+            </a:r>
+            <a:endParaRPr lang="en-US" sz="2300" dirty="0"/>
+          </a:p>
+        </p:txBody>
+      </p:sp>
+      <p:sp>
+        <p:nvSpPr>
+          <p:cNvPr id="5" name="Text 3"/>
+          <p:cNvSpPr/>
+          <p:nvPr/>
+        </p:nvSpPr>
+        <p:spPr>
+          <a:xfrm>
+            <a:off x="411480" y="749808"/>
+            <a:ext cx="9692640" cy="256032"/>
+          </a:xfrm>
+          <a:prstGeom prst="rect">
+            <a:avLst/>
+          </a:prstGeom>
+          <a:noFill/>
+          <a:ln/>
+        </p:spPr>
+        <p:txBody>
+          <a:bodyPr wrap="square" rtlCol="0" anchor="ctr"/>
+          <a:lstStyle/>
+          <a:p>
+            <a:pPr indent="0" marL="0">
+              <a:buNone/>
+            </a:pPr>
+            <a:r>
+              <a:rPr lang="en-US" sz="1050" i="1" dirty="0">
+                <a:solidFill>
+                  <a:srgbClr val="94A3B8"/>
+                </a:solidFill>
+                <a:latin typeface="Inter" pitchFamily="34" charset="0"/>
+                <a:ea typeface="Inter" pitchFamily="34" charset="-122"/>
+                <a:cs typeface="Inter" pitchFamily="34" charset="-120"/>
+              </a:rPr>
+              <a:t>End-to-end cluster upgrade automation — pre-assessment through post-verification, with ITSM in the loop</a:t>
+            </a:r>
+            <a:endParaRPr lang="en-US" sz="1050" dirty="0"/>
+          </a:p>
+        </p:txBody>
+      </p:sp>
+      <p:sp>
+        <p:nvSpPr>
+          <p:cNvPr id="6" name="Text 4"/>
+          <p:cNvSpPr/>
+          <p:nvPr/>
+        </p:nvSpPr>
+        <p:spPr>
+          <a:xfrm>
+            <a:off x="10561320" y="310896"/>
+            <a:ext cx="1234440" cy="365760"/>
           </a:xfrm>
           <a:prstGeom prst="rect">
             <a:avLst>
-              <a:gd name="adj" fmla="val 14706"/>
+              <a:gd name="adj" fmla="val 12500"/>
             </a:avLst>
           </a:prstGeom>
           <a:solidFill>
@@ -6057,7 +6330,7 @@
               <a:buNone/>
             </a:pPr>
             <a:r>
-              <a:rPr lang="en-US" sz="1300" b="1" dirty="0">
+              <a:rPr lang="en-US" sz="1500" b="1" dirty="0">
                 <a:solidFill>
                   <a:srgbClr val="FFFFFF"/>
                 </a:solidFill>
@@ -6067,20 +6340,20 @@
               </a:rPr>
               <a:t>UC-02</a:t>
             </a:r>
-            <a:endParaRPr lang="en-US" sz="1300" dirty="0"/>
-          </a:p>
-        </p:txBody>
-      </p:sp>
-      <p:sp>
-        <p:nvSpPr>
-          <p:cNvPr id="4" name="Text 2"/>
-          <p:cNvSpPr/>
-          <p:nvPr/>
-        </p:nvSpPr>
-        <p:spPr>
-          <a:xfrm>
-            <a:off x="1737360" y="128016"/>
-            <a:ext cx="10058400" cy="402336"/>
+            <a:endParaRPr lang="en-US" sz="1500" dirty="0"/>
+          </a:p>
+        </p:txBody>
+      </p:sp>
+      <p:sp>
+        <p:nvSpPr>
+          <p:cNvPr id="7" name="Text 5"/>
+          <p:cNvSpPr/>
+          <p:nvPr/>
+        </p:nvSpPr>
+        <p:spPr>
+          <a:xfrm>
+            <a:off x="411480" y="1188720"/>
+            <a:ext cx="3657600" cy="182880"/>
           </a:xfrm>
           <a:prstGeom prst="rect">
             <a:avLst/>
@@ -6096,69 +6369,30 @@
               <a:buNone/>
             </a:pPr>
             <a:r>
-              <a:rPr lang="en-US" sz="2200" b="1" dirty="0">
-                <a:solidFill>
-                  <a:srgbClr val="FFFFFF"/>
-                </a:solidFill>
-                <a:latin typeface="Inter" pitchFamily="34" charset="0"/>
-                <a:ea typeface="Inter" pitchFamily="34" charset="-122"/>
-                <a:cs typeface="Inter" pitchFamily="34" charset="-120"/>
-              </a:rPr>
-              <a:t>End-to-End Cluster Upgrade Automation</a:t>
-            </a:r>
-            <a:endParaRPr lang="en-US" sz="2200" dirty="0"/>
-          </a:p>
-        </p:txBody>
-      </p:sp>
-      <p:sp>
-        <p:nvSpPr>
-          <p:cNvPr id="5" name="Text 3"/>
-          <p:cNvSpPr/>
-          <p:nvPr/>
-        </p:nvSpPr>
-        <p:spPr>
-          <a:xfrm>
-            <a:off x="1737360" y="548640"/>
-            <a:ext cx="10058400" cy="274320"/>
-          </a:xfrm>
-          <a:prstGeom prst="rect">
-            <a:avLst/>
-          </a:prstGeom>
-          <a:noFill/>
-          <a:ln/>
-        </p:spPr>
-        <p:txBody>
-          <a:bodyPr wrap="square" rtlCol="0" anchor="ctr"/>
-          <a:lstStyle/>
-          <a:p>
-            <a:pPr indent="0" marL="0">
-              <a:buNone/>
-            </a:pPr>
-            <a:r>
-              <a:rPr lang="en-US" sz="1100" i="1" dirty="0">
-                <a:solidFill>
-                  <a:srgbClr val="0891B2"/>
-                </a:solidFill>
-                <a:latin typeface="Inter" pitchFamily="34" charset="0"/>
-                <a:ea typeface="Inter" pitchFamily="34" charset="-122"/>
-                <a:cs typeface="Inter" pitchFamily="34" charset="-120"/>
-              </a:rPr>
-              <a:t>Pre-assessment through post-verification, with ITSM in the loop</a:t>
-            </a:r>
-            <a:endParaRPr lang="en-US" sz="1100" dirty="0"/>
-          </a:p>
-        </p:txBody>
-      </p:sp>
-      <p:sp>
-        <p:nvSpPr>
-          <p:cNvPr id="6" name="Text 4"/>
-          <p:cNvSpPr/>
-          <p:nvPr/>
-        </p:nvSpPr>
-        <p:spPr>
-          <a:xfrm>
-            <a:off x="411480" y="1170432"/>
-            <a:ext cx="11384280" cy="1051560"/>
+              <a:rPr lang="en-US" sz="850" b="1" spc="140" kern="0" dirty="0">
+                <a:solidFill>
+                  <a:srgbClr val="64748B"/>
+                </a:solidFill>
+                <a:latin typeface="Inter" pitchFamily="34" charset="0"/>
+                <a:ea typeface="Inter" pitchFamily="34" charset="-122"/>
+                <a:cs typeface="Inter" pitchFamily="34" charset="-120"/>
+              </a:rPr>
+              <a:t>USE CASE DESCRIPTION</a:t>
+            </a:r>
+            <a:endParaRPr lang="en-US" sz="850" dirty="0"/>
+          </a:p>
+        </p:txBody>
+      </p:sp>
+      <p:sp>
+        <p:nvSpPr>
+          <p:cNvPr id="8" name="Text 6"/>
+          <p:cNvSpPr/>
+          <p:nvPr/>
+        </p:nvSpPr>
+        <p:spPr>
+          <a:xfrm>
+            <a:off x="411480" y="1389888"/>
+            <a:ext cx="11384280" cy="914400"/>
           </a:xfrm>
           <a:prstGeom prst="rect">
             <a:avLst/>
@@ -6172,12 +6406,12 @@
           <a:p>
             <a:pPr indent="0" marL="0">
               <a:lnSpc>
-                <a:spcPct val="122000"/>
+                <a:spcPct val="120000"/>
               </a:lnSpc>
               <a:buNone/>
             </a:pPr>
             <a:r>
-              <a:rPr lang="en-US" sz="1250" dirty="0">
+              <a:rPr lang="en-US" sz="1200" dirty="0">
                 <a:solidFill>
                   <a:srgbClr val="1E293B"/>
                 </a:solidFill>
@@ -6187,19 +6421,19 @@
               </a:rPr>
               <a:t>OpenShift cluster upgrades orchestrated end to end: a pre-assessment against the live cluster, the change record raised automatically, execution with real-time observability, and verification afterwards — instead of a human tracking a long-running operation across consoles and spreadsheets.</a:t>
             </a:r>
-            <a:endParaRPr lang="en-US" sz="1250" dirty="0"/>
-          </a:p>
-        </p:txBody>
-      </p:sp>
-      <p:sp>
-        <p:nvSpPr>
-          <p:cNvPr id="7" name="Text 5"/>
-          <p:cNvSpPr/>
-          <p:nvPr/>
-        </p:nvSpPr>
-        <p:spPr>
-          <a:xfrm>
-            <a:off x="411480" y="2157984"/>
+            <a:endParaRPr lang="en-US" sz="1200" dirty="0"/>
+          </a:p>
+        </p:txBody>
+      </p:sp>
+      <p:sp>
+        <p:nvSpPr>
+          <p:cNvPr id="9" name="Text 7"/>
+          <p:cNvSpPr/>
+          <p:nvPr/>
+        </p:nvSpPr>
+        <p:spPr>
+          <a:xfrm>
+            <a:off x="411480" y="2176272"/>
             <a:ext cx="3657600" cy="201168"/>
           </a:xfrm>
           <a:prstGeom prst="rect">
@@ -6216,7 +6450,7 @@
               <a:buNone/>
             </a:pPr>
             <a:r>
-              <a:rPr lang="en-US" sz="900" b="1" spc="150" kern="0" dirty="0">
+              <a:rPr lang="en-US" sz="850" b="1" spc="140" kern="0" dirty="0">
                 <a:solidFill>
                   <a:srgbClr val="2563EB"/>
                 </a:solidFill>
@@ -6224,15 +6458,15 @@
                 <a:ea typeface="Inter" pitchFamily="34" charset="-122"/>
                 <a:cs typeface="Inter" pitchFamily="34" charset="-120"/>
               </a:rPr>
-              <a:t>MASTER WORKFLOW</a:t>
-            </a:r>
-            <a:endParaRPr lang="en-US" sz="900" dirty="0"/>
-          </a:p>
-        </p:txBody>
-      </p:sp>
-      <p:sp>
-        <p:nvSpPr>
-          <p:cNvPr id="8" name="Text 6"/>
+              <a:t>END-TO-END WORKFLOW</a:t>
+            </a:r>
+            <a:endParaRPr lang="en-US" sz="850" dirty="0"/>
+          </a:p>
+        </p:txBody>
+      </p:sp>
+      <p:sp>
+        <p:nvSpPr>
+          <p:cNvPr id="10" name="Text 8"/>
           <p:cNvSpPr/>
           <p:nvPr/>
         </p:nvSpPr>
@@ -6271,7 +6505,7 @@
       </p:sp>
       <p:sp>
         <p:nvSpPr>
-          <p:cNvPr id="9" name="Shape 7"/>
+          <p:cNvPr id="11" name="Shape 9"/>
           <p:cNvSpPr/>
           <p:nvPr/>
         </p:nvSpPr>
@@ -6298,7 +6532,7 @@
       </p:sp>
       <p:sp>
         <p:nvSpPr>
-          <p:cNvPr id="10" name="Text 8"/>
+          <p:cNvPr id="12" name="Text 10"/>
           <p:cNvSpPr/>
           <p:nvPr/>
         </p:nvSpPr>
@@ -6337,7 +6571,7 @@
       </p:sp>
       <p:sp>
         <p:nvSpPr>
-          <p:cNvPr id="11" name="Text 9"/>
+          <p:cNvPr id="13" name="Text 11"/>
           <p:cNvSpPr/>
           <p:nvPr/>
         </p:nvSpPr>
@@ -6376,7 +6610,7 @@
       </p:sp>
       <p:sp>
         <p:nvSpPr>
-          <p:cNvPr id="12" name="Text 10"/>
+          <p:cNvPr id="14" name="Text 12"/>
           <p:cNvSpPr/>
           <p:nvPr/>
         </p:nvSpPr>
@@ -6415,7 +6649,7 @@
       </p:sp>
       <p:sp>
         <p:nvSpPr>
-          <p:cNvPr id="13" name="Shape 11"/>
+          <p:cNvPr id="15" name="Shape 13"/>
           <p:cNvSpPr/>
           <p:nvPr/>
         </p:nvSpPr>
@@ -6442,7 +6676,7 @@
       </p:sp>
       <p:sp>
         <p:nvSpPr>
-          <p:cNvPr id="14" name="Text 12"/>
+          <p:cNvPr id="16" name="Text 14"/>
           <p:cNvSpPr/>
           <p:nvPr/>
         </p:nvSpPr>
@@ -6481,7 +6715,7 @@
       </p:sp>
       <p:sp>
         <p:nvSpPr>
-          <p:cNvPr id="15" name="Text 13"/>
+          <p:cNvPr id="17" name="Text 15"/>
           <p:cNvSpPr/>
           <p:nvPr/>
         </p:nvSpPr>
@@ -6520,7 +6754,7 @@
       </p:sp>
       <p:sp>
         <p:nvSpPr>
-          <p:cNvPr id="16" name="Text 14"/>
+          <p:cNvPr id="18" name="Text 16"/>
           <p:cNvSpPr/>
           <p:nvPr/>
         </p:nvSpPr>
@@ -6559,7 +6793,7 @@
       </p:sp>
       <p:sp>
         <p:nvSpPr>
-          <p:cNvPr id="17" name="Shape 15"/>
+          <p:cNvPr id="19" name="Shape 17"/>
           <p:cNvSpPr/>
           <p:nvPr/>
         </p:nvSpPr>
@@ -6586,7 +6820,7 @@
       </p:sp>
       <p:sp>
         <p:nvSpPr>
-          <p:cNvPr id="18" name="Text 16"/>
+          <p:cNvPr id="20" name="Text 18"/>
           <p:cNvSpPr/>
           <p:nvPr/>
         </p:nvSpPr>
@@ -6625,7 +6859,7 @@
       </p:sp>
       <p:sp>
         <p:nvSpPr>
-          <p:cNvPr id="19" name="Text 17"/>
+          <p:cNvPr id="21" name="Text 19"/>
           <p:cNvSpPr/>
           <p:nvPr/>
         </p:nvSpPr>
@@ -6664,7 +6898,7 @@
       </p:sp>
       <p:sp>
         <p:nvSpPr>
-          <p:cNvPr id="20" name="Text 18"/>
+          <p:cNvPr id="22" name="Text 20"/>
           <p:cNvSpPr/>
           <p:nvPr/>
         </p:nvSpPr>
@@ -6703,7 +6937,7 @@
       </p:sp>
       <p:sp>
         <p:nvSpPr>
-          <p:cNvPr id="21" name="Shape 19"/>
+          <p:cNvPr id="23" name="Shape 21"/>
           <p:cNvSpPr/>
           <p:nvPr/>
         </p:nvSpPr>
@@ -6730,7 +6964,7 @@
       </p:sp>
       <p:sp>
         <p:nvSpPr>
-          <p:cNvPr id="22" name="Text 20"/>
+          <p:cNvPr id="24" name="Text 22"/>
           <p:cNvSpPr/>
           <p:nvPr/>
         </p:nvSpPr>
@@ -6769,7 +7003,7 @@
       </p:sp>
       <p:sp>
         <p:nvSpPr>
-          <p:cNvPr id="23" name="Text 21"/>
+          <p:cNvPr id="25" name="Text 23"/>
           <p:cNvSpPr/>
           <p:nvPr/>
         </p:nvSpPr>
@@ -6808,7 +7042,7 @@
       </p:sp>
       <p:sp>
         <p:nvSpPr>
-          <p:cNvPr id="24" name="Shape 22"/>
+          <p:cNvPr id="26" name="Shape 24"/>
           <p:cNvSpPr/>
           <p:nvPr/>
         </p:nvSpPr>
@@ -6835,7 +7069,7 @@
       </p:sp>
       <p:sp>
         <p:nvSpPr>
-          <p:cNvPr id="25" name="Text 23"/>
+          <p:cNvPr id="27" name="Text 25"/>
           <p:cNvSpPr/>
           <p:nvPr/>
         </p:nvSpPr>
@@ -6874,7 +7108,7 @@
       </p:sp>
       <p:sp>
         <p:nvSpPr>
-          <p:cNvPr id="26" name="Text 24"/>
+          <p:cNvPr id="28" name="Text 26"/>
           <p:cNvSpPr/>
           <p:nvPr/>
         </p:nvSpPr>
@@ -6913,7 +7147,7 @@
       </p:sp>
       <p:sp>
         <p:nvSpPr>
-          <p:cNvPr id="27" name="Shape 25"/>
+          <p:cNvPr id="29" name="Shape 27"/>
           <p:cNvSpPr/>
           <p:nvPr/>
         </p:nvSpPr>
@@ -6940,7 +7174,7 @@
       </p:sp>
       <p:sp>
         <p:nvSpPr>
-          <p:cNvPr id="28" name="Text 26"/>
+          <p:cNvPr id="30" name="Text 28"/>
           <p:cNvSpPr/>
           <p:nvPr/>
         </p:nvSpPr>
@@ -6979,7 +7213,7 @@
       </p:sp>
       <p:sp>
         <p:nvSpPr>
-          <p:cNvPr id="29" name="Text 27"/>
+          <p:cNvPr id="31" name="Text 29"/>
           <p:cNvSpPr/>
           <p:nvPr/>
         </p:nvSpPr>
@@ -7018,7 +7252,7 @@
       </p:sp>
       <p:sp>
         <p:nvSpPr>
-          <p:cNvPr id="30" name="Text 28"/>
+          <p:cNvPr id="32" name="Text 30"/>
           <p:cNvSpPr/>
           <p:nvPr/>
         </p:nvSpPr>
@@ -7057,7 +7291,7 @@
       </p:sp>
       <p:sp>
         <p:nvSpPr>
-          <p:cNvPr id="31" name="Shape 29"/>
+          <p:cNvPr id="33" name="Shape 31"/>
           <p:cNvSpPr/>
           <p:nvPr/>
         </p:nvSpPr>
@@ -7084,7 +7318,7 @@
       </p:sp>
       <p:sp>
         <p:nvSpPr>
-          <p:cNvPr id="32" name="Text 30"/>
+          <p:cNvPr id="34" name="Text 32"/>
           <p:cNvSpPr/>
           <p:nvPr/>
         </p:nvSpPr>
@@ -7123,7 +7357,7 @@
       </p:sp>
       <p:sp>
         <p:nvSpPr>
-          <p:cNvPr id="33" name="Text 31"/>
+          <p:cNvPr id="35" name="Text 33"/>
           <p:cNvSpPr/>
           <p:nvPr/>
         </p:nvSpPr>
@@ -7162,7 +7396,7 @@
       </p:sp>
       <p:sp>
         <p:nvSpPr>
-          <p:cNvPr id="34" name="Text 32"/>
+          <p:cNvPr id="36" name="Text 34"/>
           <p:cNvSpPr/>
           <p:nvPr/>
         </p:nvSpPr>
@@ -7201,7 +7435,7 @@
       </p:sp>
       <p:sp>
         <p:nvSpPr>
-          <p:cNvPr id="35" name="Shape 33"/>
+          <p:cNvPr id="37" name="Shape 35"/>
           <p:cNvSpPr/>
           <p:nvPr/>
         </p:nvSpPr>
@@ -7228,7 +7462,7 @@
       </p:sp>
       <p:sp>
         <p:nvSpPr>
-          <p:cNvPr id="36" name="Text 34"/>
+          <p:cNvPr id="38" name="Text 36"/>
           <p:cNvSpPr/>
           <p:nvPr/>
         </p:nvSpPr>
@@ -7267,7 +7501,7 @@
       </p:sp>
       <p:sp>
         <p:nvSpPr>
-          <p:cNvPr id="37" name="Text 35"/>
+          <p:cNvPr id="39" name="Text 37"/>
           <p:cNvSpPr/>
           <p:nvPr/>
         </p:nvSpPr>
@@ -7306,7 +7540,7 @@
       </p:sp>
       <p:sp>
         <p:nvSpPr>
-          <p:cNvPr id="38" name="Text 36"/>
+          <p:cNvPr id="40" name="Text 38"/>
           <p:cNvSpPr/>
           <p:nvPr/>
         </p:nvSpPr>
@@ -7345,7 +7579,7 @@
       </p:sp>
       <p:sp>
         <p:nvSpPr>
-          <p:cNvPr id="39" name="Shape 37"/>
+          <p:cNvPr id="41" name="Shape 39"/>
           <p:cNvSpPr/>
           <p:nvPr/>
         </p:nvSpPr>
@@ -7372,7 +7606,7 @@
       </p:sp>
       <p:sp>
         <p:nvSpPr>
-          <p:cNvPr id="40" name="Text 38"/>
+          <p:cNvPr id="42" name="Text 40"/>
           <p:cNvSpPr/>
           <p:nvPr/>
         </p:nvSpPr>
@@ -7411,7 +7645,7 @@
       </p:sp>
       <p:sp>
         <p:nvSpPr>
-          <p:cNvPr id="41" name="Text 39"/>
+          <p:cNvPr id="43" name="Text 41"/>
           <p:cNvSpPr/>
           <p:nvPr/>
         </p:nvSpPr>
@@ -7450,7 +7684,7 @@
       </p:sp>
       <p:sp>
         <p:nvSpPr>
-          <p:cNvPr id="42" name="Shape 40"/>
+          <p:cNvPr id="44" name="Shape 42"/>
           <p:cNvSpPr/>
           <p:nvPr/>
         </p:nvSpPr>
@@ -7477,7 +7711,7 @@
       </p:sp>
       <p:sp>
         <p:nvSpPr>
-          <p:cNvPr id="43" name="Text 41"/>
+          <p:cNvPr id="45" name="Text 43"/>
           <p:cNvSpPr/>
           <p:nvPr/>
         </p:nvSpPr>
@@ -7516,7 +7750,7 @@
       </p:sp>
       <p:sp>
         <p:nvSpPr>
-          <p:cNvPr id="44" name="Shape 42"/>
+          <p:cNvPr id="46" name="Shape 44"/>
           <p:cNvSpPr/>
           <p:nvPr/>
         </p:nvSpPr>
@@ -7543,7 +7777,7 @@
       </p:sp>
       <p:sp>
         <p:nvSpPr>
-          <p:cNvPr id="45" name="Text 43"/>
+          <p:cNvPr id="47" name="Text 45"/>
           <p:cNvSpPr/>
           <p:nvPr/>
         </p:nvSpPr>
@@ -7582,7 +7816,7 @@
       </p:sp>
       <p:sp>
         <p:nvSpPr>
-          <p:cNvPr id="46" name="Shape 44"/>
+          <p:cNvPr id="48" name="Shape 46"/>
           <p:cNvSpPr/>
           <p:nvPr/>
         </p:nvSpPr>
@@ -7609,7 +7843,7 @@
       </p:sp>
       <p:sp>
         <p:nvSpPr>
-          <p:cNvPr id="47" name="Text 45"/>
+          <p:cNvPr id="49" name="Text 47"/>
           <p:cNvSpPr/>
           <p:nvPr/>
         </p:nvSpPr>
@@ -7648,7 +7882,7 @@
       </p:sp>
       <p:sp>
         <p:nvSpPr>
-          <p:cNvPr id="48" name="Shape 46"/>
+          <p:cNvPr id="50" name="Shape 48"/>
           <p:cNvSpPr/>
           <p:nvPr/>
         </p:nvSpPr>
@@ -7675,7 +7909,7 @@
       </p:sp>
       <p:sp>
         <p:nvSpPr>
-          <p:cNvPr id="49" name="Text 47"/>
+          <p:cNvPr id="51" name="Text 49"/>
           <p:cNvSpPr/>
           <p:nvPr/>
         </p:nvSpPr>
@@ -7714,7 +7948,7 @@
       </p:sp>
       <p:sp>
         <p:nvSpPr>
-          <p:cNvPr id="50" name="Text 48"/>
+          <p:cNvPr id="52" name="Text 50"/>
           <p:cNvSpPr/>
           <p:nvPr/>
         </p:nvSpPr>
@@ -7785,7 +8019,7 @@
         <p:spPr>
           <a:xfrm>
             <a:off x="0" y="0"/>
-            <a:ext cx="12188952" cy="1005840"/>
+            <a:ext cx="12188952" cy="1060704"/>
           </a:xfrm>
           <a:prstGeom prst="rect">
             <a:avLst/>
@@ -7804,12 +8038,129 @@
         </p:nvSpPr>
         <p:spPr>
           <a:xfrm>
-            <a:off x="411480" y="164592"/>
-            <a:ext cx="1188720" cy="310896"/>
+            <a:off x="411480" y="118872"/>
+            <a:ext cx="4572000" cy="219456"/>
+          </a:xfrm>
+          <a:prstGeom prst="rect">
+            <a:avLst/>
+          </a:prstGeom>
+          <a:noFill/>
+          <a:ln/>
+        </p:spPr>
+        <p:txBody>
+          <a:bodyPr wrap="square" rtlCol="0" anchor="ctr"/>
+          <a:lstStyle/>
+          <a:p>
+            <a:pPr indent="0" marL="0">
+              <a:buNone/>
+            </a:pPr>
+            <a:r>
+              <a:rPr lang="en-US" sz="1000" b="1" spc="220" kern="0" dirty="0">
+                <a:solidFill>
+                  <a:srgbClr val="0891B2"/>
+                </a:solidFill>
+                <a:latin typeface="Inter" pitchFamily="34" charset="0"/>
+                <a:ea typeface="Inter" pitchFamily="34" charset="-122"/>
+                <a:cs typeface="Inter" pitchFamily="34" charset="-120"/>
+              </a:rPr>
+              <a:t>TCS AGENTIC AI</a:t>
+            </a:r>
+            <a:endParaRPr lang="en-US" sz="1000" dirty="0"/>
+          </a:p>
+        </p:txBody>
+      </p:sp>
+      <p:sp>
+        <p:nvSpPr>
+          <p:cNvPr id="4" name="Text 2"/>
+          <p:cNvSpPr/>
+          <p:nvPr/>
+        </p:nvSpPr>
+        <p:spPr>
+          <a:xfrm>
+            <a:off x="411480" y="329184"/>
+            <a:ext cx="9692640" cy="402336"/>
+          </a:xfrm>
+          <a:prstGeom prst="rect">
+            <a:avLst/>
+          </a:prstGeom>
+          <a:noFill/>
+          <a:ln/>
+        </p:spPr>
+        <p:txBody>
+          <a:bodyPr wrap="square" rtlCol="0" anchor="ctr"/>
+          <a:lstStyle/>
+          <a:p>
+            <a:pPr indent="0" marL="0">
+              <a:buNone/>
+            </a:pPr>
+            <a:r>
+              <a:rPr lang="en-US" sz="2300" b="1" dirty="0">
+                <a:solidFill>
+                  <a:srgbClr val="FFFFFF"/>
+                </a:solidFill>
+                <a:latin typeface="Inter" pitchFamily="34" charset="0"/>
+                <a:ea typeface="Inter" pitchFamily="34" charset="-122"/>
+                <a:cs typeface="Inter" pitchFamily="34" charset="-120"/>
+              </a:rPr>
+              <a:t>Proactive Intelligence Agent</a:t>
+            </a:r>
+            <a:endParaRPr lang="en-US" sz="2300" dirty="0"/>
+          </a:p>
+        </p:txBody>
+      </p:sp>
+      <p:sp>
+        <p:nvSpPr>
+          <p:cNvPr id="5" name="Text 3"/>
+          <p:cNvSpPr/>
+          <p:nvPr/>
+        </p:nvSpPr>
+        <p:spPr>
+          <a:xfrm>
+            <a:off x="411480" y="749808"/>
+            <a:ext cx="9692640" cy="256032"/>
+          </a:xfrm>
+          <a:prstGeom prst="rect">
+            <a:avLst/>
+          </a:prstGeom>
+          <a:noFill/>
+          <a:ln/>
+        </p:spPr>
+        <p:txBody>
+          <a:bodyPr wrap="square" rtlCol="0" anchor="ctr"/>
+          <a:lstStyle/>
+          <a:p>
+            <a:pPr indent="0" marL="0">
+              <a:buNone/>
+            </a:pPr>
+            <a:r>
+              <a:rPr lang="en-US" sz="1050" i="1" dirty="0">
+                <a:solidFill>
+                  <a:srgbClr val="94A3B8"/>
+                </a:solidFill>
+                <a:latin typeface="Inter" pitchFamily="34" charset="0"/>
+                <a:ea typeface="Inter" pitchFamily="34" charset="-122"/>
+                <a:cs typeface="Inter" pitchFamily="34" charset="-120"/>
+              </a:rPr>
+              <a:t>Predictive intelligence &amp; anomaly detection — forecast the failure before it becomes an incident</a:t>
+            </a:r>
+            <a:endParaRPr lang="en-US" sz="1050" dirty="0"/>
+          </a:p>
+        </p:txBody>
+      </p:sp>
+      <p:sp>
+        <p:nvSpPr>
+          <p:cNvPr id="6" name="Text 4"/>
+          <p:cNvSpPr/>
+          <p:nvPr/>
+        </p:nvSpPr>
+        <p:spPr>
+          <a:xfrm>
+            <a:off x="10561320" y="310896"/>
+            <a:ext cx="1234440" cy="365760"/>
           </a:xfrm>
           <a:prstGeom prst="rect">
             <a:avLst>
-              <a:gd name="adj" fmla="val 14706"/>
+              <a:gd name="adj" fmla="val 12500"/>
             </a:avLst>
           </a:prstGeom>
           <a:solidFill>
@@ -7825,7 +8176,7 @@
               <a:buNone/>
             </a:pPr>
             <a:r>
-              <a:rPr lang="en-US" sz="1300" b="1" dirty="0">
+              <a:rPr lang="en-US" sz="1500" b="1" dirty="0">
                 <a:solidFill>
                   <a:srgbClr val="FFFFFF"/>
                 </a:solidFill>
@@ -7835,20 +8186,20 @@
               </a:rPr>
               <a:t>UC-03</a:t>
             </a:r>
-            <a:endParaRPr lang="en-US" sz="1300" dirty="0"/>
-          </a:p>
-        </p:txBody>
-      </p:sp>
-      <p:sp>
-        <p:nvSpPr>
-          <p:cNvPr id="4" name="Text 2"/>
-          <p:cNvSpPr/>
-          <p:nvPr/>
-        </p:nvSpPr>
-        <p:spPr>
-          <a:xfrm>
-            <a:off x="1737360" y="128016"/>
-            <a:ext cx="10058400" cy="402336"/>
+            <a:endParaRPr lang="en-US" sz="1500" dirty="0"/>
+          </a:p>
+        </p:txBody>
+      </p:sp>
+      <p:sp>
+        <p:nvSpPr>
+          <p:cNvPr id="7" name="Text 5"/>
+          <p:cNvSpPr/>
+          <p:nvPr/>
+        </p:nvSpPr>
+        <p:spPr>
+          <a:xfrm>
+            <a:off x="411480" y="1188720"/>
+            <a:ext cx="3657600" cy="182880"/>
           </a:xfrm>
           <a:prstGeom prst="rect">
             <a:avLst/>
@@ -7864,69 +8215,30 @@
               <a:buNone/>
             </a:pPr>
             <a:r>
-              <a:rPr lang="en-US" sz="2200" b="1" dirty="0">
-                <a:solidFill>
-                  <a:srgbClr val="FFFFFF"/>
-                </a:solidFill>
-                <a:latin typeface="Inter" pitchFamily="34" charset="0"/>
-                <a:ea typeface="Inter" pitchFamily="34" charset="-122"/>
-                <a:cs typeface="Inter" pitchFamily="34" charset="-120"/>
-              </a:rPr>
-              <a:t>Predictive Intelligence &amp; Anomaly Detection</a:t>
-            </a:r>
-            <a:endParaRPr lang="en-US" sz="2200" dirty="0"/>
-          </a:p>
-        </p:txBody>
-      </p:sp>
-      <p:sp>
-        <p:nvSpPr>
-          <p:cNvPr id="5" name="Text 3"/>
-          <p:cNvSpPr/>
-          <p:nvPr/>
-        </p:nvSpPr>
-        <p:spPr>
-          <a:xfrm>
-            <a:off x="1737360" y="548640"/>
-            <a:ext cx="10058400" cy="274320"/>
-          </a:xfrm>
-          <a:prstGeom prst="rect">
-            <a:avLst/>
-          </a:prstGeom>
-          <a:noFill/>
-          <a:ln/>
-        </p:spPr>
-        <p:txBody>
-          <a:bodyPr wrap="square" rtlCol="0" anchor="ctr"/>
-          <a:lstStyle/>
-          <a:p>
-            <a:pPr indent="0" marL="0">
-              <a:buNone/>
-            </a:pPr>
-            <a:r>
-              <a:rPr lang="en-US" sz="1100" i="1" dirty="0">
-                <a:solidFill>
-                  <a:srgbClr val="0891B2"/>
-                </a:solidFill>
-                <a:latin typeface="Inter" pitchFamily="34" charset="0"/>
-                <a:ea typeface="Inter" pitchFamily="34" charset="-122"/>
-                <a:cs typeface="Inter" pitchFamily="34" charset="-120"/>
-              </a:rPr>
-              <a:t>Forecast the failure before it becomes an incident</a:t>
-            </a:r>
-            <a:endParaRPr lang="en-US" sz="1100" dirty="0"/>
-          </a:p>
-        </p:txBody>
-      </p:sp>
-      <p:sp>
-        <p:nvSpPr>
-          <p:cNvPr id="6" name="Text 4"/>
-          <p:cNvSpPr/>
-          <p:nvPr/>
-        </p:nvSpPr>
-        <p:spPr>
-          <a:xfrm>
-            <a:off x="411480" y="1170432"/>
-            <a:ext cx="11384280" cy="1051560"/>
+              <a:rPr lang="en-US" sz="850" b="1" spc="140" kern="0" dirty="0">
+                <a:solidFill>
+                  <a:srgbClr val="64748B"/>
+                </a:solidFill>
+                <a:latin typeface="Inter" pitchFamily="34" charset="0"/>
+                <a:ea typeface="Inter" pitchFamily="34" charset="-122"/>
+                <a:cs typeface="Inter" pitchFamily="34" charset="-120"/>
+              </a:rPr>
+              <a:t>USE CASE DESCRIPTION</a:t>
+            </a:r>
+            <a:endParaRPr lang="en-US" sz="850" dirty="0"/>
+          </a:p>
+        </p:txBody>
+      </p:sp>
+      <p:sp>
+        <p:nvSpPr>
+          <p:cNvPr id="8" name="Text 6"/>
+          <p:cNvSpPr/>
+          <p:nvPr/>
+        </p:nvSpPr>
+        <p:spPr>
+          <a:xfrm>
+            <a:off x="411480" y="1389888"/>
+            <a:ext cx="11384280" cy="914400"/>
           </a:xfrm>
           <a:prstGeom prst="rect">
             <a:avLst/>
@@ -7940,12 +8252,12 @@
           <a:p>
             <a:pPr indent="0" marL="0">
               <a:lnSpc>
-                <a:spcPct val="122000"/>
+                <a:spcPct val="120000"/>
               </a:lnSpc>
               <a:buNone/>
             </a:pPr>
             <a:r>
-              <a:rPr lang="en-US" sz="1250" dirty="0">
+              <a:rPr lang="en-US" sz="1200" dirty="0">
                 <a:solidFill>
                   <a:srgbClr val="1E293B"/>
                 </a:solidFill>
@@ -7955,19 +8267,19 @@
               </a:rPr>
               <a:t>Trend analysis over rolling metric windows forecasts infrastructure failures before they occur — capacity exhaustion, memory growth, certificate expiry, node pressure. The agent surfaces what is about to break and how long there is to act, converting reactive firefighting into scheduled maintenance.</a:t>
             </a:r>
-            <a:endParaRPr lang="en-US" sz="1250" dirty="0"/>
-          </a:p>
-        </p:txBody>
-      </p:sp>
-      <p:sp>
-        <p:nvSpPr>
-          <p:cNvPr id="7" name="Text 5"/>
-          <p:cNvSpPr/>
-          <p:nvPr/>
-        </p:nvSpPr>
-        <p:spPr>
-          <a:xfrm>
-            <a:off x="411480" y="2157984"/>
+            <a:endParaRPr lang="en-US" sz="1200" dirty="0"/>
+          </a:p>
+        </p:txBody>
+      </p:sp>
+      <p:sp>
+        <p:nvSpPr>
+          <p:cNvPr id="9" name="Text 7"/>
+          <p:cNvSpPr/>
+          <p:nvPr/>
+        </p:nvSpPr>
+        <p:spPr>
+          <a:xfrm>
+            <a:off x="411480" y="2176272"/>
             <a:ext cx="3657600" cy="201168"/>
           </a:xfrm>
           <a:prstGeom prst="rect">
@@ -7984,7 +8296,7 @@
               <a:buNone/>
             </a:pPr>
             <a:r>
-              <a:rPr lang="en-US" sz="900" b="1" spc="150" kern="0" dirty="0">
+              <a:rPr lang="en-US" sz="850" b="1" spc="140" kern="0" dirty="0">
                 <a:solidFill>
                   <a:srgbClr val="2563EB"/>
                 </a:solidFill>
@@ -7992,15 +8304,15 @@
                 <a:ea typeface="Inter" pitchFamily="34" charset="-122"/>
                 <a:cs typeface="Inter" pitchFamily="34" charset="-120"/>
               </a:rPr>
-              <a:t>MASTER WORKFLOW</a:t>
-            </a:r>
-            <a:endParaRPr lang="en-US" sz="900" dirty="0"/>
-          </a:p>
-        </p:txBody>
-      </p:sp>
-      <p:sp>
-        <p:nvSpPr>
-          <p:cNvPr id="8" name="Text 6"/>
+              <a:t>END-TO-END WORKFLOW</a:t>
+            </a:r>
+            <a:endParaRPr lang="en-US" sz="850" dirty="0"/>
+          </a:p>
+        </p:txBody>
+      </p:sp>
+      <p:sp>
+        <p:nvSpPr>
+          <p:cNvPr id="10" name="Text 8"/>
           <p:cNvSpPr/>
           <p:nvPr/>
         </p:nvSpPr>
@@ -8039,7 +8351,7 @@
       </p:sp>
       <p:sp>
         <p:nvSpPr>
-          <p:cNvPr id="9" name="Shape 7"/>
+          <p:cNvPr id="11" name="Shape 9"/>
           <p:cNvSpPr/>
           <p:nvPr/>
         </p:nvSpPr>
@@ -8066,7 +8378,7 @@
       </p:sp>
       <p:sp>
         <p:nvSpPr>
-          <p:cNvPr id="10" name="Text 8"/>
+          <p:cNvPr id="12" name="Text 10"/>
           <p:cNvSpPr/>
           <p:nvPr/>
         </p:nvSpPr>
@@ -8105,7 +8417,7 @@
       </p:sp>
       <p:sp>
         <p:nvSpPr>
-          <p:cNvPr id="11" name="Text 9"/>
+          <p:cNvPr id="13" name="Text 11"/>
           <p:cNvSpPr/>
           <p:nvPr/>
         </p:nvSpPr>
@@ -8144,7 +8456,7 @@
       </p:sp>
       <p:sp>
         <p:nvSpPr>
-          <p:cNvPr id="12" name="Text 10"/>
+          <p:cNvPr id="14" name="Text 12"/>
           <p:cNvSpPr/>
           <p:nvPr/>
         </p:nvSpPr>
@@ -8183,7 +8495,7 @@
       </p:sp>
       <p:sp>
         <p:nvSpPr>
-          <p:cNvPr id="13" name="Shape 11"/>
+          <p:cNvPr id="15" name="Shape 13"/>
           <p:cNvSpPr/>
           <p:nvPr/>
         </p:nvSpPr>
@@ -8210,7 +8522,7 @@
       </p:sp>
       <p:sp>
         <p:nvSpPr>
-          <p:cNvPr id="14" name="Text 12"/>
+          <p:cNvPr id="16" name="Text 14"/>
           <p:cNvSpPr/>
           <p:nvPr/>
         </p:nvSpPr>
@@ -8249,7 +8561,7 @@
       </p:sp>
       <p:sp>
         <p:nvSpPr>
-          <p:cNvPr id="15" name="Text 13"/>
+          <p:cNvPr id="17" name="Text 15"/>
           <p:cNvSpPr/>
           <p:nvPr/>
         </p:nvSpPr>
@@ -8288,7 +8600,7 @@
       </p:sp>
       <p:sp>
         <p:nvSpPr>
-          <p:cNvPr id="16" name="Text 14"/>
+          <p:cNvPr id="18" name="Text 16"/>
           <p:cNvSpPr/>
           <p:nvPr/>
         </p:nvSpPr>
@@ -8327,7 +8639,7 @@
       </p:sp>
       <p:sp>
         <p:nvSpPr>
-          <p:cNvPr id="17" name="Shape 15"/>
+          <p:cNvPr id="19" name="Shape 17"/>
           <p:cNvSpPr/>
           <p:nvPr/>
         </p:nvSpPr>
@@ -8354,7 +8666,7 @@
       </p:sp>
       <p:sp>
         <p:nvSpPr>
-          <p:cNvPr id="18" name="Text 16"/>
+          <p:cNvPr id="20" name="Text 18"/>
           <p:cNvSpPr/>
           <p:nvPr/>
         </p:nvSpPr>
@@ -8393,7 +8705,7 @@
       </p:sp>
       <p:sp>
         <p:nvSpPr>
-          <p:cNvPr id="19" name="Text 17"/>
+          <p:cNvPr id="21" name="Text 19"/>
           <p:cNvSpPr/>
           <p:nvPr/>
         </p:nvSpPr>
@@ -8432,7 +8744,7 @@
       </p:sp>
       <p:sp>
         <p:nvSpPr>
-          <p:cNvPr id="20" name="Text 18"/>
+          <p:cNvPr id="22" name="Text 20"/>
           <p:cNvSpPr/>
           <p:nvPr/>
         </p:nvSpPr>
@@ -8471,7 +8783,7 @@
       </p:sp>
       <p:sp>
         <p:nvSpPr>
-          <p:cNvPr id="21" name="Shape 19"/>
+          <p:cNvPr id="23" name="Shape 21"/>
           <p:cNvSpPr/>
           <p:nvPr/>
         </p:nvSpPr>
@@ -8498,7 +8810,7 @@
       </p:sp>
       <p:sp>
         <p:nvSpPr>
-          <p:cNvPr id="22" name="Text 20"/>
+          <p:cNvPr id="24" name="Text 22"/>
           <p:cNvSpPr/>
           <p:nvPr/>
         </p:nvSpPr>
@@ -8537,7 +8849,7 @@
       </p:sp>
       <p:sp>
         <p:nvSpPr>
-          <p:cNvPr id="23" name="Text 21"/>
+          <p:cNvPr id="25" name="Text 23"/>
           <p:cNvSpPr/>
           <p:nvPr/>
         </p:nvSpPr>
@@ -8576,7 +8888,7 @@
       </p:sp>
       <p:sp>
         <p:nvSpPr>
-          <p:cNvPr id="24" name="Text 22"/>
+          <p:cNvPr id="26" name="Text 24"/>
           <p:cNvSpPr/>
           <p:nvPr/>
         </p:nvSpPr>
@@ -8615,7 +8927,7 @@
       </p:sp>
       <p:sp>
         <p:nvSpPr>
-          <p:cNvPr id="25" name="Shape 23"/>
+          <p:cNvPr id="27" name="Shape 25"/>
           <p:cNvSpPr/>
           <p:nvPr/>
         </p:nvSpPr>
@@ -8642,7 +8954,7 @@
       </p:sp>
       <p:sp>
         <p:nvSpPr>
-          <p:cNvPr id="26" name="Text 24"/>
+          <p:cNvPr id="28" name="Text 26"/>
           <p:cNvSpPr/>
           <p:nvPr/>
         </p:nvSpPr>
@@ -8681,7 +8993,7 @@
       </p:sp>
       <p:sp>
         <p:nvSpPr>
-          <p:cNvPr id="27" name="Text 25"/>
+          <p:cNvPr id="29" name="Text 27"/>
           <p:cNvSpPr/>
           <p:nvPr/>
         </p:nvSpPr>
@@ -8720,7 +9032,7 @@
       </p:sp>
       <p:sp>
         <p:nvSpPr>
-          <p:cNvPr id="28" name="Text 26"/>
+          <p:cNvPr id="30" name="Text 28"/>
           <p:cNvSpPr/>
           <p:nvPr/>
         </p:nvSpPr>
@@ -8759,7 +9071,7 @@
       </p:sp>
       <p:sp>
         <p:nvSpPr>
-          <p:cNvPr id="29" name="Shape 27"/>
+          <p:cNvPr id="31" name="Shape 29"/>
           <p:cNvSpPr/>
           <p:nvPr/>
         </p:nvSpPr>
@@ -8786,7 +9098,7 @@
       </p:sp>
       <p:sp>
         <p:nvSpPr>
-          <p:cNvPr id="30" name="Text 28"/>
+          <p:cNvPr id="32" name="Text 30"/>
           <p:cNvSpPr/>
           <p:nvPr/>
         </p:nvSpPr>
@@ -8825,7 +9137,7 @@
       </p:sp>
       <p:sp>
         <p:nvSpPr>
-          <p:cNvPr id="31" name="Text 29"/>
+          <p:cNvPr id="33" name="Text 31"/>
           <p:cNvSpPr/>
           <p:nvPr/>
         </p:nvSpPr>
@@ -8864,7 +9176,7 @@
       </p:sp>
       <p:sp>
         <p:nvSpPr>
-          <p:cNvPr id="32" name="Text 30"/>
+          <p:cNvPr id="34" name="Text 32"/>
           <p:cNvSpPr/>
           <p:nvPr/>
         </p:nvSpPr>
@@ -8903,7 +9215,7 @@
       </p:sp>
       <p:sp>
         <p:nvSpPr>
-          <p:cNvPr id="33" name="Shape 31"/>
+          <p:cNvPr id="35" name="Shape 33"/>
           <p:cNvSpPr/>
           <p:nvPr/>
         </p:nvSpPr>
@@ -8930,7 +9242,7 @@
       </p:sp>
       <p:sp>
         <p:nvSpPr>
-          <p:cNvPr id="34" name="Text 32"/>
+          <p:cNvPr id="36" name="Text 34"/>
           <p:cNvSpPr/>
           <p:nvPr/>
         </p:nvSpPr>
@@ -8969,7 +9281,7 @@
       </p:sp>
       <p:sp>
         <p:nvSpPr>
-          <p:cNvPr id="35" name="Shape 33"/>
+          <p:cNvPr id="37" name="Shape 35"/>
           <p:cNvSpPr/>
           <p:nvPr/>
         </p:nvSpPr>
@@ -8996,7 +9308,7 @@
       </p:sp>
       <p:sp>
         <p:nvSpPr>
-          <p:cNvPr id="36" name="Text 34"/>
+          <p:cNvPr id="38" name="Text 36"/>
           <p:cNvSpPr/>
           <p:nvPr/>
         </p:nvSpPr>
@@ -9035,7 +9347,7 @@
       </p:sp>
       <p:sp>
         <p:nvSpPr>
-          <p:cNvPr id="37" name="Shape 35"/>
+          <p:cNvPr id="39" name="Shape 37"/>
           <p:cNvSpPr/>
           <p:nvPr/>
         </p:nvSpPr>
@@ -9062,7 +9374,7 @@
       </p:sp>
       <p:sp>
         <p:nvSpPr>
-          <p:cNvPr id="38" name="Text 36"/>
+          <p:cNvPr id="40" name="Text 38"/>
           <p:cNvSpPr/>
           <p:nvPr/>
         </p:nvSpPr>
@@ -9101,7 +9413,7 @@
       </p:sp>
       <p:sp>
         <p:nvSpPr>
-          <p:cNvPr id="39" name="Shape 37"/>
+          <p:cNvPr id="41" name="Shape 39"/>
           <p:cNvSpPr/>
           <p:nvPr/>
         </p:nvSpPr>
@@ -9128,7 +9440,7 @@
       </p:sp>
       <p:sp>
         <p:nvSpPr>
-          <p:cNvPr id="40" name="Text 38"/>
+          <p:cNvPr id="42" name="Text 40"/>
           <p:cNvSpPr/>
           <p:nvPr/>
         </p:nvSpPr>
@@ -9167,7 +9479,7 @@
       </p:sp>
       <p:sp>
         <p:nvSpPr>
-          <p:cNvPr id="41" name="Shape 39"/>
+          <p:cNvPr id="43" name="Shape 41"/>
           <p:cNvSpPr/>
           <p:nvPr/>
         </p:nvSpPr>
@@ -9194,7 +9506,7 @@
       </p:sp>
       <p:sp>
         <p:nvSpPr>
-          <p:cNvPr id="42" name="Text 40"/>
+          <p:cNvPr id="44" name="Text 42"/>
           <p:cNvSpPr/>
           <p:nvPr/>
         </p:nvSpPr>
@@ -9233,7 +9545,7 @@
       </p:sp>
       <p:sp>
         <p:nvSpPr>
-          <p:cNvPr id="43" name="Shape 41"/>
+          <p:cNvPr id="45" name="Shape 43"/>
           <p:cNvSpPr/>
           <p:nvPr/>
         </p:nvSpPr>
@@ -9260,7 +9572,7 @@
       </p:sp>
       <p:sp>
         <p:nvSpPr>
-          <p:cNvPr id="44" name="Text 42"/>
+          <p:cNvPr id="46" name="Text 44"/>
           <p:cNvSpPr/>
           <p:nvPr/>
         </p:nvSpPr>
@@ -9299,7 +9611,7 @@
       </p:sp>
       <p:sp>
         <p:nvSpPr>
-          <p:cNvPr id="45" name="Shape 43"/>
+          <p:cNvPr id="47" name="Shape 45"/>
           <p:cNvSpPr/>
           <p:nvPr/>
         </p:nvSpPr>
@@ -9326,7 +9638,7 @@
       </p:sp>
       <p:sp>
         <p:nvSpPr>
-          <p:cNvPr id="46" name="Text 44"/>
+          <p:cNvPr id="48" name="Text 46"/>
           <p:cNvSpPr/>
           <p:nvPr/>
         </p:nvSpPr>
@@ -9365,7 +9677,7 @@
       </p:sp>
       <p:sp>
         <p:nvSpPr>
-          <p:cNvPr id="47" name="Text 45"/>
+          <p:cNvPr id="49" name="Text 47"/>
           <p:cNvSpPr/>
           <p:nvPr/>
         </p:nvSpPr>
@@ -9436,7 +9748,7 @@
         <p:spPr>
           <a:xfrm>
             <a:off x="0" y="0"/>
-            <a:ext cx="12188952" cy="1005840"/>
+            <a:ext cx="12188952" cy="1060704"/>
           </a:xfrm>
           <a:prstGeom prst="rect">
             <a:avLst/>
@@ -9455,12 +9767,129 @@
         </p:nvSpPr>
         <p:spPr>
           <a:xfrm>
-            <a:off x="411480" y="164592"/>
-            <a:ext cx="1188720" cy="310896"/>
+            <a:off x="411480" y="118872"/>
+            <a:ext cx="4572000" cy="219456"/>
+          </a:xfrm>
+          <a:prstGeom prst="rect">
+            <a:avLst/>
+          </a:prstGeom>
+          <a:noFill/>
+          <a:ln/>
+        </p:spPr>
+        <p:txBody>
+          <a:bodyPr wrap="square" rtlCol="0" anchor="ctr"/>
+          <a:lstStyle/>
+          <a:p>
+            <a:pPr indent="0" marL="0">
+              <a:buNone/>
+            </a:pPr>
+            <a:r>
+              <a:rPr lang="en-US" sz="1000" b="1" spc="220" kern="0" dirty="0">
+                <a:solidFill>
+                  <a:srgbClr val="0891B2"/>
+                </a:solidFill>
+                <a:latin typeface="Inter" pitchFamily="34" charset="0"/>
+                <a:ea typeface="Inter" pitchFamily="34" charset="-122"/>
+                <a:cs typeface="Inter" pitchFamily="34" charset="-120"/>
+              </a:rPr>
+              <a:t>TCS AGENTIC AI</a:t>
+            </a:r>
+            <a:endParaRPr lang="en-US" sz="1000" dirty="0"/>
+          </a:p>
+        </p:txBody>
+      </p:sp>
+      <p:sp>
+        <p:nvSpPr>
+          <p:cNvPr id="4" name="Text 2"/>
+          <p:cNvSpPr/>
+          <p:nvPr/>
+        </p:nvSpPr>
+        <p:spPr>
+          <a:xfrm>
+            <a:off x="411480" y="329184"/>
+            <a:ext cx="9692640" cy="402336"/>
+          </a:xfrm>
+          <a:prstGeom prst="rect">
+            <a:avLst/>
+          </a:prstGeom>
+          <a:noFill/>
+          <a:ln/>
+        </p:spPr>
+        <p:txBody>
+          <a:bodyPr wrap="square" rtlCol="0" anchor="ctr"/>
+          <a:lstStyle/>
+          <a:p>
+            <a:pPr indent="0" marL="0">
+              <a:buNone/>
+            </a:pPr>
+            <a:r>
+              <a:rPr lang="en-US" sz="2300" b="1" dirty="0">
+                <a:solidFill>
+                  <a:srgbClr val="FFFFFF"/>
+                </a:solidFill>
+                <a:latin typeface="Inter" pitchFamily="34" charset="0"/>
+                <a:ea typeface="Inter" pitchFamily="34" charset="-122"/>
+                <a:cs typeface="Inter" pitchFamily="34" charset="-120"/>
+              </a:rPr>
+              <a:t>Security &amp; Compliance Agent</a:t>
+            </a:r>
+            <a:endParaRPr lang="en-US" sz="2300" dirty="0"/>
+          </a:p>
+        </p:txBody>
+      </p:sp>
+      <p:sp>
+        <p:nvSpPr>
+          <p:cNvPr id="5" name="Text 3"/>
+          <p:cNvSpPr/>
+          <p:nvPr/>
+        </p:nvSpPr>
+        <p:spPr>
+          <a:xfrm>
+            <a:off x="411480" y="749808"/>
+            <a:ext cx="9692640" cy="256032"/>
+          </a:xfrm>
+          <a:prstGeom prst="rect">
+            <a:avLst/>
+          </a:prstGeom>
+          <a:noFill/>
+          <a:ln/>
+        </p:spPr>
+        <p:txBody>
+          <a:bodyPr wrap="square" rtlCol="0" anchor="ctr"/>
+          <a:lstStyle/>
+          <a:p>
+            <a:pPr indent="0" marL="0">
+              <a:buNone/>
+            </a:pPr>
+            <a:r>
+              <a:rPr lang="en-US" sz="1050" i="1" dirty="0">
+                <a:solidFill>
+                  <a:srgbClr val="94A3B8"/>
+                </a:solidFill>
+                <a:latin typeface="Inter" pitchFamily="34" charset="0"/>
+                <a:ea typeface="Inter" pitchFamily="34" charset="-122"/>
+                <a:cs typeface="Inter" pitchFamily="34" charset="-120"/>
+              </a:rPr>
+              <a:t>Security &amp; compliance governance — continuous posture assessment, not a quarterly audit</a:t>
+            </a:r>
+            <a:endParaRPr lang="en-US" sz="1050" dirty="0"/>
+          </a:p>
+        </p:txBody>
+      </p:sp>
+      <p:sp>
+        <p:nvSpPr>
+          <p:cNvPr id="6" name="Text 4"/>
+          <p:cNvSpPr/>
+          <p:nvPr/>
+        </p:nvSpPr>
+        <p:spPr>
+          <a:xfrm>
+            <a:off x="10561320" y="310896"/>
+            <a:ext cx="1234440" cy="365760"/>
           </a:xfrm>
           <a:prstGeom prst="rect">
             <a:avLst>
-              <a:gd name="adj" fmla="val 14706"/>
+              <a:gd name="adj" fmla="val 12500"/>
             </a:avLst>
           </a:prstGeom>
           <a:solidFill>
@@ -9476,7 +9905,7 @@
               <a:buNone/>
             </a:pPr>
             <a:r>
-              <a:rPr lang="en-US" sz="1300" b="1" dirty="0">
+              <a:rPr lang="en-US" sz="1500" b="1" dirty="0">
                 <a:solidFill>
                   <a:srgbClr val="FFFFFF"/>
                 </a:solidFill>
@@ -9486,20 +9915,20 @@
               </a:rPr>
               <a:t>UC-04</a:t>
             </a:r>
-            <a:endParaRPr lang="en-US" sz="1300" dirty="0"/>
-          </a:p>
-        </p:txBody>
-      </p:sp>
-      <p:sp>
-        <p:nvSpPr>
-          <p:cNvPr id="4" name="Text 2"/>
-          <p:cNvSpPr/>
-          <p:nvPr/>
-        </p:nvSpPr>
-        <p:spPr>
-          <a:xfrm>
-            <a:off x="1737360" y="128016"/>
-            <a:ext cx="10058400" cy="402336"/>
+            <a:endParaRPr lang="en-US" sz="1500" dirty="0"/>
+          </a:p>
+        </p:txBody>
+      </p:sp>
+      <p:sp>
+        <p:nvSpPr>
+          <p:cNvPr id="7" name="Text 5"/>
+          <p:cNvSpPr/>
+          <p:nvPr/>
+        </p:nvSpPr>
+        <p:spPr>
+          <a:xfrm>
+            <a:off x="411480" y="1188720"/>
+            <a:ext cx="3657600" cy="182880"/>
           </a:xfrm>
           <a:prstGeom prst="rect">
             <a:avLst/>
@@ -9515,69 +9944,30 @@
               <a:buNone/>
             </a:pPr>
             <a:r>
-              <a:rPr lang="en-US" sz="2200" b="1" dirty="0">
-                <a:solidFill>
-                  <a:srgbClr val="FFFFFF"/>
-                </a:solidFill>
-                <a:latin typeface="Inter" pitchFamily="34" charset="0"/>
-                <a:ea typeface="Inter" pitchFamily="34" charset="-122"/>
-                <a:cs typeface="Inter" pitchFamily="34" charset="-120"/>
-              </a:rPr>
-              <a:t>Security &amp; Compliance Governance</a:t>
-            </a:r>
-            <a:endParaRPr lang="en-US" sz="2200" dirty="0"/>
-          </a:p>
-        </p:txBody>
-      </p:sp>
-      <p:sp>
-        <p:nvSpPr>
-          <p:cNvPr id="5" name="Text 3"/>
-          <p:cNvSpPr/>
-          <p:nvPr/>
-        </p:nvSpPr>
-        <p:spPr>
-          <a:xfrm>
-            <a:off x="1737360" y="548640"/>
-            <a:ext cx="10058400" cy="274320"/>
-          </a:xfrm>
-          <a:prstGeom prst="rect">
-            <a:avLst/>
-          </a:prstGeom>
-          <a:noFill/>
-          <a:ln/>
-        </p:spPr>
-        <p:txBody>
-          <a:bodyPr wrap="square" rtlCol="0" anchor="ctr"/>
-          <a:lstStyle/>
-          <a:p>
-            <a:pPr indent="0" marL="0">
-              <a:buNone/>
-            </a:pPr>
-            <a:r>
-              <a:rPr lang="en-US" sz="1100" i="1" dirty="0">
-                <a:solidFill>
-                  <a:srgbClr val="0891B2"/>
-                </a:solidFill>
-                <a:latin typeface="Inter" pitchFamily="34" charset="0"/>
-                <a:ea typeface="Inter" pitchFamily="34" charset="-122"/>
-                <a:cs typeface="Inter" pitchFamily="34" charset="-120"/>
-              </a:rPr>
-              <a:t>Continuous posture assessment, not a quarterly audit</a:t>
-            </a:r>
-            <a:endParaRPr lang="en-US" sz="1100" dirty="0"/>
-          </a:p>
-        </p:txBody>
-      </p:sp>
-      <p:sp>
-        <p:nvSpPr>
-          <p:cNvPr id="6" name="Text 4"/>
-          <p:cNvSpPr/>
-          <p:nvPr/>
-        </p:nvSpPr>
-        <p:spPr>
-          <a:xfrm>
-            <a:off x="411480" y="1170432"/>
-            <a:ext cx="11384280" cy="1051560"/>
+              <a:rPr lang="en-US" sz="850" b="1" spc="140" kern="0" dirty="0">
+                <a:solidFill>
+                  <a:srgbClr val="64748B"/>
+                </a:solidFill>
+                <a:latin typeface="Inter" pitchFamily="34" charset="0"/>
+                <a:ea typeface="Inter" pitchFamily="34" charset="-122"/>
+                <a:cs typeface="Inter" pitchFamily="34" charset="-120"/>
+              </a:rPr>
+              <a:t>USE CASE DESCRIPTION</a:t>
+            </a:r>
+            <a:endParaRPr lang="en-US" sz="850" dirty="0"/>
+          </a:p>
+        </p:txBody>
+      </p:sp>
+      <p:sp>
+        <p:nvSpPr>
+          <p:cNvPr id="8" name="Text 6"/>
+          <p:cNvSpPr/>
+          <p:nvPr/>
+        </p:nvSpPr>
+        <p:spPr>
+          <a:xfrm>
+            <a:off x="411480" y="1389888"/>
+            <a:ext cx="11384280" cy="914400"/>
           </a:xfrm>
           <a:prstGeom prst="rect">
             <a:avLst/>
@@ -9591,12 +9981,12 @@
           <a:p>
             <a:pPr indent="0" marL="0">
               <a:lnSpc>
-                <a:spcPct val="122000"/>
+                <a:spcPct val="120000"/>
               </a:lnSpc>
               <a:buNone/>
             </a:pPr>
             <a:r>
-              <a:rPr lang="en-US" sz="1250" dirty="0">
+              <a:rPr lang="en-US" sz="1200" dirty="0">
                 <a:solidFill>
                   <a:srgbClr val="1E293B"/>
                 </a:solidFill>
@@ -9606,19 +9996,19 @@
               </a:rPr>
               <a:t>Continuous security posture across the fleet: CIS benchmark evaluation, image vulnerability scanning, RBAC audit and policy enforcement — run continuously and reported per namespace, so compliance is a live number rather than a point-in-time report that ages the moment it is produced.</a:t>
             </a:r>
-            <a:endParaRPr lang="en-US" sz="1250" dirty="0"/>
-          </a:p>
-        </p:txBody>
-      </p:sp>
-      <p:sp>
-        <p:nvSpPr>
-          <p:cNvPr id="7" name="Text 5"/>
-          <p:cNvSpPr/>
-          <p:nvPr/>
-        </p:nvSpPr>
-        <p:spPr>
-          <a:xfrm>
-            <a:off x="411480" y="2157984"/>
+            <a:endParaRPr lang="en-US" sz="1200" dirty="0"/>
+          </a:p>
+        </p:txBody>
+      </p:sp>
+      <p:sp>
+        <p:nvSpPr>
+          <p:cNvPr id="9" name="Text 7"/>
+          <p:cNvSpPr/>
+          <p:nvPr/>
+        </p:nvSpPr>
+        <p:spPr>
+          <a:xfrm>
+            <a:off x="411480" y="2176272"/>
             <a:ext cx="3657600" cy="201168"/>
           </a:xfrm>
           <a:prstGeom prst="rect">
@@ -9635,7 +10025,7 @@
               <a:buNone/>
             </a:pPr>
             <a:r>
-              <a:rPr lang="en-US" sz="900" b="1" spc="150" kern="0" dirty="0">
+              <a:rPr lang="en-US" sz="850" b="1" spc="140" kern="0" dirty="0">
                 <a:solidFill>
                   <a:srgbClr val="2563EB"/>
                 </a:solidFill>
@@ -9643,15 +10033,15 @@
                 <a:ea typeface="Inter" pitchFamily="34" charset="-122"/>
                 <a:cs typeface="Inter" pitchFamily="34" charset="-120"/>
               </a:rPr>
-              <a:t>MASTER WORKFLOW</a:t>
-            </a:r>
-            <a:endParaRPr lang="en-US" sz="900" dirty="0"/>
-          </a:p>
-        </p:txBody>
-      </p:sp>
-      <p:sp>
-        <p:nvSpPr>
-          <p:cNvPr id="8" name="Text 6"/>
+              <a:t>END-TO-END WORKFLOW</a:t>
+            </a:r>
+            <a:endParaRPr lang="en-US" sz="850" dirty="0"/>
+          </a:p>
+        </p:txBody>
+      </p:sp>
+      <p:sp>
+        <p:nvSpPr>
+          <p:cNvPr id="10" name="Text 8"/>
           <p:cNvSpPr/>
           <p:nvPr/>
         </p:nvSpPr>
@@ -9690,7 +10080,7 @@
       </p:sp>
       <p:sp>
         <p:nvSpPr>
-          <p:cNvPr id="9" name="Shape 7"/>
+          <p:cNvPr id="11" name="Shape 9"/>
           <p:cNvSpPr/>
           <p:nvPr/>
         </p:nvSpPr>
@@ -9717,7 +10107,7 @@
       </p:sp>
       <p:sp>
         <p:nvSpPr>
-          <p:cNvPr id="10" name="Text 8"/>
+          <p:cNvPr id="12" name="Text 10"/>
           <p:cNvSpPr/>
           <p:nvPr/>
         </p:nvSpPr>
@@ -9756,7 +10146,7 @@
       </p:sp>
       <p:sp>
         <p:nvSpPr>
-          <p:cNvPr id="11" name="Text 9"/>
+          <p:cNvPr id="13" name="Text 11"/>
           <p:cNvSpPr/>
           <p:nvPr/>
         </p:nvSpPr>
@@ -9795,7 +10185,7 @@
       </p:sp>
       <p:sp>
         <p:nvSpPr>
-          <p:cNvPr id="12" name="Text 10"/>
+          <p:cNvPr id="14" name="Text 12"/>
           <p:cNvSpPr/>
           <p:nvPr/>
         </p:nvSpPr>
@@ -9834,7 +10224,7 @@
       </p:sp>
       <p:sp>
         <p:nvSpPr>
-          <p:cNvPr id="13" name="Shape 11"/>
+          <p:cNvPr id="15" name="Shape 13"/>
           <p:cNvSpPr/>
           <p:nvPr/>
         </p:nvSpPr>
@@ -9861,7 +10251,7 @@
       </p:sp>
       <p:sp>
         <p:nvSpPr>
-          <p:cNvPr id="14" name="Text 12"/>
+          <p:cNvPr id="16" name="Text 14"/>
           <p:cNvSpPr/>
           <p:nvPr/>
         </p:nvSpPr>
@@ -9900,7 +10290,7 @@
       </p:sp>
       <p:sp>
         <p:nvSpPr>
-          <p:cNvPr id="15" name="Text 13"/>
+          <p:cNvPr id="17" name="Text 15"/>
           <p:cNvSpPr/>
           <p:nvPr/>
         </p:nvSpPr>
@@ -9939,7 +10329,7 @@
       </p:sp>
       <p:sp>
         <p:nvSpPr>
-          <p:cNvPr id="16" name="Text 14"/>
+          <p:cNvPr id="18" name="Text 16"/>
           <p:cNvSpPr/>
           <p:nvPr/>
         </p:nvSpPr>
@@ -9978,7 +10368,7 @@
       </p:sp>
       <p:sp>
         <p:nvSpPr>
-          <p:cNvPr id="17" name="Shape 15"/>
+          <p:cNvPr id="19" name="Shape 17"/>
           <p:cNvSpPr/>
           <p:nvPr/>
         </p:nvSpPr>
@@ -10005,7 +10395,7 @@
       </p:sp>
       <p:sp>
         <p:nvSpPr>
-          <p:cNvPr id="18" name="Text 16"/>
+          <p:cNvPr id="20" name="Text 18"/>
           <p:cNvSpPr/>
           <p:nvPr/>
         </p:nvSpPr>
@@ -10044,7 +10434,7 @@
       </p:sp>
       <p:sp>
         <p:nvSpPr>
-          <p:cNvPr id="19" name="Text 17"/>
+          <p:cNvPr id="21" name="Text 19"/>
           <p:cNvSpPr/>
           <p:nvPr/>
         </p:nvSpPr>
@@ -10083,7 +10473,7 @@
       </p:sp>
       <p:sp>
         <p:nvSpPr>
-          <p:cNvPr id="20" name="Text 18"/>
+          <p:cNvPr id="22" name="Text 20"/>
           <p:cNvSpPr/>
           <p:nvPr/>
         </p:nvSpPr>
@@ -10122,7 +10512,7 @@
       </p:sp>
       <p:sp>
         <p:nvSpPr>
-          <p:cNvPr id="21" name="Shape 19"/>
+          <p:cNvPr id="23" name="Shape 21"/>
           <p:cNvSpPr/>
           <p:nvPr/>
         </p:nvSpPr>
@@ -10149,7 +10539,7 @@
       </p:sp>
       <p:sp>
         <p:nvSpPr>
-          <p:cNvPr id="22" name="Text 20"/>
+          <p:cNvPr id="24" name="Text 22"/>
           <p:cNvSpPr/>
           <p:nvPr/>
         </p:nvSpPr>
@@ -10188,7 +10578,7 @@
       </p:sp>
       <p:sp>
         <p:nvSpPr>
-          <p:cNvPr id="23" name="Text 21"/>
+          <p:cNvPr id="25" name="Text 23"/>
           <p:cNvSpPr/>
           <p:nvPr/>
         </p:nvSpPr>
@@ -10227,7 +10617,7 @@
       </p:sp>
       <p:sp>
         <p:nvSpPr>
-          <p:cNvPr id="24" name="Text 22"/>
+          <p:cNvPr id="26" name="Text 24"/>
           <p:cNvSpPr/>
           <p:nvPr/>
         </p:nvSpPr>
@@ -10266,7 +10656,7 @@
       </p:sp>
       <p:sp>
         <p:nvSpPr>
-          <p:cNvPr id="25" name="Shape 23"/>
+          <p:cNvPr id="27" name="Shape 25"/>
           <p:cNvSpPr/>
           <p:nvPr/>
         </p:nvSpPr>
@@ -10293,7 +10683,7 @@
       </p:sp>
       <p:sp>
         <p:nvSpPr>
-          <p:cNvPr id="26" name="Text 24"/>
+          <p:cNvPr id="28" name="Text 26"/>
           <p:cNvSpPr/>
           <p:nvPr/>
         </p:nvSpPr>
@@ -10332,7 +10722,7 @@
       </p:sp>
       <p:sp>
         <p:nvSpPr>
-          <p:cNvPr id="27" name="Text 25"/>
+          <p:cNvPr id="29" name="Text 27"/>
           <p:cNvSpPr/>
           <p:nvPr/>
         </p:nvSpPr>
@@ -10371,7 +10761,7 @@
       </p:sp>
       <p:sp>
         <p:nvSpPr>
-          <p:cNvPr id="28" name="Text 26"/>
+          <p:cNvPr id="30" name="Text 28"/>
           <p:cNvSpPr/>
           <p:nvPr/>
         </p:nvSpPr>
@@ -10410,7 +10800,7 @@
       </p:sp>
       <p:sp>
         <p:nvSpPr>
-          <p:cNvPr id="29" name="Shape 27"/>
+          <p:cNvPr id="31" name="Shape 29"/>
           <p:cNvSpPr/>
           <p:nvPr/>
         </p:nvSpPr>
@@ -10437,7 +10827,7 @@
       </p:sp>
       <p:sp>
         <p:nvSpPr>
-          <p:cNvPr id="30" name="Text 28"/>
+          <p:cNvPr id="32" name="Text 30"/>
           <p:cNvSpPr/>
           <p:nvPr/>
         </p:nvSpPr>
@@ -10476,7 +10866,7 @@
       </p:sp>
       <p:sp>
         <p:nvSpPr>
-          <p:cNvPr id="31" name="Text 29"/>
+          <p:cNvPr id="33" name="Text 31"/>
           <p:cNvSpPr/>
           <p:nvPr/>
         </p:nvSpPr>
@@ -10515,7 +10905,7 @@
       </p:sp>
       <p:sp>
         <p:nvSpPr>
-          <p:cNvPr id="32" name="Text 30"/>
+          <p:cNvPr id="34" name="Text 32"/>
           <p:cNvSpPr/>
           <p:nvPr/>
         </p:nvSpPr>
@@ -10554,7 +10944,7 @@
       </p:sp>
       <p:sp>
         <p:nvSpPr>
-          <p:cNvPr id="33" name="Shape 31"/>
+          <p:cNvPr id="35" name="Shape 33"/>
           <p:cNvSpPr/>
           <p:nvPr/>
         </p:nvSpPr>
@@ -10581,7 +10971,7 @@
       </p:sp>
       <p:sp>
         <p:nvSpPr>
-          <p:cNvPr id="34" name="Text 32"/>
+          <p:cNvPr id="36" name="Text 34"/>
           <p:cNvSpPr/>
           <p:nvPr/>
         </p:nvSpPr>
@@ -10620,7 +11010,7 @@
       </p:sp>
       <p:sp>
         <p:nvSpPr>
-          <p:cNvPr id="35" name="Text 33"/>
+          <p:cNvPr id="37" name="Text 35"/>
           <p:cNvSpPr/>
           <p:nvPr/>
         </p:nvSpPr>
@@ -10659,7 +11049,7 @@
       </p:sp>
       <p:sp>
         <p:nvSpPr>
-          <p:cNvPr id="36" name="Text 34"/>
+          <p:cNvPr id="38" name="Text 36"/>
           <p:cNvSpPr/>
           <p:nvPr/>
         </p:nvSpPr>
@@ -10698,7 +11088,7 @@
       </p:sp>
       <p:sp>
         <p:nvSpPr>
-          <p:cNvPr id="37" name="Shape 35"/>
+          <p:cNvPr id="39" name="Shape 37"/>
           <p:cNvSpPr/>
           <p:nvPr/>
         </p:nvSpPr>
@@ -10725,7 +11115,7 @@
       </p:sp>
       <p:sp>
         <p:nvSpPr>
-          <p:cNvPr id="38" name="Text 36"/>
+          <p:cNvPr id="40" name="Text 38"/>
           <p:cNvSpPr/>
           <p:nvPr/>
         </p:nvSpPr>
@@ -10764,7 +11154,7 @@
       </p:sp>
       <p:sp>
         <p:nvSpPr>
-          <p:cNvPr id="39" name="Text 37"/>
+          <p:cNvPr id="41" name="Text 39"/>
           <p:cNvSpPr/>
           <p:nvPr/>
         </p:nvSpPr>
@@ -10803,7 +11193,7 @@
       </p:sp>
       <p:sp>
         <p:nvSpPr>
-          <p:cNvPr id="40" name="Shape 38"/>
+          <p:cNvPr id="42" name="Shape 40"/>
           <p:cNvSpPr/>
           <p:nvPr/>
         </p:nvSpPr>
@@ -10830,7 +11220,7 @@
       </p:sp>
       <p:sp>
         <p:nvSpPr>
-          <p:cNvPr id="41" name="Text 39"/>
+          <p:cNvPr id="43" name="Text 41"/>
           <p:cNvSpPr/>
           <p:nvPr/>
         </p:nvSpPr>
@@ -10869,7 +11259,7 @@
       </p:sp>
       <p:sp>
         <p:nvSpPr>
-          <p:cNvPr id="42" name="Shape 40"/>
+          <p:cNvPr id="44" name="Shape 42"/>
           <p:cNvSpPr/>
           <p:nvPr/>
         </p:nvSpPr>
@@ -10896,7 +11286,7 @@
       </p:sp>
       <p:sp>
         <p:nvSpPr>
-          <p:cNvPr id="43" name="Text 41"/>
+          <p:cNvPr id="45" name="Text 43"/>
           <p:cNvSpPr/>
           <p:nvPr/>
         </p:nvSpPr>
@@ -10935,7 +11325,7 @@
       </p:sp>
       <p:sp>
         <p:nvSpPr>
-          <p:cNvPr id="44" name="Shape 42"/>
+          <p:cNvPr id="46" name="Shape 44"/>
           <p:cNvSpPr/>
           <p:nvPr/>
         </p:nvSpPr>
@@ -10962,7 +11352,7 @@
       </p:sp>
       <p:sp>
         <p:nvSpPr>
-          <p:cNvPr id="45" name="Text 43"/>
+          <p:cNvPr id="47" name="Text 45"/>
           <p:cNvSpPr/>
           <p:nvPr/>
         </p:nvSpPr>
@@ -11001,7 +11391,7 @@
       </p:sp>
       <p:sp>
         <p:nvSpPr>
-          <p:cNvPr id="46" name="Shape 44"/>
+          <p:cNvPr id="48" name="Shape 46"/>
           <p:cNvSpPr/>
           <p:nvPr/>
         </p:nvSpPr>
@@ -11028,7 +11418,7 @@
       </p:sp>
       <p:sp>
         <p:nvSpPr>
-          <p:cNvPr id="47" name="Text 45"/>
+          <p:cNvPr id="49" name="Text 47"/>
           <p:cNvSpPr/>
           <p:nvPr/>
         </p:nvSpPr>
@@ -11067,7 +11457,7 @@
       </p:sp>
       <p:sp>
         <p:nvSpPr>
-          <p:cNvPr id="48" name="Text 46"/>
+          <p:cNvPr id="50" name="Text 48"/>
           <p:cNvSpPr/>
           <p:nvPr/>
         </p:nvSpPr>
@@ -11138,7 +11528,7 @@
         <p:spPr>
           <a:xfrm>
             <a:off x="0" y="0"/>
-            <a:ext cx="12188952" cy="1005840"/>
+            <a:ext cx="12188952" cy="1060704"/>
           </a:xfrm>
           <a:prstGeom prst="rect">
             <a:avLst/>
@@ -11157,12 +11547,129 @@
         </p:nvSpPr>
         <p:spPr>
           <a:xfrm>
-            <a:off x="411480" y="164592"/>
-            <a:ext cx="1188720" cy="310896"/>
+            <a:off x="411480" y="118872"/>
+            <a:ext cx="4572000" cy="219456"/>
+          </a:xfrm>
+          <a:prstGeom prst="rect">
+            <a:avLst/>
+          </a:prstGeom>
+          <a:noFill/>
+          <a:ln/>
+        </p:spPr>
+        <p:txBody>
+          <a:bodyPr wrap="square" rtlCol="0" anchor="ctr"/>
+          <a:lstStyle/>
+          <a:p>
+            <a:pPr indent="0" marL="0">
+              <a:buNone/>
+            </a:pPr>
+            <a:r>
+              <a:rPr lang="en-US" sz="1000" b="1" spc="220" kern="0" dirty="0">
+                <a:solidFill>
+                  <a:srgbClr val="0891B2"/>
+                </a:solidFill>
+                <a:latin typeface="Inter" pitchFamily="34" charset="0"/>
+                <a:ea typeface="Inter" pitchFamily="34" charset="-122"/>
+                <a:cs typeface="Inter" pitchFamily="34" charset="-120"/>
+              </a:rPr>
+              <a:t>TCS AGENTIC AI</a:t>
+            </a:r>
+            <a:endParaRPr lang="en-US" sz="1000" dirty="0"/>
+          </a:p>
+        </p:txBody>
+      </p:sp>
+      <p:sp>
+        <p:nvSpPr>
+          <p:cNvPr id="4" name="Text 2"/>
+          <p:cNvSpPr/>
+          <p:nvPr/>
+        </p:nvSpPr>
+        <p:spPr>
+          <a:xfrm>
+            <a:off x="411480" y="329184"/>
+            <a:ext cx="9692640" cy="402336"/>
+          </a:xfrm>
+          <a:prstGeom prst="rect">
+            <a:avLst/>
+          </a:prstGeom>
+          <a:noFill/>
+          <a:ln/>
+        </p:spPr>
+        <p:txBody>
+          <a:bodyPr wrap="square" rtlCol="0" anchor="ctr"/>
+          <a:lstStyle/>
+          <a:p>
+            <a:pPr indent="0" marL="0">
+              <a:buNone/>
+            </a:pPr>
+            <a:r>
+              <a:rPr lang="en-US" sz="2300" b="1" dirty="0">
+                <a:solidFill>
+                  <a:srgbClr val="FFFFFF"/>
+                </a:solidFill>
+                <a:latin typeface="Inter" pitchFamily="34" charset="0"/>
+                <a:ea typeface="Inter" pitchFamily="34" charset="-122"/>
+                <a:cs typeface="Inter" pitchFamily="34" charset="-120"/>
+              </a:rPr>
+              <a:t>Container RCA Agent</a:t>
+            </a:r>
+            <a:endParaRPr lang="en-US" sz="2300" dirty="0"/>
+          </a:p>
+        </p:txBody>
+      </p:sp>
+      <p:sp>
+        <p:nvSpPr>
+          <p:cNvPr id="5" name="Text 3"/>
+          <p:cNvSpPr/>
+          <p:nvPr/>
+        </p:nvSpPr>
+        <p:spPr>
+          <a:xfrm>
+            <a:off x="411480" y="749808"/>
+            <a:ext cx="9692640" cy="256032"/>
+          </a:xfrm>
+          <a:prstGeom prst="rect">
+            <a:avLst/>
+          </a:prstGeom>
+          <a:noFill/>
+          <a:ln/>
+        </p:spPr>
+        <p:txBody>
+          <a:bodyPr wrap="square" rtlCol="0" anchor="ctr"/>
+          <a:lstStyle/>
+          <a:p>
+            <a:pPr indent="0" marL="0">
+              <a:buNone/>
+            </a:pPr>
+            <a:r>
+              <a:rPr lang="en-US" sz="1050" i="1" dirty="0">
+                <a:solidFill>
+                  <a:srgbClr val="94A3B8"/>
+                </a:solidFill>
+                <a:latin typeface="Inter" pitchFamily="34" charset="0"/>
+                <a:ea typeface="Inter" pitchFamily="34" charset="-122"/>
+                <a:cs typeface="Inter" pitchFamily="34" charset="-120"/>
+              </a:rPr>
+              <a:t>Zero-Touch Incident Command — self-detecting · self-documenting · self-closing · self-reverting</a:t>
+            </a:r>
+            <a:endParaRPr lang="en-US" sz="1050" dirty="0"/>
+          </a:p>
+        </p:txBody>
+      </p:sp>
+      <p:sp>
+        <p:nvSpPr>
+          <p:cNvPr id="6" name="Text 4"/>
+          <p:cNvSpPr/>
+          <p:nvPr/>
+        </p:nvSpPr>
+        <p:spPr>
+          <a:xfrm>
+            <a:off x="10561320" y="310896"/>
+            <a:ext cx="1234440" cy="365760"/>
           </a:xfrm>
           <a:prstGeom prst="rect">
             <a:avLst>
-              <a:gd name="adj" fmla="val 14706"/>
+              <a:gd name="adj" fmla="val 12500"/>
             </a:avLst>
           </a:prstGeom>
           <a:solidFill>
@@ -11178,7 +11685,7 @@
               <a:buNone/>
             </a:pPr>
             <a:r>
-              <a:rPr lang="en-US" sz="1300" b="1" dirty="0">
+              <a:rPr lang="en-US" sz="1500" b="1" dirty="0">
                 <a:solidFill>
                   <a:srgbClr val="FFFFFF"/>
                 </a:solidFill>
@@ -11188,20 +11695,20 @@
               </a:rPr>
               <a:t>UC-05</a:t>
             </a:r>
-            <a:endParaRPr lang="en-US" sz="1300" dirty="0"/>
-          </a:p>
-        </p:txBody>
-      </p:sp>
-      <p:sp>
-        <p:nvSpPr>
-          <p:cNvPr id="4" name="Text 2"/>
-          <p:cNvSpPr/>
-          <p:nvPr/>
-        </p:nvSpPr>
-        <p:spPr>
-          <a:xfrm>
-            <a:off x="1737360" y="128016"/>
-            <a:ext cx="10058400" cy="402336"/>
+            <a:endParaRPr lang="en-US" sz="1500" dirty="0"/>
+          </a:p>
+        </p:txBody>
+      </p:sp>
+      <p:sp>
+        <p:nvSpPr>
+          <p:cNvPr id="7" name="Text 5"/>
+          <p:cNvSpPr/>
+          <p:nvPr/>
+        </p:nvSpPr>
+        <p:spPr>
+          <a:xfrm>
+            <a:off x="411480" y="1188720"/>
+            <a:ext cx="3657600" cy="182880"/>
           </a:xfrm>
           <a:prstGeom prst="rect">
             <a:avLst/>
@@ -11217,69 +11724,30 @@
               <a:buNone/>
             </a:pPr>
             <a:r>
-              <a:rPr lang="en-US" sz="2200" b="1" dirty="0">
-                <a:solidFill>
-                  <a:srgbClr val="FFFFFF"/>
-                </a:solidFill>
-                <a:latin typeface="Inter" pitchFamily="34" charset="0"/>
-                <a:ea typeface="Inter" pitchFamily="34" charset="-122"/>
-                <a:cs typeface="Inter" pitchFamily="34" charset="-120"/>
-              </a:rPr>
-              <a:t>RCA Agent — Zero-Touch Incident Command</a:t>
-            </a:r>
-            <a:endParaRPr lang="en-US" sz="2200" dirty="0"/>
-          </a:p>
-        </p:txBody>
-      </p:sp>
-      <p:sp>
-        <p:nvSpPr>
-          <p:cNvPr id="5" name="Text 3"/>
-          <p:cNvSpPr/>
-          <p:nvPr/>
-        </p:nvSpPr>
-        <p:spPr>
-          <a:xfrm>
-            <a:off x="1737360" y="548640"/>
-            <a:ext cx="10058400" cy="274320"/>
-          </a:xfrm>
-          <a:prstGeom prst="rect">
-            <a:avLst/>
-          </a:prstGeom>
-          <a:noFill/>
-          <a:ln/>
-        </p:spPr>
-        <p:txBody>
-          <a:bodyPr wrap="square" rtlCol="0" anchor="ctr"/>
-          <a:lstStyle/>
-          <a:p>
-            <a:pPr indent="0" marL="0">
-              <a:buNone/>
-            </a:pPr>
-            <a:r>
-              <a:rPr lang="en-US" sz="1100" i="1" dirty="0">
-                <a:solidFill>
-                  <a:srgbClr val="0891B2"/>
-                </a:solidFill>
-                <a:latin typeface="Inter" pitchFamily="34" charset="0"/>
-                <a:ea typeface="Inter" pitchFamily="34" charset="-122"/>
-                <a:cs typeface="Inter" pitchFamily="34" charset="-120"/>
-              </a:rPr>
-              <a:t>Self-detecting · self-documenting · self-closing · self-reverting</a:t>
-            </a:r>
-            <a:endParaRPr lang="en-US" sz="1100" dirty="0"/>
-          </a:p>
-        </p:txBody>
-      </p:sp>
-      <p:sp>
-        <p:nvSpPr>
-          <p:cNvPr id="6" name="Text 4"/>
-          <p:cNvSpPr/>
-          <p:nvPr/>
-        </p:nvSpPr>
-        <p:spPr>
-          <a:xfrm>
-            <a:off x="411480" y="1170432"/>
-            <a:ext cx="11384280" cy="1051560"/>
+              <a:rPr lang="en-US" sz="850" b="1" spc="140" kern="0" dirty="0">
+                <a:solidFill>
+                  <a:srgbClr val="64748B"/>
+                </a:solidFill>
+                <a:latin typeface="Inter" pitchFamily="34" charset="0"/>
+                <a:ea typeface="Inter" pitchFamily="34" charset="-122"/>
+                <a:cs typeface="Inter" pitchFamily="34" charset="-120"/>
+              </a:rPr>
+              <a:t>USE CASE DESCRIPTION</a:t>
+            </a:r>
+            <a:endParaRPr lang="en-US" sz="850" dirty="0"/>
+          </a:p>
+        </p:txBody>
+      </p:sp>
+      <p:sp>
+        <p:nvSpPr>
+          <p:cNvPr id="8" name="Text 6"/>
+          <p:cNvSpPr/>
+          <p:nvPr/>
+        </p:nvSpPr>
+        <p:spPr>
+          <a:xfrm>
+            <a:off x="411480" y="1389888"/>
+            <a:ext cx="11384280" cy="914400"/>
           </a:xfrm>
           <a:prstGeom prst="rect">
             <a:avLst/>
@@ -11293,12 +11761,12 @@
           <a:p>
             <a:pPr indent="0" marL="0">
               <a:lnSpc>
-                <a:spcPct val="122000"/>
+                <a:spcPct val="120000"/>
               </a:lnSpc>
               <a:buNone/>
             </a:pPr>
             <a:r>
-              <a:rPr lang="en-US" sz="1250" dirty="0">
+              <a:rPr lang="en-US" sz="1200" dirty="0">
                 <a:solidFill>
                   <a:srgbClr val="1E293B"/>
                 </a:solidFill>
@@ -11308,19 +11776,19 @@
               </a:rPr>
               <a:t>The only agent-initiated use case: nothing triggers it, which is its entire point. It detects against industry-standard thresholds with dwell time, correlates N signals into one incident, determines root cause from real evidence, raises the ticket, and — after one human decision — applies, verifies, documents and closes it.</a:t>
             </a:r>
-            <a:endParaRPr lang="en-US" sz="1250" dirty="0"/>
-          </a:p>
-        </p:txBody>
-      </p:sp>
-      <p:sp>
-        <p:nvSpPr>
-          <p:cNvPr id="7" name="Text 5"/>
-          <p:cNvSpPr/>
-          <p:nvPr/>
-        </p:nvSpPr>
-        <p:spPr>
-          <a:xfrm>
-            <a:off x="411480" y="2157984"/>
+            <a:endParaRPr lang="en-US" sz="1200" dirty="0"/>
+          </a:p>
+        </p:txBody>
+      </p:sp>
+      <p:sp>
+        <p:nvSpPr>
+          <p:cNvPr id="9" name="Text 7"/>
+          <p:cNvSpPr/>
+          <p:nvPr/>
+        </p:nvSpPr>
+        <p:spPr>
+          <a:xfrm>
+            <a:off x="411480" y="2176272"/>
             <a:ext cx="3657600" cy="201168"/>
           </a:xfrm>
           <a:prstGeom prst="rect">
@@ -11337,7 +11805,7 @@
               <a:buNone/>
             </a:pPr>
             <a:r>
-              <a:rPr lang="en-US" sz="900" b="1" spc="150" kern="0" dirty="0">
+              <a:rPr lang="en-US" sz="850" b="1" spc="140" kern="0" dirty="0">
                 <a:solidFill>
                   <a:srgbClr val="2563EB"/>
                 </a:solidFill>
@@ -11345,15 +11813,15 @@
                 <a:ea typeface="Inter" pitchFamily="34" charset="-122"/>
                 <a:cs typeface="Inter" pitchFamily="34" charset="-120"/>
               </a:rPr>
-              <a:t>MASTER WORKFLOW</a:t>
-            </a:r>
-            <a:endParaRPr lang="en-US" sz="900" dirty="0"/>
-          </a:p>
-        </p:txBody>
-      </p:sp>
-      <p:sp>
-        <p:nvSpPr>
-          <p:cNvPr id="8" name="Shape 6"/>
+              <a:t>END-TO-END WORKFLOW</a:t>
+            </a:r>
+            <a:endParaRPr lang="en-US" sz="850" dirty="0"/>
+          </a:p>
+        </p:txBody>
+      </p:sp>
+      <p:sp>
+        <p:nvSpPr>
+          <p:cNvPr id="10" name="Shape 8"/>
           <p:cNvSpPr/>
           <p:nvPr/>
         </p:nvSpPr>
@@ -11380,7 +11848,7 @@
       </p:sp>
       <p:sp>
         <p:nvSpPr>
-          <p:cNvPr id="9" name="Text 7"/>
+          <p:cNvPr id="11" name="Text 9"/>
           <p:cNvSpPr/>
           <p:nvPr/>
         </p:nvSpPr>
@@ -11419,7 +11887,7 @@
       </p:sp>
       <p:sp>
         <p:nvSpPr>
-          <p:cNvPr id="10" name="Text 8"/>
+          <p:cNvPr id="12" name="Text 10"/>
           <p:cNvSpPr/>
           <p:nvPr/>
         </p:nvSpPr>
@@ -11458,7 +11926,7 @@
       </p:sp>
       <p:sp>
         <p:nvSpPr>
-          <p:cNvPr id="11" name="Text 9"/>
+          <p:cNvPr id="13" name="Text 11"/>
           <p:cNvSpPr/>
           <p:nvPr/>
         </p:nvSpPr>
@@ -11497,7 +11965,7 @@
       </p:sp>
       <p:sp>
         <p:nvSpPr>
-          <p:cNvPr id="12" name="Shape 10"/>
+          <p:cNvPr id="14" name="Shape 12"/>
           <p:cNvSpPr/>
           <p:nvPr/>
         </p:nvSpPr>
@@ -11524,7 +11992,7 @@
       </p:sp>
       <p:sp>
         <p:nvSpPr>
-          <p:cNvPr id="13" name="Text 11"/>
+          <p:cNvPr id="15" name="Text 13"/>
           <p:cNvSpPr/>
           <p:nvPr/>
         </p:nvSpPr>
@@ -11563,7 +12031,7 @@
       </p:sp>
       <p:sp>
         <p:nvSpPr>
-          <p:cNvPr id="14" name="Text 12"/>
+          <p:cNvPr id="16" name="Text 14"/>
           <p:cNvSpPr/>
           <p:nvPr/>
         </p:nvSpPr>
@@ -11602,7 +12070,7 @@
       </p:sp>
       <p:sp>
         <p:nvSpPr>
-          <p:cNvPr id="15" name="Text 13"/>
+          <p:cNvPr id="17" name="Text 15"/>
           <p:cNvSpPr/>
           <p:nvPr/>
         </p:nvSpPr>
@@ -11641,7 +12109,7 @@
       </p:sp>
       <p:sp>
         <p:nvSpPr>
-          <p:cNvPr id="16" name="Shape 14"/>
+          <p:cNvPr id="18" name="Shape 16"/>
           <p:cNvSpPr/>
           <p:nvPr/>
         </p:nvSpPr>
@@ -11668,7 +12136,7 @@
       </p:sp>
       <p:sp>
         <p:nvSpPr>
-          <p:cNvPr id="17" name="Text 15"/>
+          <p:cNvPr id="19" name="Text 17"/>
           <p:cNvSpPr/>
           <p:nvPr/>
         </p:nvSpPr>
@@ -11707,7 +12175,7 @@
       </p:sp>
       <p:sp>
         <p:nvSpPr>
-          <p:cNvPr id="18" name="Text 16"/>
+          <p:cNvPr id="20" name="Text 18"/>
           <p:cNvSpPr/>
           <p:nvPr/>
         </p:nvSpPr>
@@ -11746,7 +12214,7 @@
       </p:sp>
       <p:sp>
         <p:nvSpPr>
-          <p:cNvPr id="19" name="Text 17"/>
+          <p:cNvPr id="21" name="Text 19"/>
           <p:cNvSpPr/>
           <p:nvPr/>
         </p:nvSpPr>
@@ -11785,7 +12253,7 @@
       </p:sp>
       <p:sp>
         <p:nvSpPr>
-          <p:cNvPr id="20" name="Shape 18"/>
+          <p:cNvPr id="22" name="Shape 20"/>
           <p:cNvSpPr/>
           <p:nvPr/>
         </p:nvSpPr>
@@ -11812,7 +12280,7 @@
       </p:sp>
       <p:sp>
         <p:nvSpPr>
-          <p:cNvPr id="21" name="Text 19"/>
+          <p:cNvPr id="23" name="Text 21"/>
           <p:cNvSpPr/>
           <p:nvPr/>
         </p:nvSpPr>
@@ -11851,7 +12319,7 @@
       </p:sp>
       <p:sp>
         <p:nvSpPr>
-          <p:cNvPr id="22" name="Text 20"/>
+          <p:cNvPr id="24" name="Text 22"/>
           <p:cNvSpPr/>
           <p:nvPr/>
         </p:nvSpPr>
@@ -11890,7 +12358,7 @@
       </p:sp>
       <p:sp>
         <p:nvSpPr>
-          <p:cNvPr id="23" name="Text 21"/>
+          <p:cNvPr id="25" name="Text 23"/>
           <p:cNvSpPr/>
           <p:nvPr/>
         </p:nvSpPr>
@@ -11929,7 +12397,7 @@
       </p:sp>
       <p:sp>
         <p:nvSpPr>
-          <p:cNvPr id="24" name="Shape 22"/>
+          <p:cNvPr id="26" name="Shape 24"/>
           <p:cNvSpPr/>
           <p:nvPr/>
         </p:nvSpPr>
@@ -11956,7 +12424,7 @@
       </p:sp>
       <p:sp>
         <p:nvSpPr>
-          <p:cNvPr id="25" name="Text 23"/>
+          <p:cNvPr id="27" name="Text 25"/>
           <p:cNvSpPr/>
           <p:nvPr/>
         </p:nvSpPr>
@@ -11995,7 +12463,7 @@
       </p:sp>
       <p:sp>
         <p:nvSpPr>
-          <p:cNvPr id="26" name="Text 24"/>
+          <p:cNvPr id="28" name="Text 26"/>
           <p:cNvSpPr/>
           <p:nvPr/>
         </p:nvSpPr>
@@ -12034,7 +12502,7 @@
       </p:sp>
       <p:sp>
         <p:nvSpPr>
-          <p:cNvPr id="27" name="Text 25"/>
+          <p:cNvPr id="29" name="Text 27"/>
           <p:cNvSpPr/>
           <p:nvPr/>
         </p:nvSpPr>
@@ -12073,7 +12541,7 @@
       </p:sp>
       <p:sp>
         <p:nvSpPr>
-          <p:cNvPr id="28" name="Shape 26"/>
+          <p:cNvPr id="30" name="Shape 28"/>
           <p:cNvSpPr/>
           <p:nvPr/>
         </p:nvSpPr>
@@ -12100,7 +12568,7 @@
       </p:sp>
       <p:sp>
         <p:nvSpPr>
-          <p:cNvPr id="29" name="Text 27"/>
+          <p:cNvPr id="31" name="Text 29"/>
           <p:cNvSpPr/>
           <p:nvPr/>
         </p:nvSpPr>
@@ -12139,7 +12607,7 @@
       </p:sp>
       <p:sp>
         <p:nvSpPr>
-          <p:cNvPr id="30" name="Text 28"/>
+          <p:cNvPr id="32" name="Text 30"/>
           <p:cNvSpPr/>
           <p:nvPr/>
         </p:nvSpPr>
@@ -12178,7 +12646,7 @@
       </p:sp>
       <p:sp>
         <p:nvSpPr>
-          <p:cNvPr id="31" name="Shape 29"/>
+          <p:cNvPr id="33" name="Shape 31"/>
           <p:cNvSpPr/>
           <p:nvPr/>
         </p:nvSpPr>
@@ -12205,7 +12673,7 @@
       </p:sp>
       <p:sp>
         <p:nvSpPr>
-          <p:cNvPr id="32" name="Text 30"/>
+          <p:cNvPr id="34" name="Text 32"/>
           <p:cNvSpPr/>
           <p:nvPr/>
         </p:nvSpPr>
@@ -12244,7 +12712,7 @@
       </p:sp>
       <p:sp>
         <p:nvSpPr>
-          <p:cNvPr id="33" name="Shape 31"/>
+          <p:cNvPr id="35" name="Shape 33"/>
           <p:cNvSpPr/>
           <p:nvPr/>
         </p:nvSpPr>
@@ -12271,7 +12739,7 @@
       </p:sp>
       <p:sp>
         <p:nvSpPr>
-          <p:cNvPr id="34" name="Text 32"/>
+          <p:cNvPr id="36" name="Text 34"/>
           <p:cNvSpPr/>
           <p:nvPr/>
         </p:nvSpPr>
@@ -12310,7 +12778,7 @@
       </p:sp>
       <p:sp>
         <p:nvSpPr>
-          <p:cNvPr id="35" name="Text 33"/>
+          <p:cNvPr id="37" name="Text 35"/>
           <p:cNvSpPr/>
           <p:nvPr/>
         </p:nvSpPr>
@@ -12349,7 +12817,7 @@
       </p:sp>
       <p:sp>
         <p:nvSpPr>
-          <p:cNvPr id="36" name="Text 34"/>
+          <p:cNvPr id="38" name="Text 36"/>
           <p:cNvSpPr/>
           <p:nvPr/>
         </p:nvSpPr>
@@ -12388,7 +12856,7 @@
       </p:sp>
       <p:sp>
         <p:nvSpPr>
-          <p:cNvPr id="37" name="Shape 35"/>
+          <p:cNvPr id="39" name="Shape 37"/>
           <p:cNvSpPr/>
           <p:nvPr/>
         </p:nvSpPr>
@@ -12415,7 +12883,7 @@
       </p:sp>
       <p:sp>
         <p:nvSpPr>
-          <p:cNvPr id="38" name="Text 36"/>
+          <p:cNvPr id="40" name="Text 38"/>
           <p:cNvSpPr/>
           <p:nvPr/>
         </p:nvSpPr>
@@ -12454,7 +12922,7 @@
       </p:sp>
       <p:sp>
         <p:nvSpPr>
-          <p:cNvPr id="39" name="Text 37"/>
+          <p:cNvPr id="41" name="Text 39"/>
           <p:cNvSpPr/>
           <p:nvPr/>
         </p:nvSpPr>
@@ -12493,7 +12961,7 @@
       </p:sp>
       <p:sp>
         <p:nvSpPr>
-          <p:cNvPr id="40" name="Text 38"/>
+          <p:cNvPr id="42" name="Text 40"/>
           <p:cNvSpPr/>
           <p:nvPr/>
         </p:nvSpPr>
@@ -12532,7 +13000,7 @@
       </p:sp>
       <p:sp>
         <p:nvSpPr>
-          <p:cNvPr id="41" name="Shape 39"/>
+          <p:cNvPr id="43" name="Shape 41"/>
           <p:cNvSpPr/>
           <p:nvPr/>
         </p:nvSpPr>
@@ -12559,7 +13027,7 @@
       </p:sp>
       <p:sp>
         <p:nvSpPr>
-          <p:cNvPr id="42" name="Text 40"/>
+          <p:cNvPr id="44" name="Text 42"/>
           <p:cNvSpPr/>
           <p:nvPr/>
         </p:nvSpPr>
@@ -12598,7 +13066,7 @@
       </p:sp>
       <p:sp>
         <p:nvSpPr>
-          <p:cNvPr id="43" name="Text 41"/>
+          <p:cNvPr id="45" name="Text 43"/>
           <p:cNvSpPr/>
           <p:nvPr/>
         </p:nvSpPr>
@@ -12637,7 +13105,7 @@
       </p:sp>
       <p:sp>
         <p:nvSpPr>
-          <p:cNvPr id="44" name="Text 42"/>
+          <p:cNvPr id="46" name="Text 44"/>
           <p:cNvSpPr/>
           <p:nvPr/>
         </p:nvSpPr>
@@ -12676,7 +13144,7 @@
       </p:sp>
       <p:sp>
         <p:nvSpPr>
-          <p:cNvPr id="45" name="Shape 43"/>
+          <p:cNvPr id="47" name="Shape 45"/>
           <p:cNvSpPr/>
           <p:nvPr/>
         </p:nvSpPr>
@@ -12703,7 +13171,7 @@
       </p:sp>
       <p:sp>
         <p:nvSpPr>
-          <p:cNvPr id="46" name="Text 44"/>
+          <p:cNvPr id="48" name="Text 46"/>
           <p:cNvSpPr/>
           <p:nvPr/>
         </p:nvSpPr>
@@ -12742,7 +13210,7 @@
       </p:sp>
       <p:sp>
         <p:nvSpPr>
-          <p:cNvPr id="47" name="Text 45"/>
+          <p:cNvPr id="49" name="Text 47"/>
           <p:cNvSpPr/>
           <p:nvPr/>
         </p:nvSpPr>
@@ -12781,7 +13249,7 @@
       </p:sp>
       <p:sp>
         <p:nvSpPr>
-          <p:cNvPr id="48" name="Shape 46"/>
+          <p:cNvPr id="50" name="Shape 48"/>
           <p:cNvSpPr/>
           <p:nvPr/>
         </p:nvSpPr>
@@ -12808,7 +13276,7 @@
       </p:sp>
       <p:sp>
         <p:nvSpPr>
-          <p:cNvPr id="49" name="Text 47"/>
+          <p:cNvPr id="51" name="Text 49"/>
           <p:cNvSpPr/>
           <p:nvPr/>
         </p:nvSpPr>
@@ -12847,7 +13315,7 @@
       </p:sp>
       <p:sp>
         <p:nvSpPr>
-          <p:cNvPr id="50" name="Shape 48"/>
+          <p:cNvPr id="52" name="Shape 50"/>
           <p:cNvSpPr/>
           <p:nvPr/>
         </p:nvSpPr>
@@ -12874,7 +13342,7 @@
       </p:sp>
       <p:sp>
         <p:nvSpPr>
-          <p:cNvPr id="51" name="Text 49"/>
+          <p:cNvPr id="53" name="Text 51"/>
           <p:cNvSpPr/>
           <p:nvPr/>
         </p:nvSpPr>
@@ -12913,7 +13381,7 @@
       </p:sp>
       <p:sp>
         <p:nvSpPr>
-          <p:cNvPr id="52" name="Shape 50"/>
+          <p:cNvPr id="54" name="Shape 52"/>
           <p:cNvSpPr/>
           <p:nvPr/>
         </p:nvSpPr>
@@ -12940,7 +13408,7 @@
       </p:sp>
       <p:sp>
         <p:nvSpPr>
-          <p:cNvPr id="53" name="Text 51"/>
+          <p:cNvPr id="55" name="Text 53"/>
           <p:cNvSpPr/>
           <p:nvPr/>
         </p:nvSpPr>
@@ -12979,7 +13447,7 @@
       </p:sp>
       <p:sp>
         <p:nvSpPr>
-          <p:cNvPr id="54" name="Shape 52"/>
+          <p:cNvPr id="56" name="Shape 54"/>
           <p:cNvSpPr/>
           <p:nvPr/>
         </p:nvSpPr>
@@ -13006,7 +13474,7 @@
       </p:sp>
       <p:sp>
         <p:nvSpPr>
-          <p:cNvPr id="55" name="Text 53"/>
+          <p:cNvPr id="57" name="Text 55"/>
           <p:cNvSpPr/>
           <p:nvPr/>
         </p:nvSpPr>
@@ -13045,7 +13513,7 @@
       </p:sp>
       <p:sp>
         <p:nvSpPr>
-          <p:cNvPr id="56" name="Shape 54"/>
+          <p:cNvPr id="58" name="Shape 56"/>
           <p:cNvSpPr/>
           <p:nvPr/>
         </p:nvSpPr>
@@ -13072,7 +13540,7 @@
       </p:sp>
       <p:sp>
         <p:nvSpPr>
-          <p:cNvPr id="57" name="Text 55"/>
+          <p:cNvPr id="59" name="Text 57"/>
           <p:cNvSpPr/>
           <p:nvPr/>
         </p:nvSpPr>
@@ -13111,7 +13579,7 @@
       </p:sp>
       <p:sp>
         <p:nvSpPr>
-          <p:cNvPr id="58" name="Shape 56"/>
+          <p:cNvPr id="60" name="Shape 58"/>
           <p:cNvSpPr/>
           <p:nvPr/>
         </p:nvSpPr>
@@ -13138,7 +13606,7 @@
       </p:sp>
       <p:sp>
         <p:nvSpPr>
-          <p:cNvPr id="59" name="Text 57"/>
+          <p:cNvPr id="61" name="Text 59"/>
           <p:cNvSpPr/>
           <p:nvPr/>
         </p:nvSpPr>
@@ -13177,7 +13645,7 @@
       </p:sp>
       <p:sp>
         <p:nvSpPr>
-          <p:cNvPr id="60" name="Shape 58"/>
+          <p:cNvPr id="62" name="Shape 60"/>
           <p:cNvSpPr/>
           <p:nvPr/>
         </p:nvSpPr>
@@ -13204,7 +13672,7 @@
       </p:sp>
       <p:sp>
         <p:nvSpPr>
-          <p:cNvPr id="61" name="Text 59"/>
+          <p:cNvPr id="63" name="Text 61"/>
           <p:cNvSpPr/>
           <p:nvPr/>
         </p:nvSpPr>
@@ -13243,7 +13711,7 @@
       </p:sp>
       <p:sp>
         <p:nvSpPr>
-          <p:cNvPr id="62" name="Text 60"/>
+          <p:cNvPr id="64" name="Text 62"/>
           <p:cNvSpPr/>
           <p:nvPr/>
         </p:nvSpPr>
@@ -13314,7 +13782,7 @@
         <p:spPr>
           <a:xfrm>
             <a:off x="0" y="0"/>
-            <a:ext cx="12188952" cy="1005840"/>
+            <a:ext cx="12188952" cy="1060704"/>
           </a:xfrm>
           <a:prstGeom prst="rect">
             <a:avLst/>
@@ -13333,12 +13801,129 @@
         </p:nvSpPr>
         <p:spPr>
           <a:xfrm>
-            <a:off x="411480" y="164592"/>
-            <a:ext cx="1188720" cy="310896"/>
+            <a:off x="411480" y="118872"/>
+            <a:ext cx="4572000" cy="219456"/>
+          </a:xfrm>
+          <a:prstGeom prst="rect">
+            <a:avLst/>
+          </a:prstGeom>
+          <a:noFill/>
+          <a:ln/>
+        </p:spPr>
+        <p:txBody>
+          <a:bodyPr wrap="square" rtlCol="0" anchor="ctr"/>
+          <a:lstStyle/>
+          <a:p>
+            <a:pPr indent="0" marL="0">
+              <a:buNone/>
+            </a:pPr>
+            <a:r>
+              <a:rPr lang="en-US" sz="1000" b="1" spc="220" kern="0" dirty="0">
+                <a:solidFill>
+                  <a:srgbClr val="0891B2"/>
+                </a:solidFill>
+                <a:latin typeface="Inter" pitchFamily="34" charset="0"/>
+                <a:ea typeface="Inter" pitchFamily="34" charset="-122"/>
+                <a:cs typeface="Inter" pitchFamily="34" charset="-120"/>
+              </a:rPr>
+              <a:t>TCS AGENTIC AI</a:t>
+            </a:r>
+            <a:endParaRPr lang="en-US" sz="1000" dirty="0"/>
+          </a:p>
+        </p:txBody>
+      </p:sp>
+      <p:sp>
+        <p:nvSpPr>
+          <p:cNvPr id="4" name="Text 2"/>
+          <p:cNvSpPr/>
+          <p:nvPr/>
+        </p:nvSpPr>
+        <p:spPr>
+          <a:xfrm>
+            <a:off x="411480" y="329184"/>
+            <a:ext cx="9692640" cy="402336"/>
+          </a:xfrm>
+          <a:prstGeom prst="rect">
+            <a:avLst/>
+          </a:prstGeom>
+          <a:noFill/>
+          <a:ln/>
+        </p:spPr>
+        <p:txBody>
+          <a:bodyPr wrap="square" rtlCol="0" anchor="ctr"/>
+          <a:lstStyle/>
+          <a:p>
+            <a:pPr indent="0" marL="0">
+              <a:buNone/>
+            </a:pPr>
+            <a:r>
+              <a:rPr lang="en-US" sz="2300" b="1" dirty="0">
+                <a:solidFill>
+                  <a:srgbClr val="FFFFFF"/>
+                </a:solidFill>
+                <a:latin typeface="Inter" pitchFamily="34" charset="0"/>
+                <a:ea typeface="Inter" pitchFamily="34" charset="-122"/>
+                <a:cs typeface="Inter" pitchFamily="34" charset="-120"/>
+              </a:rPr>
+              <a:t>VM Lifecycle Agent</a:t>
+            </a:r>
+            <a:endParaRPr lang="en-US" sz="2300" dirty="0"/>
+          </a:p>
+        </p:txBody>
+      </p:sp>
+      <p:sp>
+        <p:nvSpPr>
+          <p:cNvPr id="5" name="Text 3"/>
+          <p:cNvSpPr/>
+          <p:nvPr/>
+        </p:nvSpPr>
+        <p:spPr>
+          <a:xfrm>
+            <a:off x="411480" y="749808"/>
+            <a:ext cx="9692640" cy="256032"/>
+          </a:xfrm>
+          <a:prstGeom prst="rect">
+            <a:avLst/>
+          </a:prstGeom>
+          <a:noFill/>
+          <a:ln/>
+        </p:spPr>
+        <p:txBody>
+          <a:bodyPr wrap="square" rtlCol="0" anchor="ctr"/>
+          <a:lstStyle/>
+          <a:p>
+            <a:pPr indent="0" marL="0">
+              <a:buNone/>
+            </a:pPr>
+            <a:r>
+              <a:rPr lang="en-US" sz="1050" i="1" dirty="0">
+                <a:solidFill>
+                  <a:srgbClr val="94A3B8"/>
+                </a:solidFill>
+                <a:latin typeface="Inter" pitchFamily="34" charset="0"/>
+                <a:ea typeface="Inter" pitchFamily="34" charset="-122"/>
+                <a:cs typeface="Inter" pitchFamily="34" charset="-120"/>
+              </a:rPr>
+              <a:t>Governed VM provisioning &amp; lifecycle — one sentence in, a governed, owned, accountable machine out</a:t>
+            </a:r>
+            <a:endParaRPr lang="en-US" sz="1050" dirty="0"/>
+          </a:p>
+        </p:txBody>
+      </p:sp>
+      <p:sp>
+        <p:nvSpPr>
+          <p:cNvPr id="6" name="Text 4"/>
+          <p:cNvSpPr/>
+          <p:nvPr/>
+        </p:nvSpPr>
+        <p:spPr>
+          <a:xfrm>
+            <a:off x="10561320" y="310896"/>
+            <a:ext cx="1234440" cy="365760"/>
           </a:xfrm>
           <a:prstGeom prst="rect">
             <a:avLst>
-              <a:gd name="adj" fmla="val 14706"/>
+              <a:gd name="adj" fmla="val 12500"/>
             </a:avLst>
           </a:prstGeom>
           <a:solidFill>
@@ -13354,7 +13939,7 @@
               <a:buNone/>
             </a:pPr>
             <a:r>
-              <a:rPr lang="en-US" sz="1300" b="1" dirty="0">
+              <a:rPr lang="en-US" sz="1500" b="1" dirty="0">
                 <a:solidFill>
                   <a:srgbClr val="FFFFFF"/>
                 </a:solidFill>
@@ -13364,20 +13949,20 @@
               </a:rPr>
               <a:t>UC-06</a:t>
             </a:r>
-            <a:endParaRPr lang="en-US" sz="1300" dirty="0"/>
-          </a:p>
-        </p:txBody>
-      </p:sp>
-      <p:sp>
-        <p:nvSpPr>
-          <p:cNvPr id="4" name="Text 2"/>
-          <p:cNvSpPr/>
-          <p:nvPr/>
-        </p:nvSpPr>
-        <p:spPr>
-          <a:xfrm>
-            <a:off x="1737360" y="128016"/>
-            <a:ext cx="10058400" cy="402336"/>
+            <a:endParaRPr lang="en-US" sz="1500" dirty="0"/>
+          </a:p>
+        </p:txBody>
+      </p:sp>
+      <p:sp>
+        <p:nvSpPr>
+          <p:cNvPr id="7" name="Text 5"/>
+          <p:cNvSpPr/>
+          <p:nvPr/>
+        </p:nvSpPr>
+        <p:spPr>
+          <a:xfrm>
+            <a:off x="411480" y="1188720"/>
+            <a:ext cx="3657600" cy="182880"/>
           </a:xfrm>
           <a:prstGeom prst="rect">
             <a:avLst/>
@@ -13393,69 +13978,30 @@
               <a:buNone/>
             </a:pPr>
             <a:r>
-              <a:rPr lang="en-US" sz="2200" b="1" dirty="0">
-                <a:solidFill>
-                  <a:srgbClr val="FFFFFF"/>
-                </a:solidFill>
-                <a:latin typeface="Inter" pitchFamily="34" charset="0"/>
-                <a:ea typeface="Inter" pitchFamily="34" charset="-122"/>
-                <a:cs typeface="Inter" pitchFamily="34" charset="-120"/>
-              </a:rPr>
-              <a:t>Governed VM Provisioning &amp; Lifecycle</a:t>
-            </a:r>
-            <a:endParaRPr lang="en-US" sz="2200" dirty="0"/>
-          </a:p>
-        </p:txBody>
-      </p:sp>
-      <p:sp>
-        <p:nvSpPr>
-          <p:cNvPr id="5" name="Text 3"/>
-          <p:cNvSpPr/>
-          <p:nvPr/>
-        </p:nvSpPr>
-        <p:spPr>
-          <a:xfrm>
-            <a:off x="1737360" y="548640"/>
-            <a:ext cx="10058400" cy="274320"/>
-          </a:xfrm>
-          <a:prstGeom prst="rect">
-            <a:avLst/>
-          </a:prstGeom>
-          <a:noFill/>
-          <a:ln/>
-        </p:spPr>
-        <p:txBody>
-          <a:bodyPr wrap="square" rtlCol="0" anchor="ctr"/>
-          <a:lstStyle/>
-          <a:p>
-            <a:pPr indent="0" marL="0">
-              <a:buNone/>
-            </a:pPr>
-            <a:r>
-              <a:rPr lang="en-US" sz="1100" i="1" dirty="0">
-                <a:solidFill>
-                  <a:srgbClr val="0891B2"/>
-                </a:solidFill>
-                <a:latin typeface="Inter" pitchFamily="34" charset="0"/>
-                <a:ea typeface="Inter" pitchFamily="34" charset="-122"/>
-                <a:cs typeface="Inter" pitchFamily="34" charset="-120"/>
-              </a:rPr>
-              <a:t>One sentence in. A governed, owned, accountable virtual machine out</a:t>
-            </a:r>
-            <a:endParaRPr lang="en-US" sz="1100" dirty="0"/>
-          </a:p>
-        </p:txBody>
-      </p:sp>
-      <p:sp>
-        <p:nvSpPr>
-          <p:cNvPr id="6" name="Text 4"/>
-          <p:cNvSpPr/>
-          <p:nvPr/>
-        </p:nvSpPr>
-        <p:spPr>
-          <a:xfrm>
-            <a:off x="411480" y="1170432"/>
-            <a:ext cx="11384280" cy="1051560"/>
+              <a:rPr lang="en-US" sz="850" b="1" spc="140" kern="0" dirty="0">
+                <a:solidFill>
+                  <a:srgbClr val="64748B"/>
+                </a:solidFill>
+                <a:latin typeface="Inter" pitchFamily="34" charset="0"/>
+                <a:ea typeface="Inter" pitchFamily="34" charset="-122"/>
+                <a:cs typeface="Inter" pitchFamily="34" charset="-120"/>
+              </a:rPr>
+              <a:t>USE CASE DESCRIPTION</a:t>
+            </a:r>
+            <a:endParaRPr lang="en-US" sz="850" dirty="0"/>
+          </a:p>
+        </p:txBody>
+      </p:sp>
+      <p:sp>
+        <p:nvSpPr>
+          <p:cNvPr id="8" name="Text 6"/>
+          <p:cNvSpPr/>
+          <p:nvPr/>
+        </p:nvSpPr>
+        <p:spPr>
+          <a:xfrm>
+            <a:off x="411480" y="1389888"/>
+            <a:ext cx="11384280" cy="914400"/>
           </a:xfrm>
           <a:prstGeom prst="rect">
             <a:avLst/>
@@ -13469,12 +14015,12 @@
           <a:p>
             <a:pPr indent="0" marL="0">
               <a:lnSpc>
-                <a:spcPct val="122000"/>
+                <a:spcPct val="120000"/>
               </a:lnSpc>
               <a:buNone/>
             </a:pPr>
             <a:r>
-              <a:rPr lang="en-US" sz="1250" dirty="0">
+              <a:rPr lang="en-US" sz="1200" dirty="0">
                 <a:solidFill>
                   <a:srgbClr val="1E293B"/>
                 </a:solidFill>
@@ -13484,19 +14030,19 @@
               </a:rPr>
               <a:t>A VM request stated in plain language, reconciled against the golden templates this cluster actually offers and checked against live quota — before anyone is asked to approve it. On approval the VM is provisioned with full provenance written onto the object, and weeks later the agent reads that provenance back to right-size or reclaim it.</a:t>
             </a:r>
-            <a:endParaRPr lang="en-US" sz="1250" dirty="0"/>
-          </a:p>
-        </p:txBody>
-      </p:sp>
-      <p:sp>
-        <p:nvSpPr>
-          <p:cNvPr id="7" name="Text 5"/>
-          <p:cNvSpPr/>
-          <p:nvPr/>
-        </p:nvSpPr>
-        <p:spPr>
-          <a:xfrm>
-            <a:off x="411480" y="2157984"/>
+            <a:endParaRPr lang="en-US" sz="1200" dirty="0"/>
+          </a:p>
+        </p:txBody>
+      </p:sp>
+      <p:sp>
+        <p:nvSpPr>
+          <p:cNvPr id="9" name="Text 7"/>
+          <p:cNvSpPr/>
+          <p:nvPr/>
+        </p:nvSpPr>
+        <p:spPr>
+          <a:xfrm>
+            <a:off x="411480" y="2176272"/>
             <a:ext cx="3657600" cy="201168"/>
           </a:xfrm>
           <a:prstGeom prst="rect">
@@ -13513,7 +14059,7 @@
               <a:buNone/>
             </a:pPr>
             <a:r>
-              <a:rPr lang="en-US" sz="900" b="1" spc="150" kern="0" dirty="0">
+              <a:rPr lang="en-US" sz="850" b="1" spc="140" kern="0" dirty="0">
                 <a:solidFill>
                   <a:srgbClr val="2563EB"/>
                 </a:solidFill>
@@ -13521,15 +14067,15 @@
                 <a:ea typeface="Inter" pitchFamily="34" charset="-122"/>
                 <a:cs typeface="Inter" pitchFamily="34" charset="-120"/>
               </a:rPr>
-              <a:t>MASTER WORKFLOW</a:t>
-            </a:r>
-            <a:endParaRPr lang="en-US" sz="900" dirty="0"/>
-          </a:p>
-        </p:txBody>
-      </p:sp>
-      <p:sp>
-        <p:nvSpPr>
-          <p:cNvPr id="8" name="Text 6"/>
+              <a:t>END-TO-END WORKFLOW</a:t>
+            </a:r>
+            <a:endParaRPr lang="en-US" sz="850" dirty="0"/>
+          </a:p>
+        </p:txBody>
+      </p:sp>
+      <p:sp>
+        <p:nvSpPr>
+          <p:cNvPr id="10" name="Text 8"/>
           <p:cNvSpPr/>
           <p:nvPr/>
         </p:nvSpPr>
@@ -13568,7 +14114,7 @@
       </p:sp>
       <p:sp>
         <p:nvSpPr>
-          <p:cNvPr id="9" name="Shape 7"/>
+          <p:cNvPr id="11" name="Shape 9"/>
           <p:cNvSpPr/>
           <p:nvPr/>
         </p:nvSpPr>
@@ -13595,7 +14141,7 @@
       </p:sp>
       <p:sp>
         <p:nvSpPr>
-          <p:cNvPr id="10" name="Text 8"/>
+          <p:cNvPr id="12" name="Text 10"/>
           <p:cNvSpPr/>
           <p:nvPr/>
         </p:nvSpPr>
@@ -13634,7 +14180,7 @@
       </p:sp>
       <p:sp>
         <p:nvSpPr>
-          <p:cNvPr id="11" name="Text 9"/>
+          <p:cNvPr id="13" name="Text 11"/>
           <p:cNvSpPr/>
           <p:nvPr/>
         </p:nvSpPr>
@@ -13673,7 +14219,7 @@
       </p:sp>
       <p:sp>
         <p:nvSpPr>
-          <p:cNvPr id="12" name="Text 10"/>
+          <p:cNvPr id="14" name="Text 12"/>
           <p:cNvSpPr/>
           <p:nvPr/>
         </p:nvSpPr>
@@ -13712,7 +14258,7 @@
       </p:sp>
       <p:sp>
         <p:nvSpPr>
-          <p:cNvPr id="13" name="Shape 11"/>
+          <p:cNvPr id="15" name="Shape 13"/>
           <p:cNvSpPr/>
           <p:nvPr/>
         </p:nvSpPr>
@@ -13739,7 +14285,7 @@
       </p:sp>
       <p:sp>
         <p:nvSpPr>
-          <p:cNvPr id="14" name="Text 12"/>
+          <p:cNvPr id="16" name="Text 14"/>
           <p:cNvSpPr/>
           <p:nvPr/>
         </p:nvSpPr>
@@ -13778,7 +14324,7 @@
       </p:sp>
       <p:sp>
         <p:nvSpPr>
-          <p:cNvPr id="15" name="Text 13"/>
+          <p:cNvPr id="17" name="Text 15"/>
           <p:cNvSpPr/>
           <p:nvPr/>
         </p:nvSpPr>
@@ -13817,7 +14363,7 @@
       </p:sp>
       <p:sp>
         <p:nvSpPr>
-          <p:cNvPr id="16" name="Text 14"/>
+          <p:cNvPr id="18" name="Text 16"/>
           <p:cNvSpPr/>
           <p:nvPr/>
         </p:nvSpPr>
@@ -13856,7 +14402,7 @@
       </p:sp>
       <p:sp>
         <p:nvSpPr>
-          <p:cNvPr id="17" name="Shape 15"/>
+          <p:cNvPr id="19" name="Shape 17"/>
           <p:cNvSpPr/>
           <p:nvPr/>
         </p:nvSpPr>
@@ -13883,7 +14429,7 @@
       </p:sp>
       <p:sp>
         <p:nvSpPr>
-          <p:cNvPr id="18" name="Text 16"/>
+          <p:cNvPr id="20" name="Text 18"/>
           <p:cNvSpPr/>
           <p:nvPr/>
         </p:nvSpPr>
@@ -13922,7 +14468,7 @@
       </p:sp>
       <p:sp>
         <p:nvSpPr>
-          <p:cNvPr id="19" name="Text 17"/>
+          <p:cNvPr id="21" name="Text 19"/>
           <p:cNvSpPr/>
           <p:nvPr/>
         </p:nvSpPr>
@@ -13961,7 +14507,7 @@
       </p:sp>
       <p:sp>
         <p:nvSpPr>
-          <p:cNvPr id="20" name="Text 18"/>
+          <p:cNvPr id="22" name="Text 20"/>
           <p:cNvSpPr/>
           <p:nvPr/>
         </p:nvSpPr>
@@ -14000,7 +14546,7 @@
       </p:sp>
       <p:sp>
         <p:nvSpPr>
-          <p:cNvPr id="21" name="Shape 19"/>
+          <p:cNvPr id="23" name="Shape 21"/>
           <p:cNvSpPr/>
           <p:nvPr/>
         </p:nvSpPr>
@@ -14027,7 +14573,7 @@
       </p:sp>
       <p:sp>
         <p:nvSpPr>
-          <p:cNvPr id="22" name="Text 20"/>
+          <p:cNvPr id="24" name="Text 22"/>
           <p:cNvSpPr/>
           <p:nvPr/>
         </p:nvSpPr>
@@ -14066,7 +14612,7 @@
       </p:sp>
       <p:sp>
         <p:nvSpPr>
-          <p:cNvPr id="23" name="Text 21"/>
+          <p:cNvPr id="25" name="Text 23"/>
           <p:cNvSpPr/>
           <p:nvPr/>
         </p:nvSpPr>
@@ -14105,7 +14651,7 @@
       </p:sp>
       <p:sp>
         <p:nvSpPr>
-          <p:cNvPr id="24" name="Text 22"/>
+          <p:cNvPr id="26" name="Text 24"/>
           <p:cNvSpPr/>
           <p:nvPr/>
         </p:nvSpPr>
@@ -14144,7 +14690,7 @@
       </p:sp>
       <p:sp>
         <p:nvSpPr>
-          <p:cNvPr id="25" name="Shape 23"/>
+          <p:cNvPr id="27" name="Shape 25"/>
           <p:cNvSpPr/>
           <p:nvPr/>
         </p:nvSpPr>
@@ -14171,7 +14717,7 @@
       </p:sp>
       <p:sp>
         <p:nvSpPr>
-          <p:cNvPr id="26" name="Text 24"/>
+          <p:cNvPr id="28" name="Text 26"/>
           <p:cNvSpPr/>
           <p:nvPr/>
         </p:nvSpPr>
@@ -14210,7 +14756,7 @@
       </p:sp>
       <p:sp>
         <p:nvSpPr>
-          <p:cNvPr id="27" name="Text 25"/>
+          <p:cNvPr id="29" name="Text 27"/>
           <p:cNvSpPr/>
           <p:nvPr/>
         </p:nvSpPr>
@@ -14249,7 +14795,7 @@
       </p:sp>
       <p:sp>
         <p:nvSpPr>
-          <p:cNvPr id="28" name="Shape 26"/>
+          <p:cNvPr id="30" name="Shape 28"/>
           <p:cNvSpPr/>
           <p:nvPr/>
         </p:nvSpPr>
@@ -14276,7 +14822,7 @@
       </p:sp>
       <p:sp>
         <p:nvSpPr>
-          <p:cNvPr id="29" name="Text 27"/>
+          <p:cNvPr id="31" name="Text 29"/>
           <p:cNvSpPr/>
           <p:nvPr/>
         </p:nvSpPr>
@@ -14315,7 +14861,7 @@
       </p:sp>
       <p:sp>
         <p:nvSpPr>
-          <p:cNvPr id="30" name="Text 28"/>
+          <p:cNvPr id="32" name="Text 30"/>
           <p:cNvSpPr/>
           <p:nvPr/>
         </p:nvSpPr>
@@ -14354,7 +14900,7 @@
       </p:sp>
       <p:sp>
         <p:nvSpPr>
-          <p:cNvPr id="31" name="Shape 29"/>
+          <p:cNvPr id="33" name="Shape 31"/>
           <p:cNvSpPr/>
           <p:nvPr/>
         </p:nvSpPr>
@@ -14381,7 +14927,7 @@
       </p:sp>
       <p:sp>
         <p:nvSpPr>
-          <p:cNvPr id="32" name="Text 30"/>
+          <p:cNvPr id="34" name="Text 32"/>
           <p:cNvSpPr/>
           <p:nvPr/>
         </p:nvSpPr>
@@ -14420,7 +14966,7 @@
       </p:sp>
       <p:sp>
         <p:nvSpPr>
-          <p:cNvPr id="33" name="Text 31"/>
+          <p:cNvPr id="35" name="Text 33"/>
           <p:cNvSpPr/>
           <p:nvPr/>
         </p:nvSpPr>
@@ -14459,7 +15005,7 @@
       </p:sp>
       <p:sp>
         <p:nvSpPr>
-          <p:cNvPr id="34" name="Text 32"/>
+          <p:cNvPr id="36" name="Text 34"/>
           <p:cNvSpPr/>
           <p:nvPr/>
         </p:nvSpPr>
@@ -14498,7 +15044,7 @@
       </p:sp>
       <p:sp>
         <p:nvSpPr>
-          <p:cNvPr id="35" name="Shape 33"/>
+          <p:cNvPr id="37" name="Shape 35"/>
           <p:cNvSpPr/>
           <p:nvPr/>
         </p:nvSpPr>
@@ -14525,7 +15071,7 @@
       </p:sp>
       <p:sp>
         <p:nvSpPr>
-          <p:cNvPr id="36" name="Text 34"/>
+          <p:cNvPr id="38" name="Text 36"/>
           <p:cNvSpPr/>
           <p:nvPr/>
         </p:nvSpPr>
@@ -14564,7 +15110,7 @@
       </p:sp>
       <p:sp>
         <p:nvSpPr>
-          <p:cNvPr id="37" name="Text 35"/>
+          <p:cNvPr id="39" name="Text 37"/>
           <p:cNvSpPr/>
           <p:nvPr/>
         </p:nvSpPr>
@@ -14603,7 +15149,7 @@
       </p:sp>
       <p:sp>
         <p:nvSpPr>
-          <p:cNvPr id="38" name="Text 36"/>
+          <p:cNvPr id="40" name="Text 38"/>
           <p:cNvSpPr/>
           <p:nvPr/>
         </p:nvSpPr>
@@ -14642,7 +15188,7 @@
       </p:sp>
       <p:sp>
         <p:nvSpPr>
-          <p:cNvPr id="39" name="Shape 37"/>
+          <p:cNvPr id="41" name="Shape 39"/>
           <p:cNvSpPr/>
           <p:nvPr/>
         </p:nvSpPr>
@@ -14669,7 +15215,7 @@
       </p:sp>
       <p:sp>
         <p:nvSpPr>
-          <p:cNvPr id="40" name="Text 38"/>
+          <p:cNvPr id="42" name="Text 40"/>
           <p:cNvSpPr/>
           <p:nvPr/>
         </p:nvSpPr>
@@ -14708,7 +15254,7 @@
       </p:sp>
       <p:sp>
         <p:nvSpPr>
-          <p:cNvPr id="41" name="Text 39"/>
+          <p:cNvPr id="43" name="Text 41"/>
           <p:cNvSpPr/>
           <p:nvPr/>
         </p:nvSpPr>
@@ -14747,7 +15293,7 @@
       </p:sp>
       <p:sp>
         <p:nvSpPr>
-          <p:cNvPr id="42" name="Text 40"/>
+          <p:cNvPr id="44" name="Text 42"/>
           <p:cNvSpPr/>
           <p:nvPr/>
         </p:nvSpPr>
@@ -14786,7 +15332,7 @@
       </p:sp>
       <p:sp>
         <p:nvSpPr>
-          <p:cNvPr id="43" name="Shape 41"/>
+          <p:cNvPr id="45" name="Shape 43"/>
           <p:cNvSpPr/>
           <p:nvPr/>
         </p:nvSpPr>
@@ -14813,7 +15359,7 @@
       </p:sp>
       <p:sp>
         <p:nvSpPr>
-          <p:cNvPr id="44" name="Text 42"/>
+          <p:cNvPr id="46" name="Text 44"/>
           <p:cNvSpPr/>
           <p:nvPr/>
         </p:nvSpPr>
@@ -14852,7 +15398,7 @@
       </p:sp>
       <p:sp>
         <p:nvSpPr>
-          <p:cNvPr id="45" name="Text 43"/>
+          <p:cNvPr id="47" name="Text 45"/>
           <p:cNvSpPr/>
           <p:nvPr/>
         </p:nvSpPr>
@@ -14891,7 +15437,7 @@
       </p:sp>
       <p:sp>
         <p:nvSpPr>
-          <p:cNvPr id="46" name="Text 44"/>
+          <p:cNvPr id="48" name="Text 46"/>
           <p:cNvSpPr/>
           <p:nvPr/>
         </p:nvSpPr>
@@ -14930,7 +15476,7 @@
       </p:sp>
       <p:sp>
         <p:nvSpPr>
-          <p:cNvPr id="47" name="Shape 45"/>
+          <p:cNvPr id="49" name="Shape 47"/>
           <p:cNvSpPr/>
           <p:nvPr/>
         </p:nvSpPr>
@@ -14957,7 +15503,7 @@
       </p:sp>
       <p:sp>
         <p:nvSpPr>
-          <p:cNvPr id="48" name="Text 46"/>
+          <p:cNvPr id="50" name="Text 48"/>
           <p:cNvSpPr/>
           <p:nvPr/>
         </p:nvSpPr>
@@ -14996,7 +15542,7 @@
       </p:sp>
       <p:sp>
         <p:nvSpPr>
-          <p:cNvPr id="49" name="Shape 47"/>
+          <p:cNvPr id="51" name="Shape 49"/>
           <p:cNvSpPr/>
           <p:nvPr/>
         </p:nvSpPr>
@@ -15023,7 +15569,7 @@
       </p:sp>
       <p:sp>
         <p:nvSpPr>
-          <p:cNvPr id="50" name="Text 48"/>
+          <p:cNvPr id="52" name="Text 50"/>
           <p:cNvSpPr/>
           <p:nvPr/>
         </p:nvSpPr>
@@ -15062,7 +15608,7 @@
       </p:sp>
       <p:sp>
         <p:nvSpPr>
-          <p:cNvPr id="51" name="Shape 49"/>
+          <p:cNvPr id="53" name="Shape 51"/>
           <p:cNvSpPr/>
           <p:nvPr/>
         </p:nvSpPr>
@@ -15089,7 +15635,7 @@
       </p:sp>
       <p:sp>
         <p:nvSpPr>
-          <p:cNvPr id="52" name="Text 50"/>
+          <p:cNvPr id="54" name="Text 52"/>
           <p:cNvSpPr/>
           <p:nvPr/>
         </p:nvSpPr>
@@ -15128,7 +15674,7 @@
       </p:sp>
       <p:sp>
         <p:nvSpPr>
-          <p:cNvPr id="53" name="Shape 51"/>
+          <p:cNvPr id="55" name="Shape 53"/>
           <p:cNvSpPr/>
           <p:nvPr/>
         </p:nvSpPr>
@@ -15155,7 +15701,7 @@
       </p:sp>
       <p:sp>
         <p:nvSpPr>
-          <p:cNvPr id="54" name="Text 52"/>
+          <p:cNvPr id="56" name="Text 54"/>
           <p:cNvSpPr/>
           <p:nvPr/>
         </p:nvSpPr>
@@ -15194,7 +15740,7 @@
       </p:sp>
       <p:sp>
         <p:nvSpPr>
-          <p:cNvPr id="55" name="Shape 53"/>
+          <p:cNvPr id="57" name="Shape 55"/>
           <p:cNvSpPr/>
           <p:nvPr/>
         </p:nvSpPr>
@@ -15221,7 +15767,7 @@
       </p:sp>
       <p:sp>
         <p:nvSpPr>
-          <p:cNvPr id="56" name="Text 54"/>
+          <p:cNvPr id="58" name="Text 56"/>
           <p:cNvSpPr/>
           <p:nvPr/>
         </p:nvSpPr>
@@ -15260,7 +15806,7 @@
       </p:sp>
       <p:sp>
         <p:nvSpPr>
-          <p:cNvPr id="57" name="Shape 55"/>
+          <p:cNvPr id="59" name="Shape 57"/>
           <p:cNvSpPr/>
           <p:nvPr/>
         </p:nvSpPr>
@@ -15287,7 +15833,7 @@
       </p:sp>
       <p:sp>
         <p:nvSpPr>
-          <p:cNvPr id="58" name="Text 56"/>
+          <p:cNvPr id="60" name="Text 58"/>
           <p:cNvSpPr/>
           <p:nvPr/>
         </p:nvSpPr>
@@ -15326,7 +15872,7 @@
       </p:sp>
       <p:sp>
         <p:nvSpPr>
-          <p:cNvPr id="59" name="Shape 57"/>
+          <p:cNvPr id="61" name="Shape 59"/>
           <p:cNvSpPr/>
           <p:nvPr/>
         </p:nvSpPr>
@@ -15353,7 +15899,7 @@
       </p:sp>
       <p:sp>
         <p:nvSpPr>
-          <p:cNvPr id="60" name="Text 58"/>
+          <p:cNvPr id="62" name="Text 60"/>
           <p:cNvSpPr/>
           <p:nvPr/>
         </p:nvSpPr>
@@ -15392,7 +15938,7 @@
       </p:sp>
       <p:sp>
         <p:nvSpPr>
-          <p:cNvPr id="61" name="Shape 59"/>
+          <p:cNvPr id="63" name="Shape 61"/>
           <p:cNvSpPr/>
           <p:nvPr/>
         </p:nvSpPr>
@@ -15419,7 +15965,7 @@
       </p:sp>
       <p:sp>
         <p:nvSpPr>
-          <p:cNvPr id="62" name="Text 60"/>
+          <p:cNvPr id="64" name="Text 62"/>
           <p:cNvSpPr/>
           <p:nvPr/>
         </p:nvSpPr>
@@ -15458,7 +16004,7 @@
       </p:sp>
       <p:sp>
         <p:nvSpPr>
-          <p:cNvPr id="63" name="Text 61"/>
+          <p:cNvPr id="65" name="Text 63"/>
           <p:cNvSpPr/>
           <p:nvPr/>
         </p:nvSpPr>
@@ -15529,7 +16075,7 @@
         <p:spPr>
           <a:xfrm>
             <a:off x="0" y="0"/>
-            <a:ext cx="12188952" cy="1005840"/>
+            <a:ext cx="12188952" cy="1060704"/>
           </a:xfrm>
           <a:prstGeom prst="rect">
             <a:avLst/>
@@ -15548,12 +16094,129 @@
         </p:nvSpPr>
         <p:spPr>
           <a:xfrm>
-            <a:off x="411480" y="164592"/>
-            <a:ext cx="1188720" cy="310896"/>
+            <a:off x="411480" y="118872"/>
+            <a:ext cx="4572000" cy="219456"/>
+          </a:xfrm>
+          <a:prstGeom prst="rect">
+            <a:avLst/>
+          </a:prstGeom>
+          <a:noFill/>
+          <a:ln/>
+        </p:spPr>
+        <p:txBody>
+          <a:bodyPr wrap="square" rtlCol="0" anchor="ctr"/>
+          <a:lstStyle/>
+          <a:p>
+            <a:pPr indent="0" marL="0">
+              <a:buNone/>
+            </a:pPr>
+            <a:r>
+              <a:rPr lang="en-US" sz="1000" b="1" spc="220" kern="0" dirty="0">
+                <a:solidFill>
+                  <a:srgbClr val="0891B2"/>
+                </a:solidFill>
+                <a:latin typeface="Inter" pitchFamily="34" charset="0"/>
+                <a:ea typeface="Inter" pitchFamily="34" charset="-122"/>
+                <a:cs typeface="Inter" pitchFamily="34" charset="-120"/>
+              </a:rPr>
+              <a:t>TCS AGENTIC AI</a:t>
+            </a:r>
+            <a:endParaRPr lang="en-US" sz="1000" dirty="0"/>
+          </a:p>
+        </p:txBody>
+      </p:sp>
+      <p:sp>
+        <p:nvSpPr>
+          <p:cNvPr id="4" name="Text 2"/>
+          <p:cNvSpPr/>
+          <p:nvPr/>
+        </p:nvSpPr>
+        <p:spPr>
+          <a:xfrm>
+            <a:off x="411480" y="329184"/>
+            <a:ext cx="9692640" cy="402336"/>
+          </a:xfrm>
+          <a:prstGeom prst="rect">
+            <a:avLst/>
+          </a:prstGeom>
+          <a:noFill/>
+          <a:ln/>
+        </p:spPr>
+        <p:txBody>
+          <a:bodyPr wrap="square" rtlCol="0" anchor="ctr"/>
+          <a:lstStyle/>
+          <a:p>
+            <a:pPr indent="0" marL="0">
+              <a:buNone/>
+            </a:pPr>
+            <a:r>
+              <a:rPr lang="en-US" sz="2300" b="1" dirty="0">
+                <a:solidFill>
+                  <a:srgbClr val="FFFFFF"/>
+                </a:solidFill>
+                <a:latin typeface="Inter" pitchFamily="34" charset="0"/>
+                <a:ea typeface="Inter" pitchFamily="34" charset="-122"/>
+                <a:cs typeface="Inter" pitchFamily="34" charset="-120"/>
+              </a:rPr>
+              <a:t>App Deployment Agent</a:t>
+            </a:r>
+            <a:endParaRPr lang="en-US" sz="2300" dirty="0"/>
+          </a:p>
+        </p:txBody>
+      </p:sp>
+      <p:sp>
+        <p:nvSpPr>
+          <p:cNvPr id="5" name="Text 3"/>
+          <p:cNvSpPr/>
+          <p:nvPr/>
+        </p:nvSpPr>
+        <p:spPr>
+          <a:xfrm>
+            <a:off x="411480" y="749808"/>
+            <a:ext cx="9692640" cy="256032"/>
+          </a:xfrm>
+          <a:prstGeom prst="rect">
+            <a:avLst/>
+          </a:prstGeom>
+          <a:noFill/>
+          <a:ln/>
+        </p:spPr>
+        <p:txBody>
+          <a:bodyPr wrap="square" rtlCol="0" anchor="ctr"/>
+          <a:lstStyle/>
+          <a:p>
+            <a:pPr indent="0" marL="0">
+              <a:buNone/>
+            </a:pPr>
+            <a:r>
+              <a:rPr lang="en-US" sz="1050" i="1" dirty="0">
+                <a:solidFill>
+                  <a:srgbClr val="94A3B8"/>
+                </a:solidFill>
+                <a:latin typeface="Inter" pitchFamily="34" charset="0"/>
+                <a:ea typeface="Inter" pitchFamily="34" charset="-122"/>
+                <a:cs typeface="Inter" pitchFamily="34" charset="-120"/>
+              </a:rPr>
+              <a:t>Document-driven application deployment — the requirement document IS the deployment</a:t>
+            </a:r>
+            <a:endParaRPr lang="en-US" sz="1050" dirty="0"/>
+          </a:p>
+        </p:txBody>
+      </p:sp>
+      <p:sp>
+        <p:nvSpPr>
+          <p:cNvPr id="6" name="Text 4"/>
+          <p:cNvSpPr/>
+          <p:nvPr/>
+        </p:nvSpPr>
+        <p:spPr>
+          <a:xfrm>
+            <a:off x="10561320" y="310896"/>
+            <a:ext cx="1234440" cy="365760"/>
           </a:xfrm>
           <a:prstGeom prst="rect">
             <a:avLst>
-              <a:gd name="adj" fmla="val 14706"/>
+              <a:gd name="adj" fmla="val 12500"/>
             </a:avLst>
           </a:prstGeom>
           <a:solidFill>
@@ -15569,7 +16232,7 @@
               <a:buNone/>
             </a:pPr>
             <a:r>
-              <a:rPr lang="en-US" sz="1300" b="1" dirty="0">
+              <a:rPr lang="en-US" sz="1500" b="1" dirty="0">
                 <a:solidFill>
                   <a:srgbClr val="FFFFFF"/>
                 </a:solidFill>
@@ -15579,20 +16242,20 @@
               </a:rPr>
               <a:t>UC-07</a:t>
             </a:r>
-            <a:endParaRPr lang="en-US" sz="1300" dirty="0"/>
-          </a:p>
-        </p:txBody>
-      </p:sp>
-      <p:sp>
-        <p:nvSpPr>
-          <p:cNvPr id="4" name="Text 2"/>
-          <p:cNvSpPr/>
-          <p:nvPr/>
-        </p:nvSpPr>
-        <p:spPr>
-          <a:xfrm>
-            <a:off x="1737360" y="128016"/>
-            <a:ext cx="10058400" cy="402336"/>
+            <a:endParaRPr lang="en-US" sz="1500" dirty="0"/>
+          </a:p>
+        </p:txBody>
+      </p:sp>
+      <p:sp>
+        <p:nvSpPr>
+          <p:cNvPr id="7" name="Text 5"/>
+          <p:cNvSpPr/>
+          <p:nvPr/>
+        </p:nvSpPr>
+        <p:spPr>
+          <a:xfrm>
+            <a:off x="411480" y="1188720"/>
+            <a:ext cx="3657600" cy="182880"/>
           </a:xfrm>
           <a:prstGeom prst="rect">
             <a:avLst/>
@@ -15608,69 +16271,30 @@
               <a:buNone/>
             </a:pPr>
             <a:r>
-              <a:rPr lang="en-US" sz="2200" b="1" dirty="0">
-                <a:solidFill>
-                  <a:srgbClr val="FFFFFF"/>
-                </a:solidFill>
-                <a:latin typeface="Inter" pitchFamily="34" charset="0"/>
-                <a:ea typeface="Inter" pitchFamily="34" charset="-122"/>
-                <a:cs typeface="Inter" pitchFamily="34" charset="-120"/>
-              </a:rPr>
-              <a:t>Document-Driven Application Deployment</a:t>
-            </a:r>
-            <a:endParaRPr lang="en-US" sz="2200" dirty="0"/>
-          </a:p>
-        </p:txBody>
-      </p:sp>
-      <p:sp>
-        <p:nvSpPr>
-          <p:cNvPr id="5" name="Text 3"/>
-          <p:cNvSpPr/>
-          <p:nvPr/>
-        </p:nvSpPr>
-        <p:spPr>
-          <a:xfrm>
-            <a:off x="1737360" y="548640"/>
-            <a:ext cx="10058400" cy="274320"/>
-          </a:xfrm>
-          <a:prstGeom prst="rect">
-            <a:avLst/>
-          </a:prstGeom>
-          <a:noFill/>
-          <a:ln/>
-        </p:spPr>
-        <p:txBody>
-          <a:bodyPr wrap="square" rtlCol="0" anchor="ctr"/>
-          <a:lstStyle/>
-          <a:p>
-            <a:pPr indent="0" marL="0">
-              <a:buNone/>
-            </a:pPr>
-            <a:r>
-              <a:rPr lang="en-US" sz="1100" i="1" dirty="0">
-                <a:solidFill>
-                  <a:srgbClr val="0891B2"/>
-                </a:solidFill>
-                <a:latin typeface="Inter" pitchFamily="34" charset="0"/>
-                <a:ea typeface="Inter" pitchFamily="34" charset="-122"/>
-                <a:cs typeface="Inter" pitchFamily="34" charset="-120"/>
-              </a:rPr>
-              <a:t>The requirement document IS the deployment</a:t>
-            </a:r>
-            <a:endParaRPr lang="en-US" sz="1100" dirty="0"/>
-          </a:p>
-        </p:txBody>
-      </p:sp>
-      <p:sp>
-        <p:nvSpPr>
-          <p:cNvPr id="6" name="Text 4"/>
-          <p:cNvSpPr/>
-          <p:nvPr/>
-        </p:nvSpPr>
-        <p:spPr>
-          <a:xfrm>
-            <a:off x="411480" y="1170432"/>
-            <a:ext cx="11384280" cy="1051560"/>
+              <a:rPr lang="en-US" sz="850" b="1" spc="140" kern="0" dirty="0">
+                <a:solidFill>
+                  <a:srgbClr val="64748B"/>
+                </a:solidFill>
+                <a:latin typeface="Inter" pitchFamily="34" charset="0"/>
+                <a:ea typeface="Inter" pitchFamily="34" charset="-122"/>
+                <a:cs typeface="Inter" pitchFamily="34" charset="-120"/>
+              </a:rPr>
+              <a:t>USE CASE DESCRIPTION</a:t>
+            </a:r>
+            <a:endParaRPr lang="en-US" sz="850" dirty="0"/>
+          </a:p>
+        </p:txBody>
+      </p:sp>
+      <p:sp>
+        <p:nvSpPr>
+          <p:cNvPr id="8" name="Text 6"/>
+          <p:cNvSpPr/>
+          <p:nvPr/>
+        </p:nvSpPr>
+        <p:spPr>
+          <a:xfrm>
+            <a:off x="411480" y="1389888"/>
+            <a:ext cx="11384280" cy="914400"/>
           </a:xfrm>
           <a:prstGeom prst="rect">
             <a:avLst/>
@@ -15684,12 +16308,12 @@
           <a:p>
             <a:pPr indent="0" marL="0">
               <a:lnSpc>
-                <a:spcPct val="122000"/>
+                <a:spcPct val="120000"/>
               </a:lnSpc>
               <a:buNone/>
             </a:pPr>
             <a:r>
-              <a:rPr lang="en-US" sz="1250" dirty="0">
+              <a:rPr lang="en-US" sz="1200" dirty="0">
                 <a:solidFill>
                   <a:srgbClr val="1E293B"/>
                 </a:solidFill>
@@ -15699,19 +16323,19 @@
               </a:rPr>
               <a:t>A requirement document — Word or Markdown, uploaded or pulled straight from Git — becomes a complete, security-hardened, zero-trust application. Structured documents generate deterministically: the same commit produces the same manifests every time. The flow does not stop at “pods are green”.</a:t>
             </a:r>
-            <a:endParaRPr lang="en-US" sz="1250" dirty="0"/>
-          </a:p>
-        </p:txBody>
-      </p:sp>
-      <p:sp>
-        <p:nvSpPr>
-          <p:cNvPr id="7" name="Text 5"/>
-          <p:cNvSpPr/>
-          <p:nvPr/>
-        </p:nvSpPr>
-        <p:spPr>
-          <a:xfrm>
-            <a:off x="411480" y="2157984"/>
+            <a:endParaRPr lang="en-US" sz="1200" dirty="0"/>
+          </a:p>
+        </p:txBody>
+      </p:sp>
+      <p:sp>
+        <p:nvSpPr>
+          <p:cNvPr id="9" name="Text 7"/>
+          <p:cNvSpPr/>
+          <p:nvPr/>
+        </p:nvSpPr>
+        <p:spPr>
+          <a:xfrm>
+            <a:off x="411480" y="2176272"/>
             <a:ext cx="3657600" cy="201168"/>
           </a:xfrm>
           <a:prstGeom prst="rect">
@@ -15728,7 +16352,7 @@
               <a:buNone/>
             </a:pPr>
             <a:r>
-              <a:rPr lang="en-US" sz="900" b="1" spc="150" kern="0" dirty="0">
+              <a:rPr lang="en-US" sz="850" b="1" spc="140" kern="0" dirty="0">
                 <a:solidFill>
                   <a:srgbClr val="2563EB"/>
                 </a:solidFill>
@@ -15736,15 +16360,15 @@
                 <a:ea typeface="Inter" pitchFamily="34" charset="-122"/>
                 <a:cs typeface="Inter" pitchFamily="34" charset="-120"/>
               </a:rPr>
-              <a:t>MASTER WORKFLOW</a:t>
-            </a:r>
-            <a:endParaRPr lang="en-US" sz="900" dirty="0"/>
-          </a:p>
-        </p:txBody>
-      </p:sp>
-      <p:sp>
-        <p:nvSpPr>
-          <p:cNvPr id="8" name="Text 6"/>
+              <a:t>END-TO-END WORKFLOW</a:t>
+            </a:r>
+            <a:endParaRPr lang="en-US" sz="850" dirty="0"/>
+          </a:p>
+        </p:txBody>
+      </p:sp>
+      <p:sp>
+        <p:nvSpPr>
+          <p:cNvPr id="10" name="Text 8"/>
           <p:cNvSpPr/>
           <p:nvPr/>
         </p:nvSpPr>
@@ -15783,7 +16407,7 @@
       </p:sp>
       <p:sp>
         <p:nvSpPr>
-          <p:cNvPr id="9" name="Shape 7"/>
+          <p:cNvPr id="11" name="Shape 9"/>
           <p:cNvSpPr/>
           <p:nvPr/>
         </p:nvSpPr>
@@ -15810,7 +16434,7 @@
       </p:sp>
       <p:sp>
         <p:nvSpPr>
-          <p:cNvPr id="10" name="Text 8"/>
+          <p:cNvPr id="12" name="Text 10"/>
           <p:cNvSpPr/>
           <p:nvPr/>
         </p:nvSpPr>
@@ -15849,7 +16473,7 @@
       </p:sp>
       <p:sp>
         <p:nvSpPr>
-          <p:cNvPr id="11" name="Text 9"/>
+          <p:cNvPr id="13" name="Text 11"/>
           <p:cNvSpPr/>
           <p:nvPr/>
         </p:nvSpPr>
@@ -15888,7 +16512,7 @@
       </p:sp>
       <p:sp>
         <p:nvSpPr>
-          <p:cNvPr id="12" name="Text 10"/>
+          <p:cNvPr id="14" name="Text 12"/>
           <p:cNvSpPr/>
           <p:nvPr/>
         </p:nvSpPr>
@@ -15927,7 +16551,7 @@
       </p:sp>
       <p:sp>
         <p:nvSpPr>
-          <p:cNvPr id="13" name="Shape 11"/>
+          <p:cNvPr id="15" name="Shape 13"/>
           <p:cNvSpPr/>
           <p:nvPr/>
         </p:nvSpPr>
@@ -15954,7 +16578,7 @@
       </p:sp>
       <p:sp>
         <p:nvSpPr>
-          <p:cNvPr id="14" name="Text 12"/>
+          <p:cNvPr id="16" name="Text 14"/>
           <p:cNvSpPr/>
           <p:nvPr/>
         </p:nvSpPr>
@@ -15993,7 +16617,7 @@
       </p:sp>
       <p:sp>
         <p:nvSpPr>
-          <p:cNvPr id="15" name="Text 13"/>
+          <p:cNvPr id="17" name="Text 15"/>
           <p:cNvSpPr/>
           <p:nvPr/>
         </p:nvSpPr>
@@ -16032,7 +16656,7 @@
       </p:sp>
       <p:sp>
         <p:nvSpPr>
-          <p:cNvPr id="16" name="Text 14"/>
+          <p:cNvPr id="18" name="Text 16"/>
           <p:cNvSpPr/>
           <p:nvPr/>
         </p:nvSpPr>
@@ -16071,7 +16695,7 @@
       </p:sp>
       <p:sp>
         <p:nvSpPr>
-          <p:cNvPr id="17" name="Shape 15"/>
+          <p:cNvPr id="19" name="Shape 17"/>
           <p:cNvSpPr/>
           <p:nvPr/>
         </p:nvSpPr>
@@ -16098,7 +16722,7 @@
       </p:sp>
       <p:sp>
         <p:nvSpPr>
-          <p:cNvPr id="18" name="Text 16"/>
+          <p:cNvPr id="20" name="Text 18"/>
           <p:cNvSpPr/>
           <p:nvPr/>
         </p:nvSpPr>
@@ -16137,7 +16761,7 @@
       </p:sp>
       <p:sp>
         <p:nvSpPr>
-          <p:cNvPr id="19" name="Text 17"/>
+          <p:cNvPr id="21" name="Text 19"/>
           <p:cNvSpPr/>
           <p:nvPr/>
         </p:nvSpPr>
@@ -16176,7 +16800,7 @@
       </p:sp>
       <p:sp>
         <p:nvSpPr>
-          <p:cNvPr id="20" name="Text 18"/>
+          <p:cNvPr id="22" name="Text 20"/>
           <p:cNvSpPr/>
           <p:nvPr/>
         </p:nvSpPr>
@@ -16215,7 +16839,7 @@
       </p:sp>
       <p:sp>
         <p:nvSpPr>
-          <p:cNvPr id="21" name="Shape 19"/>
+          <p:cNvPr id="23" name="Shape 21"/>
           <p:cNvSpPr/>
           <p:nvPr/>
         </p:nvSpPr>
@@ -16242,7 +16866,7 @@
       </p:sp>
       <p:sp>
         <p:nvSpPr>
-          <p:cNvPr id="22" name="Text 20"/>
+          <p:cNvPr id="24" name="Text 22"/>
           <p:cNvSpPr/>
           <p:nvPr/>
         </p:nvSpPr>
@@ -16281,7 +16905,7 @@
       </p:sp>
       <p:sp>
         <p:nvSpPr>
-          <p:cNvPr id="23" name="Text 21"/>
+          <p:cNvPr id="25" name="Text 23"/>
           <p:cNvSpPr/>
           <p:nvPr/>
         </p:nvSpPr>
@@ -16320,7 +16944,7 @@
       </p:sp>
       <p:sp>
         <p:nvSpPr>
-          <p:cNvPr id="24" name="Text 22"/>
+          <p:cNvPr id="26" name="Text 24"/>
           <p:cNvSpPr/>
           <p:nvPr/>
         </p:nvSpPr>
@@ -16359,7 +16983,7 @@
       </p:sp>
       <p:sp>
         <p:nvSpPr>
-          <p:cNvPr id="25" name="Shape 23"/>
+          <p:cNvPr id="27" name="Shape 25"/>
           <p:cNvSpPr/>
           <p:nvPr/>
         </p:nvSpPr>
@@ -16386,7 +17010,7 @@
       </p:sp>
       <p:sp>
         <p:nvSpPr>
-          <p:cNvPr id="26" name="Text 24"/>
+          <p:cNvPr id="28" name="Text 26"/>
           <p:cNvSpPr/>
           <p:nvPr/>
         </p:nvSpPr>
@@ -16425,7 +17049,7 @@
       </p:sp>
       <p:sp>
         <p:nvSpPr>
-          <p:cNvPr id="27" name="Text 25"/>
+          <p:cNvPr id="29" name="Text 27"/>
           <p:cNvSpPr/>
           <p:nvPr/>
         </p:nvSpPr>
@@ -16464,7 +17088,7 @@
       </p:sp>
       <p:sp>
         <p:nvSpPr>
-          <p:cNvPr id="28" name="Shape 26"/>
+          <p:cNvPr id="30" name="Shape 28"/>
           <p:cNvSpPr/>
           <p:nvPr/>
         </p:nvSpPr>
@@ -16491,7 +17115,7 @@
       </p:sp>
       <p:sp>
         <p:nvSpPr>
-          <p:cNvPr id="29" name="Text 27"/>
+          <p:cNvPr id="31" name="Text 29"/>
           <p:cNvSpPr/>
           <p:nvPr/>
         </p:nvSpPr>
@@ -16530,7 +17154,7 @@
       </p:sp>
       <p:sp>
         <p:nvSpPr>
-          <p:cNvPr id="30" name="Text 28"/>
+          <p:cNvPr id="32" name="Text 30"/>
           <p:cNvSpPr/>
           <p:nvPr/>
         </p:nvSpPr>
@@ -16569,7 +17193,7 @@
       </p:sp>
       <p:sp>
         <p:nvSpPr>
-          <p:cNvPr id="31" name="Shape 29"/>
+          <p:cNvPr id="33" name="Shape 31"/>
           <p:cNvSpPr/>
           <p:nvPr/>
         </p:nvSpPr>
@@ -16596,7 +17220,7 @@
       </p:sp>
       <p:sp>
         <p:nvSpPr>
-          <p:cNvPr id="32" name="Text 30"/>
+          <p:cNvPr id="34" name="Text 32"/>
           <p:cNvSpPr/>
           <p:nvPr/>
         </p:nvSpPr>
@@ -16635,7 +17259,7 @@
       </p:sp>
       <p:sp>
         <p:nvSpPr>
-          <p:cNvPr id="33" name="Text 31"/>
+          <p:cNvPr id="35" name="Text 33"/>
           <p:cNvSpPr/>
           <p:nvPr/>
         </p:nvSpPr>
@@ -16674,7 +17298,7 @@
       </p:sp>
       <p:sp>
         <p:nvSpPr>
-          <p:cNvPr id="34" name="Text 32"/>
+          <p:cNvPr id="36" name="Text 34"/>
           <p:cNvSpPr/>
           <p:nvPr/>
         </p:nvSpPr>
@@ -16713,7 +17337,7 @@
       </p:sp>
       <p:sp>
         <p:nvSpPr>
-          <p:cNvPr id="35" name="Shape 33"/>
+          <p:cNvPr id="37" name="Shape 35"/>
           <p:cNvSpPr/>
           <p:nvPr/>
         </p:nvSpPr>
@@ -16740,7 +17364,7 @@
       </p:sp>
       <p:sp>
         <p:nvSpPr>
-          <p:cNvPr id="36" name="Text 34"/>
+          <p:cNvPr id="38" name="Text 36"/>
           <p:cNvSpPr/>
           <p:nvPr/>
         </p:nvSpPr>
@@ -16779,7 +17403,7 @@
       </p:sp>
       <p:sp>
         <p:nvSpPr>
-          <p:cNvPr id="37" name="Text 35"/>
+          <p:cNvPr id="39" name="Text 37"/>
           <p:cNvSpPr/>
           <p:nvPr/>
         </p:nvSpPr>
@@ -16818,7 +17442,7 @@
       </p:sp>
       <p:sp>
         <p:nvSpPr>
-          <p:cNvPr id="38" name="Text 36"/>
+          <p:cNvPr id="40" name="Text 38"/>
           <p:cNvSpPr/>
           <p:nvPr/>
         </p:nvSpPr>
@@ -16857,7 +17481,7 @@
       </p:sp>
       <p:sp>
         <p:nvSpPr>
-          <p:cNvPr id="39" name="Shape 37"/>
+          <p:cNvPr id="41" name="Shape 39"/>
           <p:cNvSpPr/>
           <p:nvPr/>
         </p:nvSpPr>
@@ -16884,7 +17508,7 @@
       </p:sp>
       <p:sp>
         <p:nvSpPr>
-          <p:cNvPr id="40" name="Text 38"/>
+          <p:cNvPr id="42" name="Text 40"/>
           <p:cNvSpPr/>
           <p:nvPr/>
         </p:nvSpPr>
@@ -16923,7 +17547,7 @@
       </p:sp>
       <p:sp>
         <p:nvSpPr>
-          <p:cNvPr id="41" name="Text 39"/>
+          <p:cNvPr id="43" name="Text 41"/>
           <p:cNvSpPr/>
           <p:nvPr/>
         </p:nvSpPr>
@@ -16962,7 +17586,7 @@
       </p:sp>
       <p:sp>
         <p:nvSpPr>
-          <p:cNvPr id="42" name="Text 40"/>
+          <p:cNvPr id="44" name="Text 42"/>
           <p:cNvSpPr/>
           <p:nvPr/>
         </p:nvSpPr>
@@ -17001,7 +17625,7 @@
       </p:sp>
       <p:sp>
         <p:nvSpPr>
-          <p:cNvPr id="43" name="Shape 41"/>
+          <p:cNvPr id="45" name="Shape 43"/>
           <p:cNvSpPr/>
           <p:nvPr/>
         </p:nvSpPr>
@@ -17028,7 +17652,7 @@
       </p:sp>
       <p:sp>
         <p:nvSpPr>
-          <p:cNvPr id="44" name="Text 42"/>
+          <p:cNvPr id="46" name="Text 44"/>
           <p:cNvSpPr/>
           <p:nvPr/>
         </p:nvSpPr>
@@ -17067,7 +17691,7 @@
       </p:sp>
       <p:sp>
         <p:nvSpPr>
-          <p:cNvPr id="45" name="Shape 43"/>
+          <p:cNvPr id="47" name="Shape 45"/>
           <p:cNvSpPr/>
           <p:nvPr/>
         </p:nvSpPr>
@@ -17094,7 +17718,7 @@
       </p:sp>
       <p:sp>
         <p:nvSpPr>
-          <p:cNvPr id="46" name="Text 44"/>
+          <p:cNvPr id="48" name="Text 46"/>
           <p:cNvSpPr/>
           <p:nvPr/>
         </p:nvSpPr>
@@ -17133,7 +17757,7 @@
       </p:sp>
       <p:sp>
         <p:nvSpPr>
-          <p:cNvPr id="47" name="Shape 45"/>
+          <p:cNvPr id="49" name="Shape 47"/>
           <p:cNvSpPr/>
           <p:nvPr/>
         </p:nvSpPr>
@@ -17160,7 +17784,7 @@
       </p:sp>
       <p:sp>
         <p:nvSpPr>
-          <p:cNvPr id="48" name="Text 46"/>
+          <p:cNvPr id="50" name="Text 48"/>
           <p:cNvSpPr/>
           <p:nvPr/>
         </p:nvSpPr>
@@ -17199,7 +17823,7 @@
       </p:sp>
       <p:sp>
         <p:nvSpPr>
-          <p:cNvPr id="49" name="Shape 47"/>
+          <p:cNvPr id="51" name="Shape 49"/>
           <p:cNvSpPr/>
           <p:nvPr/>
         </p:nvSpPr>
@@ -17226,7 +17850,7 @@
       </p:sp>
       <p:sp>
         <p:nvSpPr>
-          <p:cNvPr id="50" name="Text 48"/>
+          <p:cNvPr id="52" name="Text 50"/>
           <p:cNvSpPr/>
           <p:nvPr/>
         </p:nvSpPr>
@@ -17265,7 +17889,7 @@
       </p:sp>
       <p:sp>
         <p:nvSpPr>
-          <p:cNvPr id="51" name="Shape 49"/>
+          <p:cNvPr id="53" name="Shape 51"/>
           <p:cNvSpPr/>
           <p:nvPr/>
         </p:nvSpPr>
@@ -17292,7 +17916,7 @@
       </p:sp>
       <p:sp>
         <p:nvSpPr>
-          <p:cNvPr id="52" name="Text 50"/>
+          <p:cNvPr id="54" name="Text 52"/>
           <p:cNvSpPr/>
           <p:nvPr/>
         </p:nvSpPr>
@@ -17331,7 +17955,7 @@
       </p:sp>
       <p:sp>
         <p:nvSpPr>
-          <p:cNvPr id="53" name="Shape 51"/>
+          <p:cNvPr id="55" name="Shape 53"/>
           <p:cNvSpPr/>
           <p:nvPr/>
         </p:nvSpPr>
@@ -17358,7 +17982,7 @@
       </p:sp>
       <p:sp>
         <p:nvSpPr>
-          <p:cNvPr id="54" name="Text 52"/>
+          <p:cNvPr id="56" name="Text 54"/>
           <p:cNvSpPr/>
           <p:nvPr/>
         </p:nvSpPr>
@@ -17397,7 +18021,7 @@
       </p:sp>
       <p:sp>
         <p:nvSpPr>
-          <p:cNvPr id="55" name="Shape 53"/>
+          <p:cNvPr id="57" name="Shape 55"/>
           <p:cNvSpPr/>
           <p:nvPr/>
         </p:nvSpPr>
@@ -17424,7 +18048,7 @@
       </p:sp>
       <p:sp>
         <p:nvSpPr>
-          <p:cNvPr id="56" name="Text 54"/>
+          <p:cNvPr id="58" name="Text 56"/>
           <p:cNvSpPr/>
           <p:nvPr/>
         </p:nvSpPr>
@@ -17463,7 +18087,7 @@
       </p:sp>
       <p:sp>
         <p:nvSpPr>
-          <p:cNvPr id="57" name="Shape 55"/>
+          <p:cNvPr id="59" name="Shape 57"/>
           <p:cNvSpPr/>
           <p:nvPr/>
         </p:nvSpPr>
@@ -17490,7 +18114,7 @@
       </p:sp>
       <p:sp>
         <p:nvSpPr>
-          <p:cNvPr id="58" name="Text 56"/>
+          <p:cNvPr id="60" name="Text 58"/>
           <p:cNvSpPr/>
           <p:nvPr/>
         </p:nvSpPr>
@@ -17529,7 +18153,7 @@
       </p:sp>
       <p:sp>
         <p:nvSpPr>
-          <p:cNvPr id="59" name="Text 57"/>
+          <p:cNvPr id="61" name="Text 59"/>
           <p:cNvSpPr/>
           <p:nvPr/>
         </p:nvSpPr>
@@ -17600,7 +18224,7 @@
         <p:spPr>
           <a:xfrm>
             <a:off x="0" y="0"/>
-            <a:ext cx="12188952" cy="1005840"/>
+            <a:ext cx="12188952" cy="1060704"/>
           </a:xfrm>
           <a:prstGeom prst="rect">
             <a:avLst/>
@@ -17619,12 +18243,129 @@
         </p:nvSpPr>
         <p:spPr>
           <a:xfrm>
-            <a:off x="411480" y="164592"/>
-            <a:ext cx="1188720" cy="310896"/>
+            <a:off x="411480" y="118872"/>
+            <a:ext cx="4572000" cy="219456"/>
+          </a:xfrm>
+          <a:prstGeom prst="rect">
+            <a:avLst/>
+          </a:prstGeom>
+          <a:noFill/>
+          <a:ln/>
+        </p:spPr>
+        <p:txBody>
+          <a:bodyPr wrap="square" rtlCol="0" anchor="ctr"/>
+          <a:lstStyle/>
+          <a:p>
+            <a:pPr indent="0" marL="0">
+              <a:buNone/>
+            </a:pPr>
+            <a:r>
+              <a:rPr lang="en-US" sz="1000" b="1" spc="220" kern="0" dirty="0">
+                <a:solidFill>
+                  <a:srgbClr val="0891B2"/>
+                </a:solidFill>
+                <a:latin typeface="Inter" pitchFamily="34" charset="0"/>
+                <a:ea typeface="Inter" pitchFamily="34" charset="-122"/>
+                <a:cs typeface="Inter" pitchFamily="34" charset="-120"/>
+              </a:rPr>
+              <a:t>TCS AGENTIC AI</a:t>
+            </a:r>
+            <a:endParaRPr lang="en-US" sz="1000" dirty="0"/>
+          </a:p>
+        </p:txBody>
+      </p:sp>
+      <p:sp>
+        <p:nvSpPr>
+          <p:cNvPr id="4" name="Text 2"/>
+          <p:cNvSpPr/>
+          <p:nvPr/>
+        </p:nvSpPr>
+        <p:spPr>
+          <a:xfrm>
+            <a:off x="411480" y="329184"/>
+            <a:ext cx="9692640" cy="402336"/>
+          </a:xfrm>
+          <a:prstGeom prst="rect">
+            <a:avLst/>
+          </a:prstGeom>
+          <a:noFill/>
+          <a:ln/>
+        </p:spPr>
+        <p:txBody>
+          <a:bodyPr wrap="square" rtlCol="0" anchor="ctr"/>
+          <a:lstStyle/>
+          <a:p>
+            <a:pPr indent="0" marL="0">
+              <a:buNone/>
+            </a:pPr>
+            <a:r>
+              <a:rPr lang="en-US" sz="2300" b="1" dirty="0">
+                <a:solidFill>
+                  <a:srgbClr val="FFFFFF"/>
+                </a:solidFill>
+                <a:latin typeface="Inter" pitchFamily="34" charset="0"/>
+                <a:ea typeface="Inter" pitchFamily="34" charset="-122"/>
+                <a:cs typeface="Inter" pitchFamily="34" charset="-120"/>
+              </a:rPr>
+              <a:t>Configuration Drift Agent</a:t>
+            </a:r>
+            <a:endParaRPr lang="en-US" sz="2300" dirty="0"/>
+          </a:p>
+        </p:txBody>
+      </p:sp>
+      <p:sp>
+        <p:nvSpPr>
+          <p:cNvPr id="5" name="Text 3"/>
+          <p:cNvSpPr/>
+          <p:nvPr/>
+        </p:nvSpPr>
+        <p:spPr>
+          <a:xfrm>
+            <a:off x="411480" y="749808"/>
+            <a:ext cx="9692640" cy="256032"/>
+          </a:xfrm>
+          <a:prstGeom prst="rect">
+            <a:avLst/>
+          </a:prstGeom>
+          <a:noFill/>
+          <a:ln/>
+        </p:spPr>
+        <p:txBody>
+          <a:bodyPr wrap="square" rtlCol="0" anchor="ctr"/>
+          <a:lstStyle/>
+          <a:p>
+            <a:pPr indent="0" marL="0">
+              <a:buNone/>
+            </a:pPr>
+            <a:r>
+              <a:rPr lang="en-US" sz="1050" i="1" dirty="0">
+                <a:solidFill>
+                  <a:srgbClr val="94A3B8"/>
+                </a:solidFill>
+                <a:latin typeface="Inter" pitchFamily="34" charset="0"/>
+                <a:ea typeface="Inter" pitchFamily="34" charset="-122"/>
+                <a:cs typeface="Inter" pitchFamily="34" charset="-120"/>
+              </a:rPr>
+              <a:t>Configuration drift detection &amp; one-click rollback — know what changed, in words, and put it back</a:t>
+            </a:r>
+            <a:endParaRPr lang="en-US" sz="1050" dirty="0"/>
+          </a:p>
+        </p:txBody>
+      </p:sp>
+      <p:sp>
+        <p:nvSpPr>
+          <p:cNvPr id="6" name="Text 4"/>
+          <p:cNvSpPr/>
+          <p:nvPr/>
+        </p:nvSpPr>
+        <p:spPr>
+          <a:xfrm>
+            <a:off x="10561320" y="310896"/>
+            <a:ext cx="1234440" cy="365760"/>
           </a:xfrm>
           <a:prstGeom prst="rect">
             <a:avLst>
-              <a:gd name="adj" fmla="val 14706"/>
+              <a:gd name="adj" fmla="val 12500"/>
             </a:avLst>
           </a:prstGeom>
           <a:solidFill>
@@ -17640,7 +18381,7 @@
               <a:buNone/>
             </a:pPr>
             <a:r>
-              <a:rPr lang="en-US" sz="1300" b="1" dirty="0">
+              <a:rPr lang="en-US" sz="1500" b="1" dirty="0">
                 <a:solidFill>
                   <a:srgbClr val="FFFFFF"/>
                 </a:solidFill>
@@ -17650,20 +18391,20 @@
               </a:rPr>
               <a:t>UC-08</a:t>
             </a:r>
-            <a:endParaRPr lang="en-US" sz="1300" dirty="0"/>
-          </a:p>
-        </p:txBody>
-      </p:sp>
-      <p:sp>
-        <p:nvSpPr>
-          <p:cNvPr id="4" name="Text 2"/>
-          <p:cNvSpPr/>
-          <p:nvPr/>
-        </p:nvSpPr>
-        <p:spPr>
-          <a:xfrm>
-            <a:off x="1737360" y="128016"/>
-            <a:ext cx="10058400" cy="402336"/>
+            <a:endParaRPr lang="en-US" sz="1500" dirty="0"/>
+          </a:p>
+        </p:txBody>
+      </p:sp>
+      <p:sp>
+        <p:nvSpPr>
+          <p:cNvPr id="7" name="Text 5"/>
+          <p:cNvSpPr/>
+          <p:nvPr/>
+        </p:nvSpPr>
+        <p:spPr>
+          <a:xfrm>
+            <a:off x="411480" y="1188720"/>
+            <a:ext cx="3657600" cy="182880"/>
           </a:xfrm>
           <a:prstGeom prst="rect">
             <a:avLst/>
@@ -17679,69 +18420,30 @@
               <a:buNone/>
             </a:pPr>
             <a:r>
-              <a:rPr lang="en-US" sz="2200" b="1" dirty="0">
-                <a:solidFill>
-                  <a:srgbClr val="FFFFFF"/>
-                </a:solidFill>
-                <a:latin typeface="Inter" pitchFamily="34" charset="0"/>
-                <a:ea typeface="Inter" pitchFamily="34" charset="-122"/>
-                <a:cs typeface="Inter" pitchFamily="34" charset="-120"/>
-              </a:rPr>
-              <a:t>Configuration Drift Detection &amp; One-Click Rollback</a:t>
-            </a:r>
-            <a:endParaRPr lang="en-US" sz="2200" dirty="0"/>
-          </a:p>
-        </p:txBody>
-      </p:sp>
-      <p:sp>
-        <p:nvSpPr>
-          <p:cNvPr id="5" name="Text 3"/>
-          <p:cNvSpPr/>
-          <p:nvPr/>
-        </p:nvSpPr>
-        <p:spPr>
-          <a:xfrm>
-            <a:off x="1737360" y="548640"/>
-            <a:ext cx="10058400" cy="274320"/>
-          </a:xfrm>
-          <a:prstGeom prst="rect">
-            <a:avLst/>
-          </a:prstGeom>
-          <a:noFill/>
-          <a:ln/>
-        </p:spPr>
-        <p:txBody>
-          <a:bodyPr wrap="square" rtlCol="0" anchor="ctr"/>
-          <a:lstStyle/>
-          <a:p>
-            <a:pPr indent="0" marL="0">
-              <a:buNone/>
-            </a:pPr>
-            <a:r>
-              <a:rPr lang="en-US" sz="1100" i="1" dirty="0">
-                <a:solidFill>
-                  <a:srgbClr val="0891B2"/>
-                </a:solidFill>
-                <a:latin typeface="Inter" pitchFamily="34" charset="0"/>
-                <a:ea typeface="Inter" pitchFamily="34" charset="-122"/>
-                <a:cs typeface="Inter" pitchFamily="34" charset="-120"/>
-              </a:rPr>
-              <a:t>Know what changed, in words — and put it back</a:t>
-            </a:r>
-            <a:endParaRPr lang="en-US" sz="1100" dirty="0"/>
-          </a:p>
-        </p:txBody>
-      </p:sp>
-      <p:sp>
-        <p:nvSpPr>
-          <p:cNvPr id="6" name="Text 4"/>
-          <p:cNvSpPr/>
-          <p:nvPr/>
-        </p:nvSpPr>
-        <p:spPr>
-          <a:xfrm>
-            <a:off x="411480" y="1170432"/>
-            <a:ext cx="11384280" cy="1051560"/>
+              <a:rPr lang="en-US" sz="850" b="1" spc="140" kern="0" dirty="0">
+                <a:solidFill>
+                  <a:srgbClr val="64748B"/>
+                </a:solidFill>
+                <a:latin typeface="Inter" pitchFamily="34" charset="0"/>
+                <a:ea typeface="Inter" pitchFamily="34" charset="-122"/>
+                <a:cs typeface="Inter" pitchFamily="34" charset="-120"/>
+              </a:rPr>
+              <a:t>USE CASE DESCRIPTION</a:t>
+            </a:r>
+            <a:endParaRPr lang="en-US" sz="850" dirty="0"/>
+          </a:p>
+        </p:txBody>
+      </p:sp>
+      <p:sp>
+        <p:nvSpPr>
+          <p:cNvPr id="8" name="Text 6"/>
+          <p:cNvSpPr/>
+          <p:nvPr/>
+        </p:nvSpPr>
+        <p:spPr>
+          <a:xfrm>
+            <a:off x="411480" y="1389888"/>
+            <a:ext cx="11384280" cy="914400"/>
           </a:xfrm>
           <a:prstGeom prst="rect">
             <a:avLst/>
@@ -17755,12 +18457,12 @@
           <a:p>
             <a:pPr indent="0" marL="0">
               <a:lnSpc>
-                <a:spcPct val="122000"/>
+                <a:spcPct val="120000"/>
               </a:lnSpc>
               <a:buNone/>
             </a:pPr>
             <a:r>
-              <a:rPr lang="en-US" sz="1250" dirty="0">
+              <a:rPr lang="en-US" sz="1200" dirty="0">
                 <a:solidFill>
                   <a:srgbClr val="1E293B"/>
                 </a:solidFill>
@@ -17770,19 +18472,19 @@
               </a:rPr>
               <a:t>Continuous watch over cluster configuration. When live state diverges from the recorded baseline, the agent explains the difference in plain language rather than as a raw diff, surfaces the decision, and offers a one-click rollback — then verifies the rollback landed and records the episode for audit.</a:t>
             </a:r>
-            <a:endParaRPr lang="en-US" sz="1250" dirty="0"/>
-          </a:p>
-        </p:txBody>
-      </p:sp>
-      <p:sp>
-        <p:nvSpPr>
-          <p:cNvPr id="7" name="Text 5"/>
-          <p:cNvSpPr/>
-          <p:nvPr/>
-        </p:nvSpPr>
-        <p:spPr>
-          <a:xfrm>
-            <a:off x="411480" y="2157984"/>
+            <a:endParaRPr lang="en-US" sz="1200" dirty="0"/>
+          </a:p>
+        </p:txBody>
+      </p:sp>
+      <p:sp>
+        <p:nvSpPr>
+          <p:cNvPr id="9" name="Text 7"/>
+          <p:cNvSpPr/>
+          <p:nvPr/>
+        </p:nvSpPr>
+        <p:spPr>
+          <a:xfrm>
+            <a:off x="411480" y="2176272"/>
             <a:ext cx="3657600" cy="201168"/>
           </a:xfrm>
           <a:prstGeom prst="rect">
@@ -17799,7 +18501,7 @@
               <a:buNone/>
             </a:pPr>
             <a:r>
-              <a:rPr lang="en-US" sz="900" b="1" spc="150" kern="0" dirty="0">
+              <a:rPr lang="en-US" sz="850" b="1" spc="140" kern="0" dirty="0">
                 <a:solidFill>
                   <a:srgbClr val="2563EB"/>
                 </a:solidFill>
@@ -17807,15 +18509,15 @@
                 <a:ea typeface="Inter" pitchFamily="34" charset="-122"/>
                 <a:cs typeface="Inter" pitchFamily="34" charset="-120"/>
               </a:rPr>
-              <a:t>MASTER WORKFLOW</a:t>
-            </a:r>
-            <a:endParaRPr lang="en-US" sz="900" dirty="0"/>
-          </a:p>
-        </p:txBody>
-      </p:sp>
-      <p:sp>
-        <p:nvSpPr>
-          <p:cNvPr id="8" name="Text 6"/>
+              <a:t>END-TO-END WORKFLOW</a:t>
+            </a:r>
+            <a:endParaRPr lang="en-US" sz="850" dirty="0"/>
+          </a:p>
+        </p:txBody>
+      </p:sp>
+      <p:sp>
+        <p:nvSpPr>
+          <p:cNvPr id="10" name="Text 8"/>
           <p:cNvSpPr/>
           <p:nvPr/>
         </p:nvSpPr>
@@ -17854,7 +18556,7 @@
       </p:sp>
       <p:sp>
         <p:nvSpPr>
-          <p:cNvPr id="9" name="Shape 7"/>
+          <p:cNvPr id="11" name="Shape 9"/>
           <p:cNvSpPr/>
           <p:nvPr/>
         </p:nvSpPr>
@@ -17881,7 +18583,7 @@
       </p:sp>
       <p:sp>
         <p:nvSpPr>
-          <p:cNvPr id="10" name="Text 8"/>
+          <p:cNvPr id="12" name="Text 10"/>
           <p:cNvSpPr/>
           <p:nvPr/>
         </p:nvSpPr>
@@ -17920,7 +18622,7 @@
       </p:sp>
       <p:sp>
         <p:nvSpPr>
-          <p:cNvPr id="11" name="Text 9"/>
+          <p:cNvPr id="13" name="Text 11"/>
           <p:cNvSpPr/>
           <p:nvPr/>
         </p:nvSpPr>
@@ -17959,7 +18661,7 @@
       </p:sp>
       <p:sp>
         <p:nvSpPr>
-          <p:cNvPr id="12" name="Text 10"/>
+          <p:cNvPr id="14" name="Text 12"/>
           <p:cNvSpPr/>
           <p:nvPr/>
         </p:nvSpPr>
@@ -17998,7 +18700,7 @@
       </p:sp>
       <p:sp>
         <p:nvSpPr>
-          <p:cNvPr id="13" name="Shape 11"/>
+          <p:cNvPr id="15" name="Shape 13"/>
           <p:cNvSpPr/>
           <p:nvPr/>
         </p:nvSpPr>
@@ -18025,7 +18727,7 @@
       </p:sp>
       <p:sp>
         <p:nvSpPr>
-          <p:cNvPr id="14" name="Text 12"/>
+          <p:cNvPr id="16" name="Text 14"/>
           <p:cNvSpPr/>
           <p:nvPr/>
         </p:nvSpPr>
@@ -18064,7 +18766,7 @@
       </p:sp>
       <p:sp>
         <p:nvSpPr>
-          <p:cNvPr id="15" name="Text 13"/>
+          <p:cNvPr id="17" name="Text 15"/>
           <p:cNvSpPr/>
           <p:nvPr/>
         </p:nvSpPr>
@@ -18103,7 +18805,7 @@
       </p:sp>
       <p:sp>
         <p:nvSpPr>
-          <p:cNvPr id="16" name="Text 14"/>
+          <p:cNvPr id="18" name="Text 16"/>
           <p:cNvSpPr/>
           <p:nvPr/>
         </p:nvSpPr>
@@ -18142,7 +18844,7 @@
       </p:sp>
       <p:sp>
         <p:nvSpPr>
-          <p:cNvPr id="17" name="Shape 15"/>
+          <p:cNvPr id="19" name="Shape 17"/>
           <p:cNvSpPr/>
           <p:nvPr/>
         </p:nvSpPr>
@@ -18169,7 +18871,7 @@
       </p:sp>
       <p:sp>
         <p:nvSpPr>
-          <p:cNvPr id="18" name="Text 16"/>
+          <p:cNvPr id="20" name="Text 18"/>
           <p:cNvSpPr/>
           <p:nvPr/>
         </p:nvSpPr>
@@ -18208,7 +18910,7 @@
       </p:sp>
       <p:sp>
         <p:nvSpPr>
-          <p:cNvPr id="19" name="Text 17"/>
+          <p:cNvPr id="21" name="Text 19"/>
           <p:cNvSpPr/>
           <p:nvPr/>
         </p:nvSpPr>
@@ -18247,7 +18949,7 @@
       </p:sp>
       <p:sp>
         <p:nvSpPr>
-          <p:cNvPr id="20" name="Shape 18"/>
+          <p:cNvPr id="22" name="Shape 20"/>
           <p:cNvSpPr/>
           <p:nvPr/>
         </p:nvSpPr>
@@ -18274,7 +18976,7 @@
       </p:sp>
       <p:sp>
         <p:nvSpPr>
-          <p:cNvPr id="21" name="Text 19"/>
+          <p:cNvPr id="23" name="Text 21"/>
           <p:cNvSpPr/>
           <p:nvPr/>
         </p:nvSpPr>
@@ -18313,7 +19015,7 @@
       </p:sp>
       <p:sp>
         <p:nvSpPr>
-          <p:cNvPr id="22" name="Text 20"/>
+          <p:cNvPr id="24" name="Text 22"/>
           <p:cNvSpPr/>
           <p:nvPr/>
         </p:nvSpPr>
@@ -18352,7 +19054,7 @@
       </p:sp>
       <p:sp>
         <p:nvSpPr>
-          <p:cNvPr id="23" name="Shape 21"/>
+          <p:cNvPr id="25" name="Shape 23"/>
           <p:cNvSpPr/>
           <p:nvPr/>
         </p:nvSpPr>
@@ -18379,7 +19081,7 @@
       </p:sp>
       <p:sp>
         <p:nvSpPr>
-          <p:cNvPr id="24" name="Text 22"/>
+          <p:cNvPr id="26" name="Text 24"/>
           <p:cNvSpPr/>
           <p:nvPr/>
         </p:nvSpPr>
@@ -18418,7 +19120,7 @@
       </p:sp>
       <p:sp>
         <p:nvSpPr>
-          <p:cNvPr id="25" name="Text 23"/>
+          <p:cNvPr id="27" name="Text 25"/>
           <p:cNvSpPr/>
           <p:nvPr/>
         </p:nvSpPr>
@@ -18457,7 +19159,7 @@
       </p:sp>
       <p:sp>
         <p:nvSpPr>
-          <p:cNvPr id="26" name="Text 24"/>
+          <p:cNvPr id="28" name="Text 26"/>
           <p:cNvSpPr/>
           <p:nvPr/>
         </p:nvSpPr>
@@ -18496,7 +19198,7 @@
       </p:sp>
       <p:sp>
         <p:nvSpPr>
-          <p:cNvPr id="27" name="Shape 25"/>
+          <p:cNvPr id="29" name="Shape 27"/>
           <p:cNvSpPr/>
           <p:nvPr/>
         </p:nvSpPr>
@@ -18523,7 +19225,7 @@
       </p:sp>
       <p:sp>
         <p:nvSpPr>
-          <p:cNvPr id="28" name="Text 26"/>
+          <p:cNvPr id="30" name="Text 28"/>
           <p:cNvSpPr/>
           <p:nvPr/>
         </p:nvSpPr>
@@ -18562,7 +19264,7 @@
       </p:sp>
       <p:sp>
         <p:nvSpPr>
-          <p:cNvPr id="29" name="Text 27"/>
+          <p:cNvPr id="31" name="Text 29"/>
           <p:cNvSpPr/>
           <p:nvPr/>
         </p:nvSpPr>
@@ -18601,7 +19303,7 @@
       </p:sp>
       <p:sp>
         <p:nvSpPr>
-          <p:cNvPr id="30" name="Text 28"/>
+          <p:cNvPr id="32" name="Text 30"/>
           <p:cNvSpPr/>
           <p:nvPr/>
         </p:nvSpPr>
@@ -18640,7 +19342,7 @@
       </p:sp>
       <p:sp>
         <p:nvSpPr>
-          <p:cNvPr id="31" name="Shape 29"/>
+          <p:cNvPr id="33" name="Shape 31"/>
           <p:cNvSpPr/>
           <p:nvPr/>
         </p:nvSpPr>
@@ -18667,7 +19369,7 @@
       </p:sp>
       <p:sp>
         <p:nvSpPr>
-          <p:cNvPr id="32" name="Text 30"/>
+          <p:cNvPr id="34" name="Text 32"/>
           <p:cNvSpPr/>
           <p:nvPr/>
         </p:nvSpPr>
@@ -18706,7 +19408,7 @@
       </p:sp>
       <p:sp>
         <p:nvSpPr>
-          <p:cNvPr id="33" name="Text 31"/>
+          <p:cNvPr id="35" name="Text 33"/>
           <p:cNvSpPr/>
           <p:nvPr/>
         </p:nvSpPr>
@@ -18745,7 +19447,7 @@
       </p:sp>
       <p:sp>
         <p:nvSpPr>
-          <p:cNvPr id="34" name="Shape 32"/>
+          <p:cNvPr id="36" name="Shape 34"/>
           <p:cNvSpPr/>
           <p:nvPr/>
         </p:nvSpPr>
@@ -18772,7 +19474,7 @@
       </p:sp>
       <p:sp>
         <p:nvSpPr>
-          <p:cNvPr id="35" name="Text 33"/>
+          <p:cNvPr id="37" name="Text 35"/>
           <p:cNvSpPr/>
           <p:nvPr/>
         </p:nvSpPr>
@@ -18811,7 +19513,7 @@
       </p:sp>
       <p:sp>
         <p:nvSpPr>
-          <p:cNvPr id="36" name="Shape 34"/>
+          <p:cNvPr id="38" name="Shape 36"/>
           <p:cNvSpPr/>
           <p:nvPr/>
         </p:nvSpPr>
@@ -18838,7 +19540,7 @@
       </p:sp>
       <p:sp>
         <p:nvSpPr>
-          <p:cNvPr id="37" name="Text 35"/>
+          <p:cNvPr id="39" name="Text 37"/>
           <p:cNvSpPr/>
           <p:nvPr/>
         </p:nvSpPr>
@@ -18877,7 +19579,7 @@
       </p:sp>
       <p:sp>
         <p:nvSpPr>
-          <p:cNvPr id="38" name="Shape 36"/>
+          <p:cNvPr id="40" name="Shape 38"/>
           <p:cNvSpPr/>
           <p:nvPr/>
         </p:nvSpPr>
@@ -18904,7 +19606,7 @@
       </p:sp>
       <p:sp>
         <p:nvSpPr>
-          <p:cNvPr id="39" name="Text 37"/>
+          <p:cNvPr id="41" name="Text 39"/>
           <p:cNvSpPr/>
           <p:nvPr/>
         </p:nvSpPr>
@@ -18943,7 +19645,7 @@
       </p:sp>
       <p:sp>
         <p:nvSpPr>
-          <p:cNvPr id="40" name="Shape 38"/>
+          <p:cNvPr id="42" name="Shape 40"/>
           <p:cNvSpPr/>
           <p:nvPr/>
         </p:nvSpPr>
@@ -18970,7 +19672,7 @@
       </p:sp>
       <p:sp>
         <p:nvSpPr>
-          <p:cNvPr id="41" name="Text 39"/>
+          <p:cNvPr id="43" name="Text 41"/>
           <p:cNvSpPr/>
           <p:nvPr/>
         </p:nvSpPr>
@@ -19009,7 +19711,7 @@
       </p:sp>
       <p:sp>
         <p:nvSpPr>
-          <p:cNvPr id="42" name="Text 40"/>
+          <p:cNvPr id="44" name="Text 42"/>
           <p:cNvSpPr/>
           <p:nvPr/>
         </p:nvSpPr>

--- a/usecases/portfolio/TCS-Agentic-AI-Use-Case-Summary.pptx
+++ b/usecases/portfolio/TCS-Agentic-AI-Use-Case-Summary.pptx
@@ -15,10 +15,9 @@
     <p:sldId id="263" r:id="rId9"/>
     <p:sldId id="264" r:id="rId10"/>
     <p:sldId id="265" r:id="rId11"/>
-    <p:sldId id="266" r:id="rId12"/>
   </p:sldIdLst>
   <p:notesMasterIdLst>
-    <p:notesMasterId r:id="rId13"/>
+    <p:notesMasterId r:id="rId12"/>
   </p:notesMasterIdLst>
   <p:sldSz cx="12192000" cy="6858000"/>
   <p:notesSz cx="6858000" cy="12192000"/>
@@ -624,94 +623,6 @@
             <a:fld id="{F7021451-1387-4CA6-816F-3879F97B5CBC}" type="slidenum">
               <a:rPr lang="en-US"/>
               <a:t>10</a:t>
-            </a:fld>
-            <a:endParaRPr lang="en-US"/>
-          </a:p>
-        </p:txBody>
-      </p:sp>
-    </p:spTree>
-    <p:extLst>
-      <p:ext uri="{BB962C8B-B14F-4D97-AF65-F5344CB8AC3E}">
-        <p14:creationId xmlns:p14="http://schemas.microsoft.com/office/powerpoint/2010/main" val="1024086991"/>
-      </p:ext>
-    </p:extLst>
-  </p:cSld>
-  <p:clrMapOvr>
-    <a:masterClrMapping/>
-  </p:clrMapOvr>
-</p:notes>
-</file>
-
-<file path=ppt/notesSlides/notesSlide11.xml><?xml version="1.0" encoding="utf-8"?>
-<p:notes xmlns:a="http://schemas.openxmlformats.org/drawingml/2006/main" xmlns:r="http://schemas.openxmlformats.org/officeDocument/2006/relationships" xmlns:p="http://schemas.openxmlformats.org/presentationml/2006/main">
-  <p:cSld>
-    <p:spTree>
-      <p:nvGrpSpPr>
-        <p:cNvPr id="1" name=""/>
-        <p:cNvGrpSpPr/>
-        <p:nvPr/>
-      </p:nvGrpSpPr>
-      <p:grpSpPr>
-        <a:xfrm>
-          <a:off x="0" y="0"/>
-          <a:ext cx="0" cy="0"/>
-          <a:chOff x="0" y="0"/>
-          <a:chExt cx="0" cy="0"/>
-        </a:xfrm>
-      </p:grpSpPr>
-      <p:sp>
-        <p:nvSpPr>
-          <p:cNvPr id="2" name="Slide Image Placeholder 1"/>
-          <p:cNvSpPr>
-            <a:spLocks noGrp="1" noRot="1" noChangeAspect="1"/>
-          </p:cNvSpPr>
-          <p:nvPr>
-            <p:ph type="sldImg"/>
-          </p:nvPr>
-        </p:nvSpPr>
-        <p:spPr/>
-      </p:sp>
-      <p:sp>
-        <p:nvSpPr>
-          <p:cNvPr id="3" name="Notes Placeholder 2"/>
-          <p:cNvSpPr>
-            <a:spLocks noGrp="1"/>
-          </p:cNvSpPr>
-          <p:nvPr>
-            <p:ph type="body" idx="1"/>
-          </p:nvPr>
-        </p:nvSpPr>
-        <p:spPr/>
-        <p:txBody>
-          <a:bodyPr/>
-          <a:lstStyle/>
-          <a:p>
-            <a:r>
-              <a:rPr lang="en-US" dirty="0"/>
-              <a:t/>
-            </a:r>
-            <a:endParaRPr lang="en-US" dirty="0"/>
-          </a:p>
-        </p:txBody>
-      </p:sp>
-      <p:sp>
-        <p:nvSpPr>
-          <p:cNvPr id="4" name="Slide Number Placeholder 3"/>
-          <p:cNvSpPr>
-            <a:spLocks noGrp="1"/>
-          </p:cNvSpPr>
-          <p:nvPr>
-            <p:ph type="sldNum" sz="quarter" idx="10"/>
-          </p:nvPr>
-        </p:nvSpPr>
-        <p:spPr/>
-        <p:txBody>
-          <a:bodyPr/>
-          <a:lstStyle/>
-          <a:p>
-            <a:fld id="{F7021451-1387-4CA6-816F-3879F97B5CBC}" type="slidenum">
-              <a:rPr lang="en-US"/>
-              <a:t>11</a:t>
             </a:fld>
             <a:endParaRPr lang="en-US"/>
           </a:p>
@@ -1962,7 +1873,7 @@
                 <a:ea typeface="Inter" pitchFamily="34" charset="-122"/>
                 <a:cs typeface="Inter" pitchFamily="34" charset="-120"/>
               </a:rPr>
-              <a:t>9</a:t>
+              <a:t>8</a:t>
             </a:r>
             <a:endParaRPr lang="en-US" sz="2600" dirty="0"/>
           </a:p>
@@ -2450,1786 +2361,6 @@
 <file path=ppt/slides/slide10.xml><?xml version="1.0" encoding="utf-8"?>
 <p:sld xmlns:a="http://schemas.openxmlformats.org/drawingml/2006/main" xmlns:r="http://schemas.openxmlformats.org/officeDocument/2006/relationships" xmlns:p="http://schemas.openxmlformats.org/presentationml/2006/main">
   <p:cSld name="Slide 10">
-    <p:spTree>
-      <p:nvGrpSpPr>
-        <p:cNvPr id="1" name=""/>
-        <p:cNvGrpSpPr/>
-        <p:nvPr/>
-      </p:nvGrpSpPr>
-      <p:grpSpPr>
-        <a:xfrm>
-          <a:off x="0" y="0"/>
-          <a:ext cx="0" cy="0"/>
-          <a:chOff x="0" y="0"/>
-          <a:chExt cx="0" cy="0"/>
-        </a:xfrm>
-      </p:grpSpPr>
-      <p:sp>
-        <p:nvSpPr>
-          <p:cNvPr id="2" name="Shape 0"/>
-          <p:cNvSpPr/>
-          <p:nvPr/>
-        </p:nvSpPr>
-        <p:spPr>
-          <a:xfrm>
-            <a:off x="0" y="0"/>
-            <a:ext cx="12188952" cy="1060704"/>
-          </a:xfrm>
-          <a:prstGeom prst="rect">
-            <a:avLst/>
-          </a:prstGeom>
-          <a:solidFill>
-            <a:srgbClr val="0F172A"/>
-          </a:solidFill>
-          <a:ln/>
-        </p:spPr>
-      </p:sp>
-      <p:sp>
-        <p:nvSpPr>
-          <p:cNvPr id="3" name="Text 1"/>
-          <p:cNvSpPr/>
-          <p:nvPr/>
-        </p:nvSpPr>
-        <p:spPr>
-          <a:xfrm>
-            <a:off x="411480" y="118872"/>
-            <a:ext cx="4572000" cy="219456"/>
-          </a:xfrm>
-          <a:prstGeom prst="rect">
-            <a:avLst/>
-          </a:prstGeom>
-          <a:noFill/>
-          <a:ln/>
-        </p:spPr>
-        <p:txBody>
-          <a:bodyPr wrap="square" rtlCol="0" anchor="ctr"/>
-          <a:lstStyle/>
-          <a:p>
-            <a:pPr indent="0" marL="0">
-              <a:buNone/>
-            </a:pPr>
-            <a:r>
-              <a:rPr lang="en-US" sz="1000" b="1" spc="220" kern="0" dirty="0">
-                <a:solidFill>
-                  <a:srgbClr val="0891B2"/>
-                </a:solidFill>
-                <a:latin typeface="Inter" pitchFamily="34" charset="0"/>
-                <a:ea typeface="Inter" pitchFamily="34" charset="-122"/>
-                <a:cs typeface="Inter" pitchFamily="34" charset="-120"/>
-              </a:rPr>
-              <a:t>TCS AGENTIC AI</a:t>
-            </a:r>
-            <a:endParaRPr lang="en-US" sz="1000" dirty="0"/>
-          </a:p>
-        </p:txBody>
-      </p:sp>
-      <p:sp>
-        <p:nvSpPr>
-          <p:cNvPr id="4" name="Text 2"/>
-          <p:cNvSpPr/>
-          <p:nvPr/>
-        </p:nvSpPr>
-        <p:spPr>
-          <a:xfrm>
-            <a:off x="411480" y="329184"/>
-            <a:ext cx="9692640" cy="402336"/>
-          </a:xfrm>
-          <a:prstGeom prst="rect">
-            <a:avLst/>
-          </a:prstGeom>
-          <a:noFill/>
-          <a:ln/>
-        </p:spPr>
-        <p:txBody>
-          <a:bodyPr wrap="square" rtlCol="0" anchor="ctr"/>
-          <a:lstStyle/>
-          <a:p>
-            <a:pPr indent="0" marL="0">
-              <a:buNone/>
-            </a:pPr>
-            <a:r>
-              <a:rPr lang="en-US" sz="2300" b="1" dirty="0">
-                <a:solidFill>
-                  <a:srgbClr val="FFFFFF"/>
-                </a:solidFill>
-                <a:latin typeface="Inter" pitchFamily="34" charset="0"/>
-                <a:ea typeface="Inter" pitchFamily="34" charset="-122"/>
-                <a:cs typeface="Inter" pitchFamily="34" charset="-120"/>
-              </a:rPr>
-              <a:t>Incident Response Agent</a:t>
-            </a:r>
-            <a:endParaRPr lang="en-US" sz="2300" dirty="0"/>
-          </a:p>
-        </p:txBody>
-      </p:sp>
-      <p:sp>
-        <p:nvSpPr>
-          <p:cNvPr id="5" name="Text 3"/>
-          <p:cNvSpPr/>
-          <p:nvPr/>
-        </p:nvSpPr>
-        <p:spPr>
-          <a:xfrm>
-            <a:off x="411480" y="749808"/>
-            <a:ext cx="9692640" cy="256032"/>
-          </a:xfrm>
-          <a:prstGeom prst="rect">
-            <a:avLst/>
-          </a:prstGeom>
-          <a:noFill/>
-          <a:ln/>
-        </p:spPr>
-        <p:txBody>
-          <a:bodyPr wrap="square" rtlCol="0" anchor="ctr"/>
-          <a:lstStyle/>
-          <a:p>
-            <a:pPr indent="0" marL="0">
-              <a:buNone/>
-            </a:pPr>
-            <a:r>
-              <a:rPr lang="en-US" sz="1050" i="1" dirty="0">
-                <a:solidFill>
-                  <a:srgbClr val="94A3B8"/>
-                </a:solidFill>
-                <a:latin typeface="Inter" pitchFamily="34" charset="0"/>
-                <a:ea typeface="Inter" pitchFamily="34" charset="-122"/>
-                <a:cs typeface="Inter" pitchFamily="34" charset="-120"/>
-              </a:rPr>
-              <a:t>End-to-end incident response — “why is my pod crashing?” to diagnosis, ticket and a dry-run fix</a:t>
-            </a:r>
-            <a:endParaRPr lang="en-US" sz="1050" dirty="0"/>
-          </a:p>
-        </p:txBody>
-      </p:sp>
-      <p:sp>
-        <p:nvSpPr>
-          <p:cNvPr id="6" name="Text 4"/>
-          <p:cNvSpPr/>
-          <p:nvPr/>
-        </p:nvSpPr>
-        <p:spPr>
-          <a:xfrm>
-            <a:off x="10561320" y="310896"/>
-            <a:ext cx="1234440" cy="365760"/>
-          </a:xfrm>
-          <a:prstGeom prst="rect">
-            <a:avLst>
-              <a:gd name="adj" fmla="val 12500"/>
-            </a:avLst>
-          </a:prstGeom>
-          <a:solidFill>
-            <a:srgbClr val="2563EB"/>
-          </a:solidFill>
-          <a:ln/>
-        </p:spPr>
-        <p:txBody>
-          <a:bodyPr wrap="square" rtlCol="0" anchor="ctr"/>
-          <a:lstStyle/>
-          <a:p>
-            <a:pPr algn="ctr" indent="0" marL="0">
-              <a:buNone/>
-            </a:pPr>
-            <a:r>
-              <a:rPr lang="en-US" sz="1500" b="1" dirty="0">
-                <a:solidFill>
-                  <a:srgbClr val="FFFFFF"/>
-                </a:solidFill>
-                <a:latin typeface="Inter" pitchFamily="34" charset="0"/>
-                <a:ea typeface="Inter" pitchFamily="34" charset="-122"/>
-                <a:cs typeface="Inter" pitchFamily="34" charset="-120"/>
-              </a:rPr>
-              <a:t>UC-09</a:t>
-            </a:r>
-            <a:endParaRPr lang="en-US" sz="1500" dirty="0"/>
-          </a:p>
-        </p:txBody>
-      </p:sp>
-      <p:sp>
-        <p:nvSpPr>
-          <p:cNvPr id="7" name="Text 5"/>
-          <p:cNvSpPr/>
-          <p:nvPr/>
-        </p:nvSpPr>
-        <p:spPr>
-          <a:xfrm>
-            <a:off x="411480" y="1188720"/>
-            <a:ext cx="3657600" cy="182880"/>
-          </a:xfrm>
-          <a:prstGeom prst="rect">
-            <a:avLst/>
-          </a:prstGeom>
-          <a:noFill/>
-          <a:ln/>
-        </p:spPr>
-        <p:txBody>
-          <a:bodyPr wrap="square" rtlCol="0" anchor="ctr"/>
-          <a:lstStyle/>
-          <a:p>
-            <a:pPr indent="0" marL="0">
-              <a:buNone/>
-            </a:pPr>
-            <a:r>
-              <a:rPr lang="en-US" sz="850" b="1" spc="140" kern="0" dirty="0">
-                <a:solidFill>
-                  <a:srgbClr val="64748B"/>
-                </a:solidFill>
-                <a:latin typeface="Inter" pitchFamily="34" charset="0"/>
-                <a:ea typeface="Inter" pitchFamily="34" charset="-122"/>
-                <a:cs typeface="Inter" pitchFamily="34" charset="-120"/>
-              </a:rPr>
-              <a:t>USE CASE DESCRIPTION</a:t>
-            </a:r>
-            <a:endParaRPr lang="en-US" sz="850" dirty="0"/>
-          </a:p>
-        </p:txBody>
-      </p:sp>
-      <p:sp>
-        <p:nvSpPr>
-          <p:cNvPr id="8" name="Text 6"/>
-          <p:cNvSpPr/>
-          <p:nvPr/>
-        </p:nvSpPr>
-        <p:spPr>
-          <a:xfrm>
-            <a:off x="411480" y="1389888"/>
-            <a:ext cx="11384280" cy="914400"/>
-          </a:xfrm>
-          <a:prstGeom prst="rect">
-            <a:avLst/>
-          </a:prstGeom>
-          <a:noFill/>
-          <a:ln/>
-        </p:spPr>
-        <p:txBody>
-          <a:bodyPr wrap="square" rtlCol="0" anchor="t"/>
-          <a:lstStyle/>
-          <a:p>
-            <a:pPr indent="0" marL="0">
-              <a:lnSpc>
-                <a:spcPct val="120000"/>
-              </a:lnSpc>
-              <a:buNone/>
-            </a:pPr>
-            <a:r>
-              <a:rPr lang="en-US" sz="1200" dirty="0">
-                <a:solidFill>
-                  <a:srgbClr val="1E293B"/>
-                </a:solidFill>
-                <a:latin typeface="Inter" pitchFamily="34" charset="0"/>
-                <a:ea typeface="Inter" pitchFamily="34" charset="-122"/>
-                <a:cs typeface="Inter" pitchFamily="34" charset="-120"/>
-              </a:rPr>
-              <a:t>A natural-language question triggers the full incident pipeline: the agent recognises the error pattern, diagnoses root cause from parallel cluster queries, assesses severity, creates the ServiceNow incident, and proposes a targeted fix — presented with a dry-run result attached, so the operator approves an action whose effect is already known.</a:t>
-            </a:r>
-            <a:endParaRPr lang="en-US" sz="1200" dirty="0"/>
-          </a:p>
-        </p:txBody>
-      </p:sp>
-      <p:sp>
-        <p:nvSpPr>
-          <p:cNvPr id="9" name="Text 7"/>
-          <p:cNvSpPr/>
-          <p:nvPr/>
-        </p:nvSpPr>
-        <p:spPr>
-          <a:xfrm>
-            <a:off x="411480" y="2176272"/>
-            <a:ext cx="3657600" cy="201168"/>
-          </a:xfrm>
-          <a:prstGeom prst="rect">
-            <a:avLst/>
-          </a:prstGeom>
-          <a:noFill/>
-          <a:ln/>
-        </p:spPr>
-        <p:txBody>
-          <a:bodyPr wrap="square" rtlCol="0" anchor="ctr"/>
-          <a:lstStyle/>
-          <a:p>
-            <a:pPr indent="0" marL="0">
-              <a:buNone/>
-            </a:pPr>
-            <a:r>
-              <a:rPr lang="en-US" sz="850" b="1" spc="140" kern="0" dirty="0">
-                <a:solidFill>
-                  <a:srgbClr val="2563EB"/>
-                </a:solidFill>
-                <a:latin typeface="Inter" pitchFamily="34" charset="0"/>
-                <a:ea typeface="Inter" pitchFamily="34" charset="-122"/>
-                <a:cs typeface="Inter" pitchFamily="34" charset="-120"/>
-              </a:rPr>
-              <a:t>END-TO-END WORKFLOW</a:t>
-            </a:r>
-            <a:endParaRPr lang="en-US" sz="850" dirty="0"/>
-          </a:p>
-        </p:txBody>
-      </p:sp>
-      <p:sp>
-        <p:nvSpPr>
-          <p:cNvPr id="10" name="Text 8"/>
-          <p:cNvSpPr/>
-          <p:nvPr/>
-        </p:nvSpPr>
-        <p:spPr>
-          <a:xfrm>
-            <a:off x="411480" y="2395728"/>
-            <a:ext cx="7315200" cy="173736"/>
-          </a:xfrm>
-          <a:prstGeom prst="rect">
-            <a:avLst/>
-          </a:prstGeom>
-          <a:noFill/>
-          <a:ln/>
-        </p:spPr>
-        <p:txBody>
-          <a:bodyPr wrap="square" rtlCol="0" anchor="ctr"/>
-          <a:lstStyle/>
-          <a:p>
-            <a:pPr indent="0" marL="0">
-              <a:buNone/>
-            </a:pPr>
-            <a:r>
-              <a:rPr lang="en-US" sz="900" b="1" spc="120" kern="0" dirty="0">
-                <a:solidFill>
-                  <a:srgbClr val="64748B"/>
-                </a:solidFill>
-                <a:latin typeface="Inter" pitchFamily="34" charset="0"/>
-                <a:ea typeface="Inter" pitchFamily="34" charset="-122"/>
-                <a:cs typeface="Inter" pitchFamily="34" charset="-120"/>
-              </a:rPr>
-              <a:t>QUESTION → DIAGNOSIS</a:t>
-            </a:r>
-            <a:endParaRPr lang="en-US" sz="900" dirty="0"/>
-          </a:p>
-        </p:txBody>
-      </p:sp>
-      <p:sp>
-        <p:nvSpPr>
-          <p:cNvPr id="11" name="Shape 9"/>
-          <p:cNvSpPr/>
-          <p:nvPr/>
-        </p:nvSpPr>
-        <p:spPr>
-          <a:xfrm>
-            <a:off x="411480" y="2569464"/>
-            <a:ext cx="2640330" cy="749808"/>
-          </a:xfrm>
-          <a:prstGeom prst="roundRect">
-            <a:avLst>
-              <a:gd name="adj" fmla="val 8537"/>
-            </a:avLst>
-          </a:prstGeom>
-          <a:solidFill>
-            <a:srgbClr val="FEF3C7"/>
-          </a:solidFill>
-          <a:ln w="19050">
-            <a:solidFill>
-              <a:srgbClr val="D97706"/>
-            </a:solidFill>
-            <a:prstDash val="solid"/>
-          </a:ln>
-        </p:spPr>
-      </p:sp>
-      <p:sp>
-        <p:nvSpPr>
-          <p:cNvPr id="12" name="Text 10"/>
-          <p:cNvSpPr/>
-          <p:nvPr/>
-        </p:nvSpPr>
-        <p:spPr>
-          <a:xfrm>
-            <a:off x="466344" y="2636947"/>
-            <a:ext cx="2530602" cy="314919"/>
-          </a:xfrm>
-          <a:prstGeom prst="rect">
-            <a:avLst/>
-          </a:prstGeom>
-          <a:noFill/>
-          <a:ln/>
-        </p:spPr>
-        <p:txBody>
-          <a:bodyPr wrap="square" rtlCol="0" anchor="ctr"/>
-          <a:lstStyle/>
-          <a:p>
-            <a:pPr algn="ctr" indent="0" marL="0">
-              <a:buNone/>
-            </a:pPr>
-            <a:r>
-              <a:rPr lang="en-US" sz="1050" b="1" dirty="0">
-                <a:solidFill>
-                  <a:srgbClr val="92400E"/>
-                </a:solidFill>
-                <a:latin typeface="Inter" pitchFamily="34" charset="0"/>
-                <a:ea typeface="Inter" pitchFamily="34" charset="-122"/>
-                <a:cs typeface="Inter" pitchFamily="34" charset="-120"/>
-              </a:rPr>
-              <a:t>👤 Question asked</a:t>
-            </a:r>
-            <a:endParaRPr lang="en-US" sz="1050" dirty="0"/>
-          </a:p>
-        </p:txBody>
-      </p:sp>
-      <p:sp>
-        <p:nvSpPr>
-          <p:cNvPr id="13" name="Text 11"/>
-          <p:cNvSpPr/>
-          <p:nvPr/>
-        </p:nvSpPr>
-        <p:spPr>
-          <a:xfrm>
-            <a:off x="466344" y="2944368"/>
-            <a:ext cx="2530602" cy="329916"/>
-          </a:xfrm>
-          <a:prstGeom prst="rect">
-            <a:avLst/>
-          </a:prstGeom>
-          <a:noFill/>
-          <a:ln/>
-        </p:spPr>
-        <p:txBody>
-          <a:bodyPr wrap="square" rtlCol="0" anchor="t"/>
-          <a:lstStyle/>
-          <a:p>
-            <a:pPr algn="ctr" indent="0" marL="0">
-              <a:buNone/>
-            </a:pPr>
-            <a:r>
-              <a:rPr lang="en-US" sz="850" dirty="0">
-                <a:solidFill>
-                  <a:srgbClr val="475569"/>
-                </a:solidFill>
-                <a:latin typeface="Inter" pitchFamily="34" charset="0"/>
-                <a:ea typeface="Inter" pitchFamily="34" charset="-122"/>
-                <a:cs typeface="Inter" pitchFamily="34" charset="-120"/>
-              </a:rPr>
-              <a:t>plain language, in chat</a:t>
-            </a:r>
-            <a:endParaRPr lang="en-US" sz="850" dirty="0"/>
-          </a:p>
-        </p:txBody>
-      </p:sp>
-      <p:sp>
-        <p:nvSpPr>
-          <p:cNvPr id="14" name="Text 12"/>
-          <p:cNvSpPr/>
-          <p:nvPr/>
-        </p:nvSpPr>
-        <p:spPr>
-          <a:xfrm>
-            <a:off x="3051810" y="2816352"/>
-            <a:ext cx="274320" cy="256032"/>
-          </a:xfrm>
-          <a:prstGeom prst="rect">
-            <a:avLst/>
-          </a:prstGeom>
-          <a:noFill/>
-          <a:ln/>
-        </p:spPr>
-        <p:txBody>
-          <a:bodyPr wrap="square" rtlCol="0" anchor="ctr"/>
-          <a:lstStyle/>
-          <a:p>
-            <a:pPr algn="ctr" indent="0" marL="0">
-              <a:buNone/>
-            </a:pPr>
-            <a:r>
-              <a:rPr lang="en-US" sz="1100" dirty="0">
-                <a:solidFill>
-                  <a:srgbClr val="64748B"/>
-                </a:solidFill>
-                <a:latin typeface="Inter" pitchFamily="34" charset="0"/>
-                <a:ea typeface="Inter" pitchFamily="34" charset="-122"/>
-                <a:cs typeface="Inter" pitchFamily="34" charset="-120"/>
-              </a:rPr>
-              <a:t>▶</a:t>
-            </a:r>
-            <a:endParaRPr lang="en-US" sz="1100" dirty="0"/>
-          </a:p>
-        </p:txBody>
-      </p:sp>
-      <p:sp>
-        <p:nvSpPr>
-          <p:cNvPr id="15" name="Shape 13"/>
-          <p:cNvSpPr/>
-          <p:nvPr/>
-        </p:nvSpPr>
-        <p:spPr>
-          <a:xfrm>
-            <a:off x="3326130" y="2569464"/>
-            <a:ext cx="2640330" cy="749808"/>
-          </a:xfrm>
-          <a:prstGeom prst="roundRect">
-            <a:avLst>
-              <a:gd name="adj" fmla="val 8537"/>
-            </a:avLst>
-          </a:prstGeom>
-          <a:solidFill>
-            <a:srgbClr val="DBEAFE"/>
-          </a:solidFill>
-          <a:ln w="19050">
-            <a:solidFill>
-              <a:srgbClr val="2563EB"/>
-            </a:solidFill>
-            <a:prstDash val="solid"/>
-          </a:ln>
-        </p:spPr>
-      </p:sp>
-      <p:sp>
-        <p:nvSpPr>
-          <p:cNvPr id="16" name="Text 14"/>
-          <p:cNvSpPr/>
-          <p:nvPr/>
-        </p:nvSpPr>
-        <p:spPr>
-          <a:xfrm>
-            <a:off x="3380994" y="2636947"/>
-            <a:ext cx="2530602" cy="314919"/>
-          </a:xfrm>
-          <a:prstGeom prst="rect">
-            <a:avLst/>
-          </a:prstGeom>
-          <a:noFill/>
-          <a:ln/>
-        </p:spPr>
-        <p:txBody>
-          <a:bodyPr wrap="square" rtlCol="0" anchor="ctr"/>
-          <a:lstStyle/>
-          <a:p>
-            <a:pPr algn="ctr" indent="0" marL="0">
-              <a:buNone/>
-            </a:pPr>
-            <a:r>
-              <a:rPr lang="en-US" sz="1050" b="1" dirty="0">
-                <a:solidFill>
-                  <a:srgbClr val="1E40AF"/>
-                </a:solidFill>
-                <a:latin typeface="Inter" pitchFamily="34" charset="0"/>
-                <a:ea typeface="Inter" pitchFamily="34" charset="-122"/>
-                <a:cs typeface="Inter" pitchFamily="34" charset="-120"/>
-              </a:rPr>
-              <a:t>⚙️ Context gathered</a:t>
-            </a:r>
-            <a:endParaRPr lang="en-US" sz="1050" dirty="0"/>
-          </a:p>
-        </p:txBody>
-      </p:sp>
-      <p:sp>
-        <p:nvSpPr>
-          <p:cNvPr id="17" name="Text 15"/>
-          <p:cNvSpPr/>
-          <p:nvPr/>
-        </p:nvSpPr>
-        <p:spPr>
-          <a:xfrm>
-            <a:off x="3380994" y="2944368"/>
-            <a:ext cx="2530602" cy="329916"/>
-          </a:xfrm>
-          <a:prstGeom prst="rect">
-            <a:avLst/>
-          </a:prstGeom>
-          <a:noFill/>
-          <a:ln/>
-        </p:spPr>
-        <p:txBody>
-          <a:bodyPr wrap="square" rtlCol="0" anchor="t"/>
-          <a:lstStyle/>
-          <a:p>
-            <a:pPr algn="ctr" indent="0" marL="0">
-              <a:buNone/>
-            </a:pPr>
-            <a:r>
-              <a:rPr lang="en-US" sz="850" dirty="0">
-                <a:solidFill>
-                  <a:srgbClr val="475569"/>
-                </a:solidFill>
-                <a:latin typeface="Inter" pitchFamily="34" charset="0"/>
-                <a:ea typeface="Inter" pitchFamily="34" charset="-122"/>
-                <a:cs typeface="Inter" pitchFamily="34" charset="-120"/>
-              </a:rPr>
-              <a:t>parallel cluster queries</a:t>
-            </a:r>
-            <a:endParaRPr lang="en-US" sz="850" dirty="0"/>
-          </a:p>
-        </p:txBody>
-      </p:sp>
-      <p:sp>
-        <p:nvSpPr>
-          <p:cNvPr id="18" name="Text 16"/>
-          <p:cNvSpPr/>
-          <p:nvPr/>
-        </p:nvSpPr>
-        <p:spPr>
-          <a:xfrm>
-            <a:off x="5966460" y="2816352"/>
-            <a:ext cx="274320" cy="256032"/>
-          </a:xfrm>
-          <a:prstGeom prst="rect">
-            <a:avLst/>
-          </a:prstGeom>
-          <a:noFill/>
-          <a:ln/>
-        </p:spPr>
-        <p:txBody>
-          <a:bodyPr wrap="square" rtlCol="0" anchor="ctr"/>
-          <a:lstStyle/>
-          <a:p>
-            <a:pPr algn="ctr" indent="0" marL="0">
-              <a:buNone/>
-            </a:pPr>
-            <a:r>
-              <a:rPr lang="en-US" sz="1100" dirty="0">
-                <a:solidFill>
-                  <a:srgbClr val="64748B"/>
-                </a:solidFill>
-                <a:latin typeface="Inter" pitchFamily="34" charset="0"/>
-                <a:ea typeface="Inter" pitchFamily="34" charset="-122"/>
-                <a:cs typeface="Inter" pitchFamily="34" charset="-120"/>
-              </a:rPr>
-              <a:t>▶</a:t>
-            </a:r>
-            <a:endParaRPr lang="en-US" sz="1100" dirty="0"/>
-          </a:p>
-        </p:txBody>
-      </p:sp>
-      <p:sp>
-        <p:nvSpPr>
-          <p:cNvPr id="19" name="Shape 17"/>
-          <p:cNvSpPr/>
-          <p:nvPr/>
-        </p:nvSpPr>
-        <p:spPr>
-          <a:xfrm>
-            <a:off x="6240780" y="2569464"/>
-            <a:ext cx="2640330" cy="749808"/>
-          </a:xfrm>
-          <a:prstGeom prst="roundRect">
-            <a:avLst>
-              <a:gd name="adj" fmla="val 8537"/>
-            </a:avLst>
-          </a:prstGeom>
-          <a:solidFill>
-            <a:srgbClr val="EDE9FE"/>
-          </a:solidFill>
-          <a:ln w="19050">
-            <a:solidFill>
-              <a:srgbClr val="7C3AED"/>
-            </a:solidFill>
-            <a:prstDash val="solid"/>
-          </a:ln>
-        </p:spPr>
-      </p:sp>
-      <p:sp>
-        <p:nvSpPr>
-          <p:cNvPr id="20" name="Text 18"/>
-          <p:cNvSpPr/>
-          <p:nvPr/>
-        </p:nvSpPr>
-        <p:spPr>
-          <a:xfrm>
-            <a:off x="6295644" y="2636947"/>
-            <a:ext cx="2530602" cy="314919"/>
-          </a:xfrm>
-          <a:prstGeom prst="rect">
-            <a:avLst/>
-          </a:prstGeom>
-          <a:noFill/>
-          <a:ln/>
-        </p:spPr>
-        <p:txBody>
-          <a:bodyPr wrap="square" rtlCol="0" anchor="ctr"/>
-          <a:lstStyle/>
-          <a:p>
-            <a:pPr algn="ctr" indent="0" marL="0">
-              <a:buNone/>
-            </a:pPr>
-            <a:r>
-              <a:rPr lang="en-US" sz="1050" b="1" dirty="0">
-                <a:solidFill>
-                  <a:srgbClr val="5B21B6"/>
-                </a:solidFill>
-                <a:latin typeface="Inter" pitchFamily="34" charset="0"/>
-                <a:ea typeface="Inter" pitchFamily="34" charset="-122"/>
-                <a:cs typeface="Inter" pitchFamily="34" charset="-120"/>
-              </a:rPr>
-              <a:t>🤖 Pod doctor diagnosis</a:t>
-            </a:r>
-            <a:endParaRPr lang="en-US" sz="1050" dirty="0"/>
-          </a:p>
-        </p:txBody>
-      </p:sp>
-      <p:sp>
-        <p:nvSpPr>
-          <p:cNvPr id="21" name="Text 19"/>
-          <p:cNvSpPr/>
-          <p:nvPr/>
-        </p:nvSpPr>
-        <p:spPr>
-          <a:xfrm>
-            <a:off x="6295644" y="2944368"/>
-            <a:ext cx="2530602" cy="329916"/>
-          </a:xfrm>
-          <a:prstGeom prst="rect">
-            <a:avLst/>
-          </a:prstGeom>
-          <a:noFill/>
-          <a:ln/>
-        </p:spPr>
-        <p:txBody>
-          <a:bodyPr wrap="square" rtlCol="0" anchor="t"/>
-          <a:lstStyle/>
-          <a:p>
-            <a:pPr algn="ctr" indent="0" marL="0">
-              <a:buNone/>
-            </a:pPr>
-            <a:r>
-              <a:rPr lang="en-US" sz="850" dirty="0">
-                <a:solidFill>
-                  <a:srgbClr val="475569"/>
-                </a:solidFill>
-                <a:latin typeface="Inter" pitchFamily="34" charset="0"/>
-                <a:ea typeface="Inter" pitchFamily="34" charset="-122"/>
-                <a:cs typeface="Inter" pitchFamily="34" charset="-120"/>
-              </a:rPr>
-              <a:t>error pattern recognised</a:t>
-            </a:r>
-            <a:endParaRPr lang="en-US" sz="850" dirty="0"/>
-          </a:p>
-        </p:txBody>
-      </p:sp>
-      <p:sp>
-        <p:nvSpPr>
-          <p:cNvPr id="22" name="Text 20"/>
-          <p:cNvSpPr/>
-          <p:nvPr/>
-        </p:nvSpPr>
-        <p:spPr>
-          <a:xfrm>
-            <a:off x="8881110" y="2816352"/>
-            <a:ext cx="274320" cy="256032"/>
-          </a:xfrm>
-          <a:prstGeom prst="rect">
-            <a:avLst/>
-          </a:prstGeom>
-          <a:noFill/>
-          <a:ln/>
-        </p:spPr>
-        <p:txBody>
-          <a:bodyPr wrap="square" rtlCol="0" anchor="ctr"/>
-          <a:lstStyle/>
-          <a:p>
-            <a:pPr algn="ctr" indent="0" marL="0">
-              <a:buNone/>
-            </a:pPr>
-            <a:r>
-              <a:rPr lang="en-US" sz="1100" dirty="0">
-                <a:solidFill>
-                  <a:srgbClr val="64748B"/>
-                </a:solidFill>
-                <a:latin typeface="Inter" pitchFamily="34" charset="0"/>
-                <a:ea typeface="Inter" pitchFamily="34" charset="-122"/>
-                <a:cs typeface="Inter" pitchFamily="34" charset="-120"/>
-              </a:rPr>
-              <a:t>▶</a:t>
-            </a:r>
-            <a:endParaRPr lang="en-US" sz="1100" dirty="0"/>
-          </a:p>
-        </p:txBody>
-      </p:sp>
-      <p:sp>
-        <p:nvSpPr>
-          <p:cNvPr id="23" name="Shape 21"/>
-          <p:cNvSpPr/>
-          <p:nvPr/>
-        </p:nvSpPr>
-        <p:spPr>
-          <a:xfrm>
-            <a:off x="9155430" y="2569464"/>
-            <a:ext cx="2640330" cy="749808"/>
-          </a:xfrm>
-          <a:prstGeom prst="roundRect">
-            <a:avLst>
-              <a:gd name="adj" fmla="val 8537"/>
-            </a:avLst>
-          </a:prstGeom>
-          <a:solidFill>
-            <a:srgbClr val="EDE9FE"/>
-          </a:solidFill>
-          <a:ln w="19050">
-            <a:solidFill>
-              <a:srgbClr val="7C3AED"/>
-            </a:solidFill>
-            <a:prstDash val="solid"/>
-          </a:ln>
-        </p:spPr>
-      </p:sp>
-      <p:sp>
-        <p:nvSpPr>
-          <p:cNvPr id="24" name="Text 22"/>
-          <p:cNvSpPr/>
-          <p:nvPr/>
-        </p:nvSpPr>
-        <p:spPr>
-          <a:xfrm>
-            <a:off x="9210294" y="2636947"/>
-            <a:ext cx="2530602" cy="314919"/>
-          </a:xfrm>
-          <a:prstGeom prst="rect">
-            <a:avLst/>
-          </a:prstGeom>
-          <a:noFill/>
-          <a:ln/>
-        </p:spPr>
-        <p:txBody>
-          <a:bodyPr wrap="square" rtlCol="0" anchor="ctr"/>
-          <a:lstStyle/>
-          <a:p>
-            <a:pPr algn="ctr" indent="0" marL="0">
-              <a:buNone/>
-            </a:pPr>
-            <a:r>
-              <a:rPr lang="en-US" sz="1050" b="1" dirty="0">
-                <a:solidFill>
-                  <a:srgbClr val="5B21B6"/>
-                </a:solidFill>
-                <a:latin typeface="Inter" pitchFamily="34" charset="0"/>
-                <a:ea typeface="Inter" pitchFamily="34" charset="-122"/>
-                <a:cs typeface="Inter" pitchFamily="34" charset="-120"/>
-              </a:rPr>
-              <a:t>🤖 Severity assessed</a:t>
-            </a:r>
-            <a:endParaRPr lang="en-US" sz="1050" dirty="0"/>
-          </a:p>
-        </p:txBody>
-      </p:sp>
-      <p:sp>
-        <p:nvSpPr>
-          <p:cNvPr id="25" name="Text 23"/>
-          <p:cNvSpPr/>
-          <p:nvPr/>
-        </p:nvSpPr>
-        <p:spPr>
-          <a:xfrm>
-            <a:off x="9210294" y="2944368"/>
-            <a:ext cx="2530602" cy="329916"/>
-          </a:xfrm>
-          <a:prstGeom prst="rect">
-            <a:avLst/>
-          </a:prstGeom>
-          <a:noFill/>
-          <a:ln/>
-        </p:spPr>
-        <p:txBody>
-          <a:bodyPr wrap="square" rtlCol="0" anchor="t"/>
-          <a:lstStyle/>
-          <a:p>
-            <a:pPr algn="ctr" indent="0" marL="0">
-              <a:buNone/>
-            </a:pPr>
-            <a:r>
-              <a:rPr lang="en-US" sz="850" dirty="0">
-                <a:solidFill>
-                  <a:srgbClr val="475569"/>
-                </a:solidFill>
-                <a:latin typeface="Inter" pitchFamily="34" charset="0"/>
-                <a:ea typeface="Inter" pitchFamily="34" charset="-122"/>
-                <a:cs typeface="Inter" pitchFamily="34" charset="-120"/>
-              </a:rPr>
-              <a:t>impact and urgency</a:t>
-            </a:r>
-            <a:endParaRPr lang="en-US" sz="850" dirty="0"/>
-          </a:p>
-        </p:txBody>
-      </p:sp>
-      <p:sp>
-        <p:nvSpPr>
-          <p:cNvPr id="26" name="Text 24"/>
-          <p:cNvSpPr/>
-          <p:nvPr/>
-        </p:nvSpPr>
-        <p:spPr>
-          <a:xfrm>
-            <a:off x="411480" y="3438144"/>
-            <a:ext cx="7315200" cy="173736"/>
-          </a:xfrm>
-          <a:prstGeom prst="rect">
-            <a:avLst/>
-          </a:prstGeom>
-          <a:noFill/>
-          <a:ln/>
-        </p:spPr>
-        <p:txBody>
-          <a:bodyPr wrap="square" rtlCol="0" anchor="ctr"/>
-          <a:lstStyle/>
-          <a:p>
-            <a:pPr indent="0" marL="0">
-              <a:buNone/>
-            </a:pPr>
-            <a:r>
-              <a:rPr lang="en-US" sz="900" b="1" spc="120" kern="0" dirty="0">
-                <a:solidFill>
-                  <a:srgbClr val="64748B"/>
-                </a:solidFill>
-                <a:latin typeface="Inter" pitchFamily="34" charset="0"/>
-                <a:ea typeface="Inter" pitchFamily="34" charset="-122"/>
-                <a:cs typeface="Inter" pitchFamily="34" charset="-120"/>
-              </a:rPr>
-              <a:t>TICKET &amp; PROPOSAL</a:t>
-            </a:r>
-            <a:endParaRPr lang="en-US" sz="900" dirty="0"/>
-          </a:p>
-        </p:txBody>
-      </p:sp>
-      <p:sp>
-        <p:nvSpPr>
-          <p:cNvPr id="27" name="Shape 25"/>
-          <p:cNvSpPr/>
-          <p:nvPr/>
-        </p:nvSpPr>
-        <p:spPr>
-          <a:xfrm>
-            <a:off x="411480" y="3611880"/>
-            <a:ext cx="2640330" cy="749808"/>
-          </a:xfrm>
-          <a:prstGeom prst="roundRect">
-            <a:avLst>
-              <a:gd name="adj" fmla="val 8537"/>
-            </a:avLst>
-          </a:prstGeom>
-          <a:solidFill>
-            <a:srgbClr val="DBEAFE"/>
-          </a:solidFill>
-          <a:ln w="19050">
-            <a:solidFill>
-              <a:srgbClr val="2563EB"/>
-            </a:solidFill>
-            <a:prstDash val="solid"/>
-          </a:ln>
-        </p:spPr>
-      </p:sp>
-      <p:sp>
-        <p:nvSpPr>
-          <p:cNvPr id="28" name="Text 26"/>
-          <p:cNvSpPr/>
-          <p:nvPr/>
-        </p:nvSpPr>
-        <p:spPr>
-          <a:xfrm>
-            <a:off x="466344" y="3679363"/>
-            <a:ext cx="2530602" cy="314919"/>
-          </a:xfrm>
-          <a:prstGeom prst="rect">
-            <a:avLst/>
-          </a:prstGeom>
-          <a:noFill/>
-          <a:ln/>
-        </p:spPr>
-        <p:txBody>
-          <a:bodyPr wrap="square" rtlCol="0" anchor="ctr"/>
-          <a:lstStyle/>
-          <a:p>
-            <a:pPr algn="ctr" indent="0" marL="0">
-              <a:buNone/>
-            </a:pPr>
-            <a:r>
-              <a:rPr lang="en-US" sz="1050" b="1" dirty="0">
-                <a:solidFill>
-                  <a:srgbClr val="1E40AF"/>
-                </a:solidFill>
-                <a:latin typeface="Inter" pitchFamily="34" charset="0"/>
-                <a:ea typeface="Inter" pitchFamily="34" charset="-122"/>
-                <a:cs typeface="Inter" pitchFamily="34" charset="-120"/>
-              </a:rPr>
-              <a:t>⚙️ ServiceNow INC created</a:t>
-            </a:r>
-            <a:endParaRPr lang="en-US" sz="1050" dirty="0"/>
-          </a:p>
-        </p:txBody>
-      </p:sp>
-      <p:sp>
-        <p:nvSpPr>
-          <p:cNvPr id="29" name="Text 27"/>
-          <p:cNvSpPr/>
-          <p:nvPr/>
-        </p:nvSpPr>
-        <p:spPr>
-          <a:xfrm>
-            <a:off x="466344" y="3986784"/>
-            <a:ext cx="2530602" cy="329916"/>
-          </a:xfrm>
-          <a:prstGeom prst="rect">
-            <a:avLst/>
-          </a:prstGeom>
-          <a:noFill/>
-          <a:ln/>
-        </p:spPr>
-        <p:txBody>
-          <a:bodyPr wrap="square" rtlCol="0" anchor="t"/>
-          <a:lstStyle/>
-          <a:p>
-            <a:pPr algn="ctr" indent="0" marL="0">
-              <a:buNone/>
-            </a:pPr>
-            <a:r>
-              <a:rPr lang="en-US" sz="850" dirty="0">
-                <a:solidFill>
-                  <a:srgbClr val="475569"/>
-                </a:solidFill>
-                <a:latin typeface="Inter" pitchFamily="34" charset="0"/>
-                <a:ea typeface="Inter" pitchFamily="34" charset="-122"/>
-                <a:cs typeface="Inter" pitchFamily="34" charset="-120"/>
-              </a:rPr>
-              <a:t>auto-populated from evidence</a:t>
-            </a:r>
-            <a:endParaRPr lang="en-US" sz="850" dirty="0"/>
-          </a:p>
-        </p:txBody>
-      </p:sp>
-      <p:sp>
-        <p:nvSpPr>
-          <p:cNvPr id="30" name="Text 28"/>
-          <p:cNvSpPr/>
-          <p:nvPr/>
-        </p:nvSpPr>
-        <p:spPr>
-          <a:xfrm>
-            <a:off x="3051810" y="3858768"/>
-            <a:ext cx="274320" cy="256032"/>
-          </a:xfrm>
-          <a:prstGeom prst="rect">
-            <a:avLst/>
-          </a:prstGeom>
-          <a:noFill/>
-          <a:ln/>
-        </p:spPr>
-        <p:txBody>
-          <a:bodyPr wrap="square" rtlCol="0" anchor="ctr"/>
-          <a:lstStyle/>
-          <a:p>
-            <a:pPr algn="ctr" indent="0" marL="0">
-              <a:buNone/>
-            </a:pPr>
-            <a:r>
-              <a:rPr lang="en-US" sz="1100" dirty="0">
-                <a:solidFill>
-                  <a:srgbClr val="64748B"/>
-                </a:solidFill>
-                <a:latin typeface="Inter" pitchFamily="34" charset="0"/>
-                <a:ea typeface="Inter" pitchFamily="34" charset="-122"/>
-                <a:cs typeface="Inter" pitchFamily="34" charset="-120"/>
-              </a:rPr>
-              <a:t>▶</a:t>
-            </a:r>
-            <a:endParaRPr lang="en-US" sz="1100" dirty="0"/>
-          </a:p>
-        </p:txBody>
-      </p:sp>
-      <p:sp>
-        <p:nvSpPr>
-          <p:cNvPr id="31" name="Shape 29"/>
-          <p:cNvSpPr/>
-          <p:nvPr/>
-        </p:nvSpPr>
-        <p:spPr>
-          <a:xfrm>
-            <a:off x="3326130" y="3611880"/>
-            <a:ext cx="2640330" cy="749808"/>
-          </a:xfrm>
-          <a:prstGeom prst="roundRect">
-            <a:avLst>
-              <a:gd name="adj" fmla="val 8537"/>
-            </a:avLst>
-          </a:prstGeom>
-          <a:solidFill>
-            <a:srgbClr val="DBEAFE"/>
-          </a:solidFill>
-          <a:ln w="19050">
-            <a:solidFill>
-              <a:srgbClr val="2563EB"/>
-            </a:solidFill>
-            <a:prstDash val="solid"/>
-          </a:ln>
-        </p:spPr>
-      </p:sp>
-      <p:sp>
-        <p:nvSpPr>
-          <p:cNvPr id="32" name="Text 30"/>
-          <p:cNvSpPr/>
-          <p:nvPr/>
-        </p:nvSpPr>
-        <p:spPr>
-          <a:xfrm>
-            <a:off x="3380994" y="3679363"/>
-            <a:ext cx="2530602" cy="314919"/>
-          </a:xfrm>
-          <a:prstGeom prst="rect">
-            <a:avLst/>
-          </a:prstGeom>
-          <a:noFill/>
-          <a:ln/>
-        </p:spPr>
-        <p:txBody>
-          <a:bodyPr wrap="square" rtlCol="0" anchor="ctr"/>
-          <a:lstStyle/>
-          <a:p>
-            <a:pPr algn="ctr" indent="0" marL="0">
-              <a:buNone/>
-            </a:pPr>
-            <a:r>
-              <a:rPr lang="en-US" sz="1050" b="1" dirty="0">
-                <a:solidFill>
-                  <a:srgbClr val="1E40AF"/>
-                </a:solidFill>
-                <a:latin typeface="Inter" pitchFamily="34" charset="0"/>
-                <a:ea typeface="Inter" pitchFamily="34" charset="-122"/>
-                <a:cs typeface="Inter" pitchFamily="34" charset="-120"/>
-              </a:rPr>
-              <a:t>⚙️ Smart fix proposed</a:t>
-            </a:r>
-            <a:endParaRPr lang="en-US" sz="1050" dirty="0"/>
-          </a:p>
-        </p:txBody>
-      </p:sp>
-      <p:sp>
-        <p:nvSpPr>
-          <p:cNvPr id="33" name="Text 31"/>
-          <p:cNvSpPr/>
-          <p:nvPr/>
-        </p:nvSpPr>
-        <p:spPr>
-          <a:xfrm>
-            <a:off x="3380994" y="3986784"/>
-            <a:ext cx="2530602" cy="329916"/>
-          </a:xfrm>
-          <a:prstGeom prst="rect">
-            <a:avLst/>
-          </a:prstGeom>
-          <a:noFill/>
-          <a:ln/>
-        </p:spPr>
-        <p:txBody>
-          <a:bodyPr wrap="square" rtlCol="0" anchor="t"/>
-          <a:lstStyle/>
-          <a:p>
-            <a:pPr algn="ctr" indent="0" marL="0">
-              <a:buNone/>
-            </a:pPr>
-            <a:r>
-              <a:rPr lang="en-US" sz="850" dirty="0">
-                <a:solidFill>
-                  <a:srgbClr val="475569"/>
-                </a:solidFill>
-                <a:latin typeface="Inter" pitchFamily="34" charset="0"/>
-                <a:ea typeface="Inter" pitchFamily="34" charset="-122"/>
-                <a:cs typeface="Inter" pitchFamily="34" charset="-120"/>
-              </a:rPr>
-              <a:t>targeted, not generic</a:t>
-            </a:r>
-            <a:endParaRPr lang="en-US" sz="850" dirty="0"/>
-          </a:p>
-        </p:txBody>
-      </p:sp>
-      <p:sp>
-        <p:nvSpPr>
-          <p:cNvPr id="34" name="Text 32"/>
-          <p:cNvSpPr/>
-          <p:nvPr/>
-        </p:nvSpPr>
-        <p:spPr>
-          <a:xfrm>
-            <a:off x="5966460" y="3858768"/>
-            <a:ext cx="274320" cy="256032"/>
-          </a:xfrm>
-          <a:prstGeom prst="rect">
-            <a:avLst/>
-          </a:prstGeom>
-          <a:noFill/>
-          <a:ln/>
-        </p:spPr>
-        <p:txBody>
-          <a:bodyPr wrap="square" rtlCol="0" anchor="ctr"/>
-          <a:lstStyle/>
-          <a:p>
-            <a:pPr algn="ctr" indent="0" marL="0">
-              <a:buNone/>
-            </a:pPr>
-            <a:r>
-              <a:rPr lang="en-US" sz="1100" dirty="0">
-                <a:solidFill>
-                  <a:srgbClr val="64748B"/>
-                </a:solidFill>
-                <a:latin typeface="Inter" pitchFamily="34" charset="0"/>
-                <a:ea typeface="Inter" pitchFamily="34" charset="-122"/>
-                <a:cs typeface="Inter" pitchFamily="34" charset="-120"/>
-              </a:rPr>
-              <a:t>▶</a:t>
-            </a:r>
-            <a:endParaRPr lang="en-US" sz="1100" dirty="0"/>
-          </a:p>
-        </p:txBody>
-      </p:sp>
-      <p:sp>
-        <p:nvSpPr>
-          <p:cNvPr id="35" name="Shape 33"/>
-          <p:cNvSpPr/>
-          <p:nvPr/>
-        </p:nvSpPr>
-        <p:spPr>
-          <a:xfrm>
-            <a:off x="6240780" y="3611880"/>
-            <a:ext cx="2640330" cy="749808"/>
-          </a:xfrm>
-          <a:prstGeom prst="roundRect">
-            <a:avLst>
-              <a:gd name="adj" fmla="val 8537"/>
-            </a:avLst>
-          </a:prstGeom>
-          <a:solidFill>
-            <a:srgbClr val="DBEAFE"/>
-          </a:solidFill>
-          <a:ln w="19050">
-            <a:solidFill>
-              <a:srgbClr val="2563EB"/>
-            </a:solidFill>
-            <a:prstDash val="solid"/>
-          </a:ln>
-        </p:spPr>
-      </p:sp>
-      <p:sp>
-        <p:nvSpPr>
-          <p:cNvPr id="36" name="Text 34"/>
-          <p:cNvSpPr/>
-          <p:nvPr/>
-        </p:nvSpPr>
-        <p:spPr>
-          <a:xfrm>
-            <a:off x="6295644" y="3679363"/>
-            <a:ext cx="2530602" cy="314919"/>
-          </a:xfrm>
-          <a:prstGeom prst="rect">
-            <a:avLst/>
-          </a:prstGeom>
-          <a:noFill/>
-          <a:ln/>
-        </p:spPr>
-        <p:txBody>
-          <a:bodyPr wrap="square" rtlCol="0" anchor="ctr"/>
-          <a:lstStyle/>
-          <a:p>
-            <a:pPr algn="ctr" indent="0" marL="0">
-              <a:buNone/>
-            </a:pPr>
-            <a:r>
-              <a:rPr lang="en-US" sz="1050" b="1" dirty="0">
-                <a:solidFill>
-                  <a:srgbClr val="1E40AF"/>
-                </a:solidFill>
-                <a:latin typeface="Inter" pitchFamily="34" charset="0"/>
-                <a:ea typeface="Inter" pitchFamily="34" charset="-122"/>
-                <a:cs typeface="Inter" pitchFamily="34" charset="-120"/>
-              </a:rPr>
-              <a:t>⚙️ Dry-run validation</a:t>
-            </a:r>
-            <a:endParaRPr lang="en-US" sz="1050" dirty="0"/>
-          </a:p>
-        </p:txBody>
-      </p:sp>
-      <p:sp>
-        <p:nvSpPr>
-          <p:cNvPr id="37" name="Text 35"/>
-          <p:cNvSpPr/>
-          <p:nvPr/>
-        </p:nvSpPr>
-        <p:spPr>
-          <a:xfrm>
-            <a:off x="6295644" y="3986784"/>
-            <a:ext cx="2530602" cy="329916"/>
-          </a:xfrm>
-          <a:prstGeom prst="rect">
-            <a:avLst/>
-          </a:prstGeom>
-          <a:noFill/>
-          <a:ln/>
-        </p:spPr>
-        <p:txBody>
-          <a:bodyPr wrap="square" rtlCol="0" anchor="t"/>
-          <a:lstStyle/>
-          <a:p>
-            <a:pPr algn="ctr" indent="0" marL="0">
-              <a:buNone/>
-            </a:pPr>
-            <a:r>
-              <a:rPr lang="en-US" sz="850" dirty="0">
-                <a:solidFill>
-                  <a:srgbClr val="475569"/>
-                </a:solidFill>
-                <a:latin typeface="Inter" pitchFamily="34" charset="0"/>
-                <a:ea typeface="Inter" pitchFamily="34" charset="-122"/>
-                <a:cs typeface="Inter" pitchFamily="34" charset="-120"/>
-              </a:rPr>
-              <a:t>effect known before approval</a:t>
-            </a:r>
-            <a:endParaRPr lang="en-US" sz="850" dirty="0"/>
-          </a:p>
-        </p:txBody>
-      </p:sp>
-      <p:sp>
-        <p:nvSpPr>
-          <p:cNvPr id="38" name="Text 36"/>
-          <p:cNvSpPr/>
-          <p:nvPr/>
-        </p:nvSpPr>
-        <p:spPr>
-          <a:xfrm>
-            <a:off x="8881110" y="3858768"/>
-            <a:ext cx="274320" cy="256032"/>
-          </a:xfrm>
-          <a:prstGeom prst="rect">
-            <a:avLst/>
-          </a:prstGeom>
-          <a:noFill/>
-          <a:ln/>
-        </p:spPr>
-        <p:txBody>
-          <a:bodyPr wrap="square" rtlCol="0" anchor="ctr"/>
-          <a:lstStyle/>
-          <a:p>
-            <a:pPr algn="ctr" indent="0" marL="0">
-              <a:buNone/>
-            </a:pPr>
-            <a:r>
-              <a:rPr lang="en-US" sz="1100" dirty="0">
-                <a:solidFill>
-                  <a:srgbClr val="64748B"/>
-                </a:solidFill>
-                <a:latin typeface="Inter" pitchFamily="34" charset="0"/>
-                <a:ea typeface="Inter" pitchFamily="34" charset="-122"/>
-                <a:cs typeface="Inter" pitchFamily="34" charset="-120"/>
-              </a:rPr>
-              <a:t>▶</a:t>
-            </a:r>
-            <a:endParaRPr lang="en-US" sz="1100" dirty="0"/>
-          </a:p>
-        </p:txBody>
-      </p:sp>
-      <p:sp>
-        <p:nvSpPr>
-          <p:cNvPr id="39" name="Shape 37"/>
-          <p:cNvSpPr/>
-          <p:nvPr/>
-        </p:nvSpPr>
-        <p:spPr>
-          <a:xfrm>
-            <a:off x="9155430" y="3611880"/>
-            <a:ext cx="2640330" cy="749808"/>
-          </a:xfrm>
-          <a:prstGeom prst="roundRect">
-            <a:avLst>
-              <a:gd name="adj" fmla="val 8537"/>
-            </a:avLst>
-          </a:prstGeom>
-          <a:solidFill>
-            <a:srgbClr val="FEF3C7"/>
-          </a:solidFill>
-          <a:ln w="19050">
-            <a:solidFill>
-              <a:srgbClr val="D97706"/>
-            </a:solidFill>
-            <a:prstDash val="solid"/>
-          </a:ln>
-        </p:spPr>
-      </p:sp>
-      <p:sp>
-        <p:nvSpPr>
-          <p:cNvPr id="40" name="Text 38"/>
-          <p:cNvSpPr/>
-          <p:nvPr/>
-        </p:nvSpPr>
-        <p:spPr>
-          <a:xfrm>
-            <a:off x="9210294" y="3679363"/>
-            <a:ext cx="2530602" cy="314919"/>
-          </a:xfrm>
-          <a:prstGeom prst="rect">
-            <a:avLst/>
-          </a:prstGeom>
-          <a:noFill/>
-          <a:ln/>
-        </p:spPr>
-        <p:txBody>
-          <a:bodyPr wrap="square" rtlCol="0" anchor="ctr"/>
-          <a:lstStyle/>
-          <a:p>
-            <a:pPr algn="ctr" indent="0" marL="0">
-              <a:buNone/>
-            </a:pPr>
-            <a:r>
-              <a:rPr lang="en-US" sz="1050" b="1" dirty="0">
-                <a:solidFill>
-                  <a:srgbClr val="92400E"/>
-                </a:solidFill>
-                <a:latin typeface="Inter" pitchFamily="34" charset="0"/>
-                <a:ea typeface="Inter" pitchFamily="34" charset="-122"/>
-                <a:cs typeface="Inter" pitchFamily="34" charset="-120"/>
-              </a:rPr>
-              <a:t>👤 Fix card — approve</a:t>
-            </a:r>
-            <a:endParaRPr lang="en-US" sz="1050" dirty="0"/>
-          </a:p>
-        </p:txBody>
-      </p:sp>
-      <p:sp>
-        <p:nvSpPr>
-          <p:cNvPr id="41" name="Text 39"/>
-          <p:cNvSpPr/>
-          <p:nvPr/>
-        </p:nvSpPr>
-        <p:spPr>
-          <a:xfrm>
-            <a:off x="9210294" y="3986784"/>
-            <a:ext cx="2530602" cy="329916"/>
-          </a:xfrm>
-          <a:prstGeom prst="rect">
-            <a:avLst/>
-          </a:prstGeom>
-          <a:noFill/>
-          <a:ln/>
-        </p:spPr>
-        <p:txBody>
-          <a:bodyPr wrap="square" rtlCol="0" anchor="t"/>
-          <a:lstStyle/>
-          <a:p>
-            <a:pPr algn="ctr" indent="0" marL="0">
-              <a:buNone/>
-            </a:pPr>
-            <a:r>
-              <a:rPr lang="en-US" sz="850" dirty="0">
-                <a:solidFill>
-                  <a:srgbClr val="475569"/>
-                </a:solidFill>
-                <a:latin typeface="Inter" pitchFamily="34" charset="0"/>
-                <a:ea typeface="Inter" pitchFamily="34" charset="-122"/>
-                <a:cs typeface="Inter" pitchFamily="34" charset="-120"/>
-              </a:rPr>
-              <a:t>in AI Chat</a:t>
-            </a:r>
-            <a:endParaRPr lang="en-US" sz="850" dirty="0"/>
-          </a:p>
-        </p:txBody>
-      </p:sp>
-      <p:sp>
-        <p:nvSpPr>
-          <p:cNvPr id="42" name="Shape 40"/>
-          <p:cNvSpPr/>
-          <p:nvPr/>
-        </p:nvSpPr>
-        <p:spPr>
-          <a:xfrm>
-            <a:off x="411480" y="6089904"/>
-            <a:ext cx="173736" cy="173736"/>
-          </a:xfrm>
-          <a:prstGeom prst="roundRect">
-            <a:avLst>
-              <a:gd name="adj" fmla="val 15789"/>
-            </a:avLst>
-          </a:prstGeom>
-          <a:solidFill>
-            <a:srgbClr val="EDE9FE"/>
-          </a:solidFill>
-          <a:ln w="12700">
-            <a:solidFill>
-              <a:srgbClr val="7C3AED"/>
-            </a:solidFill>
-            <a:prstDash val="solid"/>
-          </a:ln>
-        </p:spPr>
-      </p:sp>
-      <p:sp>
-        <p:nvSpPr>
-          <p:cNvPr id="43" name="Text 41"/>
-          <p:cNvSpPr/>
-          <p:nvPr/>
-        </p:nvSpPr>
-        <p:spPr>
-          <a:xfrm>
-            <a:off x="621792" y="6053328"/>
-            <a:ext cx="868680" cy="237744"/>
-          </a:xfrm>
-          <a:prstGeom prst="rect">
-            <a:avLst/>
-          </a:prstGeom>
-          <a:noFill/>
-          <a:ln/>
-        </p:spPr>
-        <p:txBody>
-          <a:bodyPr wrap="square" rtlCol="0" anchor="ctr"/>
-          <a:lstStyle/>
-          <a:p>
-            <a:pPr indent="0" marL="0">
-              <a:buNone/>
-            </a:pPr>
-            <a:r>
-              <a:rPr lang="en-US" sz="850" dirty="0">
-                <a:solidFill>
-                  <a:srgbClr val="475569"/>
-                </a:solidFill>
-                <a:latin typeface="Inter" pitchFamily="34" charset="0"/>
-                <a:ea typeface="Inter" pitchFamily="34" charset="-122"/>
-                <a:cs typeface="Inter" pitchFamily="34" charset="-120"/>
-              </a:rPr>
-              <a:t>AI</a:t>
-            </a:r>
-            <a:endParaRPr lang="en-US" sz="850" dirty="0"/>
-          </a:p>
-        </p:txBody>
-      </p:sp>
-      <p:sp>
-        <p:nvSpPr>
-          <p:cNvPr id="44" name="Shape 42"/>
-          <p:cNvSpPr/>
-          <p:nvPr/>
-        </p:nvSpPr>
-        <p:spPr>
-          <a:xfrm>
-            <a:off x="1554480" y="6089904"/>
-            <a:ext cx="173736" cy="173736"/>
-          </a:xfrm>
-          <a:prstGeom prst="roundRect">
-            <a:avLst>
-              <a:gd name="adj" fmla="val 15789"/>
-            </a:avLst>
-          </a:prstGeom>
-          <a:solidFill>
-            <a:srgbClr val="DBEAFE"/>
-          </a:solidFill>
-          <a:ln w="12700">
-            <a:solidFill>
-              <a:srgbClr val="2563EB"/>
-            </a:solidFill>
-            <a:prstDash val="solid"/>
-          </a:ln>
-        </p:spPr>
-      </p:sp>
-      <p:sp>
-        <p:nvSpPr>
-          <p:cNvPr id="45" name="Text 43"/>
-          <p:cNvSpPr/>
-          <p:nvPr/>
-        </p:nvSpPr>
-        <p:spPr>
-          <a:xfrm>
-            <a:off x="1764792" y="6053328"/>
-            <a:ext cx="868680" cy="237744"/>
-          </a:xfrm>
-          <a:prstGeom prst="rect">
-            <a:avLst/>
-          </a:prstGeom>
-          <a:noFill/>
-          <a:ln/>
-        </p:spPr>
-        <p:txBody>
-          <a:bodyPr wrap="square" rtlCol="0" anchor="ctr"/>
-          <a:lstStyle/>
-          <a:p>
-            <a:pPr indent="0" marL="0">
-              <a:buNone/>
-            </a:pPr>
-            <a:r>
-              <a:rPr lang="en-US" sz="850" dirty="0">
-                <a:solidFill>
-                  <a:srgbClr val="475569"/>
-                </a:solidFill>
-                <a:latin typeface="Inter" pitchFamily="34" charset="0"/>
-                <a:ea typeface="Inter" pitchFamily="34" charset="-122"/>
-                <a:cs typeface="Inter" pitchFamily="34" charset="-120"/>
-              </a:rPr>
-              <a:t>Automatic</a:t>
-            </a:r>
-            <a:endParaRPr lang="en-US" sz="850" dirty="0"/>
-          </a:p>
-        </p:txBody>
-      </p:sp>
-      <p:sp>
-        <p:nvSpPr>
-          <p:cNvPr id="46" name="Shape 44"/>
-          <p:cNvSpPr/>
-          <p:nvPr/>
-        </p:nvSpPr>
-        <p:spPr>
-          <a:xfrm>
-            <a:off x="2697480" y="6089904"/>
-            <a:ext cx="173736" cy="173736"/>
-          </a:xfrm>
-          <a:prstGeom prst="roundRect">
-            <a:avLst>
-              <a:gd name="adj" fmla="val 15789"/>
-            </a:avLst>
-          </a:prstGeom>
-          <a:solidFill>
-            <a:srgbClr val="FEF3C7"/>
-          </a:solidFill>
-          <a:ln w="12700">
-            <a:solidFill>
-              <a:srgbClr val="D97706"/>
-            </a:solidFill>
-            <a:prstDash val="solid"/>
-          </a:ln>
-        </p:spPr>
-      </p:sp>
-      <p:sp>
-        <p:nvSpPr>
-          <p:cNvPr id="47" name="Text 45"/>
-          <p:cNvSpPr/>
-          <p:nvPr/>
-        </p:nvSpPr>
-        <p:spPr>
-          <a:xfrm>
-            <a:off x="2907792" y="6053328"/>
-            <a:ext cx="868680" cy="237744"/>
-          </a:xfrm>
-          <a:prstGeom prst="rect">
-            <a:avLst/>
-          </a:prstGeom>
-          <a:noFill/>
-          <a:ln/>
-        </p:spPr>
-        <p:txBody>
-          <a:bodyPr wrap="square" rtlCol="0" anchor="ctr"/>
-          <a:lstStyle/>
-          <a:p>
-            <a:pPr indent="0" marL="0">
-              <a:buNone/>
-            </a:pPr>
-            <a:r>
-              <a:rPr lang="en-US" sz="850" dirty="0">
-                <a:solidFill>
-                  <a:srgbClr val="475569"/>
-                </a:solidFill>
-                <a:latin typeface="Inter" pitchFamily="34" charset="0"/>
-                <a:ea typeface="Inter" pitchFamily="34" charset="-122"/>
-                <a:cs typeface="Inter" pitchFamily="34" charset="-120"/>
-              </a:rPr>
-              <a:t>Human</a:t>
-            </a:r>
-            <a:endParaRPr lang="en-US" sz="850" dirty="0"/>
-          </a:p>
-        </p:txBody>
-      </p:sp>
-      <p:sp>
-        <p:nvSpPr>
-          <p:cNvPr id="48" name="Shape 46"/>
-          <p:cNvSpPr/>
-          <p:nvPr/>
-        </p:nvSpPr>
-        <p:spPr>
-          <a:xfrm>
-            <a:off x="3840480" y="6089904"/>
-            <a:ext cx="173736" cy="173736"/>
-          </a:xfrm>
-          <a:prstGeom prst="roundRect">
-            <a:avLst>
-              <a:gd name="adj" fmla="val 15789"/>
-            </a:avLst>
-          </a:prstGeom>
-          <a:solidFill>
-            <a:srgbClr val="D1FAE5"/>
-          </a:solidFill>
-          <a:ln w="12700">
-            <a:solidFill>
-              <a:srgbClr val="059669"/>
-            </a:solidFill>
-            <a:prstDash val="solid"/>
-          </a:ln>
-        </p:spPr>
-      </p:sp>
-      <p:sp>
-        <p:nvSpPr>
-          <p:cNvPr id="49" name="Text 47"/>
-          <p:cNvSpPr/>
-          <p:nvPr/>
-        </p:nvSpPr>
-        <p:spPr>
-          <a:xfrm>
-            <a:off x="4050792" y="6053328"/>
-            <a:ext cx="868680" cy="237744"/>
-          </a:xfrm>
-          <a:prstGeom prst="rect">
-            <a:avLst/>
-          </a:prstGeom>
-          <a:noFill/>
-          <a:ln/>
-        </p:spPr>
-        <p:txBody>
-          <a:bodyPr wrap="square" rtlCol="0" anchor="ctr"/>
-          <a:lstStyle/>
-          <a:p>
-            <a:pPr indent="0" marL="0">
-              <a:buNone/>
-            </a:pPr>
-            <a:r>
-              <a:rPr lang="en-US" sz="850" dirty="0">
-                <a:solidFill>
-                  <a:srgbClr val="475569"/>
-                </a:solidFill>
-                <a:latin typeface="Inter" pitchFamily="34" charset="0"/>
-                <a:ea typeface="Inter" pitchFamily="34" charset="-122"/>
-                <a:cs typeface="Inter" pitchFamily="34" charset="-120"/>
-              </a:rPr>
-              <a:t>Verified</a:t>
-            </a:r>
-            <a:endParaRPr lang="en-US" sz="850" dirty="0"/>
-          </a:p>
-        </p:txBody>
-      </p:sp>
-      <p:sp>
-        <p:nvSpPr>
-          <p:cNvPr id="50" name="Text 48"/>
-          <p:cNvSpPr/>
-          <p:nvPr/>
-        </p:nvSpPr>
-        <p:spPr>
-          <a:xfrm>
-            <a:off x="5120640" y="6025896"/>
-            <a:ext cx="6675120" cy="292608"/>
-          </a:xfrm>
-          <a:prstGeom prst="rect">
-            <a:avLst/>
-          </a:prstGeom>
-          <a:noFill/>
-          <a:ln/>
-        </p:spPr>
-        <p:txBody>
-          <a:bodyPr wrap="square" rtlCol="0" anchor="ctr"/>
-          <a:lstStyle/>
-          <a:p>
-            <a:pPr algn="r" indent="0" marL="0">
-              <a:buNone/>
-            </a:pPr>
-            <a:r>
-              <a:rPr lang="en-US" sz="1050" b="1" dirty="0">
-                <a:solidFill>
-                  <a:srgbClr val="7C3AED"/>
-                </a:solidFill>
-                <a:latin typeface="Inter" pitchFamily="34" charset="0"/>
-                <a:ea typeface="Inter" pitchFamily="34" charset="-122"/>
-                <a:cs typeface="Inter" pitchFamily="34" charset="-120"/>
-              </a:rPr>
-              <a:t>Question in, governed action out</a:t>
-            </a:r>
-            <a:endParaRPr lang="en-US" sz="1050" dirty="0"/>
-          </a:p>
-        </p:txBody>
-      </p:sp>
-    </p:spTree>
-  </p:cSld>
-  <p:clrMapOvr>
-    <a:masterClrMapping/>
-  </p:clrMapOvr>
-</p:sld>
-</file>
-
-<file path=ppt/slides/slide11.xml><?xml version="1.0" encoding="utf-8"?>
-<p:sld xmlns:a="http://schemas.openxmlformats.org/drawingml/2006/main" xmlns:r="http://schemas.openxmlformats.org/officeDocument/2006/relationships" xmlns:p="http://schemas.openxmlformats.org/presentationml/2006/main">
-  <p:cSld name="Slide 11">
     <p:bg>
       <p:bgPr>
         <a:solidFill>
@@ -4284,7 +2415,7 @@
                 <a:ea typeface="Inter" pitchFamily="34" charset="-122"/>
                 <a:cs typeface="Inter" pitchFamily="34" charset="-120"/>
               </a:rPr>
-              <a:t>One platform. One conversational surface. Nine use cases.</a:t>
+              <a:t>One platform. One conversational surface. Eight use cases.</a:t>
             </a:r>
             <a:endParaRPr lang="en-US" sz="3000" dirty="0"/>
           </a:p>
@@ -4527,7 +2658,7 @@
                 <a:ea typeface="Inter" pitchFamily="34" charset="-122"/>
                 <a:cs typeface="Inter" pitchFamily="34" charset="-120"/>
               </a:rPr>
-              <a:t>Container Troubleshooting Agent</a:t>
+              <a:t>Incident Response Agent</a:t>
             </a:r>
             <a:endParaRPr lang="en-US" sz="2300" dirty="0"/>
           </a:p>
@@ -4566,7 +2697,7 @@
                 <a:ea typeface="Inter" pitchFamily="34" charset="-122"/>
                 <a:cs typeface="Inter" pitchFamily="34" charset="-120"/>
               </a:rPr>
-              <a:t>AI-powered pod troubleshooting — ask in plain language, get a diagnosis backed by live cluster evidence</a:t>
+              <a:t>Container troubleshooting &amp; remediation — “why is my pod crashing?” to a verified, closed ticket</a:t>
             </a:r>
             <a:endParaRPr lang="en-US" sz="1050" dirty="0"/>
           </a:p>
@@ -4690,7 +2821,7 @@
                 <a:ea typeface="Inter" pitchFamily="34" charset="-122"/>
                 <a:cs typeface="Inter" pitchFamily="34" charset="-120"/>
               </a:rPr>
-              <a:t>An engineer asks “why is my pod crashing?” in natural language. The agent gathers real evidence from the cluster — pod status, container logs, events, resource limits and exit codes — and returns a root cause with the supporting data attached, instead of a list of commands to run. This is the conversational surface every other use case is reached through.</a:t>
+              <a:t>An engineer asks a question in plain language. The agent gathers real cluster evidence, diagnoses the root cause, assesses severity, raises the ServiceNow incident, and proposes a targeted fix — presented with a dry-run result attached, so the operator approves an action whose effect is already known. It then applies, proves recovery, and closes the ticket. This is the same remediation pipeline UC-05 runs autonomously; here it is entered by a person asking.</a:t>
             </a:r>
             <a:endParaRPr lang="en-US" sz="1200" dirty="0"/>
           </a:p>
@@ -4768,7 +2899,7 @@
                 <a:ea typeface="Inter" pitchFamily="34" charset="-122"/>
                 <a:cs typeface="Inter" pitchFamily="34" charset="-120"/>
               </a:rPr>
-              <a:t>ASK</a:t>
+              <a:t>ASK  →  DIAGNOSE</a:t>
             </a:r>
             <a:endParaRPr lang="en-US" sz="900" dirty="0"/>
           </a:p>
@@ -4783,11 +2914,11 @@
         <p:spPr>
           <a:xfrm>
             <a:off x="411480" y="2569464"/>
-            <a:ext cx="3611880" cy="749808"/>
+            <a:ext cx="2640330" cy="715503"/>
           </a:xfrm>
           <a:prstGeom prst="roundRect">
             <a:avLst>
-              <a:gd name="adj" fmla="val 8537"/>
+              <a:gd name="adj" fmla="val 8946"/>
             </a:avLst>
           </a:prstGeom>
           <a:solidFill>
@@ -4809,8 +2940,8 @@
         </p:nvSpPr>
         <p:spPr>
           <a:xfrm>
-            <a:off x="466344" y="2636947"/>
-            <a:ext cx="3502152" cy="314919"/>
+            <a:off x="466344" y="2633859"/>
+            <a:ext cx="2530602" cy="300511"/>
           </a:xfrm>
           <a:prstGeom prst="rect">
             <a:avLst/>
@@ -4848,8 +2979,8 @@
         </p:nvSpPr>
         <p:spPr>
           <a:xfrm>
-            <a:off x="466344" y="2944368"/>
-            <a:ext cx="3502152" cy="329916"/>
+            <a:off x="466344" y="2927216"/>
+            <a:ext cx="2530602" cy="314821"/>
           </a:xfrm>
           <a:prstGeom prst="rect">
             <a:avLst/>
@@ -4887,7 +3018,7 @@
         </p:nvSpPr>
         <p:spPr>
           <a:xfrm>
-            <a:off x="4023360" y="2816352"/>
+            <a:off x="3051810" y="2799200"/>
             <a:ext cx="274320" cy="256032"/>
           </a:xfrm>
           <a:prstGeom prst="rect">
@@ -4926,12 +3057,156 @@
         </p:nvSpPr>
         <p:spPr>
           <a:xfrm>
-            <a:off x="4297680" y="2569464"/>
-            <a:ext cx="3611880" cy="749808"/>
+            <a:off x="3326130" y="2569464"/>
+            <a:ext cx="2640330" cy="715503"/>
           </a:xfrm>
           <a:prstGeom prst="roundRect">
             <a:avLst>
-              <a:gd name="adj" fmla="val 8537"/>
+              <a:gd name="adj" fmla="val 8946"/>
+            </a:avLst>
+          </a:prstGeom>
+          <a:solidFill>
+            <a:srgbClr val="DBEAFE"/>
+          </a:solidFill>
+          <a:ln w="19050">
+            <a:solidFill>
+              <a:srgbClr val="2563EB"/>
+            </a:solidFill>
+            <a:prstDash val="solid"/>
+          </a:ln>
+        </p:spPr>
+      </p:sp>
+      <p:sp>
+        <p:nvSpPr>
+          <p:cNvPr id="16" name="Text 14"/>
+          <p:cNvSpPr/>
+          <p:nvPr/>
+        </p:nvSpPr>
+        <p:spPr>
+          <a:xfrm>
+            <a:off x="3380994" y="2633859"/>
+            <a:ext cx="2530602" cy="300511"/>
+          </a:xfrm>
+          <a:prstGeom prst="rect">
+            <a:avLst/>
+          </a:prstGeom>
+          <a:noFill/>
+          <a:ln/>
+        </p:spPr>
+        <p:txBody>
+          <a:bodyPr wrap="square" rtlCol="0" anchor="ctr"/>
+          <a:lstStyle/>
+          <a:p>
+            <a:pPr algn="ctr" indent="0" marL="0">
+              <a:buNone/>
+            </a:pPr>
+            <a:r>
+              <a:rPr lang="en-US" sz="1050" b="1" dirty="0">
+                <a:solidFill>
+                  <a:srgbClr val="1E40AF"/>
+                </a:solidFill>
+                <a:latin typeface="Inter" pitchFamily="34" charset="0"/>
+                <a:ea typeface="Inter" pitchFamily="34" charset="-122"/>
+                <a:cs typeface="Inter" pitchFamily="34" charset="-120"/>
+              </a:rPr>
+              <a:t>⚙️ Cluster context</a:t>
+            </a:r>
+            <a:endParaRPr lang="en-US" sz="1050" dirty="0"/>
+          </a:p>
+        </p:txBody>
+      </p:sp>
+      <p:sp>
+        <p:nvSpPr>
+          <p:cNvPr id="17" name="Text 15"/>
+          <p:cNvSpPr/>
+          <p:nvPr/>
+        </p:nvSpPr>
+        <p:spPr>
+          <a:xfrm>
+            <a:off x="3380994" y="2927216"/>
+            <a:ext cx="2530602" cy="314821"/>
+          </a:xfrm>
+          <a:prstGeom prst="rect">
+            <a:avLst/>
+          </a:prstGeom>
+          <a:noFill/>
+          <a:ln/>
+        </p:spPr>
+        <p:txBody>
+          <a:bodyPr wrap="square" rtlCol="0" anchor="t"/>
+          <a:lstStyle/>
+          <a:p>
+            <a:pPr algn="ctr" indent="0" marL="0">
+              <a:buNone/>
+            </a:pPr>
+            <a:r>
+              <a:rPr lang="en-US" sz="850" dirty="0">
+                <a:solidFill>
+                  <a:srgbClr val="475569"/>
+                </a:solidFill>
+                <a:latin typeface="Inter" pitchFamily="34" charset="0"/>
+                <a:ea typeface="Inter" pitchFamily="34" charset="-122"/>
+                <a:cs typeface="Inter" pitchFamily="34" charset="-120"/>
+              </a:rPr>
+              <a:t>parallel API calls</a:t>
+            </a:r>
+            <a:endParaRPr lang="en-US" sz="850" dirty="0"/>
+          </a:p>
+        </p:txBody>
+      </p:sp>
+      <p:sp>
+        <p:nvSpPr>
+          <p:cNvPr id="18" name="Text 16"/>
+          <p:cNvSpPr/>
+          <p:nvPr/>
+        </p:nvSpPr>
+        <p:spPr>
+          <a:xfrm>
+            <a:off x="5966460" y="2799200"/>
+            <a:ext cx="274320" cy="256032"/>
+          </a:xfrm>
+          <a:prstGeom prst="rect">
+            <a:avLst/>
+          </a:prstGeom>
+          <a:noFill/>
+          <a:ln/>
+        </p:spPr>
+        <p:txBody>
+          <a:bodyPr wrap="square" rtlCol="0" anchor="ctr"/>
+          <a:lstStyle/>
+          <a:p>
+            <a:pPr algn="ctr" indent="0" marL="0">
+              <a:buNone/>
+            </a:pPr>
+            <a:r>
+              <a:rPr lang="en-US" sz="1100" dirty="0">
+                <a:solidFill>
+                  <a:srgbClr val="64748B"/>
+                </a:solidFill>
+                <a:latin typeface="Inter" pitchFamily="34" charset="0"/>
+                <a:ea typeface="Inter" pitchFamily="34" charset="-122"/>
+                <a:cs typeface="Inter" pitchFamily="34" charset="-120"/>
+              </a:rPr>
+              <a:t>▶</a:t>
+            </a:r>
+            <a:endParaRPr lang="en-US" sz="1100" dirty="0"/>
+          </a:p>
+        </p:txBody>
+      </p:sp>
+      <p:sp>
+        <p:nvSpPr>
+          <p:cNvPr id="19" name="Shape 17"/>
+          <p:cNvSpPr/>
+          <p:nvPr/>
+        </p:nvSpPr>
+        <p:spPr>
+          <a:xfrm>
+            <a:off x="6240780" y="2569464"/>
+            <a:ext cx="2640330" cy="715503"/>
+          </a:xfrm>
+          <a:prstGeom prst="roundRect">
+            <a:avLst>
+              <a:gd name="adj" fmla="val 8946"/>
             </a:avLst>
           </a:prstGeom>
           <a:solidFill>
@@ -4947,14 +3222,14 @@
       </p:sp>
       <p:sp>
         <p:nvSpPr>
-          <p:cNvPr id="16" name="Text 14"/>
-          <p:cNvSpPr/>
-          <p:nvPr/>
-        </p:nvSpPr>
-        <p:spPr>
-          <a:xfrm>
-            <a:off x="4352544" y="2636947"/>
-            <a:ext cx="3502152" cy="314919"/>
+          <p:cNvPr id="20" name="Text 18"/>
+          <p:cNvSpPr/>
+          <p:nvPr/>
+        </p:nvSpPr>
+        <p:spPr>
+          <a:xfrm>
+            <a:off x="6295644" y="2633859"/>
+            <a:ext cx="2530602" cy="300511"/>
           </a:xfrm>
           <a:prstGeom prst="rect">
             <a:avLst/>
@@ -4978,7 +3253,7 @@
                 <a:ea typeface="Inter" pitchFamily="34" charset="-122"/>
                 <a:cs typeface="Inter" pitchFamily="34" charset="-120"/>
               </a:rPr>
-              <a:t>🤖 Intent understood</a:t>
+              <a:t>🤖 Pod doctor diagnosis</a:t>
             </a:r>
             <a:endParaRPr lang="en-US" sz="1050" dirty="0"/>
           </a:p>
@@ -4986,14 +3261,14 @@
       </p:sp>
       <p:sp>
         <p:nvSpPr>
-          <p:cNvPr id="17" name="Text 15"/>
-          <p:cNvSpPr/>
-          <p:nvPr/>
-        </p:nvSpPr>
-        <p:spPr>
-          <a:xfrm>
-            <a:off x="4352544" y="2944368"/>
-            <a:ext cx="3502152" cy="329916"/>
+          <p:cNvPr id="21" name="Text 19"/>
+          <p:cNvSpPr/>
+          <p:nvPr/>
+        </p:nvSpPr>
+        <p:spPr>
+          <a:xfrm>
+            <a:off x="6295644" y="2927216"/>
+            <a:ext cx="2530602" cy="314821"/>
           </a:xfrm>
           <a:prstGeom prst="rect">
             <a:avLst/>
@@ -5017,7 +3292,7 @@
                 <a:ea typeface="Inter" pitchFamily="34" charset="-122"/>
                 <a:cs typeface="Inter" pitchFamily="34" charset="-120"/>
               </a:rPr>
-              <a:t>which workload, which namespace</a:t>
+              <a:t>error pattern recognised</a:t>
             </a:r>
             <a:endParaRPr lang="en-US" sz="850" dirty="0"/>
           </a:p>
@@ -5025,13 +3300,13 @@
       </p:sp>
       <p:sp>
         <p:nvSpPr>
-          <p:cNvPr id="18" name="Text 16"/>
-          <p:cNvSpPr/>
-          <p:nvPr/>
-        </p:nvSpPr>
-        <p:spPr>
-          <a:xfrm>
-            <a:off x="7909560" y="2816352"/>
+          <p:cNvPr id="22" name="Text 20"/>
+          <p:cNvSpPr/>
+          <p:nvPr/>
+        </p:nvSpPr>
+        <p:spPr>
+          <a:xfrm>
+            <a:off x="8881110" y="2799200"/>
             <a:ext cx="274320" cy="256032"/>
           </a:xfrm>
           <a:prstGeom prst="rect">
@@ -5064,18 +3339,162 @@
       </p:sp>
       <p:sp>
         <p:nvSpPr>
-          <p:cNvPr id="19" name="Shape 17"/>
-          <p:cNvSpPr/>
-          <p:nvPr/>
-        </p:nvSpPr>
-        <p:spPr>
-          <a:xfrm>
-            <a:off x="8183880" y="2569464"/>
-            <a:ext cx="3611880" cy="749808"/>
+          <p:cNvPr id="23" name="Shape 21"/>
+          <p:cNvSpPr/>
+          <p:nvPr/>
+        </p:nvSpPr>
+        <p:spPr>
+          <a:xfrm>
+            <a:off x="9155430" y="2569464"/>
+            <a:ext cx="2640330" cy="715503"/>
           </a:xfrm>
           <a:prstGeom prst="roundRect">
             <a:avLst>
-              <a:gd name="adj" fmla="val 8537"/>
+              <a:gd name="adj" fmla="val 8946"/>
+            </a:avLst>
+          </a:prstGeom>
+          <a:solidFill>
+            <a:srgbClr val="EDE9FE"/>
+          </a:solidFill>
+          <a:ln w="19050">
+            <a:solidFill>
+              <a:srgbClr val="7C3AED"/>
+            </a:solidFill>
+            <a:prstDash val="solid"/>
+          </a:ln>
+        </p:spPr>
+      </p:sp>
+      <p:sp>
+        <p:nvSpPr>
+          <p:cNvPr id="24" name="Text 22"/>
+          <p:cNvSpPr/>
+          <p:nvPr/>
+        </p:nvSpPr>
+        <p:spPr>
+          <a:xfrm>
+            <a:off x="9210294" y="2633859"/>
+            <a:ext cx="2530602" cy="300511"/>
+          </a:xfrm>
+          <a:prstGeom prst="rect">
+            <a:avLst/>
+          </a:prstGeom>
+          <a:noFill/>
+          <a:ln/>
+        </p:spPr>
+        <p:txBody>
+          <a:bodyPr wrap="square" rtlCol="0" anchor="ctr"/>
+          <a:lstStyle/>
+          <a:p>
+            <a:pPr algn="ctr" indent="0" marL="0">
+              <a:buNone/>
+            </a:pPr>
+            <a:r>
+              <a:rPr lang="en-US" sz="1050" b="1" dirty="0">
+                <a:solidFill>
+                  <a:srgbClr val="5B21B6"/>
+                </a:solidFill>
+                <a:latin typeface="Inter" pitchFamily="34" charset="0"/>
+                <a:ea typeface="Inter" pitchFamily="34" charset="-122"/>
+                <a:cs typeface="Inter" pitchFamily="34" charset="-120"/>
+              </a:rPr>
+              <a:t>🤖 Severity assessed</a:t>
+            </a:r>
+            <a:endParaRPr lang="en-US" sz="1050" dirty="0"/>
+          </a:p>
+        </p:txBody>
+      </p:sp>
+      <p:sp>
+        <p:nvSpPr>
+          <p:cNvPr id="25" name="Text 23"/>
+          <p:cNvSpPr/>
+          <p:nvPr/>
+        </p:nvSpPr>
+        <p:spPr>
+          <a:xfrm>
+            <a:off x="9210294" y="2927216"/>
+            <a:ext cx="2530602" cy="314821"/>
+          </a:xfrm>
+          <a:prstGeom prst="rect">
+            <a:avLst/>
+          </a:prstGeom>
+          <a:noFill/>
+          <a:ln/>
+        </p:spPr>
+        <p:txBody>
+          <a:bodyPr wrap="square" rtlCol="0" anchor="t"/>
+          <a:lstStyle/>
+          <a:p>
+            <a:pPr algn="ctr" indent="0" marL="0">
+              <a:buNone/>
+            </a:pPr>
+            <a:r>
+              <a:rPr lang="en-US" sz="850" dirty="0">
+                <a:solidFill>
+                  <a:srgbClr val="475569"/>
+                </a:solidFill>
+                <a:latin typeface="Inter" pitchFamily="34" charset="0"/>
+                <a:ea typeface="Inter" pitchFamily="34" charset="-122"/>
+                <a:cs typeface="Inter" pitchFamily="34" charset="-120"/>
+              </a:rPr>
+              <a:t>impact and urgency</a:t>
+            </a:r>
+            <a:endParaRPr lang="en-US" sz="850" dirty="0"/>
+          </a:p>
+        </p:txBody>
+      </p:sp>
+      <p:sp>
+        <p:nvSpPr>
+          <p:cNvPr id="26" name="Text 24"/>
+          <p:cNvSpPr/>
+          <p:nvPr/>
+        </p:nvSpPr>
+        <p:spPr>
+          <a:xfrm>
+            <a:off x="411480" y="3403839"/>
+            <a:ext cx="7315200" cy="173736"/>
+          </a:xfrm>
+          <a:prstGeom prst="rect">
+            <a:avLst/>
+          </a:prstGeom>
+          <a:noFill/>
+          <a:ln/>
+        </p:spPr>
+        <p:txBody>
+          <a:bodyPr wrap="square" rtlCol="0" anchor="ctr"/>
+          <a:lstStyle/>
+          <a:p>
+            <a:pPr indent="0" marL="0">
+              <a:buNone/>
+            </a:pPr>
+            <a:r>
+              <a:rPr lang="en-US" sz="900" b="1" spc="120" kern="0" dirty="0">
+                <a:solidFill>
+                  <a:srgbClr val="64748B"/>
+                </a:solidFill>
+                <a:latin typeface="Inter" pitchFamily="34" charset="0"/>
+                <a:ea typeface="Inter" pitchFamily="34" charset="-122"/>
+                <a:cs typeface="Inter" pitchFamily="34" charset="-120"/>
+              </a:rPr>
+              <a:t>PROPOSE  &amp;  VALIDATE</a:t>
+            </a:r>
+            <a:endParaRPr lang="en-US" sz="900" dirty="0"/>
+          </a:p>
+        </p:txBody>
+      </p:sp>
+      <p:sp>
+        <p:nvSpPr>
+          <p:cNvPr id="27" name="Shape 25"/>
+          <p:cNvSpPr/>
+          <p:nvPr/>
+        </p:nvSpPr>
+        <p:spPr>
+          <a:xfrm>
+            <a:off x="411480" y="3577575"/>
+            <a:ext cx="3611880" cy="715503"/>
+          </a:xfrm>
+          <a:prstGeom prst="roundRect">
+            <a:avLst>
+              <a:gd name="adj" fmla="val 8946"/>
             </a:avLst>
           </a:prstGeom>
           <a:solidFill>
@@ -5091,14 +3510,14 @@
       </p:sp>
       <p:sp>
         <p:nvSpPr>
-          <p:cNvPr id="20" name="Text 18"/>
-          <p:cNvSpPr/>
-          <p:nvPr/>
-        </p:nvSpPr>
-        <p:spPr>
-          <a:xfrm>
-            <a:off x="8238744" y="2636947"/>
-            <a:ext cx="3502152" cy="314919"/>
+          <p:cNvPr id="28" name="Text 26"/>
+          <p:cNvSpPr/>
+          <p:nvPr/>
+        </p:nvSpPr>
+        <p:spPr>
+          <a:xfrm>
+            <a:off x="466344" y="3641970"/>
+            <a:ext cx="3502152" cy="300511"/>
           </a:xfrm>
           <a:prstGeom prst="rect">
             <a:avLst/>
@@ -5122,7 +3541,7 @@
                 <a:ea typeface="Inter" pitchFamily="34" charset="-122"/>
                 <a:cs typeface="Inter" pitchFamily="34" charset="-120"/>
               </a:rPr>
-              <a:t>⚙️ Cluster queried</a:t>
+              <a:t>⚙️ Smart fix proposed</a:t>
             </a:r>
             <a:endParaRPr lang="en-US" sz="1050" dirty="0"/>
           </a:p>
@@ -5130,14 +3549,14 @@
       </p:sp>
       <p:sp>
         <p:nvSpPr>
-          <p:cNvPr id="21" name="Text 19"/>
-          <p:cNvSpPr/>
-          <p:nvPr/>
-        </p:nvSpPr>
-        <p:spPr>
-          <a:xfrm>
-            <a:off x="8238744" y="2944368"/>
-            <a:ext cx="3502152" cy="329916"/>
+          <p:cNvPr id="29" name="Text 27"/>
+          <p:cNvSpPr/>
+          <p:nvPr/>
+        </p:nvSpPr>
+        <p:spPr>
+          <a:xfrm>
+            <a:off x="466344" y="3935327"/>
+            <a:ext cx="3502152" cy="314821"/>
           </a:xfrm>
           <a:prstGeom prst="rect">
             <a:avLst/>
@@ -5161,7 +3580,7 @@
                 <a:ea typeface="Inter" pitchFamily="34" charset="-122"/>
                 <a:cs typeface="Inter" pitchFamily="34" charset="-120"/>
               </a:rPr>
-              <a:t>parallel API calls</a:t>
+              <a:t>targeted, not generic</a:t>
             </a:r>
             <a:endParaRPr lang="en-US" sz="850" dirty="0"/>
           </a:p>
@@ -5169,30 +3588,30 @@
       </p:sp>
       <p:sp>
         <p:nvSpPr>
-          <p:cNvPr id="22" name="Text 20"/>
-          <p:cNvSpPr/>
-          <p:nvPr/>
-        </p:nvSpPr>
-        <p:spPr>
-          <a:xfrm>
-            <a:off x="411480" y="3438144"/>
-            <a:ext cx="7315200" cy="173736"/>
-          </a:xfrm>
-          <a:prstGeom prst="rect">
-            <a:avLst/>
-          </a:prstGeom>
-          <a:noFill/>
-          <a:ln/>
-        </p:spPr>
-        <p:txBody>
-          <a:bodyPr wrap="square" rtlCol="0" anchor="ctr"/>
-          <a:lstStyle/>
-          <a:p>
-            <a:pPr indent="0" marL="0">
-              <a:buNone/>
-            </a:pPr>
-            <a:r>
-              <a:rPr lang="en-US" sz="900" b="1" spc="120" kern="0" dirty="0">
+          <p:cNvPr id="30" name="Text 28"/>
+          <p:cNvSpPr/>
+          <p:nvPr/>
+        </p:nvSpPr>
+        <p:spPr>
+          <a:xfrm>
+            <a:off x="4023360" y="3807311"/>
+            <a:ext cx="274320" cy="256032"/>
+          </a:xfrm>
+          <a:prstGeom prst="rect">
+            <a:avLst/>
+          </a:prstGeom>
+          <a:noFill/>
+          <a:ln/>
+        </p:spPr>
+        <p:txBody>
+          <a:bodyPr wrap="square" rtlCol="0" anchor="ctr"/>
+          <a:lstStyle/>
+          <a:p>
+            <a:pPr algn="ctr" indent="0" marL="0">
+              <a:buNone/>
+            </a:pPr>
+            <a:r>
+              <a:rPr lang="en-US" sz="1100" dirty="0">
                 <a:solidFill>
                   <a:srgbClr val="64748B"/>
                 </a:solidFill>
@@ -5200,26 +3619,26 @@
                 <a:ea typeface="Inter" pitchFamily="34" charset="-122"/>
                 <a:cs typeface="Inter" pitchFamily="34" charset="-120"/>
               </a:rPr>
-              <a:t>DIAGNOSE</a:t>
-            </a:r>
-            <a:endParaRPr lang="en-US" sz="900" dirty="0"/>
-          </a:p>
-        </p:txBody>
-      </p:sp>
-      <p:sp>
-        <p:nvSpPr>
-          <p:cNvPr id="23" name="Shape 21"/>
-          <p:cNvSpPr/>
-          <p:nvPr/>
-        </p:nvSpPr>
-        <p:spPr>
-          <a:xfrm>
-            <a:off x="411480" y="3611880"/>
-            <a:ext cx="3611880" cy="749808"/>
+              <a:t>▶</a:t>
+            </a:r>
+            <a:endParaRPr lang="en-US" sz="1100" dirty="0"/>
+          </a:p>
+        </p:txBody>
+      </p:sp>
+      <p:sp>
+        <p:nvSpPr>
+          <p:cNvPr id="31" name="Shape 29"/>
+          <p:cNvSpPr/>
+          <p:nvPr/>
+        </p:nvSpPr>
+        <p:spPr>
+          <a:xfrm>
+            <a:off x="4297680" y="3577575"/>
+            <a:ext cx="3611880" cy="715503"/>
           </a:xfrm>
           <a:prstGeom prst="roundRect">
             <a:avLst>
-              <a:gd name="adj" fmla="val 8537"/>
+              <a:gd name="adj" fmla="val 8946"/>
             </a:avLst>
           </a:prstGeom>
           <a:solidFill>
@@ -5235,14 +3654,14 @@
       </p:sp>
       <p:sp>
         <p:nvSpPr>
-          <p:cNvPr id="24" name="Text 22"/>
-          <p:cNvSpPr/>
-          <p:nvPr/>
-        </p:nvSpPr>
-        <p:spPr>
-          <a:xfrm>
-            <a:off x="466344" y="3679363"/>
-            <a:ext cx="3502152" cy="314919"/>
+          <p:cNvPr id="32" name="Text 30"/>
+          <p:cNvSpPr/>
+          <p:nvPr/>
+        </p:nvSpPr>
+        <p:spPr>
+          <a:xfrm>
+            <a:off x="4352544" y="3641970"/>
+            <a:ext cx="3502152" cy="300511"/>
           </a:xfrm>
           <a:prstGeom prst="rect">
             <a:avLst/>
@@ -5266,7 +3685,7 @@
                 <a:ea typeface="Inter" pitchFamily="34" charset="-122"/>
                 <a:cs typeface="Inter" pitchFamily="34" charset="-120"/>
               </a:rPr>
-              <a:t>⚙️ Evidence gathered</a:t>
+              <a:t>⚙️ ServiceNow INC created</a:t>
             </a:r>
             <a:endParaRPr lang="en-US" sz="1050" dirty="0"/>
           </a:p>
@@ -5274,14 +3693,14 @@
       </p:sp>
       <p:sp>
         <p:nvSpPr>
-          <p:cNvPr id="25" name="Text 23"/>
-          <p:cNvSpPr/>
-          <p:nvPr/>
-        </p:nvSpPr>
-        <p:spPr>
-          <a:xfrm>
-            <a:off x="466344" y="3986784"/>
-            <a:ext cx="3502152" cy="329916"/>
+          <p:cNvPr id="33" name="Text 31"/>
+          <p:cNvSpPr/>
+          <p:nvPr/>
+        </p:nvSpPr>
+        <p:spPr>
+          <a:xfrm>
+            <a:off x="4352544" y="3935327"/>
+            <a:ext cx="3502152" cy="314821"/>
           </a:xfrm>
           <a:prstGeom prst="rect">
             <a:avLst/>
@@ -5305,7 +3724,7 @@
                 <a:ea typeface="Inter" pitchFamily="34" charset="-122"/>
                 <a:cs typeface="Inter" pitchFamily="34" charset="-120"/>
               </a:rPr>
-              <a:t>logs · events · limits · exit codes</a:t>
+              <a:t>populated from the evidence</a:t>
             </a:r>
             <a:endParaRPr lang="en-US" sz="850" dirty="0"/>
           </a:p>
@@ -5313,13 +3732,13 @@
       </p:sp>
       <p:sp>
         <p:nvSpPr>
-          <p:cNvPr id="26" name="Text 24"/>
-          <p:cNvSpPr/>
-          <p:nvPr/>
-        </p:nvSpPr>
-        <p:spPr>
-          <a:xfrm>
-            <a:off x="4023360" y="3858768"/>
+          <p:cNvPr id="34" name="Text 32"/>
+          <p:cNvSpPr/>
+          <p:nvPr/>
+        </p:nvSpPr>
+        <p:spPr>
+          <a:xfrm>
+            <a:off x="7909560" y="3807311"/>
             <a:ext cx="274320" cy="256032"/>
           </a:xfrm>
           <a:prstGeom prst="rect">
@@ -5352,162 +3771,18 @@
       </p:sp>
       <p:sp>
         <p:nvSpPr>
-          <p:cNvPr id="27" name="Shape 25"/>
-          <p:cNvSpPr/>
-          <p:nvPr/>
-        </p:nvSpPr>
-        <p:spPr>
-          <a:xfrm>
-            <a:off x="4297680" y="3611880"/>
-            <a:ext cx="3611880" cy="749808"/>
+          <p:cNvPr id="35" name="Shape 33"/>
+          <p:cNvSpPr/>
+          <p:nvPr/>
+        </p:nvSpPr>
+        <p:spPr>
+          <a:xfrm>
+            <a:off x="8183880" y="3577575"/>
+            <a:ext cx="3611880" cy="715503"/>
           </a:xfrm>
           <a:prstGeom prst="roundRect">
             <a:avLst>
-              <a:gd name="adj" fmla="val 8537"/>
-            </a:avLst>
-          </a:prstGeom>
-          <a:solidFill>
-            <a:srgbClr val="EDE9FE"/>
-          </a:solidFill>
-          <a:ln w="19050">
-            <a:solidFill>
-              <a:srgbClr val="7C3AED"/>
-            </a:solidFill>
-            <a:prstDash val="solid"/>
-          </a:ln>
-        </p:spPr>
-      </p:sp>
-      <p:sp>
-        <p:nvSpPr>
-          <p:cNvPr id="28" name="Text 26"/>
-          <p:cNvSpPr/>
-          <p:nvPr/>
-        </p:nvSpPr>
-        <p:spPr>
-          <a:xfrm>
-            <a:off x="4352544" y="3679363"/>
-            <a:ext cx="3502152" cy="314919"/>
-          </a:xfrm>
-          <a:prstGeom prst="rect">
-            <a:avLst/>
-          </a:prstGeom>
-          <a:noFill/>
-          <a:ln/>
-        </p:spPr>
-        <p:txBody>
-          <a:bodyPr wrap="square" rtlCol="0" anchor="ctr"/>
-          <a:lstStyle/>
-          <a:p>
-            <a:pPr algn="ctr" indent="0" marL="0">
-              <a:buNone/>
-            </a:pPr>
-            <a:r>
-              <a:rPr lang="en-US" sz="1050" b="1" dirty="0">
-                <a:solidFill>
-                  <a:srgbClr val="5B21B6"/>
-                </a:solidFill>
-                <a:latin typeface="Inter" pitchFamily="34" charset="0"/>
-                <a:ea typeface="Inter" pitchFamily="34" charset="-122"/>
-                <a:cs typeface="Inter" pitchFamily="34" charset="-120"/>
-              </a:rPr>
-              <a:t>🤖 Root cause</a:t>
-            </a:r>
-            <a:endParaRPr lang="en-US" sz="1050" dirty="0"/>
-          </a:p>
-        </p:txBody>
-      </p:sp>
-      <p:sp>
-        <p:nvSpPr>
-          <p:cNvPr id="29" name="Text 27"/>
-          <p:cNvSpPr/>
-          <p:nvPr/>
-        </p:nvSpPr>
-        <p:spPr>
-          <a:xfrm>
-            <a:off x="4352544" y="3986784"/>
-            <a:ext cx="3502152" cy="329916"/>
-          </a:xfrm>
-          <a:prstGeom prst="rect">
-            <a:avLst/>
-          </a:prstGeom>
-          <a:noFill/>
-          <a:ln/>
-        </p:spPr>
-        <p:txBody>
-          <a:bodyPr wrap="square" rtlCol="0" anchor="t"/>
-          <a:lstStyle/>
-          <a:p>
-            <a:pPr algn="ctr" indent="0" marL="0">
-              <a:buNone/>
-            </a:pPr>
-            <a:r>
-              <a:rPr lang="en-US" sz="850" dirty="0">
-                <a:solidFill>
-                  <a:srgbClr val="475569"/>
-                </a:solidFill>
-                <a:latin typeface="Inter" pitchFamily="34" charset="0"/>
-                <a:ea typeface="Inter" pitchFamily="34" charset="-122"/>
-                <a:cs typeface="Inter" pitchFamily="34" charset="-120"/>
-              </a:rPr>
-              <a:t>explained with the evidence shown</a:t>
-            </a:r>
-            <a:endParaRPr lang="en-US" sz="850" dirty="0"/>
-          </a:p>
-        </p:txBody>
-      </p:sp>
-      <p:sp>
-        <p:nvSpPr>
-          <p:cNvPr id="30" name="Text 28"/>
-          <p:cNvSpPr/>
-          <p:nvPr/>
-        </p:nvSpPr>
-        <p:spPr>
-          <a:xfrm>
-            <a:off x="7909560" y="3858768"/>
-            <a:ext cx="274320" cy="256032"/>
-          </a:xfrm>
-          <a:prstGeom prst="rect">
-            <a:avLst/>
-          </a:prstGeom>
-          <a:noFill/>
-          <a:ln/>
-        </p:spPr>
-        <p:txBody>
-          <a:bodyPr wrap="square" rtlCol="0" anchor="ctr"/>
-          <a:lstStyle/>
-          <a:p>
-            <a:pPr algn="ctr" indent="0" marL="0">
-              <a:buNone/>
-            </a:pPr>
-            <a:r>
-              <a:rPr lang="en-US" sz="1100" dirty="0">
-                <a:solidFill>
-                  <a:srgbClr val="64748B"/>
-                </a:solidFill>
-                <a:latin typeface="Inter" pitchFamily="34" charset="0"/>
-                <a:ea typeface="Inter" pitchFamily="34" charset="-122"/>
-                <a:cs typeface="Inter" pitchFamily="34" charset="-120"/>
-              </a:rPr>
-              <a:t>▶</a:t>
-            </a:r>
-            <a:endParaRPr lang="en-US" sz="1100" dirty="0"/>
-          </a:p>
-        </p:txBody>
-      </p:sp>
-      <p:sp>
-        <p:nvSpPr>
-          <p:cNvPr id="31" name="Shape 29"/>
-          <p:cNvSpPr/>
-          <p:nvPr/>
-        </p:nvSpPr>
-        <p:spPr>
-          <a:xfrm>
-            <a:off x="8183880" y="3611880"/>
-            <a:ext cx="3611880" cy="749808"/>
-          </a:xfrm>
-          <a:prstGeom prst="roundRect">
-            <a:avLst>
-              <a:gd name="adj" fmla="val 8537"/>
+              <a:gd name="adj" fmla="val 8946"/>
             </a:avLst>
           </a:prstGeom>
           <a:solidFill>
@@ -5523,14 +3798,14 @@
       </p:sp>
       <p:sp>
         <p:nvSpPr>
-          <p:cNvPr id="32" name="Text 30"/>
-          <p:cNvSpPr/>
-          <p:nvPr/>
-        </p:nvSpPr>
-        <p:spPr>
-          <a:xfrm>
-            <a:off x="8238744" y="3679363"/>
-            <a:ext cx="3502152" cy="314919"/>
+          <p:cNvPr id="36" name="Text 34"/>
+          <p:cNvSpPr/>
+          <p:nvPr/>
+        </p:nvSpPr>
+        <p:spPr>
+          <a:xfrm>
+            <a:off x="8238744" y="3641970"/>
+            <a:ext cx="3502152" cy="300511"/>
           </a:xfrm>
           <a:prstGeom prst="rect">
             <a:avLst/>
@@ -5554,7 +3829,7 @@
                 <a:ea typeface="Inter" pitchFamily="34" charset="-122"/>
                 <a:cs typeface="Inter" pitchFamily="34" charset="-120"/>
               </a:rPr>
-              <a:t>⚙️ Severity assessed</a:t>
+              <a:t>⚙️ Dry-run validation</a:t>
             </a:r>
             <a:endParaRPr lang="en-US" sz="1050" dirty="0"/>
           </a:p>
@@ -5562,14 +3837,14 @@
       </p:sp>
       <p:sp>
         <p:nvSpPr>
-          <p:cNvPr id="33" name="Text 31"/>
-          <p:cNvSpPr/>
-          <p:nvPr/>
-        </p:nvSpPr>
-        <p:spPr>
-          <a:xfrm>
-            <a:off x="8238744" y="3986784"/>
-            <a:ext cx="3502152" cy="329916"/>
+          <p:cNvPr id="37" name="Text 35"/>
+          <p:cNvSpPr/>
+          <p:nvPr/>
+        </p:nvSpPr>
+        <p:spPr>
+          <a:xfrm>
+            <a:off x="8238744" y="3935327"/>
+            <a:ext cx="3502152" cy="314821"/>
           </a:xfrm>
           <a:prstGeom prst="rect">
             <a:avLst/>
@@ -5593,7 +3868,7 @@
                 <a:ea typeface="Inter" pitchFamily="34" charset="-122"/>
                 <a:cs typeface="Inter" pitchFamily="34" charset="-120"/>
               </a:rPr>
-              <a:t>impact and blast radius</a:t>
+              <a:t>effect known before approval</a:t>
             </a:r>
             <a:endParaRPr lang="en-US" sz="850" dirty="0"/>
           </a:p>
@@ -5601,57 +3876,648 @@
       </p:sp>
       <p:sp>
         <p:nvSpPr>
-          <p:cNvPr id="34" name="Text 32"/>
-          <p:cNvSpPr/>
-          <p:nvPr/>
-        </p:nvSpPr>
-        <p:spPr>
-          <a:xfrm>
-            <a:off x="411480" y="4480560"/>
-            <a:ext cx="7315200" cy="173736"/>
-          </a:xfrm>
-          <a:prstGeom prst="rect">
-            <a:avLst/>
-          </a:prstGeom>
-          <a:noFill/>
-          <a:ln/>
-        </p:spPr>
-        <p:txBody>
-          <a:bodyPr wrap="square" rtlCol="0" anchor="ctr"/>
-          <a:lstStyle/>
-          <a:p>
-            <a:pPr indent="0" marL="0">
-              <a:buNone/>
-            </a:pPr>
-            <a:r>
-              <a:rPr lang="en-US" sz="900" b="1" spc="120" kern="0" dirty="0">
-                <a:solidFill>
-                  <a:srgbClr val="64748B"/>
-                </a:solidFill>
-                <a:latin typeface="Inter" pitchFamily="34" charset="0"/>
-                <a:ea typeface="Inter" pitchFamily="34" charset="-122"/>
-                <a:cs typeface="Inter" pitchFamily="34" charset="-120"/>
-              </a:rPr>
-              <a:t>ACT</a:t>
-            </a:r>
-            <a:endParaRPr lang="en-US" sz="900" dirty="0"/>
-          </a:p>
-        </p:txBody>
-      </p:sp>
-      <p:sp>
-        <p:nvSpPr>
-          <p:cNvPr id="35" name="Shape 33"/>
-          <p:cNvSpPr/>
-          <p:nvPr/>
-        </p:nvSpPr>
-        <p:spPr>
-          <a:xfrm>
-            <a:off x="411480" y="4654296"/>
-            <a:ext cx="3697224" cy="420624"/>
+          <p:cNvPr id="38" name="Shape 36"/>
+          <p:cNvSpPr/>
+          <p:nvPr/>
+        </p:nvSpPr>
+        <p:spPr>
+          <a:xfrm>
+            <a:off x="2606040" y="4411950"/>
+            <a:ext cx="6995160" cy="523539"/>
           </a:xfrm>
           <a:prstGeom prst="roundRect">
             <a:avLst>
-              <a:gd name="adj" fmla="val 10870"/>
+              <a:gd name="adj" fmla="val 12226"/>
+            </a:avLst>
+          </a:prstGeom>
+          <a:solidFill>
+            <a:srgbClr val="D97706"/>
+          </a:solidFill>
+          <a:ln w="25400">
+            <a:solidFill>
+              <a:srgbClr val="92400E"/>
+            </a:solidFill>
+            <a:prstDash val="solid"/>
+          </a:ln>
+        </p:spPr>
+      </p:sp>
+      <p:sp>
+        <p:nvSpPr>
+          <p:cNvPr id="39" name="Text 37"/>
+          <p:cNvSpPr/>
+          <p:nvPr/>
+        </p:nvSpPr>
+        <p:spPr>
+          <a:xfrm>
+            <a:off x="2606040" y="4411950"/>
+            <a:ext cx="6995160" cy="523539"/>
+          </a:xfrm>
+          <a:prstGeom prst="rect">
+            <a:avLst/>
+          </a:prstGeom>
+          <a:noFill/>
+          <a:ln/>
+        </p:spPr>
+        <p:txBody>
+          <a:bodyPr wrap="square" rtlCol="0" anchor="ctr"/>
+          <a:lstStyle/>
+          <a:p>
+            <a:pPr algn="ctr" indent="0" marL="0">
+              <a:buNone/>
+            </a:pPr>
+            <a:r>
+              <a:rPr lang="en-US" sz="1200" b="1" dirty="0">
+                <a:solidFill>
+                  <a:srgbClr val="FFFFFF"/>
+                </a:solidFill>
+                <a:latin typeface="Inter" pitchFamily="34" charset="0"/>
+                <a:ea typeface="Inter" pitchFamily="34" charset="-122"/>
+                <a:cs typeface="Inter" pitchFamily="34" charset="-120"/>
+              </a:rPr>
+              <a:t>👤  FIX CARD IN AI CHAT — APPROVE OR REJECT  👤</a:t>
+            </a:r>
+            <a:endParaRPr lang="en-US" sz="1200" dirty="0"/>
+          </a:p>
+        </p:txBody>
+      </p:sp>
+      <p:sp>
+        <p:nvSpPr>
+          <p:cNvPr id="40" name="Text 38"/>
+          <p:cNvSpPr/>
+          <p:nvPr/>
+        </p:nvSpPr>
+        <p:spPr>
+          <a:xfrm>
+            <a:off x="411480" y="5054361"/>
+            <a:ext cx="7315200" cy="173736"/>
+          </a:xfrm>
+          <a:prstGeom prst="rect">
+            <a:avLst/>
+          </a:prstGeom>
+          <a:noFill/>
+          <a:ln/>
+        </p:spPr>
+        <p:txBody>
+          <a:bodyPr wrap="square" rtlCol="0" anchor="ctr"/>
+          <a:lstStyle/>
+          <a:p>
+            <a:pPr indent="0" marL="0">
+              <a:buNone/>
+            </a:pPr>
+            <a:r>
+              <a:rPr lang="en-US" sz="900" b="1" spc="120" kern="0" dirty="0">
+                <a:solidFill>
+                  <a:srgbClr val="64748B"/>
+                </a:solidFill>
+                <a:latin typeface="Inter" pitchFamily="34" charset="0"/>
+                <a:ea typeface="Inter" pitchFamily="34" charset="-122"/>
+                <a:cs typeface="Inter" pitchFamily="34" charset="-120"/>
+              </a:rPr>
+              <a:t>APPLY  &amp;  PROVE</a:t>
+            </a:r>
+            <a:endParaRPr lang="en-US" sz="900" dirty="0"/>
+          </a:p>
+        </p:txBody>
+      </p:sp>
+      <p:sp>
+        <p:nvSpPr>
+          <p:cNvPr id="41" name="Shape 39"/>
+          <p:cNvSpPr/>
+          <p:nvPr/>
+        </p:nvSpPr>
+        <p:spPr>
+          <a:xfrm>
+            <a:off x="411480" y="5228097"/>
+            <a:ext cx="3611880" cy="715503"/>
+          </a:xfrm>
+          <a:prstGeom prst="roundRect">
+            <a:avLst>
+              <a:gd name="adj" fmla="val 8946"/>
+            </a:avLst>
+          </a:prstGeom>
+          <a:solidFill>
+            <a:srgbClr val="DBEAFE"/>
+          </a:solidFill>
+          <a:ln w="19050">
+            <a:solidFill>
+              <a:srgbClr val="2563EB"/>
+            </a:solidFill>
+            <a:prstDash val="solid"/>
+          </a:ln>
+        </p:spPr>
+      </p:sp>
+      <p:sp>
+        <p:nvSpPr>
+          <p:cNvPr id="42" name="Text 40"/>
+          <p:cNvSpPr/>
+          <p:nvPr/>
+        </p:nvSpPr>
+        <p:spPr>
+          <a:xfrm>
+            <a:off x="466344" y="5292492"/>
+            <a:ext cx="3502152" cy="300511"/>
+          </a:xfrm>
+          <a:prstGeom prst="rect">
+            <a:avLst/>
+          </a:prstGeom>
+          <a:noFill/>
+          <a:ln/>
+        </p:spPr>
+        <p:txBody>
+          <a:bodyPr wrap="square" rtlCol="0" anchor="ctr"/>
+          <a:lstStyle/>
+          <a:p>
+            <a:pPr algn="ctr" indent="0" marL="0">
+              <a:buNone/>
+            </a:pPr>
+            <a:r>
+              <a:rPr lang="en-US" sz="1050" b="1" dirty="0">
+                <a:solidFill>
+                  <a:srgbClr val="1E40AF"/>
+                </a:solidFill>
+                <a:latin typeface="Inter" pitchFamily="34" charset="0"/>
+                <a:ea typeface="Inter" pitchFamily="34" charset="-122"/>
+                <a:cs typeface="Inter" pitchFamily="34" charset="-120"/>
+              </a:rPr>
+              <a:t>⚙️ Fix applied</a:t>
+            </a:r>
+            <a:endParaRPr lang="en-US" sz="1050" dirty="0"/>
+          </a:p>
+        </p:txBody>
+      </p:sp>
+      <p:sp>
+        <p:nvSpPr>
+          <p:cNvPr id="43" name="Text 41"/>
+          <p:cNvSpPr/>
+          <p:nvPr/>
+        </p:nvSpPr>
+        <p:spPr>
+          <a:xfrm>
+            <a:off x="466344" y="5585848"/>
+            <a:ext cx="3502152" cy="314821"/>
+          </a:xfrm>
+          <a:prstGeom prst="rect">
+            <a:avLst/>
+          </a:prstGeom>
+          <a:noFill/>
+          <a:ln/>
+        </p:spPr>
+        <p:txBody>
+          <a:bodyPr wrap="square" rtlCol="0" anchor="t"/>
+          <a:lstStyle/>
+          <a:p>
+            <a:pPr algn="ctr" indent="0" marL="0">
+              <a:buNone/>
+            </a:pPr>
+            <a:r>
+              <a:rPr lang="en-US" sz="850" dirty="0">
+                <a:solidFill>
+                  <a:srgbClr val="475569"/>
+                </a:solidFill>
+                <a:latin typeface="Inter" pitchFamily="34" charset="0"/>
+                <a:ea typeface="Inter" pitchFamily="34" charset="-122"/>
+                <a:cs typeface="Inter" pitchFamily="34" charset="-120"/>
+              </a:rPr>
+              <a:t>before / after metrics captured</a:t>
+            </a:r>
+            <a:endParaRPr lang="en-US" sz="850" dirty="0"/>
+          </a:p>
+        </p:txBody>
+      </p:sp>
+      <p:sp>
+        <p:nvSpPr>
+          <p:cNvPr id="44" name="Text 42"/>
+          <p:cNvSpPr/>
+          <p:nvPr/>
+        </p:nvSpPr>
+        <p:spPr>
+          <a:xfrm>
+            <a:off x="4023360" y="5457832"/>
+            <a:ext cx="274320" cy="256032"/>
+          </a:xfrm>
+          <a:prstGeom prst="rect">
+            <a:avLst/>
+          </a:prstGeom>
+          <a:noFill/>
+          <a:ln/>
+        </p:spPr>
+        <p:txBody>
+          <a:bodyPr wrap="square" rtlCol="0" anchor="ctr"/>
+          <a:lstStyle/>
+          <a:p>
+            <a:pPr algn="ctr" indent="0" marL="0">
+              <a:buNone/>
+            </a:pPr>
+            <a:r>
+              <a:rPr lang="en-US" sz="1100" dirty="0">
+                <a:solidFill>
+                  <a:srgbClr val="64748B"/>
+                </a:solidFill>
+                <a:latin typeface="Inter" pitchFamily="34" charset="0"/>
+                <a:ea typeface="Inter" pitchFamily="34" charset="-122"/>
+                <a:cs typeface="Inter" pitchFamily="34" charset="-120"/>
+              </a:rPr>
+              <a:t>▶</a:t>
+            </a:r>
+            <a:endParaRPr lang="en-US" sz="1100" dirty="0"/>
+          </a:p>
+        </p:txBody>
+      </p:sp>
+      <p:sp>
+        <p:nvSpPr>
+          <p:cNvPr id="45" name="Shape 43"/>
+          <p:cNvSpPr/>
+          <p:nvPr/>
+        </p:nvSpPr>
+        <p:spPr>
+          <a:xfrm>
+            <a:off x="4297680" y="5228097"/>
+            <a:ext cx="3611880" cy="715503"/>
+          </a:xfrm>
+          <a:prstGeom prst="roundRect">
+            <a:avLst>
+              <a:gd name="adj" fmla="val 8946"/>
+            </a:avLst>
+          </a:prstGeom>
+          <a:solidFill>
+            <a:srgbClr val="D1FAE5"/>
+          </a:solidFill>
+          <a:ln w="19050">
+            <a:solidFill>
+              <a:srgbClr val="059669"/>
+            </a:solidFill>
+            <a:prstDash val="solid"/>
+          </a:ln>
+        </p:spPr>
+      </p:sp>
+      <p:sp>
+        <p:nvSpPr>
+          <p:cNvPr id="46" name="Text 44"/>
+          <p:cNvSpPr/>
+          <p:nvPr/>
+        </p:nvSpPr>
+        <p:spPr>
+          <a:xfrm>
+            <a:off x="4352544" y="5292492"/>
+            <a:ext cx="3502152" cy="300511"/>
+          </a:xfrm>
+          <a:prstGeom prst="rect">
+            <a:avLst/>
+          </a:prstGeom>
+          <a:noFill/>
+          <a:ln/>
+        </p:spPr>
+        <p:txBody>
+          <a:bodyPr wrap="square" rtlCol="0" anchor="ctr"/>
+          <a:lstStyle/>
+          <a:p>
+            <a:pPr algn="ctr" indent="0" marL="0">
+              <a:buNone/>
+            </a:pPr>
+            <a:r>
+              <a:rPr lang="en-US" sz="1050" b="1" dirty="0">
+                <a:solidFill>
+                  <a:srgbClr val="065F46"/>
+                </a:solidFill>
+                <a:latin typeface="Inter" pitchFamily="34" charset="0"/>
+                <a:ea typeface="Inter" pitchFamily="34" charset="-122"/>
+                <a:cs typeface="Inter" pitchFamily="34" charset="-120"/>
+              </a:rPr>
+              <a:t>✅ Recovery verified</a:t>
+            </a:r>
+            <a:endParaRPr lang="en-US" sz="1050" dirty="0"/>
+          </a:p>
+        </p:txBody>
+      </p:sp>
+      <p:sp>
+        <p:nvSpPr>
+          <p:cNvPr id="47" name="Text 45"/>
+          <p:cNvSpPr/>
+          <p:nvPr/>
+        </p:nvSpPr>
+        <p:spPr>
+          <a:xfrm>
+            <a:off x="4352544" y="5585848"/>
+            <a:ext cx="3502152" cy="314821"/>
+          </a:xfrm>
+          <a:prstGeom prst="rect">
+            <a:avLst/>
+          </a:prstGeom>
+          <a:noFill/>
+          <a:ln/>
+        </p:spPr>
+        <p:txBody>
+          <a:bodyPr wrap="square" rtlCol="0" anchor="t"/>
+          <a:lstStyle/>
+          <a:p>
+            <a:pPr algn="ctr" indent="0" marL="0">
+              <a:buNone/>
+            </a:pPr>
+            <a:r>
+              <a:rPr lang="en-US" sz="850" dirty="0">
+                <a:solidFill>
+                  <a:srgbClr val="475569"/>
+                </a:solidFill>
+                <a:latin typeface="Inter" pitchFamily="34" charset="0"/>
+                <a:ea typeface="Inter" pitchFamily="34" charset="-122"/>
+                <a:cs typeface="Inter" pitchFamily="34" charset="-120"/>
+              </a:rPr>
+              <a:t>the fix actually held</a:t>
+            </a:r>
+            <a:endParaRPr lang="en-US" sz="850" dirty="0"/>
+          </a:p>
+        </p:txBody>
+      </p:sp>
+      <p:sp>
+        <p:nvSpPr>
+          <p:cNvPr id="48" name="Text 46"/>
+          <p:cNvSpPr/>
+          <p:nvPr/>
+        </p:nvSpPr>
+        <p:spPr>
+          <a:xfrm>
+            <a:off x="7909560" y="5457832"/>
+            <a:ext cx="274320" cy="256032"/>
+          </a:xfrm>
+          <a:prstGeom prst="rect">
+            <a:avLst/>
+          </a:prstGeom>
+          <a:noFill/>
+          <a:ln/>
+        </p:spPr>
+        <p:txBody>
+          <a:bodyPr wrap="square" rtlCol="0" anchor="ctr"/>
+          <a:lstStyle/>
+          <a:p>
+            <a:pPr algn="ctr" indent="0" marL="0">
+              <a:buNone/>
+            </a:pPr>
+            <a:r>
+              <a:rPr lang="en-US" sz="1100" dirty="0">
+                <a:solidFill>
+                  <a:srgbClr val="64748B"/>
+                </a:solidFill>
+                <a:latin typeface="Inter" pitchFamily="34" charset="0"/>
+                <a:ea typeface="Inter" pitchFamily="34" charset="-122"/>
+                <a:cs typeface="Inter" pitchFamily="34" charset="-120"/>
+              </a:rPr>
+              <a:t>▶</a:t>
+            </a:r>
+            <a:endParaRPr lang="en-US" sz="1100" dirty="0"/>
+          </a:p>
+        </p:txBody>
+      </p:sp>
+      <p:sp>
+        <p:nvSpPr>
+          <p:cNvPr id="49" name="Shape 47"/>
+          <p:cNvSpPr/>
+          <p:nvPr/>
+        </p:nvSpPr>
+        <p:spPr>
+          <a:xfrm>
+            <a:off x="8183880" y="5228097"/>
+            <a:ext cx="3611880" cy="715503"/>
+          </a:xfrm>
+          <a:prstGeom prst="roundRect">
+            <a:avLst>
+              <a:gd name="adj" fmla="val 8946"/>
+            </a:avLst>
+          </a:prstGeom>
+          <a:solidFill>
+            <a:srgbClr val="D1FAE5"/>
+          </a:solidFill>
+          <a:ln w="19050">
+            <a:solidFill>
+              <a:srgbClr val="059669"/>
+            </a:solidFill>
+            <a:prstDash val="solid"/>
+          </a:ln>
+        </p:spPr>
+      </p:sp>
+      <p:sp>
+        <p:nvSpPr>
+          <p:cNvPr id="50" name="Text 48"/>
+          <p:cNvSpPr/>
+          <p:nvPr/>
+        </p:nvSpPr>
+        <p:spPr>
+          <a:xfrm>
+            <a:off x="8238744" y="5292492"/>
+            <a:ext cx="3502152" cy="300511"/>
+          </a:xfrm>
+          <a:prstGeom prst="rect">
+            <a:avLst/>
+          </a:prstGeom>
+          <a:noFill/>
+          <a:ln/>
+        </p:spPr>
+        <p:txBody>
+          <a:bodyPr wrap="square" rtlCol="0" anchor="ctr"/>
+          <a:lstStyle/>
+          <a:p>
+            <a:pPr algn="ctr" indent="0" marL="0">
+              <a:buNone/>
+            </a:pPr>
+            <a:r>
+              <a:rPr lang="en-US" sz="1050" b="1" dirty="0">
+                <a:solidFill>
+                  <a:srgbClr val="065F46"/>
+                </a:solidFill>
+                <a:latin typeface="Inter" pitchFamily="34" charset="0"/>
+                <a:ea typeface="Inter" pitchFamily="34" charset="-122"/>
+                <a:cs typeface="Inter" pitchFamily="34" charset="-120"/>
+              </a:rPr>
+              <a:t>✅ Incident auto-closed</a:t>
+            </a:r>
+            <a:endParaRPr lang="en-US" sz="1050" dirty="0"/>
+          </a:p>
+        </p:txBody>
+      </p:sp>
+      <p:sp>
+        <p:nvSpPr>
+          <p:cNvPr id="51" name="Text 49"/>
+          <p:cNvSpPr/>
+          <p:nvPr/>
+        </p:nvSpPr>
+        <p:spPr>
+          <a:xfrm>
+            <a:off x="8238744" y="5585848"/>
+            <a:ext cx="3502152" cy="314821"/>
+          </a:xfrm>
+          <a:prstGeom prst="rect">
+            <a:avLst/>
+          </a:prstGeom>
+          <a:noFill/>
+          <a:ln/>
+        </p:spPr>
+        <p:txBody>
+          <a:bodyPr wrap="square" rtlCol="0" anchor="t"/>
+          <a:lstStyle/>
+          <a:p>
+            <a:pPr algn="ctr" indent="0" marL="0">
+              <a:buNone/>
+            </a:pPr>
+            <a:r>
+              <a:rPr lang="en-US" sz="850" dirty="0">
+                <a:solidFill>
+                  <a:srgbClr val="475569"/>
+                </a:solidFill>
+                <a:latin typeface="Inter" pitchFamily="34" charset="0"/>
+                <a:ea typeface="Inter" pitchFamily="34" charset="-122"/>
+                <a:cs typeface="Inter" pitchFamily="34" charset="-120"/>
+              </a:rPr>
+              <a:t>outcome written back</a:t>
+            </a:r>
+            <a:endParaRPr lang="en-US" sz="850" dirty="0"/>
+          </a:p>
+        </p:txBody>
+      </p:sp>
+      <p:sp>
+        <p:nvSpPr>
+          <p:cNvPr id="52" name="Shape 50"/>
+          <p:cNvSpPr/>
+          <p:nvPr/>
+        </p:nvSpPr>
+        <p:spPr>
+          <a:xfrm>
+            <a:off x="411480" y="6089904"/>
+            <a:ext cx="173736" cy="173736"/>
+          </a:xfrm>
+          <a:prstGeom prst="roundRect">
+            <a:avLst>
+              <a:gd name="adj" fmla="val 15789"/>
+            </a:avLst>
+          </a:prstGeom>
+          <a:solidFill>
+            <a:srgbClr val="EDE9FE"/>
+          </a:solidFill>
+          <a:ln w="12700">
+            <a:solidFill>
+              <a:srgbClr val="7C3AED"/>
+            </a:solidFill>
+            <a:prstDash val="solid"/>
+          </a:ln>
+        </p:spPr>
+      </p:sp>
+      <p:sp>
+        <p:nvSpPr>
+          <p:cNvPr id="53" name="Text 51"/>
+          <p:cNvSpPr/>
+          <p:nvPr/>
+        </p:nvSpPr>
+        <p:spPr>
+          <a:xfrm>
+            <a:off x="621792" y="6053328"/>
+            <a:ext cx="868680" cy="237744"/>
+          </a:xfrm>
+          <a:prstGeom prst="rect">
+            <a:avLst/>
+          </a:prstGeom>
+          <a:noFill/>
+          <a:ln/>
+        </p:spPr>
+        <p:txBody>
+          <a:bodyPr wrap="square" rtlCol="0" anchor="ctr"/>
+          <a:lstStyle/>
+          <a:p>
+            <a:pPr indent="0" marL="0">
+              <a:buNone/>
+            </a:pPr>
+            <a:r>
+              <a:rPr lang="en-US" sz="850" dirty="0">
+                <a:solidFill>
+                  <a:srgbClr val="475569"/>
+                </a:solidFill>
+                <a:latin typeface="Inter" pitchFamily="34" charset="0"/>
+                <a:ea typeface="Inter" pitchFamily="34" charset="-122"/>
+                <a:cs typeface="Inter" pitchFamily="34" charset="-120"/>
+              </a:rPr>
+              <a:t>AI</a:t>
+            </a:r>
+            <a:endParaRPr lang="en-US" sz="850" dirty="0"/>
+          </a:p>
+        </p:txBody>
+      </p:sp>
+      <p:sp>
+        <p:nvSpPr>
+          <p:cNvPr id="54" name="Shape 52"/>
+          <p:cNvSpPr/>
+          <p:nvPr/>
+        </p:nvSpPr>
+        <p:spPr>
+          <a:xfrm>
+            <a:off x="1554480" y="6089904"/>
+            <a:ext cx="173736" cy="173736"/>
+          </a:xfrm>
+          <a:prstGeom prst="roundRect">
+            <a:avLst>
+              <a:gd name="adj" fmla="val 15789"/>
+            </a:avLst>
+          </a:prstGeom>
+          <a:solidFill>
+            <a:srgbClr val="DBEAFE"/>
+          </a:solidFill>
+          <a:ln w="12700">
+            <a:solidFill>
+              <a:srgbClr val="2563EB"/>
+            </a:solidFill>
+            <a:prstDash val="solid"/>
+          </a:ln>
+        </p:spPr>
+      </p:sp>
+      <p:sp>
+        <p:nvSpPr>
+          <p:cNvPr id="55" name="Text 53"/>
+          <p:cNvSpPr/>
+          <p:nvPr/>
+        </p:nvSpPr>
+        <p:spPr>
+          <a:xfrm>
+            <a:off x="1764792" y="6053328"/>
+            <a:ext cx="868680" cy="237744"/>
+          </a:xfrm>
+          <a:prstGeom prst="rect">
+            <a:avLst/>
+          </a:prstGeom>
+          <a:noFill/>
+          <a:ln/>
+        </p:spPr>
+        <p:txBody>
+          <a:bodyPr wrap="square" rtlCol="0" anchor="ctr"/>
+          <a:lstStyle/>
+          <a:p>
+            <a:pPr indent="0" marL="0">
+              <a:buNone/>
+            </a:pPr>
+            <a:r>
+              <a:rPr lang="en-US" sz="850" dirty="0">
+                <a:solidFill>
+                  <a:srgbClr val="475569"/>
+                </a:solidFill>
+                <a:latin typeface="Inter" pitchFamily="34" charset="0"/>
+                <a:ea typeface="Inter" pitchFamily="34" charset="-122"/>
+                <a:cs typeface="Inter" pitchFamily="34" charset="-120"/>
+              </a:rPr>
+              <a:t>Automatic</a:t>
+            </a:r>
+            <a:endParaRPr lang="en-US" sz="850" dirty="0"/>
+          </a:p>
+        </p:txBody>
+      </p:sp>
+      <p:sp>
+        <p:nvSpPr>
+          <p:cNvPr id="56" name="Shape 54"/>
+          <p:cNvSpPr/>
+          <p:nvPr/>
+        </p:nvSpPr>
+        <p:spPr>
+          <a:xfrm>
+            <a:off x="2697480" y="6089904"/>
+            <a:ext cx="173736" cy="173736"/>
+          </a:xfrm>
+          <a:prstGeom prst="roundRect">
+            <a:avLst>
+              <a:gd name="adj" fmla="val 15789"/>
             </a:avLst>
           </a:prstGeom>
           <a:solidFill>
@@ -5667,337 +4533,7 @@
       </p:sp>
       <p:sp>
         <p:nvSpPr>
-          <p:cNvPr id="36" name="Text 34"/>
-          <p:cNvSpPr/>
-          <p:nvPr/>
-        </p:nvSpPr>
-        <p:spPr>
-          <a:xfrm>
-            <a:off x="466344" y="4654296"/>
-            <a:ext cx="3587496" cy="420624"/>
-          </a:xfrm>
-          <a:prstGeom prst="rect">
-            <a:avLst/>
-          </a:prstGeom>
-          <a:noFill/>
-          <a:ln/>
-        </p:spPr>
-        <p:txBody>
-          <a:bodyPr wrap="square" rtlCol="0" anchor="ctr"/>
-          <a:lstStyle/>
-          <a:p>
-            <a:pPr algn="ctr" indent="0" marL="0">
-              <a:buNone/>
-            </a:pPr>
-            <a:r>
-              <a:rPr lang="en-US" sz="950" b="1" dirty="0">
-                <a:solidFill>
-                  <a:srgbClr val="92400E"/>
-                </a:solidFill>
-                <a:latin typeface="Inter" pitchFamily="34" charset="0"/>
-                <a:ea typeface="Inter" pitchFamily="34" charset="-122"/>
-                <a:cs typeface="Inter" pitchFamily="34" charset="-120"/>
-              </a:rPr>
-              <a:t>👤 Apply a proposed fix</a:t>
-            </a:r>
-            <a:endParaRPr lang="en-US" sz="950" dirty="0"/>
-          </a:p>
-        </p:txBody>
-      </p:sp>
-      <p:sp>
-        <p:nvSpPr>
-          <p:cNvPr id="37" name="Shape 35"/>
-          <p:cNvSpPr/>
-          <p:nvPr/>
-        </p:nvSpPr>
-        <p:spPr>
-          <a:xfrm>
-            <a:off x="4255008" y="4654296"/>
-            <a:ext cx="3697224" cy="420624"/>
-          </a:xfrm>
-          <a:prstGeom prst="roundRect">
-            <a:avLst>
-              <a:gd name="adj" fmla="val 10870"/>
-            </a:avLst>
-          </a:prstGeom>
-          <a:solidFill>
-            <a:srgbClr val="FEF3C7"/>
-          </a:solidFill>
-          <a:ln w="12700">
-            <a:solidFill>
-              <a:srgbClr val="D97706"/>
-            </a:solidFill>
-            <a:prstDash val="solid"/>
-          </a:ln>
-        </p:spPr>
-      </p:sp>
-      <p:sp>
-        <p:nvSpPr>
-          <p:cNvPr id="38" name="Text 36"/>
-          <p:cNvSpPr/>
-          <p:nvPr/>
-        </p:nvSpPr>
-        <p:spPr>
-          <a:xfrm>
-            <a:off x="4309872" y="4654296"/>
-            <a:ext cx="3587496" cy="420624"/>
-          </a:xfrm>
-          <a:prstGeom prst="rect">
-            <a:avLst/>
-          </a:prstGeom>
-          <a:noFill/>
-          <a:ln/>
-        </p:spPr>
-        <p:txBody>
-          <a:bodyPr wrap="square" rtlCol="0" anchor="ctr"/>
-          <a:lstStyle/>
-          <a:p>
-            <a:pPr algn="ctr" indent="0" marL="0">
-              <a:buNone/>
-            </a:pPr>
-            <a:r>
-              <a:rPr lang="en-US" sz="950" b="1" dirty="0">
-                <a:solidFill>
-                  <a:srgbClr val="92400E"/>
-                </a:solidFill>
-                <a:latin typeface="Inter" pitchFamily="34" charset="0"/>
-                <a:ea typeface="Inter" pitchFamily="34" charset="-122"/>
-                <a:cs typeface="Inter" pitchFamily="34" charset="-120"/>
-              </a:rPr>
-              <a:t>👤 Escalate with the evidence attached</a:t>
-            </a:r>
-            <a:endParaRPr lang="en-US" sz="950" dirty="0"/>
-          </a:p>
-        </p:txBody>
-      </p:sp>
-      <p:sp>
-        <p:nvSpPr>
-          <p:cNvPr id="39" name="Shape 37"/>
-          <p:cNvSpPr/>
-          <p:nvPr/>
-        </p:nvSpPr>
-        <p:spPr>
-          <a:xfrm>
-            <a:off x="8098536" y="4654296"/>
-            <a:ext cx="3697224" cy="420624"/>
-          </a:xfrm>
-          <a:prstGeom prst="roundRect">
-            <a:avLst>
-              <a:gd name="adj" fmla="val 10870"/>
-            </a:avLst>
-          </a:prstGeom>
-          <a:solidFill>
-            <a:srgbClr val="DBEAFE"/>
-          </a:solidFill>
-          <a:ln w="12700">
-            <a:solidFill>
-              <a:srgbClr val="2563EB"/>
-            </a:solidFill>
-            <a:prstDash val="solid"/>
-          </a:ln>
-        </p:spPr>
-      </p:sp>
-      <p:sp>
-        <p:nvSpPr>
-          <p:cNvPr id="40" name="Text 38"/>
-          <p:cNvSpPr/>
-          <p:nvPr/>
-        </p:nvSpPr>
-        <p:spPr>
-          <a:xfrm>
-            <a:off x="8153400" y="4654296"/>
-            <a:ext cx="3587496" cy="420624"/>
-          </a:xfrm>
-          <a:prstGeom prst="rect">
-            <a:avLst/>
-          </a:prstGeom>
-          <a:noFill/>
-          <a:ln/>
-        </p:spPr>
-        <p:txBody>
-          <a:bodyPr wrap="square" rtlCol="0" anchor="ctr"/>
-          <a:lstStyle/>
-          <a:p>
-            <a:pPr algn="ctr" indent="0" marL="0">
-              <a:buNone/>
-            </a:pPr>
-            <a:r>
-              <a:rPr lang="en-US" sz="950" b="1" dirty="0">
-                <a:solidFill>
-                  <a:srgbClr val="1E40AF"/>
-                </a:solidFill>
-                <a:latin typeface="Inter" pitchFamily="34" charset="0"/>
-                <a:ea typeface="Inter" pitchFamily="34" charset="-122"/>
-                <a:cs typeface="Inter" pitchFamily="34" charset="-120"/>
-              </a:rPr>
-              <a:t>⚙️ Keep investigating — ask a follow-up</a:t>
-            </a:r>
-            <a:endParaRPr lang="en-US" sz="950" dirty="0"/>
-          </a:p>
-        </p:txBody>
-      </p:sp>
-      <p:sp>
-        <p:nvSpPr>
-          <p:cNvPr id="41" name="Shape 39"/>
-          <p:cNvSpPr/>
-          <p:nvPr/>
-        </p:nvSpPr>
-        <p:spPr>
-          <a:xfrm>
-            <a:off x="411480" y="6089904"/>
-            <a:ext cx="173736" cy="173736"/>
-          </a:xfrm>
-          <a:prstGeom prst="roundRect">
-            <a:avLst>
-              <a:gd name="adj" fmla="val 15789"/>
-            </a:avLst>
-          </a:prstGeom>
-          <a:solidFill>
-            <a:srgbClr val="EDE9FE"/>
-          </a:solidFill>
-          <a:ln w="12700">
-            <a:solidFill>
-              <a:srgbClr val="7C3AED"/>
-            </a:solidFill>
-            <a:prstDash val="solid"/>
-          </a:ln>
-        </p:spPr>
-      </p:sp>
-      <p:sp>
-        <p:nvSpPr>
-          <p:cNvPr id="42" name="Text 40"/>
-          <p:cNvSpPr/>
-          <p:nvPr/>
-        </p:nvSpPr>
-        <p:spPr>
-          <a:xfrm>
-            <a:off x="621792" y="6053328"/>
-            <a:ext cx="868680" cy="237744"/>
-          </a:xfrm>
-          <a:prstGeom prst="rect">
-            <a:avLst/>
-          </a:prstGeom>
-          <a:noFill/>
-          <a:ln/>
-        </p:spPr>
-        <p:txBody>
-          <a:bodyPr wrap="square" rtlCol="0" anchor="ctr"/>
-          <a:lstStyle/>
-          <a:p>
-            <a:pPr indent="0" marL="0">
-              <a:buNone/>
-            </a:pPr>
-            <a:r>
-              <a:rPr lang="en-US" sz="850" dirty="0">
-                <a:solidFill>
-                  <a:srgbClr val="475569"/>
-                </a:solidFill>
-                <a:latin typeface="Inter" pitchFamily="34" charset="0"/>
-                <a:ea typeface="Inter" pitchFamily="34" charset="-122"/>
-                <a:cs typeface="Inter" pitchFamily="34" charset="-120"/>
-              </a:rPr>
-              <a:t>AI</a:t>
-            </a:r>
-            <a:endParaRPr lang="en-US" sz="850" dirty="0"/>
-          </a:p>
-        </p:txBody>
-      </p:sp>
-      <p:sp>
-        <p:nvSpPr>
-          <p:cNvPr id="43" name="Shape 41"/>
-          <p:cNvSpPr/>
-          <p:nvPr/>
-        </p:nvSpPr>
-        <p:spPr>
-          <a:xfrm>
-            <a:off x="1554480" y="6089904"/>
-            <a:ext cx="173736" cy="173736"/>
-          </a:xfrm>
-          <a:prstGeom prst="roundRect">
-            <a:avLst>
-              <a:gd name="adj" fmla="val 15789"/>
-            </a:avLst>
-          </a:prstGeom>
-          <a:solidFill>
-            <a:srgbClr val="DBEAFE"/>
-          </a:solidFill>
-          <a:ln w="12700">
-            <a:solidFill>
-              <a:srgbClr val="2563EB"/>
-            </a:solidFill>
-            <a:prstDash val="solid"/>
-          </a:ln>
-        </p:spPr>
-      </p:sp>
-      <p:sp>
-        <p:nvSpPr>
-          <p:cNvPr id="44" name="Text 42"/>
-          <p:cNvSpPr/>
-          <p:nvPr/>
-        </p:nvSpPr>
-        <p:spPr>
-          <a:xfrm>
-            <a:off x="1764792" y="6053328"/>
-            <a:ext cx="868680" cy="237744"/>
-          </a:xfrm>
-          <a:prstGeom prst="rect">
-            <a:avLst/>
-          </a:prstGeom>
-          <a:noFill/>
-          <a:ln/>
-        </p:spPr>
-        <p:txBody>
-          <a:bodyPr wrap="square" rtlCol="0" anchor="ctr"/>
-          <a:lstStyle/>
-          <a:p>
-            <a:pPr indent="0" marL="0">
-              <a:buNone/>
-            </a:pPr>
-            <a:r>
-              <a:rPr lang="en-US" sz="850" dirty="0">
-                <a:solidFill>
-                  <a:srgbClr val="475569"/>
-                </a:solidFill>
-                <a:latin typeface="Inter" pitchFamily="34" charset="0"/>
-                <a:ea typeface="Inter" pitchFamily="34" charset="-122"/>
-                <a:cs typeface="Inter" pitchFamily="34" charset="-120"/>
-              </a:rPr>
-              <a:t>Automatic</a:t>
-            </a:r>
-            <a:endParaRPr lang="en-US" sz="850" dirty="0"/>
-          </a:p>
-        </p:txBody>
-      </p:sp>
-      <p:sp>
-        <p:nvSpPr>
-          <p:cNvPr id="45" name="Shape 43"/>
-          <p:cNvSpPr/>
-          <p:nvPr/>
-        </p:nvSpPr>
-        <p:spPr>
-          <a:xfrm>
-            <a:off x="2697480" y="6089904"/>
-            <a:ext cx="173736" cy="173736"/>
-          </a:xfrm>
-          <a:prstGeom prst="roundRect">
-            <a:avLst>
-              <a:gd name="adj" fmla="val 15789"/>
-            </a:avLst>
-          </a:prstGeom>
-          <a:solidFill>
-            <a:srgbClr val="FEF3C7"/>
-          </a:solidFill>
-          <a:ln w="12700">
-            <a:solidFill>
-              <a:srgbClr val="D97706"/>
-            </a:solidFill>
-            <a:prstDash val="solid"/>
-          </a:ln>
-        </p:spPr>
-      </p:sp>
-      <p:sp>
-        <p:nvSpPr>
-          <p:cNvPr id="46" name="Text 44"/>
+          <p:cNvPr id="57" name="Text 55"/>
           <p:cNvSpPr/>
           <p:nvPr/>
         </p:nvSpPr>
@@ -6036,7 +4572,7 @@
       </p:sp>
       <p:sp>
         <p:nvSpPr>
-          <p:cNvPr id="47" name="Shape 45"/>
+          <p:cNvPr id="58" name="Shape 56"/>
           <p:cNvSpPr/>
           <p:nvPr/>
         </p:nvSpPr>
@@ -6063,7 +4599,7 @@
       </p:sp>
       <p:sp>
         <p:nvSpPr>
-          <p:cNvPr id="48" name="Text 46"/>
+          <p:cNvPr id="59" name="Text 57"/>
           <p:cNvSpPr/>
           <p:nvPr/>
         </p:nvSpPr>
@@ -6102,7 +4638,7 @@
       </p:sp>
       <p:sp>
         <p:nvSpPr>
-          <p:cNvPr id="49" name="Text 47"/>
+          <p:cNvPr id="60" name="Text 58"/>
           <p:cNvSpPr/>
           <p:nvPr/>
         </p:nvSpPr>
@@ -6133,7 +4669,7 @@
                 <a:ea typeface="Inter" pitchFamily="34" charset="-122"/>
                 <a:cs typeface="Inter" pitchFamily="34" charset="-120"/>
               </a:rPr>
-              <a:t>Conversational entry point to the whole platform</a:t>
+              <a:t>Human-initiated · UC-05 is the same pipeline, agent-initiated</a:t>
             </a:r>
             <a:endParaRPr lang="en-US" sz="1050" dirty="0"/>
           </a:p>
@@ -11774,7 +10310,7 @@
                 <a:ea typeface="Inter" pitchFamily="34" charset="-122"/>
                 <a:cs typeface="Inter" pitchFamily="34" charset="-120"/>
               </a:rPr>
-              <a:t>The only agent-initiated use case: nothing triggers it, which is its entire point. It detects against industry-standard thresholds with dwell time, correlates N signals into one incident, determines root cause from real evidence, raises the ticket, and — after one human decision — applies, verifies, documents and closes it.</a:t>
+              <a:t>The only agent-initiated use case: nothing triggers it, which is its entire point. It detects against industry-standard thresholds with dwell time, correlates N signals into one incident, determines root cause, raises the ticket, and — after one human decision — applies, verifies, documents and closes it. The same pipeline UC-01 exposes to a human question; here the agent’s own detection is the trigger, and it adds signal correlation, an RCA document and a revert ledger.</a:t>
             </a:r>
             <a:endParaRPr lang="en-US" sz="1200" dirty="0"/>
           </a:p>
@@ -13742,7 +12278,7 @@
                 <a:ea typeface="Inter" pitchFamily="34" charset="-122"/>
                 <a:cs typeface="Inter" pitchFamily="34" charset="-120"/>
               </a:rPr>
-              <a:t>Everything either side of the gate is autonomous</a:t>
+              <a:t>Agent-initiated · UC-01 is the same pipeline, human-asked</a:t>
             </a:r>
             <a:endParaRPr lang="en-US" sz="1050" dirty="0"/>
           </a:p>

--- a/usecases/portfolio/TCS-Agentic-AI-Use-Case-Summary.pptx
+++ b/usecases/portfolio/TCS-Agentic-AI-Use-Case-Summary.pptx
@@ -15,9 +15,10 @@
     <p:sldId id="263" r:id="rId9"/>
     <p:sldId id="264" r:id="rId10"/>
     <p:sldId id="265" r:id="rId11"/>
+    <p:sldId id="266" r:id="rId12"/>
   </p:sldIdLst>
   <p:notesMasterIdLst>
-    <p:notesMasterId r:id="rId12"/>
+    <p:notesMasterId r:id="rId13"/>
   </p:notesMasterIdLst>
   <p:sldSz cx="12192000" cy="6858000"/>
   <p:notesSz cx="6858000" cy="12192000"/>
@@ -623,6 +624,94 @@
             <a:fld id="{F7021451-1387-4CA6-816F-3879F97B5CBC}" type="slidenum">
               <a:rPr lang="en-US"/>
               <a:t>10</a:t>
+            </a:fld>
+            <a:endParaRPr lang="en-US"/>
+          </a:p>
+        </p:txBody>
+      </p:sp>
+    </p:spTree>
+    <p:extLst>
+      <p:ext uri="{BB962C8B-B14F-4D97-AF65-F5344CB8AC3E}">
+        <p14:creationId xmlns:p14="http://schemas.microsoft.com/office/powerpoint/2010/main" val="1024086991"/>
+      </p:ext>
+    </p:extLst>
+  </p:cSld>
+  <p:clrMapOvr>
+    <a:masterClrMapping/>
+  </p:clrMapOvr>
+</p:notes>
+</file>
+
+<file path=ppt/notesSlides/notesSlide11.xml><?xml version="1.0" encoding="utf-8"?>
+<p:notes xmlns:a="http://schemas.openxmlformats.org/drawingml/2006/main" xmlns:r="http://schemas.openxmlformats.org/officeDocument/2006/relationships" xmlns:p="http://schemas.openxmlformats.org/presentationml/2006/main">
+  <p:cSld>
+    <p:spTree>
+      <p:nvGrpSpPr>
+        <p:cNvPr id="1" name=""/>
+        <p:cNvGrpSpPr/>
+        <p:nvPr/>
+      </p:nvGrpSpPr>
+      <p:grpSpPr>
+        <a:xfrm>
+          <a:off x="0" y="0"/>
+          <a:ext cx="0" cy="0"/>
+          <a:chOff x="0" y="0"/>
+          <a:chExt cx="0" cy="0"/>
+        </a:xfrm>
+      </p:grpSpPr>
+      <p:sp>
+        <p:nvSpPr>
+          <p:cNvPr id="2" name="Slide Image Placeholder 1"/>
+          <p:cNvSpPr>
+            <a:spLocks noGrp="1" noRot="1" noChangeAspect="1"/>
+          </p:cNvSpPr>
+          <p:nvPr>
+            <p:ph type="sldImg"/>
+          </p:nvPr>
+        </p:nvSpPr>
+        <p:spPr/>
+      </p:sp>
+      <p:sp>
+        <p:nvSpPr>
+          <p:cNvPr id="3" name="Notes Placeholder 2"/>
+          <p:cNvSpPr>
+            <a:spLocks noGrp="1"/>
+          </p:cNvSpPr>
+          <p:nvPr>
+            <p:ph type="body" idx="1"/>
+          </p:nvPr>
+        </p:nvSpPr>
+        <p:spPr/>
+        <p:txBody>
+          <a:bodyPr/>
+          <a:lstStyle/>
+          <a:p>
+            <a:r>
+              <a:rPr lang="en-US" dirty="0"/>
+              <a:t/>
+            </a:r>
+            <a:endParaRPr lang="en-US" dirty="0"/>
+          </a:p>
+        </p:txBody>
+      </p:sp>
+      <p:sp>
+        <p:nvSpPr>
+          <p:cNvPr id="4" name="Slide Number Placeholder 3"/>
+          <p:cNvSpPr>
+            <a:spLocks noGrp="1"/>
+          </p:cNvSpPr>
+          <p:nvPr>
+            <p:ph type="sldNum" sz="quarter" idx="10"/>
+          </p:nvPr>
+        </p:nvSpPr>
+        <p:spPr/>
+        <p:txBody>
+          <a:bodyPr/>
+          <a:lstStyle/>
+          <a:p>
+            <a:fld id="{F7021451-1387-4CA6-816F-3879F97B5CBC}" type="slidenum">
+              <a:rPr lang="en-US"/>
+              <a:t>11</a:t>
             </a:fld>
             <a:endParaRPr lang="en-US"/>
           </a:p>
@@ -2361,6 +2450,2443 @@
 <file path=ppt/slides/slide10.xml><?xml version="1.0" encoding="utf-8"?>
 <p:sld xmlns:a="http://schemas.openxmlformats.org/drawingml/2006/main" xmlns:r="http://schemas.openxmlformats.org/officeDocument/2006/relationships" xmlns:p="http://schemas.openxmlformats.org/presentationml/2006/main">
   <p:cSld name="Slide 10">
+    <p:spTree>
+      <p:nvGrpSpPr>
+        <p:cNvPr id="1" name=""/>
+        <p:cNvGrpSpPr/>
+        <p:nvPr/>
+      </p:nvGrpSpPr>
+      <p:grpSpPr>
+        <a:xfrm>
+          <a:off x="0" y="0"/>
+          <a:ext cx="0" cy="0"/>
+          <a:chOff x="0" y="0"/>
+          <a:chExt cx="0" cy="0"/>
+        </a:xfrm>
+      </p:grpSpPr>
+      <p:sp>
+        <p:nvSpPr>
+          <p:cNvPr id="2" name="Shape 0"/>
+          <p:cNvSpPr/>
+          <p:nvPr/>
+        </p:nvSpPr>
+        <p:spPr>
+          <a:xfrm>
+            <a:off x="0" y="0"/>
+            <a:ext cx="12188952" cy="1060704"/>
+          </a:xfrm>
+          <a:prstGeom prst="rect">
+            <a:avLst/>
+          </a:prstGeom>
+          <a:solidFill>
+            <a:srgbClr val="0F172A"/>
+          </a:solidFill>
+          <a:ln/>
+        </p:spPr>
+      </p:sp>
+      <p:sp>
+        <p:nvSpPr>
+          <p:cNvPr id="3" name="Text 1"/>
+          <p:cNvSpPr/>
+          <p:nvPr/>
+        </p:nvSpPr>
+        <p:spPr>
+          <a:xfrm>
+            <a:off x="411480" y="118872"/>
+            <a:ext cx="4572000" cy="219456"/>
+          </a:xfrm>
+          <a:prstGeom prst="rect">
+            <a:avLst/>
+          </a:prstGeom>
+          <a:noFill/>
+          <a:ln/>
+        </p:spPr>
+        <p:txBody>
+          <a:bodyPr wrap="square" rtlCol="0" anchor="ctr"/>
+          <a:lstStyle/>
+          <a:p>
+            <a:pPr indent="0" marL="0">
+              <a:buNone/>
+            </a:pPr>
+            <a:r>
+              <a:rPr lang="en-US" sz="1000" b="1" spc="220" kern="0" dirty="0">
+                <a:solidFill>
+                  <a:srgbClr val="0891B2"/>
+                </a:solidFill>
+                <a:latin typeface="Inter" pitchFamily="34" charset="0"/>
+                <a:ea typeface="Inter" pitchFamily="34" charset="-122"/>
+                <a:cs typeface="Inter" pitchFamily="34" charset="-120"/>
+              </a:rPr>
+              <a:t>TCS AGENTIC AI</a:t>
+            </a:r>
+            <a:endParaRPr lang="en-US" sz="1000" dirty="0"/>
+          </a:p>
+        </p:txBody>
+      </p:sp>
+      <p:sp>
+        <p:nvSpPr>
+          <p:cNvPr id="4" name="Text 2"/>
+          <p:cNvSpPr/>
+          <p:nvPr/>
+        </p:nvSpPr>
+        <p:spPr>
+          <a:xfrm>
+            <a:off x="411480" y="329184"/>
+            <a:ext cx="9692640" cy="402336"/>
+          </a:xfrm>
+          <a:prstGeom prst="rect">
+            <a:avLst/>
+          </a:prstGeom>
+          <a:noFill/>
+          <a:ln/>
+        </p:spPr>
+        <p:txBody>
+          <a:bodyPr wrap="square" rtlCol="0" anchor="ctr"/>
+          <a:lstStyle/>
+          <a:p>
+            <a:pPr indent="0" marL="0">
+              <a:buNone/>
+            </a:pPr>
+            <a:r>
+              <a:rPr lang="en-US" sz="2300" b="1" dirty="0">
+                <a:solidFill>
+                  <a:srgbClr val="FFFFFF"/>
+                </a:solidFill>
+                <a:latin typeface="Inter" pitchFamily="34" charset="0"/>
+                <a:ea typeface="Inter" pitchFamily="34" charset="-122"/>
+                <a:cs typeface="Inter" pitchFamily="34" charset="-120"/>
+              </a:rPr>
+              <a:t>VM Migration Agent</a:t>
+            </a:r>
+            <a:endParaRPr lang="en-US" sz="2300" dirty="0"/>
+          </a:p>
+        </p:txBody>
+      </p:sp>
+      <p:sp>
+        <p:nvSpPr>
+          <p:cNvPr id="5" name="Text 3"/>
+          <p:cNvSpPr/>
+          <p:nvPr/>
+        </p:nvSpPr>
+        <p:spPr>
+          <a:xfrm>
+            <a:off x="411480" y="749808"/>
+            <a:ext cx="9692640" cy="256032"/>
+          </a:xfrm>
+          <a:prstGeom prst="rect">
+            <a:avLst/>
+          </a:prstGeom>
+          <a:noFill/>
+          <a:ln/>
+        </p:spPr>
+        <p:txBody>
+          <a:bodyPr wrap="square" rtlCol="0" anchor="ctr"/>
+          <a:lstStyle/>
+          <a:p>
+            <a:pPr indent="0" marL="0">
+              <a:buNone/>
+            </a:pPr>
+            <a:r>
+              <a:rPr lang="en-US" sz="1050" i="1" dirty="0">
+                <a:solidFill>
+                  <a:srgbClr val="94A3B8"/>
+                </a:solidFill>
+                <a:latin typeface="Inter" pitchFamily="34" charset="0"/>
+                <a:ea typeface="Inter" pitchFamily="34" charset="-122"/>
+                <a:cs typeface="Inter" pitchFamily="34" charset="-120"/>
+              </a:rPr>
+              <a:t>VMware → OpenShift Virtualization — assess against the target, govern the change, measure the move</a:t>
+            </a:r>
+            <a:endParaRPr lang="en-US" sz="1050" dirty="0"/>
+          </a:p>
+        </p:txBody>
+      </p:sp>
+      <p:sp>
+        <p:nvSpPr>
+          <p:cNvPr id="6" name="Text 4"/>
+          <p:cNvSpPr/>
+          <p:nvPr/>
+        </p:nvSpPr>
+        <p:spPr>
+          <a:xfrm>
+            <a:off x="10561320" y="310896"/>
+            <a:ext cx="1234440" cy="365760"/>
+          </a:xfrm>
+          <a:prstGeom prst="rect">
+            <a:avLst>
+              <a:gd name="adj" fmla="val 12500"/>
+            </a:avLst>
+          </a:prstGeom>
+          <a:solidFill>
+            <a:srgbClr val="2563EB"/>
+          </a:solidFill>
+          <a:ln/>
+        </p:spPr>
+        <p:txBody>
+          <a:bodyPr wrap="square" rtlCol="0" anchor="ctr"/>
+          <a:lstStyle/>
+          <a:p>
+            <a:pPr algn="ctr" indent="0" marL="0">
+              <a:buNone/>
+            </a:pPr>
+            <a:r>
+              <a:rPr lang="en-US" sz="1500" b="1" dirty="0">
+                <a:solidFill>
+                  <a:srgbClr val="FFFFFF"/>
+                </a:solidFill>
+                <a:latin typeface="Inter" pitchFamily="34" charset="0"/>
+                <a:ea typeface="Inter" pitchFamily="34" charset="-122"/>
+                <a:cs typeface="Inter" pitchFamily="34" charset="-120"/>
+              </a:rPr>
+              <a:t>UC-10</a:t>
+            </a:r>
+            <a:endParaRPr lang="en-US" sz="1500" dirty="0"/>
+          </a:p>
+        </p:txBody>
+      </p:sp>
+      <p:sp>
+        <p:nvSpPr>
+          <p:cNvPr id="7" name="Text 5"/>
+          <p:cNvSpPr/>
+          <p:nvPr/>
+        </p:nvSpPr>
+        <p:spPr>
+          <a:xfrm>
+            <a:off x="411480" y="1188720"/>
+            <a:ext cx="3657600" cy="182880"/>
+          </a:xfrm>
+          <a:prstGeom prst="rect">
+            <a:avLst/>
+          </a:prstGeom>
+          <a:noFill/>
+          <a:ln/>
+        </p:spPr>
+        <p:txBody>
+          <a:bodyPr wrap="square" rtlCol="0" anchor="ctr"/>
+          <a:lstStyle/>
+          <a:p>
+            <a:pPr indent="0" marL="0">
+              <a:buNone/>
+            </a:pPr>
+            <a:r>
+              <a:rPr lang="en-US" sz="850" b="1" spc="140" kern="0" dirty="0">
+                <a:solidFill>
+                  <a:srgbClr val="64748B"/>
+                </a:solidFill>
+                <a:latin typeface="Inter" pitchFamily="34" charset="0"/>
+                <a:ea typeface="Inter" pitchFamily="34" charset="-122"/>
+                <a:cs typeface="Inter" pitchFamily="34" charset="-120"/>
+              </a:rPr>
+              <a:t>USE CASE DESCRIPTION</a:t>
+            </a:r>
+            <a:endParaRPr lang="en-US" sz="850" dirty="0"/>
+          </a:p>
+        </p:txBody>
+      </p:sp>
+      <p:sp>
+        <p:nvSpPr>
+          <p:cNvPr id="8" name="Text 6"/>
+          <p:cNvSpPr/>
+          <p:nvPr/>
+        </p:nvSpPr>
+        <p:spPr>
+          <a:xfrm>
+            <a:off x="411480" y="1389888"/>
+            <a:ext cx="11384280" cy="914400"/>
+          </a:xfrm>
+          <a:prstGeom prst="rect">
+            <a:avLst/>
+          </a:prstGeom>
+          <a:noFill/>
+          <a:ln/>
+        </p:spPr>
+        <p:txBody>
+          <a:bodyPr wrap="square" rtlCol="0" anchor="t"/>
+          <a:lstStyle/>
+          <a:p>
+            <a:pPr indent="0" marL="0">
+              <a:lnSpc>
+                <a:spcPct val="120000"/>
+              </a:lnSpc>
+              <a:buNone/>
+            </a:pPr>
+            <a:r>
+              <a:rPr lang="en-US" sz="1200" dirty="0">
+                <a:solidFill>
+                  <a:srgbClr val="1E293B"/>
+                </a:solidFill>
+                <a:latin typeface="Inter" pitchFamily="34" charset="0"/>
+                <a:ea typeface="Inter" pitchFamily="34" charset="-122"/>
+                <a:cs typeface="Inter" pitchFamily="34" charset="-120"/>
+              </a:rPr>
+              <a:t>Every assessment tool on the market reads the source. This agent runs inside the destination, so it can answer what none of them can: will this VM actually run when it lands? A KubeVirt VM is a pod — it must fit on ONE node — and a 64 GiB guest on 32 GiB workers copies perfectly, then sits Pending after the outage is spent.</a:t>
+            </a:r>
+            <a:endParaRPr lang="en-US" sz="1200" dirty="0"/>
+          </a:p>
+        </p:txBody>
+      </p:sp>
+      <p:sp>
+        <p:nvSpPr>
+          <p:cNvPr id="9" name="Text 7"/>
+          <p:cNvSpPr/>
+          <p:nvPr/>
+        </p:nvSpPr>
+        <p:spPr>
+          <a:xfrm>
+            <a:off x="411480" y="2176272"/>
+            <a:ext cx="3657600" cy="201168"/>
+          </a:xfrm>
+          <a:prstGeom prst="rect">
+            <a:avLst/>
+          </a:prstGeom>
+          <a:noFill/>
+          <a:ln/>
+        </p:spPr>
+        <p:txBody>
+          <a:bodyPr wrap="square" rtlCol="0" anchor="ctr"/>
+          <a:lstStyle/>
+          <a:p>
+            <a:pPr indent="0" marL="0">
+              <a:buNone/>
+            </a:pPr>
+            <a:r>
+              <a:rPr lang="en-US" sz="850" b="1" spc="140" kern="0" dirty="0">
+                <a:solidFill>
+                  <a:srgbClr val="2563EB"/>
+                </a:solidFill>
+                <a:latin typeface="Inter" pitchFamily="34" charset="0"/>
+                <a:ea typeface="Inter" pitchFamily="34" charset="-122"/>
+                <a:cs typeface="Inter" pitchFamily="34" charset="-120"/>
+              </a:rPr>
+              <a:t>END-TO-END WORKFLOW</a:t>
+            </a:r>
+            <a:endParaRPr lang="en-US" sz="850" dirty="0"/>
+          </a:p>
+        </p:txBody>
+      </p:sp>
+      <p:sp>
+        <p:nvSpPr>
+          <p:cNvPr id="10" name="Text 8"/>
+          <p:cNvSpPr/>
+          <p:nvPr/>
+        </p:nvSpPr>
+        <p:spPr>
+          <a:xfrm>
+            <a:off x="411480" y="2395728"/>
+            <a:ext cx="7315200" cy="173736"/>
+          </a:xfrm>
+          <a:prstGeom prst="rect">
+            <a:avLst/>
+          </a:prstGeom>
+          <a:noFill/>
+          <a:ln/>
+        </p:spPr>
+        <p:txBody>
+          <a:bodyPr wrap="square" rtlCol="0" anchor="ctr"/>
+          <a:lstStyle/>
+          <a:p>
+            <a:pPr indent="0" marL="0">
+              <a:buNone/>
+            </a:pPr>
+            <a:r>
+              <a:rPr lang="en-US" sz="900" b="1" spc="120" kern="0" dirty="0">
+                <a:solidFill>
+                  <a:srgbClr val="64748B"/>
+                </a:solidFill>
+                <a:latin typeface="Inter" pitchFamily="34" charset="0"/>
+                <a:ea typeface="Inter" pitchFamily="34" charset="-122"/>
+                <a:cs typeface="Inter" pitchFamily="34" charset="-120"/>
+              </a:rPr>
+              <a:t>DISCOVER  →  ASSESS</a:t>
+            </a:r>
+            <a:endParaRPr lang="en-US" sz="900" dirty="0"/>
+          </a:p>
+        </p:txBody>
+      </p:sp>
+      <p:sp>
+        <p:nvSpPr>
+          <p:cNvPr id="11" name="Shape 9"/>
+          <p:cNvSpPr/>
+          <p:nvPr/>
+        </p:nvSpPr>
+        <p:spPr>
+          <a:xfrm>
+            <a:off x="411480" y="2569464"/>
+            <a:ext cx="2057400" cy="749808"/>
+          </a:xfrm>
+          <a:prstGeom prst="roundRect">
+            <a:avLst>
+              <a:gd name="adj" fmla="val 8537"/>
+            </a:avLst>
+          </a:prstGeom>
+          <a:solidFill>
+            <a:srgbClr val="FEF3C7"/>
+          </a:solidFill>
+          <a:ln w="19050">
+            <a:solidFill>
+              <a:srgbClr val="D97706"/>
+            </a:solidFill>
+            <a:prstDash val="solid"/>
+          </a:ln>
+        </p:spPr>
+      </p:sp>
+      <p:sp>
+        <p:nvSpPr>
+          <p:cNvPr id="12" name="Text 10"/>
+          <p:cNvSpPr/>
+          <p:nvPr/>
+        </p:nvSpPr>
+        <p:spPr>
+          <a:xfrm>
+            <a:off x="466344" y="2636947"/>
+            <a:ext cx="1947672" cy="314919"/>
+          </a:xfrm>
+          <a:prstGeom prst="rect">
+            <a:avLst/>
+          </a:prstGeom>
+          <a:noFill/>
+          <a:ln/>
+        </p:spPr>
+        <p:txBody>
+          <a:bodyPr wrap="square" rtlCol="0" anchor="ctr"/>
+          <a:lstStyle/>
+          <a:p>
+            <a:pPr algn="ctr" indent="0" marL="0">
+              <a:buNone/>
+            </a:pPr>
+            <a:r>
+              <a:rPr lang="en-US" sz="1050" b="1" dirty="0">
+                <a:solidFill>
+                  <a:srgbClr val="92400E"/>
+                </a:solidFill>
+                <a:latin typeface="Inter" pitchFamily="34" charset="0"/>
+                <a:ea typeface="Inter" pitchFamily="34" charset="-122"/>
+                <a:cs typeface="Inter" pitchFamily="34" charset="-120"/>
+              </a:rPr>
+              <a:t>👤 Choose the source</a:t>
+            </a:r>
+            <a:endParaRPr lang="en-US" sz="1050" dirty="0"/>
+          </a:p>
+        </p:txBody>
+      </p:sp>
+      <p:sp>
+        <p:nvSpPr>
+          <p:cNvPr id="13" name="Text 11"/>
+          <p:cNvSpPr/>
+          <p:nvPr/>
+        </p:nvSpPr>
+        <p:spPr>
+          <a:xfrm>
+            <a:off x="466344" y="2944368"/>
+            <a:ext cx="1947672" cy="329916"/>
+          </a:xfrm>
+          <a:prstGeom prst="rect">
+            <a:avLst/>
+          </a:prstGeom>
+          <a:noFill/>
+          <a:ln/>
+        </p:spPr>
+        <p:txBody>
+          <a:bodyPr wrap="square" rtlCol="0" anchor="t"/>
+          <a:lstStyle/>
+          <a:p>
+            <a:pPr algn="ctr" indent="0" marL="0">
+              <a:buNone/>
+            </a:pPr>
+            <a:r>
+              <a:rPr lang="en-US" sz="850" dirty="0">
+                <a:solidFill>
+                  <a:srgbClr val="475569"/>
+                </a:solidFill>
+                <a:latin typeface="Inter" pitchFamily="34" charset="0"/>
+                <a:ea typeface="Inter" pitchFamily="34" charset="-122"/>
+                <a:cs typeface="Inter" pitchFamily="34" charset="-120"/>
+              </a:rPr>
+              <a:t>vCenter via MTV</a:t>
+            </a:r>
+            <a:endParaRPr lang="en-US" sz="850" dirty="0"/>
+          </a:p>
+        </p:txBody>
+      </p:sp>
+      <p:sp>
+        <p:nvSpPr>
+          <p:cNvPr id="14" name="Text 12"/>
+          <p:cNvSpPr/>
+          <p:nvPr/>
+        </p:nvSpPr>
+        <p:spPr>
+          <a:xfrm>
+            <a:off x="2468880" y="2816352"/>
+            <a:ext cx="274320" cy="256032"/>
+          </a:xfrm>
+          <a:prstGeom prst="rect">
+            <a:avLst/>
+          </a:prstGeom>
+          <a:noFill/>
+          <a:ln/>
+        </p:spPr>
+        <p:txBody>
+          <a:bodyPr wrap="square" rtlCol="0" anchor="ctr"/>
+          <a:lstStyle/>
+          <a:p>
+            <a:pPr algn="ctr" indent="0" marL="0">
+              <a:buNone/>
+            </a:pPr>
+            <a:r>
+              <a:rPr lang="en-US" sz="1100" dirty="0">
+                <a:solidFill>
+                  <a:srgbClr val="64748B"/>
+                </a:solidFill>
+                <a:latin typeface="Inter" pitchFamily="34" charset="0"/>
+                <a:ea typeface="Inter" pitchFamily="34" charset="-122"/>
+                <a:cs typeface="Inter" pitchFamily="34" charset="-120"/>
+              </a:rPr>
+              <a:t>▶</a:t>
+            </a:r>
+            <a:endParaRPr lang="en-US" sz="1100" dirty="0"/>
+          </a:p>
+        </p:txBody>
+      </p:sp>
+      <p:sp>
+        <p:nvSpPr>
+          <p:cNvPr id="15" name="Shape 13"/>
+          <p:cNvSpPr/>
+          <p:nvPr/>
+        </p:nvSpPr>
+        <p:spPr>
+          <a:xfrm>
+            <a:off x="2743200" y="2569464"/>
+            <a:ext cx="2057400" cy="749808"/>
+          </a:xfrm>
+          <a:prstGeom prst="roundRect">
+            <a:avLst>
+              <a:gd name="adj" fmla="val 8537"/>
+            </a:avLst>
+          </a:prstGeom>
+          <a:solidFill>
+            <a:srgbClr val="DBEAFE"/>
+          </a:solidFill>
+          <a:ln w="19050">
+            <a:solidFill>
+              <a:srgbClr val="2563EB"/>
+            </a:solidFill>
+            <a:prstDash val="solid"/>
+          </a:ln>
+        </p:spPr>
+      </p:sp>
+      <p:sp>
+        <p:nvSpPr>
+          <p:cNvPr id="16" name="Text 14"/>
+          <p:cNvSpPr/>
+          <p:nvPr/>
+        </p:nvSpPr>
+        <p:spPr>
+          <a:xfrm>
+            <a:off x="2798064" y="2636947"/>
+            <a:ext cx="1947672" cy="314919"/>
+          </a:xfrm>
+          <a:prstGeom prst="rect">
+            <a:avLst/>
+          </a:prstGeom>
+          <a:noFill/>
+          <a:ln/>
+        </p:spPr>
+        <p:txBody>
+          <a:bodyPr wrap="square" rtlCol="0" anchor="ctr"/>
+          <a:lstStyle/>
+          <a:p>
+            <a:pPr algn="ctr" indent="0" marL="0">
+              <a:buNone/>
+            </a:pPr>
+            <a:r>
+              <a:rPr lang="en-US" sz="1050" b="1" dirty="0">
+                <a:solidFill>
+                  <a:srgbClr val="1E40AF"/>
+                </a:solidFill>
+                <a:latin typeface="Inter" pitchFamily="34" charset="0"/>
+                <a:ea typeface="Inter" pitchFamily="34" charset="-122"/>
+                <a:cs typeface="Inter" pitchFamily="34" charset="-120"/>
+              </a:rPr>
+              <a:t>⚙️ Read-only discovery</a:t>
+            </a:r>
+            <a:endParaRPr lang="en-US" sz="1050" dirty="0"/>
+          </a:p>
+        </p:txBody>
+      </p:sp>
+      <p:sp>
+        <p:nvSpPr>
+          <p:cNvPr id="17" name="Text 15"/>
+          <p:cNvSpPr/>
+          <p:nvPr/>
+        </p:nvSpPr>
+        <p:spPr>
+          <a:xfrm>
+            <a:off x="2798064" y="2944368"/>
+            <a:ext cx="1947672" cy="329916"/>
+          </a:xfrm>
+          <a:prstGeom prst="rect">
+            <a:avLst/>
+          </a:prstGeom>
+          <a:noFill/>
+          <a:ln/>
+        </p:spPr>
+        <p:txBody>
+          <a:bodyPr wrap="square" rtlCol="0" anchor="t"/>
+          <a:lstStyle/>
+          <a:p>
+            <a:pPr algn="ctr" indent="0" marL="0">
+              <a:buNone/>
+            </a:pPr>
+            <a:r>
+              <a:rPr lang="en-US" sz="850" dirty="0">
+                <a:solidFill>
+                  <a:srgbClr val="475569"/>
+                </a:solidFill>
+                <a:latin typeface="Inter" pitchFamily="34" charset="0"/>
+                <a:ea typeface="Inter" pitchFamily="34" charset="-122"/>
+                <a:cs typeface="Inter" pitchFamily="34" charset="-120"/>
+              </a:rPr>
+              <a:t>OS · IPs · CPU · RAM · disks</a:t>
+            </a:r>
+            <a:endParaRPr lang="en-US" sz="850" dirty="0"/>
+          </a:p>
+        </p:txBody>
+      </p:sp>
+      <p:sp>
+        <p:nvSpPr>
+          <p:cNvPr id="18" name="Text 16"/>
+          <p:cNvSpPr/>
+          <p:nvPr/>
+        </p:nvSpPr>
+        <p:spPr>
+          <a:xfrm>
+            <a:off x="4800600" y="2816352"/>
+            <a:ext cx="274320" cy="256032"/>
+          </a:xfrm>
+          <a:prstGeom prst="rect">
+            <a:avLst/>
+          </a:prstGeom>
+          <a:noFill/>
+          <a:ln/>
+        </p:spPr>
+        <p:txBody>
+          <a:bodyPr wrap="square" rtlCol="0" anchor="ctr"/>
+          <a:lstStyle/>
+          <a:p>
+            <a:pPr algn="ctr" indent="0" marL="0">
+              <a:buNone/>
+            </a:pPr>
+            <a:r>
+              <a:rPr lang="en-US" sz="1100" dirty="0">
+                <a:solidFill>
+                  <a:srgbClr val="64748B"/>
+                </a:solidFill>
+                <a:latin typeface="Inter" pitchFamily="34" charset="0"/>
+                <a:ea typeface="Inter" pitchFamily="34" charset="-122"/>
+                <a:cs typeface="Inter" pitchFamily="34" charset="-120"/>
+              </a:rPr>
+              <a:t>▶</a:t>
+            </a:r>
+            <a:endParaRPr lang="en-US" sz="1100" dirty="0"/>
+          </a:p>
+        </p:txBody>
+      </p:sp>
+      <p:sp>
+        <p:nvSpPr>
+          <p:cNvPr id="19" name="Shape 17"/>
+          <p:cNvSpPr/>
+          <p:nvPr/>
+        </p:nvSpPr>
+        <p:spPr>
+          <a:xfrm>
+            <a:off x="5074920" y="2569464"/>
+            <a:ext cx="2057400" cy="749808"/>
+          </a:xfrm>
+          <a:prstGeom prst="roundRect">
+            <a:avLst>
+              <a:gd name="adj" fmla="val 8537"/>
+            </a:avLst>
+          </a:prstGeom>
+          <a:solidFill>
+            <a:srgbClr val="DBEAFE"/>
+          </a:solidFill>
+          <a:ln w="19050">
+            <a:solidFill>
+              <a:srgbClr val="2563EB"/>
+            </a:solidFill>
+            <a:prstDash val="solid"/>
+          </a:ln>
+        </p:spPr>
+      </p:sp>
+      <p:sp>
+        <p:nvSpPr>
+          <p:cNvPr id="20" name="Text 18"/>
+          <p:cNvSpPr/>
+          <p:nvPr/>
+        </p:nvSpPr>
+        <p:spPr>
+          <a:xfrm>
+            <a:off x="5129784" y="2636947"/>
+            <a:ext cx="1947672" cy="314919"/>
+          </a:xfrm>
+          <a:prstGeom prst="rect">
+            <a:avLst/>
+          </a:prstGeom>
+          <a:noFill/>
+          <a:ln/>
+        </p:spPr>
+        <p:txBody>
+          <a:bodyPr wrap="square" rtlCol="0" anchor="ctr"/>
+          <a:lstStyle/>
+          <a:p>
+            <a:pPr algn="ctr" indent="0" marL="0">
+              <a:buNone/>
+            </a:pPr>
+            <a:r>
+              <a:rPr lang="en-US" sz="1050" b="1" dirty="0">
+                <a:solidFill>
+                  <a:srgbClr val="1E40AF"/>
+                </a:solidFill>
+                <a:latin typeface="Inter" pitchFamily="34" charset="0"/>
+                <a:ea typeface="Inter" pitchFamily="34" charset="-122"/>
+                <a:cs typeface="Inter" pitchFamily="34" charset="-120"/>
+              </a:rPr>
+              <a:t>⚙️ Certified guest list</a:t>
+            </a:r>
+            <a:endParaRPr lang="en-US" sz="1050" dirty="0"/>
+          </a:p>
+        </p:txBody>
+      </p:sp>
+      <p:sp>
+        <p:nvSpPr>
+          <p:cNvPr id="21" name="Text 19"/>
+          <p:cNvSpPr/>
+          <p:nvPr/>
+        </p:nvSpPr>
+        <p:spPr>
+          <a:xfrm>
+            <a:off x="5129784" y="2944368"/>
+            <a:ext cx="1947672" cy="329916"/>
+          </a:xfrm>
+          <a:prstGeom prst="rect">
+            <a:avLst/>
+          </a:prstGeom>
+          <a:noFill/>
+          <a:ln/>
+        </p:spPr>
+        <p:txBody>
+          <a:bodyPr wrap="square" rtlCol="0" anchor="t"/>
+          <a:lstStyle/>
+          <a:p>
+            <a:pPr algn="ctr" indent="0" marL="0">
+              <a:buNone/>
+            </a:pPr>
+            <a:r>
+              <a:rPr lang="en-US" sz="850" dirty="0">
+                <a:solidFill>
+                  <a:srgbClr val="475569"/>
+                </a:solidFill>
+                <a:latin typeface="Inter" pitchFamily="34" charset="0"/>
+                <a:ea typeface="Inter" pitchFamily="34" charset="-122"/>
+                <a:cs typeface="Inter" pitchFamily="34" charset="-120"/>
+              </a:rPr>
+              <a:t>Red Hat's three tiers</a:t>
+            </a:r>
+            <a:endParaRPr lang="en-US" sz="850" dirty="0"/>
+          </a:p>
+        </p:txBody>
+      </p:sp>
+      <p:sp>
+        <p:nvSpPr>
+          <p:cNvPr id="22" name="Text 20"/>
+          <p:cNvSpPr/>
+          <p:nvPr/>
+        </p:nvSpPr>
+        <p:spPr>
+          <a:xfrm>
+            <a:off x="7132320" y="2816352"/>
+            <a:ext cx="274320" cy="256032"/>
+          </a:xfrm>
+          <a:prstGeom prst="rect">
+            <a:avLst/>
+          </a:prstGeom>
+          <a:noFill/>
+          <a:ln/>
+        </p:spPr>
+        <p:txBody>
+          <a:bodyPr wrap="square" rtlCol="0" anchor="ctr"/>
+          <a:lstStyle/>
+          <a:p>
+            <a:pPr algn="ctr" indent="0" marL="0">
+              <a:buNone/>
+            </a:pPr>
+            <a:r>
+              <a:rPr lang="en-US" sz="1100" dirty="0">
+                <a:solidFill>
+                  <a:srgbClr val="64748B"/>
+                </a:solidFill>
+                <a:latin typeface="Inter" pitchFamily="34" charset="0"/>
+                <a:ea typeface="Inter" pitchFamily="34" charset="-122"/>
+                <a:cs typeface="Inter" pitchFamily="34" charset="-120"/>
+              </a:rPr>
+              <a:t>▶</a:t>
+            </a:r>
+            <a:endParaRPr lang="en-US" sz="1100" dirty="0"/>
+          </a:p>
+        </p:txBody>
+      </p:sp>
+      <p:sp>
+        <p:nvSpPr>
+          <p:cNvPr id="23" name="Shape 21"/>
+          <p:cNvSpPr/>
+          <p:nvPr/>
+        </p:nvSpPr>
+        <p:spPr>
+          <a:xfrm>
+            <a:off x="7406640" y="2569464"/>
+            <a:ext cx="2057400" cy="749808"/>
+          </a:xfrm>
+          <a:prstGeom prst="roundRect">
+            <a:avLst>
+              <a:gd name="adj" fmla="val 8537"/>
+            </a:avLst>
+          </a:prstGeom>
+          <a:solidFill>
+            <a:srgbClr val="DBEAFE"/>
+          </a:solidFill>
+          <a:ln w="19050">
+            <a:solidFill>
+              <a:srgbClr val="2563EB"/>
+            </a:solidFill>
+            <a:prstDash val="solid"/>
+          </a:ln>
+        </p:spPr>
+      </p:sp>
+      <p:sp>
+        <p:nvSpPr>
+          <p:cNvPr id="24" name="Text 22"/>
+          <p:cNvSpPr/>
+          <p:nvPr/>
+        </p:nvSpPr>
+        <p:spPr>
+          <a:xfrm>
+            <a:off x="7461504" y="2636947"/>
+            <a:ext cx="1947672" cy="314919"/>
+          </a:xfrm>
+          <a:prstGeom prst="rect">
+            <a:avLst/>
+          </a:prstGeom>
+          <a:noFill/>
+          <a:ln/>
+        </p:spPr>
+        <p:txBody>
+          <a:bodyPr wrap="square" rtlCol="0" anchor="ctr"/>
+          <a:lstStyle/>
+          <a:p>
+            <a:pPr algn="ctr" indent="0" marL="0">
+              <a:buNone/>
+            </a:pPr>
+            <a:r>
+              <a:rPr lang="en-US" sz="1050" b="1" dirty="0">
+                <a:solidFill>
+                  <a:srgbClr val="1E40AF"/>
+                </a:solidFill>
+                <a:latin typeface="Inter" pitchFamily="34" charset="0"/>
+                <a:ea typeface="Inter" pitchFamily="34" charset="-122"/>
+                <a:cs typeface="Inter" pitchFamily="34" charset="-120"/>
+              </a:rPr>
+              <a:t>⚙️ 15 source checks</a:t>
+            </a:r>
+            <a:endParaRPr lang="en-US" sz="1050" dirty="0"/>
+          </a:p>
+        </p:txBody>
+      </p:sp>
+      <p:sp>
+        <p:nvSpPr>
+          <p:cNvPr id="25" name="Text 23"/>
+          <p:cNvSpPr/>
+          <p:nvPr/>
+        </p:nvSpPr>
+        <p:spPr>
+          <a:xfrm>
+            <a:off x="7461504" y="2944368"/>
+            <a:ext cx="1947672" cy="329916"/>
+          </a:xfrm>
+          <a:prstGeom prst="rect">
+            <a:avLst/>
+          </a:prstGeom>
+          <a:noFill/>
+          <a:ln/>
+        </p:spPr>
+        <p:txBody>
+          <a:bodyPr wrap="square" rtlCol="0" anchor="t"/>
+          <a:lstStyle/>
+          <a:p>
+            <a:pPr algn="ctr" indent="0" marL="0">
+              <a:buNone/>
+            </a:pPr>
+            <a:r>
+              <a:rPr lang="en-US" sz="850" dirty="0">
+                <a:solidFill>
+                  <a:srgbClr val="475569"/>
+                </a:solidFill>
+                <a:latin typeface="Inter" pitchFamily="34" charset="0"/>
+                <a:ea typeface="Inter" pitchFamily="34" charset="-122"/>
+                <a:cs typeface="Inter" pitchFamily="34" charset="-120"/>
+              </a:rPr>
+              <a:t>snapshots · RDM · vTPM</a:t>
+            </a:r>
+            <a:endParaRPr lang="en-US" sz="850" dirty="0"/>
+          </a:p>
+        </p:txBody>
+      </p:sp>
+      <p:sp>
+        <p:nvSpPr>
+          <p:cNvPr id="26" name="Text 24"/>
+          <p:cNvSpPr/>
+          <p:nvPr/>
+        </p:nvSpPr>
+        <p:spPr>
+          <a:xfrm>
+            <a:off x="9464040" y="2816352"/>
+            <a:ext cx="274320" cy="256032"/>
+          </a:xfrm>
+          <a:prstGeom prst="rect">
+            <a:avLst/>
+          </a:prstGeom>
+          <a:noFill/>
+          <a:ln/>
+        </p:spPr>
+        <p:txBody>
+          <a:bodyPr wrap="square" rtlCol="0" anchor="ctr"/>
+          <a:lstStyle/>
+          <a:p>
+            <a:pPr algn="ctr" indent="0" marL="0">
+              <a:buNone/>
+            </a:pPr>
+            <a:r>
+              <a:rPr lang="en-US" sz="1100" dirty="0">
+                <a:solidFill>
+                  <a:srgbClr val="64748B"/>
+                </a:solidFill>
+                <a:latin typeface="Inter" pitchFamily="34" charset="0"/>
+                <a:ea typeface="Inter" pitchFamily="34" charset="-122"/>
+                <a:cs typeface="Inter" pitchFamily="34" charset="-120"/>
+              </a:rPr>
+              <a:t>▶</a:t>
+            </a:r>
+            <a:endParaRPr lang="en-US" sz="1100" dirty="0"/>
+          </a:p>
+        </p:txBody>
+      </p:sp>
+      <p:sp>
+        <p:nvSpPr>
+          <p:cNvPr id="27" name="Shape 25"/>
+          <p:cNvSpPr/>
+          <p:nvPr/>
+        </p:nvSpPr>
+        <p:spPr>
+          <a:xfrm>
+            <a:off x="9738360" y="2569464"/>
+            <a:ext cx="2057400" cy="749808"/>
+          </a:xfrm>
+          <a:prstGeom prst="roundRect">
+            <a:avLst>
+              <a:gd name="adj" fmla="val 8537"/>
+            </a:avLst>
+          </a:prstGeom>
+          <a:solidFill>
+            <a:srgbClr val="DBEAFE"/>
+          </a:solidFill>
+          <a:ln w="19050">
+            <a:solidFill>
+              <a:srgbClr val="2563EB"/>
+            </a:solidFill>
+            <a:prstDash val="solid"/>
+          </a:ln>
+        </p:spPr>
+      </p:sp>
+      <p:sp>
+        <p:nvSpPr>
+          <p:cNvPr id="28" name="Text 26"/>
+          <p:cNvSpPr/>
+          <p:nvPr/>
+        </p:nvSpPr>
+        <p:spPr>
+          <a:xfrm>
+            <a:off x="9793224" y="2636947"/>
+            <a:ext cx="1947672" cy="314919"/>
+          </a:xfrm>
+          <a:prstGeom prst="rect">
+            <a:avLst/>
+          </a:prstGeom>
+          <a:noFill/>
+          <a:ln/>
+        </p:spPr>
+        <p:txBody>
+          <a:bodyPr wrap="square" rtlCol="0" anchor="ctr"/>
+          <a:lstStyle/>
+          <a:p>
+            <a:pPr algn="ctr" indent="0" marL="0">
+              <a:buNone/>
+            </a:pPr>
+            <a:r>
+              <a:rPr lang="en-US" sz="1050" b="1" dirty="0">
+                <a:solidFill>
+                  <a:srgbClr val="1E40AF"/>
+                </a:solidFill>
+                <a:latin typeface="Inter" pitchFamily="34" charset="0"/>
+                <a:ea typeface="Inter" pitchFamily="34" charset="-122"/>
+                <a:cs typeface="Inter" pitchFamily="34" charset="-120"/>
+              </a:rPr>
+              <a:t>⚙️ Will it fit?</a:t>
+            </a:r>
+            <a:endParaRPr lang="en-US" sz="1050" dirty="0"/>
+          </a:p>
+        </p:txBody>
+      </p:sp>
+      <p:sp>
+        <p:nvSpPr>
+          <p:cNvPr id="29" name="Text 27"/>
+          <p:cNvSpPr/>
+          <p:nvPr/>
+        </p:nvSpPr>
+        <p:spPr>
+          <a:xfrm>
+            <a:off x="9793224" y="2944368"/>
+            <a:ext cx="1947672" cy="329916"/>
+          </a:xfrm>
+          <a:prstGeom prst="rect">
+            <a:avLst/>
+          </a:prstGeom>
+          <a:noFill/>
+          <a:ln/>
+        </p:spPr>
+        <p:txBody>
+          <a:bodyPr wrap="square" rtlCol="0" anchor="t"/>
+          <a:lstStyle/>
+          <a:p>
+            <a:pPr algn="ctr" indent="0" marL="0">
+              <a:buNone/>
+            </a:pPr>
+            <a:r>
+              <a:rPr lang="en-US" sz="850" dirty="0">
+                <a:solidFill>
+                  <a:srgbClr val="475569"/>
+                </a:solidFill>
+                <a:latin typeface="Inter" pitchFamily="34" charset="0"/>
+                <a:ea typeface="Inter" pitchFamily="34" charset="-122"/>
+                <a:cs typeface="Inter" pitchFamily="34" charset="-120"/>
+              </a:rPr>
+              <a:t>node-level schedulability</a:t>
+            </a:r>
+            <a:endParaRPr lang="en-US" sz="850" dirty="0"/>
+          </a:p>
+        </p:txBody>
+      </p:sp>
+      <p:sp>
+        <p:nvSpPr>
+          <p:cNvPr id="30" name="Text 28"/>
+          <p:cNvSpPr/>
+          <p:nvPr/>
+        </p:nvSpPr>
+        <p:spPr>
+          <a:xfrm>
+            <a:off x="411480" y="3438144"/>
+            <a:ext cx="7315200" cy="173736"/>
+          </a:xfrm>
+          <a:prstGeom prst="rect">
+            <a:avLst/>
+          </a:prstGeom>
+          <a:noFill/>
+          <a:ln/>
+        </p:spPr>
+        <p:txBody>
+          <a:bodyPr wrap="square" rtlCol="0" anchor="ctr"/>
+          <a:lstStyle/>
+          <a:p>
+            <a:pPr indent="0" marL="0">
+              <a:buNone/>
+            </a:pPr>
+            <a:r>
+              <a:rPr lang="en-US" sz="900" b="1" spc="120" kern="0" dirty="0">
+                <a:solidFill>
+                  <a:srgbClr val="64748B"/>
+                </a:solidFill>
+                <a:latin typeface="Inter" pitchFamily="34" charset="0"/>
+                <a:ea typeface="Inter" pitchFamily="34" charset="-122"/>
+                <a:cs typeface="Inter" pitchFamily="34" charset="-120"/>
+              </a:rPr>
+              <a:t>REPORT &amp; RECOMMEND</a:t>
+            </a:r>
+            <a:endParaRPr lang="en-US" sz="900" dirty="0"/>
+          </a:p>
+        </p:txBody>
+      </p:sp>
+      <p:sp>
+        <p:nvSpPr>
+          <p:cNvPr id="31" name="Shape 29"/>
+          <p:cNvSpPr/>
+          <p:nvPr/>
+        </p:nvSpPr>
+        <p:spPr>
+          <a:xfrm>
+            <a:off x="411480" y="3611880"/>
+            <a:ext cx="2057400" cy="749808"/>
+          </a:xfrm>
+          <a:prstGeom prst="roundRect">
+            <a:avLst>
+              <a:gd name="adj" fmla="val 8537"/>
+            </a:avLst>
+          </a:prstGeom>
+          <a:solidFill>
+            <a:srgbClr val="DBEAFE"/>
+          </a:solidFill>
+          <a:ln w="19050">
+            <a:solidFill>
+              <a:srgbClr val="2563EB"/>
+            </a:solidFill>
+            <a:prstDash val="solid"/>
+          </a:ln>
+        </p:spPr>
+      </p:sp>
+      <p:sp>
+        <p:nvSpPr>
+          <p:cNvPr id="32" name="Text 30"/>
+          <p:cNvSpPr/>
+          <p:nvPr/>
+        </p:nvSpPr>
+        <p:spPr>
+          <a:xfrm>
+            <a:off x="466344" y="3679363"/>
+            <a:ext cx="1947672" cy="314919"/>
+          </a:xfrm>
+          <a:prstGeom prst="rect">
+            <a:avLst/>
+          </a:prstGeom>
+          <a:noFill/>
+          <a:ln/>
+        </p:spPr>
+        <p:txBody>
+          <a:bodyPr wrap="square" rtlCol="0" anchor="ctr"/>
+          <a:lstStyle/>
+          <a:p>
+            <a:pPr algn="ctr" indent="0" marL="0">
+              <a:buNone/>
+            </a:pPr>
+            <a:r>
+              <a:rPr lang="en-US" sz="1050" b="1" dirty="0">
+                <a:solidFill>
+                  <a:srgbClr val="1E40AF"/>
+                </a:solidFill>
+                <a:latin typeface="Inter" pitchFamily="34" charset="0"/>
+                <a:ea typeface="Inter" pitchFamily="34" charset="-122"/>
+                <a:cs typeface="Inter" pitchFamily="34" charset="-120"/>
+              </a:rPr>
+              <a:t>⚙️ Resource guarantees</a:t>
+            </a:r>
+            <a:endParaRPr lang="en-US" sz="1050" dirty="0"/>
+          </a:p>
+        </p:txBody>
+      </p:sp>
+      <p:sp>
+        <p:nvSpPr>
+          <p:cNvPr id="33" name="Text 31"/>
+          <p:cNvSpPr/>
+          <p:nvPr/>
+        </p:nvSpPr>
+        <p:spPr>
+          <a:xfrm>
+            <a:off x="466344" y="3986784"/>
+            <a:ext cx="1947672" cy="329916"/>
+          </a:xfrm>
+          <a:prstGeom prst="rect">
+            <a:avLst/>
+          </a:prstGeom>
+          <a:noFill/>
+          <a:ln/>
+        </p:spPr>
+        <p:txBody>
+          <a:bodyPr wrap="square" rtlCol="0" anchor="t"/>
+          <a:lstStyle/>
+          <a:p>
+            <a:pPr algn="ctr" indent="0" marL="0">
+              <a:buNone/>
+            </a:pPr>
+            <a:r>
+              <a:rPr lang="en-US" sz="850" dirty="0">
+                <a:solidFill>
+                  <a:srgbClr val="475569"/>
+                </a:solidFill>
+                <a:latin typeface="Inter" pitchFamily="34" charset="0"/>
+                <a:ea typeface="Inter" pitchFamily="34" charset="-122"/>
+                <a:cs typeface="Inter" pitchFamily="34" charset="-120"/>
+              </a:rPr>
+              <a:t>reservations → Burstable</a:t>
+            </a:r>
+            <a:endParaRPr lang="en-US" sz="850" dirty="0"/>
+          </a:p>
+        </p:txBody>
+      </p:sp>
+      <p:sp>
+        <p:nvSpPr>
+          <p:cNvPr id="34" name="Text 32"/>
+          <p:cNvSpPr/>
+          <p:nvPr/>
+        </p:nvSpPr>
+        <p:spPr>
+          <a:xfrm>
+            <a:off x="2468880" y="3858768"/>
+            <a:ext cx="274320" cy="256032"/>
+          </a:xfrm>
+          <a:prstGeom prst="rect">
+            <a:avLst/>
+          </a:prstGeom>
+          <a:noFill/>
+          <a:ln/>
+        </p:spPr>
+        <p:txBody>
+          <a:bodyPr wrap="square" rtlCol="0" anchor="ctr"/>
+          <a:lstStyle/>
+          <a:p>
+            <a:pPr algn="ctr" indent="0" marL="0">
+              <a:buNone/>
+            </a:pPr>
+            <a:r>
+              <a:rPr lang="en-US" sz="1100" dirty="0">
+                <a:solidFill>
+                  <a:srgbClr val="64748B"/>
+                </a:solidFill>
+                <a:latin typeface="Inter" pitchFamily="34" charset="0"/>
+                <a:ea typeface="Inter" pitchFamily="34" charset="-122"/>
+                <a:cs typeface="Inter" pitchFamily="34" charset="-120"/>
+              </a:rPr>
+              <a:t>▶</a:t>
+            </a:r>
+            <a:endParaRPr lang="en-US" sz="1100" dirty="0"/>
+          </a:p>
+        </p:txBody>
+      </p:sp>
+      <p:sp>
+        <p:nvSpPr>
+          <p:cNvPr id="35" name="Shape 33"/>
+          <p:cNvSpPr/>
+          <p:nvPr/>
+        </p:nvSpPr>
+        <p:spPr>
+          <a:xfrm>
+            <a:off x="2743200" y="3611880"/>
+            <a:ext cx="2057400" cy="749808"/>
+          </a:xfrm>
+          <a:prstGeom prst="roundRect">
+            <a:avLst>
+              <a:gd name="adj" fmla="val 8537"/>
+            </a:avLst>
+          </a:prstGeom>
+          <a:solidFill>
+            <a:srgbClr val="DBEAFE"/>
+          </a:solidFill>
+          <a:ln w="19050">
+            <a:solidFill>
+              <a:srgbClr val="2563EB"/>
+            </a:solidFill>
+            <a:prstDash val="solid"/>
+          </a:ln>
+        </p:spPr>
+      </p:sp>
+      <p:sp>
+        <p:nvSpPr>
+          <p:cNvPr id="36" name="Text 34"/>
+          <p:cNvSpPr/>
+          <p:nvPr/>
+        </p:nvSpPr>
+        <p:spPr>
+          <a:xfrm>
+            <a:off x="2798064" y="3679363"/>
+            <a:ext cx="1947672" cy="314919"/>
+          </a:xfrm>
+          <a:prstGeom prst="rect">
+            <a:avLst/>
+          </a:prstGeom>
+          <a:noFill/>
+          <a:ln/>
+        </p:spPr>
+        <p:txBody>
+          <a:bodyPr wrap="square" rtlCol="0" anchor="ctr"/>
+          <a:lstStyle/>
+          <a:p>
+            <a:pPr algn="ctr" indent="0" marL="0">
+              <a:buNone/>
+            </a:pPr>
+            <a:r>
+              <a:rPr lang="en-US" sz="1050" b="1" dirty="0">
+                <a:solidFill>
+                  <a:srgbClr val="1E40AF"/>
+                </a:solidFill>
+                <a:latin typeface="Inter" pitchFamily="34" charset="0"/>
+                <a:ea typeface="Inter" pitchFamily="34" charset="-122"/>
+                <a:cs typeface="Inter" pitchFamily="34" charset="-120"/>
+              </a:rPr>
+              <a:t>⚙️ Drift since last run</a:t>
+            </a:r>
+            <a:endParaRPr lang="en-US" sz="1050" dirty="0"/>
+          </a:p>
+        </p:txBody>
+      </p:sp>
+      <p:sp>
+        <p:nvSpPr>
+          <p:cNvPr id="37" name="Text 35"/>
+          <p:cNvSpPr/>
+          <p:nvPr/>
+        </p:nvSpPr>
+        <p:spPr>
+          <a:xfrm>
+            <a:off x="2798064" y="3986784"/>
+            <a:ext cx="1947672" cy="329916"/>
+          </a:xfrm>
+          <a:prstGeom prst="rect">
+            <a:avLst/>
+          </a:prstGeom>
+          <a:noFill/>
+          <a:ln/>
+        </p:spPr>
+        <p:txBody>
+          <a:bodyPr wrap="square" rtlCol="0" anchor="t"/>
+          <a:lstStyle/>
+          <a:p>
+            <a:pPr algn="ctr" indent="0" marL="0">
+              <a:buNone/>
+            </a:pPr>
+            <a:r>
+              <a:rPr lang="en-US" sz="850" dirty="0">
+                <a:solidFill>
+                  <a:srgbClr val="475569"/>
+                </a:solidFill>
+                <a:latin typeface="Inter" pitchFamily="34" charset="0"/>
+                <a:ea typeface="Inter" pitchFamily="34" charset="-122"/>
+                <a:cs typeface="Inter" pitchFamily="34" charset="-120"/>
+              </a:rPr>
+              <a:t>improved · regressed</a:t>
+            </a:r>
+            <a:endParaRPr lang="en-US" sz="850" dirty="0"/>
+          </a:p>
+        </p:txBody>
+      </p:sp>
+      <p:sp>
+        <p:nvSpPr>
+          <p:cNvPr id="38" name="Text 36"/>
+          <p:cNvSpPr/>
+          <p:nvPr/>
+        </p:nvSpPr>
+        <p:spPr>
+          <a:xfrm>
+            <a:off x="4800600" y="3858768"/>
+            <a:ext cx="274320" cy="256032"/>
+          </a:xfrm>
+          <a:prstGeom prst="rect">
+            <a:avLst/>
+          </a:prstGeom>
+          <a:noFill/>
+          <a:ln/>
+        </p:spPr>
+        <p:txBody>
+          <a:bodyPr wrap="square" rtlCol="0" anchor="ctr"/>
+          <a:lstStyle/>
+          <a:p>
+            <a:pPr algn="ctr" indent="0" marL="0">
+              <a:buNone/>
+            </a:pPr>
+            <a:r>
+              <a:rPr lang="en-US" sz="1100" dirty="0">
+                <a:solidFill>
+                  <a:srgbClr val="64748B"/>
+                </a:solidFill>
+                <a:latin typeface="Inter" pitchFamily="34" charset="0"/>
+                <a:ea typeface="Inter" pitchFamily="34" charset="-122"/>
+                <a:cs typeface="Inter" pitchFamily="34" charset="-120"/>
+              </a:rPr>
+              <a:t>▶</a:t>
+            </a:r>
+            <a:endParaRPr lang="en-US" sz="1100" dirty="0"/>
+          </a:p>
+        </p:txBody>
+      </p:sp>
+      <p:sp>
+        <p:nvSpPr>
+          <p:cNvPr id="39" name="Shape 37"/>
+          <p:cNvSpPr/>
+          <p:nvPr/>
+        </p:nvSpPr>
+        <p:spPr>
+          <a:xfrm>
+            <a:off x="5074920" y="3611880"/>
+            <a:ext cx="2057400" cy="749808"/>
+          </a:xfrm>
+          <a:prstGeom prst="roundRect">
+            <a:avLst>
+              <a:gd name="adj" fmla="val 8537"/>
+            </a:avLst>
+          </a:prstGeom>
+          <a:solidFill>
+            <a:srgbClr val="EDE9FE"/>
+          </a:solidFill>
+          <a:ln w="19050">
+            <a:solidFill>
+              <a:srgbClr val="7C3AED"/>
+            </a:solidFill>
+            <a:prstDash val="solid"/>
+          </a:ln>
+        </p:spPr>
+      </p:sp>
+      <p:sp>
+        <p:nvSpPr>
+          <p:cNvPr id="40" name="Text 38"/>
+          <p:cNvSpPr/>
+          <p:nvPr/>
+        </p:nvSpPr>
+        <p:spPr>
+          <a:xfrm>
+            <a:off x="5129784" y="3679363"/>
+            <a:ext cx="1947672" cy="314919"/>
+          </a:xfrm>
+          <a:prstGeom prst="rect">
+            <a:avLst/>
+          </a:prstGeom>
+          <a:noFill/>
+          <a:ln/>
+        </p:spPr>
+        <p:txBody>
+          <a:bodyPr wrap="square" rtlCol="0" anchor="ctr"/>
+          <a:lstStyle/>
+          <a:p>
+            <a:pPr algn="ctr" indent="0" marL="0">
+              <a:buNone/>
+            </a:pPr>
+            <a:r>
+              <a:rPr lang="en-US" sz="1050" b="1" dirty="0">
+                <a:solidFill>
+                  <a:srgbClr val="5B21B6"/>
+                </a:solidFill>
+                <a:latin typeface="Inter" pitchFamily="34" charset="0"/>
+                <a:ea typeface="Inter" pitchFamily="34" charset="-122"/>
+                <a:cs typeface="Inter" pitchFamily="34" charset="-120"/>
+              </a:rPr>
+              <a:t>🤖 Warm or cold, per VM</a:t>
+            </a:r>
+            <a:endParaRPr lang="en-US" sz="1050" dirty="0"/>
+          </a:p>
+        </p:txBody>
+      </p:sp>
+      <p:sp>
+        <p:nvSpPr>
+          <p:cNvPr id="41" name="Text 39"/>
+          <p:cNvSpPr/>
+          <p:nvPr/>
+        </p:nvSpPr>
+        <p:spPr>
+          <a:xfrm>
+            <a:off x="5129784" y="3986784"/>
+            <a:ext cx="1947672" cy="329916"/>
+          </a:xfrm>
+          <a:prstGeom prst="rect">
+            <a:avLst/>
+          </a:prstGeom>
+          <a:noFill/>
+          <a:ln/>
+        </p:spPr>
+        <p:txBody>
+          <a:bodyPr wrap="square" rtlCol="0" anchor="t"/>
+          <a:lstStyle/>
+          <a:p>
+            <a:pPr algn="ctr" indent="0" marL="0">
+              <a:buNone/>
+            </a:pPr>
+            <a:r>
+              <a:rPr lang="en-US" sz="850" dirty="0">
+                <a:solidFill>
+                  <a:srgbClr val="475569"/>
+                </a:solidFill>
+                <a:latin typeface="Inter" pitchFamily="34" charset="0"/>
+                <a:ea typeface="Inter" pitchFamily="34" charset="-122"/>
+                <a:cs typeface="Inter" pitchFamily="34" charset="-120"/>
+              </a:rPr>
+              <a:t>with a reason, then clamped</a:t>
+            </a:r>
+            <a:endParaRPr lang="en-US" sz="850" dirty="0"/>
+          </a:p>
+        </p:txBody>
+      </p:sp>
+      <p:sp>
+        <p:nvSpPr>
+          <p:cNvPr id="42" name="Text 40"/>
+          <p:cNvSpPr/>
+          <p:nvPr/>
+        </p:nvSpPr>
+        <p:spPr>
+          <a:xfrm>
+            <a:off x="7132320" y="3858768"/>
+            <a:ext cx="274320" cy="256032"/>
+          </a:xfrm>
+          <a:prstGeom prst="rect">
+            <a:avLst/>
+          </a:prstGeom>
+          <a:noFill/>
+          <a:ln/>
+        </p:spPr>
+        <p:txBody>
+          <a:bodyPr wrap="square" rtlCol="0" anchor="ctr"/>
+          <a:lstStyle/>
+          <a:p>
+            <a:pPr algn="ctr" indent="0" marL="0">
+              <a:buNone/>
+            </a:pPr>
+            <a:r>
+              <a:rPr lang="en-US" sz="1100" dirty="0">
+                <a:solidFill>
+                  <a:srgbClr val="64748B"/>
+                </a:solidFill>
+                <a:latin typeface="Inter" pitchFamily="34" charset="0"/>
+                <a:ea typeface="Inter" pitchFamily="34" charset="-122"/>
+                <a:cs typeface="Inter" pitchFamily="34" charset="-120"/>
+              </a:rPr>
+              <a:t>▶</a:t>
+            </a:r>
+            <a:endParaRPr lang="en-US" sz="1100" dirty="0"/>
+          </a:p>
+        </p:txBody>
+      </p:sp>
+      <p:sp>
+        <p:nvSpPr>
+          <p:cNvPr id="43" name="Shape 41"/>
+          <p:cNvSpPr/>
+          <p:nvPr/>
+        </p:nvSpPr>
+        <p:spPr>
+          <a:xfrm>
+            <a:off x="7406640" y="3611880"/>
+            <a:ext cx="2057400" cy="749808"/>
+          </a:xfrm>
+          <a:prstGeom prst="roundRect">
+            <a:avLst>
+              <a:gd name="adj" fmla="val 8537"/>
+            </a:avLst>
+          </a:prstGeom>
+          <a:solidFill>
+            <a:srgbClr val="FEF3C7"/>
+          </a:solidFill>
+          <a:ln w="19050">
+            <a:solidFill>
+              <a:srgbClr val="D97706"/>
+            </a:solidFill>
+            <a:prstDash val="solid"/>
+          </a:ln>
+        </p:spPr>
+      </p:sp>
+      <p:sp>
+        <p:nvSpPr>
+          <p:cNvPr id="44" name="Text 42"/>
+          <p:cNvSpPr/>
+          <p:nvPr/>
+        </p:nvSpPr>
+        <p:spPr>
+          <a:xfrm>
+            <a:off x="7461504" y="3679363"/>
+            <a:ext cx="1947672" cy="314919"/>
+          </a:xfrm>
+          <a:prstGeom prst="rect">
+            <a:avLst/>
+          </a:prstGeom>
+          <a:noFill/>
+          <a:ln/>
+        </p:spPr>
+        <p:txBody>
+          <a:bodyPr wrap="square" rtlCol="0" anchor="ctr"/>
+          <a:lstStyle/>
+          <a:p>
+            <a:pPr algn="ctr" indent="0" marL="0">
+              <a:buNone/>
+            </a:pPr>
+            <a:r>
+              <a:rPr lang="en-US" sz="1050" b="1" dirty="0">
+                <a:solidFill>
+                  <a:srgbClr val="92400E"/>
+                </a:solidFill>
+                <a:latin typeface="Inter" pitchFamily="34" charset="0"/>
+                <a:ea typeface="Inter" pitchFamily="34" charset="-122"/>
+                <a:cs typeface="Inter" pitchFamily="34" charset="-120"/>
+              </a:rPr>
+              <a:t>👤 Validate the report</a:t>
+            </a:r>
+            <a:endParaRPr lang="en-US" sz="1050" dirty="0"/>
+          </a:p>
+        </p:txBody>
+      </p:sp>
+      <p:sp>
+        <p:nvSpPr>
+          <p:cNvPr id="45" name="Text 43"/>
+          <p:cNvSpPr/>
+          <p:nvPr/>
+        </p:nvSpPr>
+        <p:spPr>
+          <a:xfrm>
+            <a:off x="7461504" y="3986784"/>
+            <a:ext cx="1947672" cy="329916"/>
+          </a:xfrm>
+          <a:prstGeom prst="rect">
+            <a:avLst/>
+          </a:prstGeom>
+          <a:noFill/>
+          <a:ln/>
+        </p:spPr>
+        <p:txBody>
+          <a:bodyPr wrap="square" rtlCol="0" anchor="t"/>
+          <a:lstStyle/>
+          <a:p>
+            <a:pPr algn="ctr" indent="0" marL="0">
+              <a:buNone/>
+            </a:pPr>
+            <a:r>
+              <a:rPr lang="en-US" sz="850" dirty="0">
+                <a:solidFill>
+                  <a:srgbClr val="475569"/>
+                </a:solidFill>
+                <a:latin typeface="Inter" pitchFamily="34" charset="0"/>
+                <a:ea typeface="Inter" pitchFamily="34" charset="-122"/>
+                <a:cs typeface="Inter" pitchFamily="34" charset="-120"/>
+              </a:rPr>
+              <a:t>evidence pack exported</a:t>
+            </a:r>
+            <a:endParaRPr lang="en-US" sz="850" dirty="0"/>
+          </a:p>
+        </p:txBody>
+      </p:sp>
+      <p:sp>
+        <p:nvSpPr>
+          <p:cNvPr id="46" name="Text 44"/>
+          <p:cNvSpPr/>
+          <p:nvPr/>
+        </p:nvSpPr>
+        <p:spPr>
+          <a:xfrm>
+            <a:off x="9464040" y="3858768"/>
+            <a:ext cx="274320" cy="256032"/>
+          </a:xfrm>
+          <a:prstGeom prst="rect">
+            <a:avLst/>
+          </a:prstGeom>
+          <a:noFill/>
+          <a:ln/>
+        </p:spPr>
+        <p:txBody>
+          <a:bodyPr wrap="square" rtlCol="0" anchor="ctr"/>
+          <a:lstStyle/>
+          <a:p>
+            <a:pPr algn="ctr" indent="0" marL="0">
+              <a:buNone/>
+            </a:pPr>
+            <a:r>
+              <a:rPr lang="en-US" sz="1100" dirty="0">
+                <a:solidFill>
+                  <a:srgbClr val="64748B"/>
+                </a:solidFill>
+                <a:latin typeface="Inter" pitchFamily="34" charset="0"/>
+                <a:ea typeface="Inter" pitchFamily="34" charset="-122"/>
+                <a:cs typeface="Inter" pitchFamily="34" charset="-120"/>
+              </a:rPr>
+              <a:t>▶</a:t>
+            </a:r>
+            <a:endParaRPr lang="en-US" sz="1100" dirty="0"/>
+          </a:p>
+        </p:txBody>
+      </p:sp>
+      <p:sp>
+        <p:nvSpPr>
+          <p:cNvPr id="47" name="Shape 45"/>
+          <p:cNvSpPr/>
+          <p:nvPr/>
+        </p:nvSpPr>
+        <p:spPr>
+          <a:xfrm>
+            <a:off x="9738360" y="3611880"/>
+            <a:ext cx="2057400" cy="749808"/>
+          </a:xfrm>
+          <a:prstGeom prst="roundRect">
+            <a:avLst>
+              <a:gd name="adj" fmla="val 8537"/>
+            </a:avLst>
+          </a:prstGeom>
+          <a:solidFill>
+            <a:srgbClr val="FEF3C7"/>
+          </a:solidFill>
+          <a:ln w="19050">
+            <a:solidFill>
+              <a:srgbClr val="D97706"/>
+            </a:solidFill>
+            <a:prstDash val="solid"/>
+          </a:ln>
+        </p:spPr>
+      </p:sp>
+      <p:sp>
+        <p:nvSpPr>
+          <p:cNvPr id="48" name="Text 46"/>
+          <p:cNvSpPr/>
+          <p:nvPr/>
+        </p:nvSpPr>
+        <p:spPr>
+          <a:xfrm>
+            <a:off x="9793224" y="3679363"/>
+            <a:ext cx="1947672" cy="314919"/>
+          </a:xfrm>
+          <a:prstGeom prst="rect">
+            <a:avLst/>
+          </a:prstGeom>
+          <a:noFill/>
+          <a:ln/>
+        </p:spPr>
+        <p:txBody>
+          <a:bodyPr wrap="square" rtlCol="0" anchor="ctr"/>
+          <a:lstStyle/>
+          <a:p>
+            <a:pPr algn="ctr" indent="0" marL="0">
+              <a:buNone/>
+            </a:pPr>
+            <a:r>
+              <a:rPr lang="en-US" sz="1050" b="1" dirty="0">
+                <a:solidFill>
+                  <a:srgbClr val="92400E"/>
+                </a:solidFill>
+                <a:latin typeface="Inter" pitchFamily="34" charset="0"/>
+                <a:ea typeface="Inter" pitchFamily="34" charset="-122"/>
+                <a:cs typeface="Inter" pitchFamily="34" charset="-120"/>
+              </a:rPr>
+              <a:t>👤 Choose the wave</a:t>
+            </a:r>
+            <a:endParaRPr lang="en-US" sz="1050" dirty="0"/>
+          </a:p>
+        </p:txBody>
+      </p:sp>
+      <p:sp>
+        <p:nvSpPr>
+          <p:cNvPr id="49" name="Text 47"/>
+          <p:cNvSpPr/>
+          <p:nvPr/>
+        </p:nvSpPr>
+        <p:spPr>
+          <a:xfrm>
+            <a:off x="9793224" y="3986784"/>
+            <a:ext cx="1947672" cy="329916"/>
+          </a:xfrm>
+          <a:prstGeom prst="rect">
+            <a:avLst/>
+          </a:prstGeom>
+          <a:noFill/>
+          <a:ln/>
+        </p:spPr>
+        <p:txBody>
+          <a:bodyPr wrap="square" rtlCol="0" anchor="t"/>
+          <a:lstStyle/>
+          <a:p>
+            <a:pPr algn="ctr" indent="0" marL="0">
+              <a:buNone/>
+            </a:pPr>
+            <a:r>
+              <a:rPr lang="en-US" sz="850" dirty="0">
+                <a:solidFill>
+                  <a:srgbClr val="475569"/>
+                </a:solidFill>
+                <a:latin typeface="Inter" pitchFamily="34" charset="0"/>
+                <a:ea typeface="Inter" pitchFamily="34" charset="-122"/>
+                <a:cs typeface="Inter" pitchFamily="34" charset="-120"/>
+              </a:rPr>
+              <a:t>split-group warning</a:t>
+            </a:r>
+            <a:endParaRPr lang="en-US" sz="850" dirty="0"/>
+          </a:p>
+        </p:txBody>
+      </p:sp>
+      <p:sp>
+        <p:nvSpPr>
+          <p:cNvPr id="50" name="Shape 48"/>
+          <p:cNvSpPr/>
+          <p:nvPr/>
+        </p:nvSpPr>
+        <p:spPr>
+          <a:xfrm>
+            <a:off x="2606040" y="4480560"/>
+            <a:ext cx="6995160" cy="548640"/>
+          </a:xfrm>
+          <a:prstGeom prst="roundRect">
+            <a:avLst>
+              <a:gd name="adj" fmla="val 11667"/>
+            </a:avLst>
+          </a:prstGeom>
+          <a:solidFill>
+            <a:srgbClr val="D97706"/>
+          </a:solidFill>
+          <a:ln w="25400">
+            <a:solidFill>
+              <a:srgbClr val="92400E"/>
+            </a:solidFill>
+            <a:prstDash val="solid"/>
+          </a:ln>
+        </p:spPr>
+      </p:sp>
+      <p:sp>
+        <p:nvSpPr>
+          <p:cNvPr id="51" name="Text 49"/>
+          <p:cNvSpPr/>
+          <p:nvPr/>
+        </p:nvSpPr>
+        <p:spPr>
+          <a:xfrm>
+            <a:off x="2606040" y="4480560"/>
+            <a:ext cx="6995160" cy="548640"/>
+          </a:xfrm>
+          <a:prstGeom prst="rect">
+            <a:avLst/>
+          </a:prstGeom>
+          <a:noFill/>
+          <a:ln/>
+        </p:spPr>
+        <p:txBody>
+          <a:bodyPr wrap="square" rtlCol="0" anchor="ctr"/>
+          <a:lstStyle/>
+          <a:p>
+            <a:pPr algn="ctr" indent="0" marL="0">
+              <a:buNone/>
+            </a:pPr>
+            <a:r>
+              <a:rPr lang="en-US" sz="1200" b="1" dirty="0">
+                <a:solidFill>
+                  <a:srgbClr val="FFFFFF"/>
+                </a:solidFill>
+                <a:latin typeface="Inter" pitchFamily="34" charset="0"/>
+                <a:ea typeface="Inter" pitchFamily="34" charset="-122"/>
+                <a:cs typeface="Inter" pitchFamily="34" charset="-120"/>
+              </a:rPr>
+              <a:t>👤  CHANGE REQUEST APPROVED — THE GATE  ·  held on the Plan, re-read server-side  👤</a:t>
+            </a:r>
+            <a:endParaRPr lang="en-US" sz="1200" dirty="0"/>
+          </a:p>
+        </p:txBody>
+      </p:sp>
+      <p:sp>
+        <p:nvSpPr>
+          <p:cNvPr id="52" name="Text 50"/>
+          <p:cNvSpPr/>
+          <p:nvPr/>
+        </p:nvSpPr>
+        <p:spPr>
+          <a:xfrm>
+            <a:off x="411480" y="5148072"/>
+            <a:ext cx="7315200" cy="173736"/>
+          </a:xfrm>
+          <a:prstGeom prst="rect">
+            <a:avLst/>
+          </a:prstGeom>
+          <a:noFill/>
+          <a:ln/>
+        </p:spPr>
+        <p:txBody>
+          <a:bodyPr wrap="square" rtlCol="0" anchor="ctr"/>
+          <a:lstStyle/>
+          <a:p>
+            <a:pPr indent="0" marL="0">
+              <a:buNone/>
+            </a:pPr>
+            <a:r>
+              <a:rPr lang="en-US" sz="900" b="1" spc="120" kern="0" dirty="0">
+                <a:solidFill>
+                  <a:srgbClr val="64748B"/>
+                </a:solidFill>
+                <a:latin typeface="Inter" pitchFamily="34" charset="0"/>
+                <a:ea typeface="Inter" pitchFamily="34" charset="-122"/>
+                <a:cs typeface="Inter" pitchFamily="34" charset="-120"/>
+              </a:rPr>
+              <a:t>MIGRATE &amp; PROVE</a:t>
+            </a:r>
+            <a:endParaRPr lang="en-US" sz="900" dirty="0"/>
+          </a:p>
+        </p:txBody>
+      </p:sp>
+      <p:sp>
+        <p:nvSpPr>
+          <p:cNvPr id="53" name="Shape 51"/>
+          <p:cNvSpPr/>
+          <p:nvPr/>
+        </p:nvSpPr>
+        <p:spPr>
+          <a:xfrm>
+            <a:off x="411480" y="5321808"/>
+            <a:ext cx="2736342" cy="420624"/>
+          </a:xfrm>
+          <a:prstGeom prst="roundRect">
+            <a:avLst>
+              <a:gd name="adj" fmla="val 10870"/>
+            </a:avLst>
+          </a:prstGeom>
+          <a:solidFill>
+            <a:srgbClr val="D1FAE5"/>
+          </a:solidFill>
+          <a:ln w="12700">
+            <a:solidFill>
+              <a:srgbClr val="059669"/>
+            </a:solidFill>
+            <a:prstDash val="solid"/>
+          </a:ln>
+        </p:spPr>
+      </p:sp>
+      <p:sp>
+        <p:nvSpPr>
+          <p:cNvPr id="54" name="Text 52"/>
+          <p:cNvSpPr/>
+          <p:nvPr/>
+        </p:nvSpPr>
+        <p:spPr>
+          <a:xfrm>
+            <a:off x="466344" y="5321808"/>
+            <a:ext cx="2626614" cy="420624"/>
+          </a:xfrm>
+          <a:prstGeom prst="rect">
+            <a:avLst/>
+          </a:prstGeom>
+          <a:noFill/>
+          <a:ln/>
+        </p:spPr>
+        <p:txBody>
+          <a:bodyPr wrap="square" rtlCol="0" anchor="ctr"/>
+          <a:lstStyle/>
+          <a:p>
+            <a:pPr algn="ctr" indent="0" marL="0">
+              <a:buNone/>
+            </a:pPr>
+            <a:r>
+              <a:rPr lang="en-US" sz="950" b="1" dirty="0">
+                <a:solidFill>
+                  <a:srgbClr val="065F46"/>
+                </a:solidFill>
+                <a:latin typeface="Inter" pitchFamily="34" charset="0"/>
+                <a:ea typeface="Inter" pitchFamily="34" charset="-122"/>
+                <a:cs typeface="Inter" pitchFamily="34" charset="-120"/>
+              </a:rPr>
+              <a:t>✅ Plans MTV accepts — Windows and Linux never mixed</a:t>
+            </a:r>
+            <a:endParaRPr lang="en-US" sz="950" dirty="0"/>
+          </a:p>
+        </p:txBody>
+      </p:sp>
+      <p:sp>
+        <p:nvSpPr>
+          <p:cNvPr id="55" name="Shape 53"/>
+          <p:cNvSpPr/>
+          <p:nvPr/>
+        </p:nvSpPr>
+        <p:spPr>
+          <a:xfrm>
+            <a:off x="3294126" y="5321808"/>
+            <a:ext cx="2736342" cy="420624"/>
+          </a:xfrm>
+          <a:prstGeom prst="roundRect">
+            <a:avLst>
+              <a:gd name="adj" fmla="val 10870"/>
+            </a:avLst>
+          </a:prstGeom>
+          <a:solidFill>
+            <a:srgbClr val="D1FAE5"/>
+          </a:solidFill>
+          <a:ln w="12700">
+            <a:solidFill>
+              <a:srgbClr val="059669"/>
+            </a:solidFill>
+            <a:prstDash val="solid"/>
+          </a:ln>
+        </p:spPr>
+      </p:sp>
+      <p:sp>
+        <p:nvSpPr>
+          <p:cNvPr id="56" name="Text 54"/>
+          <p:cNvSpPr/>
+          <p:nvPr/>
+        </p:nvSpPr>
+        <p:spPr>
+          <a:xfrm>
+            <a:off x="3348990" y="5321808"/>
+            <a:ext cx="2626614" cy="420624"/>
+          </a:xfrm>
+          <a:prstGeom prst="rect">
+            <a:avLst/>
+          </a:prstGeom>
+          <a:noFill/>
+          <a:ln/>
+        </p:spPr>
+        <p:txBody>
+          <a:bodyPr wrap="square" rtlCol="0" anchor="ctr"/>
+          <a:lstStyle/>
+          <a:p>
+            <a:pPr algn="ctr" indent="0" marL="0">
+              <a:buNone/>
+            </a:pPr>
+            <a:r>
+              <a:rPr lang="en-US" sz="950" b="1" dirty="0">
+                <a:solidFill>
+                  <a:srgbClr val="065F46"/>
+                </a:solidFill>
+                <a:latin typeface="Inter" pitchFamily="34" charset="0"/>
+                <a:ea typeface="Inter" pitchFamily="34" charset="-122"/>
+                <a:cs typeface="Inter" pitchFamily="34" charset="-120"/>
+              </a:rPr>
+              <a:t>✅ Live ETA from bytes actually moving</a:t>
+            </a:r>
+            <a:endParaRPr lang="en-US" sz="950" dirty="0"/>
+          </a:p>
+        </p:txBody>
+      </p:sp>
+      <p:sp>
+        <p:nvSpPr>
+          <p:cNvPr id="57" name="Shape 55"/>
+          <p:cNvSpPr/>
+          <p:nvPr/>
+        </p:nvSpPr>
+        <p:spPr>
+          <a:xfrm>
+            <a:off x="6176772" y="5321808"/>
+            <a:ext cx="2736342" cy="420624"/>
+          </a:xfrm>
+          <a:prstGeom prst="roundRect">
+            <a:avLst>
+              <a:gd name="adj" fmla="val 10870"/>
+            </a:avLst>
+          </a:prstGeom>
+          <a:solidFill>
+            <a:srgbClr val="D1FAE5"/>
+          </a:solidFill>
+          <a:ln w="12700">
+            <a:solidFill>
+              <a:srgbClr val="059669"/>
+            </a:solidFill>
+            <a:prstDash val="solid"/>
+          </a:ln>
+        </p:spPr>
+      </p:sp>
+      <p:sp>
+        <p:nvSpPr>
+          <p:cNvPr id="58" name="Text 56"/>
+          <p:cNvSpPr/>
+          <p:nvPr/>
+        </p:nvSpPr>
+        <p:spPr>
+          <a:xfrm>
+            <a:off x="6231636" y="5321808"/>
+            <a:ext cx="2626614" cy="420624"/>
+          </a:xfrm>
+          <a:prstGeom prst="rect">
+            <a:avLst/>
+          </a:prstGeom>
+          <a:noFill/>
+          <a:ln/>
+        </p:spPr>
+        <p:txBody>
+          <a:bodyPr wrap="square" rtlCol="0" anchor="ctr"/>
+          <a:lstStyle/>
+          <a:p>
+            <a:pPr algn="ctr" indent="0" marL="0">
+              <a:buNone/>
+            </a:pPr>
+            <a:r>
+              <a:rPr lang="en-US" sz="950" b="1" dirty="0">
+                <a:solidFill>
+                  <a:srgbClr val="065F46"/>
+                </a:solidFill>
+                <a:latin typeface="Inter" pitchFamily="34" charset="0"/>
+                <a:ea typeface="Inter" pitchFamily="34" charset="-122"/>
+                <a:cs typeface="Inter" pitchFamily="34" charset="-120"/>
+              </a:rPr>
+              <a:t>✅ Verified on the target</a:t>
+            </a:r>
+            <a:endParaRPr lang="en-US" sz="950" dirty="0"/>
+          </a:p>
+        </p:txBody>
+      </p:sp>
+      <p:sp>
+        <p:nvSpPr>
+          <p:cNvPr id="59" name="Shape 57"/>
+          <p:cNvSpPr/>
+          <p:nvPr/>
+        </p:nvSpPr>
+        <p:spPr>
+          <a:xfrm>
+            <a:off x="9059418" y="5321808"/>
+            <a:ext cx="2736342" cy="420624"/>
+          </a:xfrm>
+          <a:prstGeom prst="roundRect">
+            <a:avLst>
+              <a:gd name="adj" fmla="val 10870"/>
+            </a:avLst>
+          </a:prstGeom>
+          <a:solidFill>
+            <a:srgbClr val="D1FAE5"/>
+          </a:solidFill>
+          <a:ln w="12700">
+            <a:solidFill>
+              <a:srgbClr val="059669"/>
+            </a:solidFill>
+            <a:prstDash val="solid"/>
+          </a:ln>
+        </p:spPr>
+      </p:sp>
+      <p:sp>
+        <p:nvSpPr>
+          <p:cNvPr id="60" name="Text 58"/>
+          <p:cNvSpPr/>
+          <p:nvPr/>
+        </p:nvSpPr>
+        <p:spPr>
+          <a:xfrm>
+            <a:off x="9114282" y="5321808"/>
+            <a:ext cx="2626614" cy="420624"/>
+          </a:xfrm>
+          <a:prstGeom prst="rect">
+            <a:avLst/>
+          </a:prstGeom>
+          <a:noFill/>
+          <a:ln/>
+        </p:spPr>
+        <p:txBody>
+          <a:bodyPr wrap="square" rtlCol="0" anchor="ctr"/>
+          <a:lstStyle/>
+          <a:p>
+            <a:pPr algn="ctr" indent="0" marL="0">
+              <a:buNone/>
+            </a:pPr>
+            <a:r>
+              <a:rPr lang="en-US" sz="950" b="1" dirty="0">
+                <a:solidFill>
+                  <a:srgbClr val="065F46"/>
+                </a:solidFill>
+                <a:latin typeface="Inter" pitchFamily="34" charset="0"/>
+                <a:ea typeface="Inter" pitchFamily="34" charset="-122"/>
+                <a:cs typeface="Inter" pitchFamily="34" charset="-120"/>
+              </a:rPr>
+              <a:t>✅ Rollback — the source VM is never deleted</a:t>
+            </a:r>
+            <a:endParaRPr lang="en-US" sz="950" dirty="0"/>
+          </a:p>
+        </p:txBody>
+      </p:sp>
+      <p:sp>
+        <p:nvSpPr>
+          <p:cNvPr id="61" name="Shape 59"/>
+          <p:cNvSpPr/>
+          <p:nvPr/>
+        </p:nvSpPr>
+        <p:spPr>
+          <a:xfrm>
+            <a:off x="411480" y="6089904"/>
+            <a:ext cx="173736" cy="173736"/>
+          </a:xfrm>
+          <a:prstGeom prst="roundRect">
+            <a:avLst>
+              <a:gd name="adj" fmla="val 15789"/>
+            </a:avLst>
+          </a:prstGeom>
+          <a:solidFill>
+            <a:srgbClr val="EDE9FE"/>
+          </a:solidFill>
+          <a:ln w="12700">
+            <a:solidFill>
+              <a:srgbClr val="7C3AED"/>
+            </a:solidFill>
+            <a:prstDash val="solid"/>
+          </a:ln>
+        </p:spPr>
+      </p:sp>
+      <p:sp>
+        <p:nvSpPr>
+          <p:cNvPr id="62" name="Text 60"/>
+          <p:cNvSpPr/>
+          <p:nvPr/>
+        </p:nvSpPr>
+        <p:spPr>
+          <a:xfrm>
+            <a:off x="621792" y="6053328"/>
+            <a:ext cx="868680" cy="237744"/>
+          </a:xfrm>
+          <a:prstGeom prst="rect">
+            <a:avLst/>
+          </a:prstGeom>
+          <a:noFill/>
+          <a:ln/>
+        </p:spPr>
+        <p:txBody>
+          <a:bodyPr wrap="square" rtlCol="0" anchor="ctr"/>
+          <a:lstStyle/>
+          <a:p>
+            <a:pPr indent="0" marL="0">
+              <a:buNone/>
+            </a:pPr>
+            <a:r>
+              <a:rPr lang="en-US" sz="850" dirty="0">
+                <a:solidFill>
+                  <a:srgbClr val="475569"/>
+                </a:solidFill>
+                <a:latin typeface="Inter" pitchFamily="34" charset="0"/>
+                <a:ea typeface="Inter" pitchFamily="34" charset="-122"/>
+                <a:cs typeface="Inter" pitchFamily="34" charset="-120"/>
+              </a:rPr>
+              <a:t>AI</a:t>
+            </a:r>
+            <a:endParaRPr lang="en-US" sz="850" dirty="0"/>
+          </a:p>
+        </p:txBody>
+      </p:sp>
+      <p:sp>
+        <p:nvSpPr>
+          <p:cNvPr id="63" name="Shape 61"/>
+          <p:cNvSpPr/>
+          <p:nvPr/>
+        </p:nvSpPr>
+        <p:spPr>
+          <a:xfrm>
+            <a:off x="1554480" y="6089904"/>
+            <a:ext cx="173736" cy="173736"/>
+          </a:xfrm>
+          <a:prstGeom prst="roundRect">
+            <a:avLst>
+              <a:gd name="adj" fmla="val 15789"/>
+            </a:avLst>
+          </a:prstGeom>
+          <a:solidFill>
+            <a:srgbClr val="DBEAFE"/>
+          </a:solidFill>
+          <a:ln w="12700">
+            <a:solidFill>
+              <a:srgbClr val="2563EB"/>
+            </a:solidFill>
+            <a:prstDash val="solid"/>
+          </a:ln>
+        </p:spPr>
+      </p:sp>
+      <p:sp>
+        <p:nvSpPr>
+          <p:cNvPr id="64" name="Text 62"/>
+          <p:cNvSpPr/>
+          <p:nvPr/>
+        </p:nvSpPr>
+        <p:spPr>
+          <a:xfrm>
+            <a:off x="1764792" y="6053328"/>
+            <a:ext cx="868680" cy="237744"/>
+          </a:xfrm>
+          <a:prstGeom prst="rect">
+            <a:avLst/>
+          </a:prstGeom>
+          <a:noFill/>
+          <a:ln/>
+        </p:spPr>
+        <p:txBody>
+          <a:bodyPr wrap="square" rtlCol="0" anchor="ctr"/>
+          <a:lstStyle/>
+          <a:p>
+            <a:pPr indent="0" marL="0">
+              <a:buNone/>
+            </a:pPr>
+            <a:r>
+              <a:rPr lang="en-US" sz="850" dirty="0">
+                <a:solidFill>
+                  <a:srgbClr val="475569"/>
+                </a:solidFill>
+                <a:latin typeface="Inter" pitchFamily="34" charset="0"/>
+                <a:ea typeface="Inter" pitchFamily="34" charset="-122"/>
+                <a:cs typeface="Inter" pitchFamily="34" charset="-120"/>
+              </a:rPr>
+              <a:t>Automatic</a:t>
+            </a:r>
+            <a:endParaRPr lang="en-US" sz="850" dirty="0"/>
+          </a:p>
+        </p:txBody>
+      </p:sp>
+      <p:sp>
+        <p:nvSpPr>
+          <p:cNvPr id="65" name="Shape 63"/>
+          <p:cNvSpPr/>
+          <p:nvPr/>
+        </p:nvSpPr>
+        <p:spPr>
+          <a:xfrm>
+            <a:off x="2697480" y="6089904"/>
+            <a:ext cx="173736" cy="173736"/>
+          </a:xfrm>
+          <a:prstGeom prst="roundRect">
+            <a:avLst>
+              <a:gd name="adj" fmla="val 15789"/>
+            </a:avLst>
+          </a:prstGeom>
+          <a:solidFill>
+            <a:srgbClr val="FEF3C7"/>
+          </a:solidFill>
+          <a:ln w="12700">
+            <a:solidFill>
+              <a:srgbClr val="D97706"/>
+            </a:solidFill>
+            <a:prstDash val="solid"/>
+          </a:ln>
+        </p:spPr>
+      </p:sp>
+      <p:sp>
+        <p:nvSpPr>
+          <p:cNvPr id="66" name="Text 64"/>
+          <p:cNvSpPr/>
+          <p:nvPr/>
+        </p:nvSpPr>
+        <p:spPr>
+          <a:xfrm>
+            <a:off x="2907792" y="6053328"/>
+            <a:ext cx="868680" cy="237744"/>
+          </a:xfrm>
+          <a:prstGeom prst="rect">
+            <a:avLst/>
+          </a:prstGeom>
+          <a:noFill/>
+          <a:ln/>
+        </p:spPr>
+        <p:txBody>
+          <a:bodyPr wrap="square" rtlCol="0" anchor="ctr"/>
+          <a:lstStyle/>
+          <a:p>
+            <a:pPr indent="0" marL="0">
+              <a:buNone/>
+            </a:pPr>
+            <a:r>
+              <a:rPr lang="en-US" sz="850" dirty="0">
+                <a:solidFill>
+                  <a:srgbClr val="475569"/>
+                </a:solidFill>
+                <a:latin typeface="Inter" pitchFamily="34" charset="0"/>
+                <a:ea typeface="Inter" pitchFamily="34" charset="-122"/>
+                <a:cs typeface="Inter" pitchFamily="34" charset="-120"/>
+              </a:rPr>
+              <a:t>Human</a:t>
+            </a:r>
+            <a:endParaRPr lang="en-US" sz="850" dirty="0"/>
+          </a:p>
+        </p:txBody>
+      </p:sp>
+      <p:sp>
+        <p:nvSpPr>
+          <p:cNvPr id="67" name="Shape 65"/>
+          <p:cNvSpPr/>
+          <p:nvPr/>
+        </p:nvSpPr>
+        <p:spPr>
+          <a:xfrm>
+            <a:off x="3840480" y="6089904"/>
+            <a:ext cx="173736" cy="173736"/>
+          </a:xfrm>
+          <a:prstGeom prst="roundRect">
+            <a:avLst>
+              <a:gd name="adj" fmla="val 15789"/>
+            </a:avLst>
+          </a:prstGeom>
+          <a:solidFill>
+            <a:srgbClr val="D1FAE5"/>
+          </a:solidFill>
+          <a:ln w="12700">
+            <a:solidFill>
+              <a:srgbClr val="059669"/>
+            </a:solidFill>
+            <a:prstDash val="solid"/>
+          </a:ln>
+        </p:spPr>
+      </p:sp>
+      <p:sp>
+        <p:nvSpPr>
+          <p:cNvPr id="68" name="Text 66"/>
+          <p:cNvSpPr/>
+          <p:nvPr/>
+        </p:nvSpPr>
+        <p:spPr>
+          <a:xfrm>
+            <a:off x="4050792" y="6053328"/>
+            <a:ext cx="868680" cy="237744"/>
+          </a:xfrm>
+          <a:prstGeom prst="rect">
+            <a:avLst/>
+          </a:prstGeom>
+          <a:noFill/>
+          <a:ln/>
+        </p:spPr>
+        <p:txBody>
+          <a:bodyPr wrap="square" rtlCol="0" anchor="ctr"/>
+          <a:lstStyle/>
+          <a:p>
+            <a:pPr indent="0" marL="0">
+              <a:buNone/>
+            </a:pPr>
+            <a:r>
+              <a:rPr lang="en-US" sz="850" dirty="0">
+                <a:solidFill>
+                  <a:srgbClr val="475569"/>
+                </a:solidFill>
+                <a:latin typeface="Inter" pitchFamily="34" charset="0"/>
+                <a:ea typeface="Inter" pitchFamily="34" charset="-122"/>
+                <a:cs typeface="Inter" pitchFamily="34" charset="-120"/>
+              </a:rPr>
+              <a:t>Verified</a:t>
+            </a:r>
+            <a:endParaRPr lang="en-US" sz="850" dirty="0"/>
+          </a:p>
+        </p:txBody>
+      </p:sp>
+      <p:sp>
+        <p:nvSpPr>
+          <p:cNvPr id="69" name="Text 67"/>
+          <p:cNvSpPr/>
+          <p:nvPr/>
+        </p:nvSpPr>
+        <p:spPr>
+          <a:xfrm>
+            <a:off x="5120640" y="6025896"/>
+            <a:ext cx="6675120" cy="292608"/>
+          </a:xfrm>
+          <a:prstGeom prst="rect">
+            <a:avLst/>
+          </a:prstGeom>
+          <a:noFill/>
+          <a:ln/>
+        </p:spPr>
+        <p:txBody>
+          <a:bodyPr wrap="square" rtlCol="0" anchor="ctr"/>
+          <a:lstStyle/>
+          <a:p>
+            <a:pPr algn="r" indent="0" marL="0">
+              <a:buNone/>
+            </a:pPr>
+            <a:r>
+              <a:rPr lang="en-US" sz="1050" b="1" dirty="0">
+                <a:solidFill>
+                  <a:srgbClr val="059669"/>
+                </a:solidFill>
+                <a:latin typeface="Inter" pitchFamily="34" charset="0"/>
+                <a:ea typeface="Inter" pitchFamily="34" charset="-122"/>
+                <a:cs typeface="Inter" pitchFamily="34" charset="-120"/>
+              </a:rPr>
+              <a:t>The model advises; code decides — and the source is never deleted</a:t>
+            </a:r>
+            <a:endParaRPr lang="en-US" sz="1050" dirty="0"/>
+          </a:p>
+        </p:txBody>
+      </p:sp>
+    </p:spTree>
+  </p:cSld>
+  <p:clrMapOvr>
+    <a:masterClrMapping/>
+  </p:clrMapOvr>
+</p:sld>
+</file>
+
+<file path=ppt/slides/slide11.xml><?xml version="1.0" encoding="utf-8"?>
+<p:sld xmlns:a="http://schemas.openxmlformats.org/drawingml/2006/main" xmlns:r="http://schemas.openxmlformats.org/officeDocument/2006/relationships" xmlns:p="http://schemas.openxmlformats.org/presentationml/2006/main">
+  <p:cSld name="Slide 11">
     <p:bg>
       <p:bgPr>
         <a:solidFill>
@@ -2415,7 +4941,7 @@
                 <a:ea typeface="Inter" pitchFamily="34" charset="-122"/>
                 <a:cs typeface="Inter" pitchFamily="34" charset="-120"/>
               </a:rPr>
-              <a:t>One platform. One conversational surface. Eight use cases.</a:t>
+              <a:t>One platform. One conversational surface. Nine use cases.</a:t>
             </a:r>
             <a:endParaRPr lang="en-US" sz="3000" dirty="0"/>
           </a:p>

--- a/usecases/portfolio/TCS-Agentic-AI-Use-Case-Summary.pptx
+++ b/usecases/portfolio/TCS-Agentic-AI-Use-Case-Summary.pptx
@@ -2595,7 +2595,7 @@
                 <a:ea typeface="Inter" pitchFamily="34" charset="-122"/>
                 <a:cs typeface="Inter" pitchFamily="34" charset="-120"/>
               </a:rPr>
-              <a:t>VMware → OpenShift Virtualization — assess against the target, govern the change, measure the move</a:t>
+              <a:t>Assess against the target, govern the change, prove the result — migration is one of nine stages</a:t>
             </a:r>
             <a:endParaRPr lang="en-US" sz="1050" dirty="0"/>
           </a:p>
@@ -2719,7 +2719,7 @@
                 <a:ea typeface="Inter" pitchFamily="34" charset="-122"/>
                 <a:cs typeface="Inter" pitchFamily="34" charset="-120"/>
               </a:rPr>
-              <a:t>Every assessment tool on the market reads the source. This agent runs inside the destination, so it can answer what none of them can: will this VM actually run when it lands? A KubeVirt VM is a pod — it must fit on ONE node — and a 64 GiB guest on 32 GiB workers copies perfectly, then sits Pending after the outage is spent.</a:t>
+              <a:t>Every assessment tool on the market reads the source. This agent runs inside the destination, so it can answer what none of them can: will this VM actually RUN when it lands? A KubeVirt VM is a pod — it must fit on ONE node — and a 64 GiB guest on 32 GiB workers copies perfectly, then sits Pending after the outage is spent. Migration is one of nine stages; the rest are assessment, governance, verification and retiring the source.</a:t>
             </a:r>
             <a:endParaRPr lang="en-US" sz="1200" dirty="0"/>
           </a:p>

--- a/usecases/portfolio/TCS-Agentic-AI-Use-Case-Summary.pptx
+++ b/usecases/portfolio/TCS-Agentic-AI-Use-Case-Summary.pptx
@@ -2685,13 +2685,79 @@
       </p:sp>
       <p:sp>
         <p:nvSpPr>
-          <p:cNvPr id="8" name="Text 6"/>
-          <p:cNvSpPr/>
-          <p:nvPr/>
-        </p:nvSpPr>
-        <p:spPr>
-          <a:xfrm>
-            <a:off x="411480" y="1389888"/>
+          <p:cNvPr id="8" name="Shape 6"/>
+          <p:cNvSpPr/>
+          <p:nvPr/>
+        </p:nvSpPr>
+        <p:spPr>
+          <a:xfrm>
+            <a:off x="411480" y="1060704"/>
+            <a:ext cx="11384280" cy="274320"/>
+          </a:xfrm>
+          <a:prstGeom prst="roundRect">
+            <a:avLst>
+              <a:gd name="adj" fmla="val 13333"/>
+            </a:avLst>
+          </a:prstGeom>
+          <a:solidFill>
+            <a:srgbClr val="EEF2FF"/>
+          </a:solidFill>
+          <a:ln w="9525">
+            <a:solidFill>
+              <a:srgbClr val="C7D2FE"/>
+            </a:solidFill>
+            <a:prstDash val="solid"/>
+          </a:ln>
+        </p:spPr>
+      </p:sp>
+      <p:sp>
+        <p:nvSpPr>
+          <p:cNvPr id="9" name="Text 7"/>
+          <p:cNvSpPr/>
+          <p:nvPr/>
+        </p:nvSpPr>
+        <p:spPr>
+          <a:xfrm>
+            <a:off x="521208" y="1060704"/>
+            <a:ext cx="11164824" cy="274320"/>
+          </a:xfrm>
+          <a:prstGeom prst="rect">
+            <a:avLst/>
+          </a:prstGeom>
+          <a:noFill/>
+          <a:ln/>
+        </p:spPr>
+        <p:txBody>
+          <a:bodyPr wrap="square" rtlCol="0" anchor="ctr"/>
+          <a:lstStyle/>
+          <a:p>
+            <a:pPr indent="0" marL="0">
+              <a:buNone/>
+            </a:pPr>
+            <a:r>
+              <a:rPr lang="en-US" sz="950" b="1" dirty="0">
+                <a:solidFill>
+                  <a:srgbClr val="3730A3"/>
+                </a:solidFill>
+                <a:latin typeface="Inter" pitchFamily="34" charset="0"/>
+                <a:ea typeface="Inter" pitchFamily="34" charset="-122"/>
+                <a:cs typeface="Inter" pitchFamily="34" charset="-120"/>
+              </a:rPr>
+              <a:t>SCOPE  ·  VMs that ALREADY EXIST on VMware and are moving to OpenShift Virtualization.   Once landed, they are governed by UC-06.</a:t>
+            </a:r>
+            <a:endParaRPr lang="en-US" sz="950" dirty="0"/>
+          </a:p>
+        </p:txBody>
+      </p:sp>
+      <p:sp>
+        <p:nvSpPr>
+          <p:cNvPr id="10" name="Text 8"/>
+          <p:cNvSpPr/>
+          <p:nvPr/>
+        </p:nvSpPr>
+        <p:spPr>
+          <a:xfrm>
+            <a:off x="411480" y="1426464"/>
             <a:ext cx="11384280" cy="914400"/>
           </a:xfrm>
           <a:prstGeom prst="rect">
@@ -2727,7 +2793,7 @@
       </p:sp>
       <p:sp>
         <p:nvSpPr>
-          <p:cNvPr id="9" name="Text 7"/>
+          <p:cNvPr id="11" name="Text 9"/>
           <p:cNvSpPr/>
           <p:nvPr/>
         </p:nvSpPr>
@@ -2766,7 +2832,7 @@
       </p:sp>
       <p:sp>
         <p:nvSpPr>
-          <p:cNvPr id="10" name="Text 8"/>
+          <p:cNvPr id="12" name="Text 10"/>
           <p:cNvSpPr/>
           <p:nvPr/>
         </p:nvSpPr>
@@ -2805,7 +2871,7 @@
       </p:sp>
       <p:sp>
         <p:nvSpPr>
-          <p:cNvPr id="11" name="Shape 9"/>
+          <p:cNvPr id="13" name="Shape 11"/>
           <p:cNvSpPr/>
           <p:nvPr/>
         </p:nvSpPr>
@@ -2832,7 +2898,7 @@
       </p:sp>
       <p:sp>
         <p:nvSpPr>
-          <p:cNvPr id="12" name="Text 10"/>
+          <p:cNvPr id="14" name="Text 12"/>
           <p:cNvSpPr/>
           <p:nvPr/>
         </p:nvSpPr>
@@ -2871,7 +2937,7 @@
       </p:sp>
       <p:sp>
         <p:nvSpPr>
-          <p:cNvPr id="13" name="Text 11"/>
+          <p:cNvPr id="15" name="Text 13"/>
           <p:cNvSpPr/>
           <p:nvPr/>
         </p:nvSpPr>
@@ -2910,7 +2976,7 @@
       </p:sp>
       <p:sp>
         <p:nvSpPr>
-          <p:cNvPr id="14" name="Text 12"/>
+          <p:cNvPr id="16" name="Text 14"/>
           <p:cNvSpPr/>
           <p:nvPr/>
         </p:nvSpPr>
@@ -2949,7 +3015,7 @@
       </p:sp>
       <p:sp>
         <p:nvSpPr>
-          <p:cNvPr id="15" name="Shape 13"/>
+          <p:cNvPr id="17" name="Shape 15"/>
           <p:cNvSpPr/>
           <p:nvPr/>
         </p:nvSpPr>
@@ -2976,7 +3042,7 @@
       </p:sp>
       <p:sp>
         <p:nvSpPr>
-          <p:cNvPr id="16" name="Text 14"/>
+          <p:cNvPr id="18" name="Text 16"/>
           <p:cNvSpPr/>
           <p:nvPr/>
         </p:nvSpPr>
@@ -3015,7 +3081,7 @@
       </p:sp>
       <p:sp>
         <p:nvSpPr>
-          <p:cNvPr id="17" name="Text 15"/>
+          <p:cNvPr id="19" name="Text 17"/>
           <p:cNvSpPr/>
           <p:nvPr/>
         </p:nvSpPr>
@@ -3054,7 +3120,7 @@
       </p:sp>
       <p:sp>
         <p:nvSpPr>
-          <p:cNvPr id="18" name="Text 16"/>
+          <p:cNvPr id="20" name="Text 18"/>
           <p:cNvSpPr/>
           <p:nvPr/>
         </p:nvSpPr>
@@ -3093,7 +3159,7 @@
       </p:sp>
       <p:sp>
         <p:nvSpPr>
-          <p:cNvPr id="19" name="Shape 17"/>
+          <p:cNvPr id="21" name="Shape 19"/>
           <p:cNvSpPr/>
           <p:nvPr/>
         </p:nvSpPr>
@@ -3120,7 +3186,7 @@
       </p:sp>
       <p:sp>
         <p:nvSpPr>
-          <p:cNvPr id="20" name="Text 18"/>
+          <p:cNvPr id="22" name="Text 20"/>
           <p:cNvSpPr/>
           <p:nvPr/>
         </p:nvSpPr>
@@ -3159,7 +3225,7 @@
       </p:sp>
       <p:sp>
         <p:nvSpPr>
-          <p:cNvPr id="21" name="Text 19"/>
+          <p:cNvPr id="23" name="Text 21"/>
           <p:cNvSpPr/>
           <p:nvPr/>
         </p:nvSpPr>
@@ -3198,7 +3264,7 @@
       </p:sp>
       <p:sp>
         <p:nvSpPr>
-          <p:cNvPr id="22" name="Text 20"/>
+          <p:cNvPr id="24" name="Text 22"/>
           <p:cNvSpPr/>
           <p:nvPr/>
         </p:nvSpPr>
@@ -3237,7 +3303,7 @@
       </p:sp>
       <p:sp>
         <p:nvSpPr>
-          <p:cNvPr id="23" name="Shape 21"/>
+          <p:cNvPr id="25" name="Shape 23"/>
           <p:cNvSpPr/>
           <p:nvPr/>
         </p:nvSpPr>
@@ -3264,7 +3330,7 @@
       </p:sp>
       <p:sp>
         <p:nvSpPr>
-          <p:cNvPr id="24" name="Text 22"/>
+          <p:cNvPr id="26" name="Text 24"/>
           <p:cNvSpPr/>
           <p:nvPr/>
         </p:nvSpPr>
@@ -3303,7 +3369,7 @@
       </p:sp>
       <p:sp>
         <p:nvSpPr>
-          <p:cNvPr id="25" name="Text 23"/>
+          <p:cNvPr id="27" name="Text 25"/>
           <p:cNvSpPr/>
           <p:nvPr/>
         </p:nvSpPr>
@@ -3342,7 +3408,7 @@
       </p:sp>
       <p:sp>
         <p:nvSpPr>
-          <p:cNvPr id="26" name="Text 24"/>
+          <p:cNvPr id="28" name="Text 26"/>
           <p:cNvSpPr/>
           <p:nvPr/>
         </p:nvSpPr>
@@ -3381,7 +3447,7 @@
       </p:sp>
       <p:sp>
         <p:nvSpPr>
-          <p:cNvPr id="27" name="Shape 25"/>
+          <p:cNvPr id="29" name="Shape 27"/>
           <p:cNvSpPr/>
           <p:nvPr/>
         </p:nvSpPr>
@@ -3408,7 +3474,7 @@
       </p:sp>
       <p:sp>
         <p:nvSpPr>
-          <p:cNvPr id="28" name="Text 26"/>
+          <p:cNvPr id="30" name="Text 28"/>
           <p:cNvSpPr/>
           <p:nvPr/>
         </p:nvSpPr>
@@ -3447,7 +3513,7 @@
       </p:sp>
       <p:sp>
         <p:nvSpPr>
-          <p:cNvPr id="29" name="Text 27"/>
+          <p:cNvPr id="31" name="Text 29"/>
           <p:cNvSpPr/>
           <p:nvPr/>
         </p:nvSpPr>
@@ -3486,7 +3552,7 @@
       </p:sp>
       <p:sp>
         <p:nvSpPr>
-          <p:cNvPr id="30" name="Text 28"/>
+          <p:cNvPr id="32" name="Text 30"/>
           <p:cNvSpPr/>
           <p:nvPr/>
         </p:nvSpPr>
@@ -3525,7 +3591,7 @@
       </p:sp>
       <p:sp>
         <p:nvSpPr>
-          <p:cNvPr id="31" name="Shape 29"/>
+          <p:cNvPr id="33" name="Shape 31"/>
           <p:cNvSpPr/>
           <p:nvPr/>
         </p:nvSpPr>
@@ -3552,7 +3618,7 @@
       </p:sp>
       <p:sp>
         <p:nvSpPr>
-          <p:cNvPr id="32" name="Text 30"/>
+          <p:cNvPr id="34" name="Text 32"/>
           <p:cNvSpPr/>
           <p:nvPr/>
         </p:nvSpPr>
@@ -3591,7 +3657,7 @@
       </p:sp>
       <p:sp>
         <p:nvSpPr>
-          <p:cNvPr id="33" name="Text 31"/>
+          <p:cNvPr id="35" name="Text 33"/>
           <p:cNvSpPr/>
           <p:nvPr/>
         </p:nvSpPr>
@@ -3630,7 +3696,7 @@
       </p:sp>
       <p:sp>
         <p:nvSpPr>
-          <p:cNvPr id="34" name="Text 32"/>
+          <p:cNvPr id="36" name="Text 34"/>
           <p:cNvSpPr/>
           <p:nvPr/>
         </p:nvSpPr>
@@ -3669,7 +3735,7 @@
       </p:sp>
       <p:sp>
         <p:nvSpPr>
-          <p:cNvPr id="35" name="Shape 33"/>
+          <p:cNvPr id="37" name="Shape 35"/>
           <p:cNvSpPr/>
           <p:nvPr/>
         </p:nvSpPr>
@@ -3696,7 +3762,7 @@
       </p:sp>
       <p:sp>
         <p:nvSpPr>
-          <p:cNvPr id="36" name="Text 34"/>
+          <p:cNvPr id="38" name="Text 36"/>
           <p:cNvSpPr/>
           <p:nvPr/>
         </p:nvSpPr>
@@ -3735,7 +3801,7 @@
       </p:sp>
       <p:sp>
         <p:nvSpPr>
-          <p:cNvPr id="37" name="Text 35"/>
+          <p:cNvPr id="39" name="Text 37"/>
           <p:cNvSpPr/>
           <p:nvPr/>
         </p:nvSpPr>
@@ -3774,7 +3840,7 @@
       </p:sp>
       <p:sp>
         <p:nvSpPr>
-          <p:cNvPr id="38" name="Text 36"/>
+          <p:cNvPr id="40" name="Text 38"/>
           <p:cNvSpPr/>
           <p:nvPr/>
         </p:nvSpPr>
@@ -3813,7 +3879,7 @@
       </p:sp>
       <p:sp>
         <p:nvSpPr>
-          <p:cNvPr id="39" name="Shape 37"/>
+          <p:cNvPr id="41" name="Shape 39"/>
           <p:cNvSpPr/>
           <p:nvPr/>
         </p:nvSpPr>
@@ -3840,7 +3906,7 @@
       </p:sp>
       <p:sp>
         <p:nvSpPr>
-          <p:cNvPr id="40" name="Text 38"/>
+          <p:cNvPr id="42" name="Text 40"/>
           <p:cNvSpPr/>
           <p:nvPr/>
         </p:nvSpPr>
@@ -3879,7 +3945,7 @@
       </p:sp>
       <p:sp>
         <p:nvSpPr>
-          <p:cNvPr id="41" name="Text 39"/>
+          <p:cNvPr id="43" name="Text 41"/>
           <p:cNvSpPr/>
           <p:nvPr/>
         </p:nvSpPr>
@@ -3918,7 +3984,7 @@
       </p:sp>
       <p:sp>
         <p:nvSpPr>
-          <p:cNvPr id="42" name="Text 40"/>
+          <p:cNvPr id="44" name="Text 42"/>
           <p:cNvSpPr/>
           <p:nvPr/>
         </p:nvSpPr>
@@ -3957,7 +4023,7 @@
       </p:sp>
       <p:sp>
         <p:nvSpPr>
-          <p:cNvPr id="43" name="Shape 41"/>
+          <p:cNvPr id="45" name="Shape 43"/>
           <p:cNvSpPr/>
           <p:nvPr/>
         </p:nvSpPr>
@@ -3984,7 +4050,7 @@
       </p:sp>
       <p:sp>
         <p:nvSpPr>
-          <p:cNvPr id="44" name="Text 42"/>
+          <p:cNvPr id="46" name="Text 44"/>
           <p:cNvSpPr/>
           <p:nvPr/>
         </p:nvSpPr>
@@ -4023,7 +4089,7 @@
       </p:sp>
       <p:sp>
         <p:nvSpPr>
-          <p:cNvPr id="45" name="Text 43"/>
+          <p:cNvPr id="47" name="Text 45"/>
           <p:cNvSpPr/>
           <p:nvPr/>
         </p:nvSpPr>
@@ -4062,7 +4128,7 @@
       </p:sp>
       <p:sp>
         <p:nvSpPr>
-          <p:cNvPr id="46" name="Text 44"/>
+          <p:cNvPr id="48" name="Text 46"/>
           <p:cNvSpPr/>
           <p:nvPr/>
         </p:nvSpPr>
@@ -4101,7 +4167,7 @@
       </p:sp>
       <p:sp>
         <p:nvSpPr>
-          <p:cNvPr id="47" name="Shape 45"/>
+          <p:cNvPr id="49" name="Shape 47"/>
           <p:cNvSpPr/>
           <p:nvPr/>
         </p:nvSpPr>
@@ -4128,7 +4194,7 @@
       </p:sp>
       <p:sp>
         <p:nvSpPr>
-          <p:cNvPr id="48" name="Text 46"/>
+          <p:cNvPr id="50" name="Text 48"/>
           <p:cNvSpPr/>
           <p:nvPr/>
         </p:nvSpPr>
@@ -4167,7 +4233,7 @@
       </p:sp>
       <p:sp>
         <p:nvSpPr>
-          <p:cNvPr id="49" name="Text 47"/>
+          <p:cNvPr id="51" name="Text 49"/>
           <p:cNvSpPr/>
           <p:nvPr/>
         </p:nvSpPr>
@@ -4206,7 +4272,7 @@
       </p:sp>
       <p:sp>
         <p:nvSpPr>
-          <p:cNvPr id="50" name="Shape 48"/>
+          <p:cNvPr id="52" name="Shape 50"/>
           <p:cNvSpPr/>
           <p:nvPr/>
         </p:nvSpPr>
@@ -4233,7 +4299,7 @@
       </p:sp>
       <p:sp>
         <p:nvSpPr>
-          <p:cNvPr id="51" name="Text 49"/>
+          <p:cNvPr id="53" name="Text 51"/>
           <p:cNvSpPr/>
           <p:nvPr/>
         </p:nvSpPr>
@@ -4272,7 +4338,7 @@
       </p:sp>
       <p:sp>
         <p:nvSpPr>
-          <p:cNvPr id="52" name="Text 50"/>
+          <p:cNvPr id="54" name="Text 52"/>
           <p:cNvSpPr/>
           <p:nvPr/>
         </p:nvSpPr>
@@ -4311,7 +4377,7 @@
       </p:sp>
       <p:sp>
         <p:nvSpPr>
-          <p:cNvPr id="53" name="Shape 51"/>
+          <p:cNvPr id="55" name="Shape 53"/>
           <p:cNvSpPr/>
           <p:nvPr/>
         </p:nvSpPr>
@@ -4338,7 +4404,7 @@
       </p:sp>
       <p:sp>
         <p:nvSpPr>
-          <p:cNvPr id="54" name="Text 52"/>
+          <p:cNvPr id="56" name="Text 54"/>
           <p:cNvSpPr/>
           <p:nvPr/>
         </p:nvSpPr>
@@ -4377,7 +4443,7 @@
       </p:sp>
       <p:sp>
         <p:nvSpPr>
-          <p:cNvPr id="55" name="Shape 53"/>
+          <p:cNvPr id="57" name="Shape 55"/>
           <p:cNvSpPr/>
           <p:nvPr/>
         </p:nvSpPr>
@@ -4404,7 +4470,7 @@
       </p:sp>
       <p:sp>
         <p:nvSpPr>
-          <p:cNvPr id="56" name="Text 54"/>
+          <p:cNvPr id="58" name="Text 56"/>
           <p:cNvSpPr/>
           <p:nvPr/>
         </p:nvSpPr>
@@ -4443,7 +4509,7 @@
       </p:sp>
       <p:sp>
         <p:nvSpPr>
-          <p:cNvPr id="57" name="Shape 55"/>
+          <p:cNvPr id="59" name="Shape 57"/>
           <p:cNvSpPr/>
           <p:nvPr/>
         </p:nvSpPr>
@@ -4470,7 +4536,7 @@
       </p:sp>
       <p:sp>
         <p:nvSpPr>
-          <p:cNvPr id="58" name="Text 56"/>
+          <p:cNvPr id="60" name="Text 58"/>
           <p:cNvSpPr/>
           <p:nvPr/>
         </p:nvSpPr>
@@ -4509,7 +4575,7 @@
       </p:sp>
       <p:sp>
         <p:nvSpPr>
-          <p:cNvPr id="59" name="Shape 57"/>
+          <p:cNvPr id="61" name="Shape 59"/>
           <p:cNvSpPr/>
           <p:nvPr/>
         </p:nvSpPr>
@@ -4536,7 +4602,7 @@
       </p:sp>
       <p:sp>
         <p:nvSpPr>
-          <p:cNvPr id="60" name="Text 58"/>
+          <p:cNvPr id="62" name="Text 60"/>
           <p:cNvSpPr/>
           <p:nvPr/>
         </p:nvSpPr>
@@ -4575,7 +4641,7 @@
       </p:sp>
       <p:sp>
         <p:nvSpPr>
-          <p:cNvPr id="61" name="Shape 59"/>
+          <p:cNvPr id="63" name="Shape 61"/>
           <p:cNvSpPr/>
           <p:nvPr/>
         </p:nvSpPr>
@@ -4602,7 +4668,7 @@
       </p:sp>
       <p:sp>
         <p:nvSpPr>
-          <p:cNvPr id="62" name="Text 60"/>
+          <p:cNvPr id="64" name="Text 62"/>
           <p:cNvSpPr/>
           <p:nvPr/>
         </p:nvSpPr>
@@ -4641,7 +4707,7 @@
       </p:sp>
       <p:sp>
         <p:nvSpPr>
-          <p:cNvPr id="63" name="Shape 61"/>
+          <p:cNvPr id="65" name="Shape 63"/>
           <p:cNvSpPr/>
           <p:nvPr/>
         </p:nvSpPr>
@@ -4668,7 +4734,7 @@
       </p:sp>
       <p:sp>
         <p:nvSpPr>
-          <p:cNvPr id="64" name="Text 62"/>
+          <p:cNvPr id="66" name="Text 64"/>
           <p:cNvSpPr/>
           <p:nvPr/>
         </p:nvSpPr>
@@ -4707,7 +4773,7 @@
       </p:sp>
       <p:sp>
         <p:nvSpPr>
-          <p:cNvPr id="65" name="Shape 63"/>
+          <p:cNvPr id="67" name="Shape 65"/>
           <p:cNvSpPr/>
           <p:nvPr/>
         </p:nvSpPr>
@@ -4734,7 +4800,7 @@
       </p:sp>
       <p:sp>
         <p:nvSpPr>
-          <p:cNvPr id="66" name="Text 64"/>
+          <p:cNvPr id="68" name="Text 66"/>
           <p:cNvSpPr/>
           <p:nvPr/>
         </p:nvSpPr>
@@ -4773,7 +4839,7 @@
       </p:sp>
       <p:sp>
         <p:nvSpPr>
-          <p:cNvPr id="67" name="Shape 65"/>
+          <p:cNvPr id="69" name="Shape 67"/>
           <p:cNvSpPr/>
           <p:nvPr/>
         </p:nvSpPr>
@@ -4800,7 +4866,7 @@
       </p:sp>
       <p:sp>
         <p:nvSpPr>
-          <p:cNvPr id="68" name="Text 66"/>
+          <p:cNvPr id="70" name="Text 68"/>
           <p:cNvSpPr/>
           <p:nvPr/>
         </p:nvSpPr>
@@ -4839,7 +4905,7 @@
       </p:sp>
       <p:sp>
         <p:nvSpPr>
-          <p:cNvPr id="69" name="Text 67"/>
+          <p:cNvPr id="71" name="Text 69"/>
           <p:cNvSpPr/>
           <p:nvPr/>
         </p:nvSpPr>
@@ -15056,13 +15122,79 @@
       </p:sp>
       <p:sp>
         <p:nvSpPr>
-          <p:cNvPr id="8" name="Text 6"/>
-          <p:cNvSpPr/>
-          <p:nvPr/>
-        </p:nvSpPr>
-        <p:spPr>
-          <a:xfrm>
-            <a:off x="411480" y="1389888"/>
+          <p:cNvPr id="8" name="Shape 6"/>
+          <p:cNvSpPr/>
+          <p:nvPr/>
+        </p:nvSpPr>
+        <p:spPr>
+          <a:xfrm>
+            <a:off x="411480" y="1060704"/>
+            <a:ext cx="11384280" cy="274320"/>
+          </a:xfrm>
+          <a:prstGeom prst="roundRect">
+            <a:avLst>
+              <a:gd name="adj" fmla="val 13333"/>
+            </a:avLst>
+          </a:prstGeom>
+          <a:solidFill>
+            <a:srgbClr val="EEF2FF"/>
+          </a:solidFill>
+          <a:ln w="9525">
+            <a:solidFill>
+              <a:srgbClr val="C7D2FE"/>
+            </a:solidFill>
+            <a:prstDash val="solid"/>
+          </a:ln>
+        </p:spPr>
+      </p:sp>
+      <p:sp>
+        <p:nvSpPr>
+          <p:cNvPr id="9" name="Text 7"/>
+          <p:cNvSpPr/>
+          <p:nvPr/>
+        </p:nvSpPr>
+        <p:spPr>
+          <a:xfrm>
+            <a:off x="521208" y="1060704"/>
+            <a:ext cx="11164824" cy="274320"/>
+          </a:xfrm>
+          <a:prstGeom prst="rect">
+            <a:avLst/>
+          </a:prstGeom>
+          <a:noFill/>
+          <a:ln/>
+        </p:spPr>
+        <p:txBody>
+          <a:bodyPr wrap="square" rtlCol="0" anchor="ctr"/>
+          <a:lstStyle/>
+          <a:p>
+            <a:pPr indent="0" marL="0">
+              <a:buNone/>
+            </a:pPr>
+            <a:r>
+              <a:rPr lang="en-US" sz="950" b="1" dirty="0">
+                <a:solidFill>
+                  <a:srgbClr val="3730A3"/>
+                </a:solidFill>
+                <a:latin typeface="Inter" pitchFamily="34" charset="0"/>
+                <a:ea typeface="Inter" pitchFamily="34" charset="-122"/>
+                <a:cs typeface="Inter" pitchFamily="34" charset="-120"/>
+              </a:rPr>
+              <a:t>SCOPE  ·  VMs that are BORN on OpenShift Virtualization — requested, provisioned, right-sized, reclaimed.   For machines arriving FROM VMware, see UC-10.</a:t>
+            </a:r>
+            <a:endParaRPr lang="en-US" sz="950" dirty="0"/>
+          </a:p>
+        </p:txBody>
+      </p:sp>
+      <p:sp>
+        <p:nvSpPr>
+          <p:cNvPr id="10" name="Text 8"/>
+          <p:cNvSpPr/>
+          <p:nvPr/>
+        </p:nvSpPr>
+        <p:spPr>
+          <a:xfrm>
+            <a:off x="411480" y="1426464"/>
             <a:ext cx="11384280" cy="914400"/>
           </a:xfrm>
           <a:prstGeom prst="rect">
@@ -15098,7 +15230,7 @@
       </p:sp>
       <p:sp>
         <p:nvSpPr>
-          <p:cNvPr id="9" name="Text 7"/>
+          <p:cNvPr id="11" name="Text 9"/>
           <p:cNvSpPr/>
           <p:nvPr/>
         </p:nvSpPr>
@@ -15137,7 +15269,7 @@
       </p:sp>
       <p:sp>
         <p:nvSpPr>
-          <p:cNvPr id="10" name="Text 8"/>
+          <p:cNvPr id="12" name="Text 10"/>
           <p:cNvSpPr/>
           <p:nvPr/>
         </p:nvSpPr>
@@ -15176,7 +15308,7 @@
       </p:sp>
       <p:sp>
         <p:nvSpPr>
-          <p:cNvPr id="11" name="Shape 9"/>
+          <p:cNvPr id="13" name="Shape 11"/>
           <p:cNvSpPr/>
           <p:nvPr/>
         </p:nvSpPr>
@@ -15203,7 +15335,7 @@
       </p:sp>
       <p:sp>
         <p:nvSpPr>
-          <p:cNvPr id="12" name="Text 10"/>
+          <p:cNvPr id="14" name="Text 12"/>
           <p:cNvSpPr/>
           <p:nvPr/>
         </p:nvSpPr>
@@ -15242,7 +15374,7 @@
       </p:sp>
       <p:sp>
         <p:nvSpPr>
-          <p:cNvPr id="13" name="Text 11"/>
+          <p:cNvPr id="15" name="Text 13"/>
           <p:cNvSpPr/>
           <p:nvPr/>
         </p:nvSpPr>
@@ -15281,7 +15413,7 @@
       </p:sp>
       <p:sp>
         <p:nvSpPr>
-          <p:cNvPr id="14" name="Text 12"/>
+          <p:cNvPr id="16" name="Text 14"/>
           <p:cNvSpPr/>
           <p:nvPr/>
         </p:nvSpPr>
@@ -15320,7 +15452,7 @@
       </p:sp>
       <p:sp>
         <p:nvSpPr>
-          <p:cNvPr id="15" name="Shape 13"/>
+          <p:cNvPr id="17" name="Shape 15"/>
           <p:cNvSpPr/>
           <p:nvPr/>
         </p:nvSpPr>
@@ -15347,7 +15479,7 @@
       </p:sp>
       <p:sp>
         <p:nvSpPr>
-          <p:cNvPr id="16" name="Text 14"/>
+          <p:cNvPr id="18" name="Text 16"/>
           <p:cNvSpPr/>
           <p:nvPr/>
         </p:nvSpPr>
@@ -15386,7 +15518,7 @@
       </p:sp>
       <p:sp>
         <p:nvSpPr>
-          <p:cNvPr id="17" name="Text 15"/>
+          <p:cNvPr id="19" name="Text 17"/>
           <p:cNvSpPr/>
           <p:nvPr/>
         </p:nvSpPr>
@@ -15425,7 +15557,7 @@
       </p:sp>
       <p:sp>
         <p:nvSpPr>
-          <p:cNvPr id="18" name="Text 16"/>
+          <p:cNvPr id="20" name="Text 18"/>
           <p:cNvSpPr/>
           <p:nvPr/>
         </p:nvSpPr>
@@ -15464,7 +15596,7 @@
       </p:sp>
       <p:sp>
         <p:nvSpPr>
-          <p:cNvPr id="19" name="Shape 17"/>
+          <p:cNvPr id="21" name="Shape 19"/>
           <p:cNvSpPr/>
           <p:nvPr/>
         </p:nvSpPr>
@@ -15491,7 +15623,7 @@
       </p:sp>
       <p:sp>
         <p:nvSpPr>
-          <p:cNvPr id="20" name="Text 18"/>
+          <p:cNvPr id="22" name="Text 20"/>
           <p:cNvSpPr/>
           <p:nvPr/>
         </p:nvSpPr>
@@ -15530,7 +15662,7 @@
       </p:sp>
       <p:sp>
         <p:nvSpPr>
-          <p:cNvPr id="21" name="Text 19"/>
+          <p:cNvPr id="23" name="Text 21"/>
           <p:cNvSpPr/>
           <p:nvPr/>
         </p:nvSpPr>
@@ -15569,7 +15701,7 @@
       </p:sp>
       <p:sp>
         <p:nvSpPr>
-          <p:cNvPr id="22" name="Text 20"/>
+          <p:cNvPr id="24" name="Text 22"/>
           <p:cNvSpPr/>
           <p:nvPr/>
         </p:nvSpPr>
@@ -15608,7 +15740,7 @@
       </p:sp>
       <p:sp>
         <p:nvSpPr>
-          <p:cNvPr id="23" name="Shape 21"/>
+          <p:cNvPr id="25" name="Shape 23"/>
           <p:cNvSpPr/>
           <p:nvPr/>
         </p:nvSpPr>
@@ -15635,7 +15767,7 @@
       </p:sp>
       <p:sp>
         <p:nvSpPr>
-          <p:cNvPr id="24" name="Text 22"/>
+          <p:cNvPr id="26" name="Text 24"/>
           <p:cNvSpPr/>
           <p:nvPr/>
         </p:nvSpPr>
@@ -15674,7 +15806,7 @@
       </p:sp>
       <p:sp>
         <p:nvSpPr>
-          <p:cNvPr id="25" name="Text 23"/>
+          <p:cNvPr id="27" name="Text 25"/>
           <p:cNvSpPr/>
           <p:nvPr/>
         </p:nvSpPr>
@@ -15713,7 +15845,7 @@
       </p:sp>
       <p:sp>
         <p:nvSpPr>
-          <p:cNvPr id="26" name="Text 24"/>
+          <p:cNvPr id="28" name="Text 26"/>
           <p:cNvSpPr/>
           <p:nvPr/>
         </p:nvSpPr>
@@ -15752,7 +15884,7 @@
       </p:sp>
       <p:sp>
         <p:nvSpPr>
-          <p:cNvPr id="27" name="Shape 25"/>
+          <p:cNvPr id="29" name="Shape 27"/>
           <p:cNvSpPr/>
           <p:nvPr/>
         </p:nvSpPr>
@@ -15779,7 +15911,7 @@
       </p:sp>
       <p:sp>
         <p:nvSpPr>
-          <p:cNvPr id="28" name="Text 26"/>
+          <p:cNvPr id="30" name="Text 28"/>
           <p:cNvSpPr/>
           <p:nvPr/>
         </p:nvSpPr>
@@ -15818,7 +15950,7 @@
       </p:sp>
       <p:sp>
         <p:nvSpPr>
-          <p:cNvPr id="29" name="Text 27"/>
+          <p:cNvPr id="31" name="Text 29"/>
           <p:cNvSpPr/>
           <p:nvPr/>
         </p:nvSpPr>
@@ -15857,7 +15989,7 @@
       </p:sp>
       <p:sp>
         <p:nvSpPr>
-          <p:cNvPr id="30" name="Shape 28"/>
+          <p:cNvPr id="32" name="Shape 30"/>
           <p:cNvSpPr/>
           <p:nvPr/>
         </p:nvSpPr>
@@ -15884,7 +16016,7 @@
       </p:sp>
       <p:sp>
         <p:nvSpPr>
-          <p:cNvPr id="31" name="Text 29"/>
+          <p:cNvPr id="33" name="Text 31"/>
           <p:cNvSpPr/>
           <p:nvPr/>
         </p:nvSpPr>
@@ -15923,7 +16055,7 @@
       </p:sp>
       <p:sp>
         <p:nvSpPr>
-          <p:cNvPr id="32" name="Text 30"/>
+          <p:cNvPr id="34" name="Text 32"/>
           <p:cNvSpPr/>
           <p:nvPr/>
         </p:nvSpPr>
@@ -15962,7 +16094,7 @@
       </p:sp>
       <p:sp>
         <p:nvSpPr>
-          <p:cNvPr id="33" name="Shape 31"/>
+          <p:cNvPr id="35" name="Shape 33"/>
           <p:cNvSpPr/>
           <p:nvPr/>
         </p:nvSpPr>
@@ -15989,7 +16121,7 @@
       </p:sp>
       <p:sp>
         <p:nvSpPr>
-          <p:cNvPr id="34" name="Text 32"/>
+          <p:cNvPr id="36" name="Text 34"/>
           <p:cNvSpPr/>
           <p:nvPr/>
         </p:nvSpPr>
@@ -16028,7 +16160,7 @@
       </p:sp>
       <p:sp>
         <p:nvSpPr>
-          <p:cNvPr id="35" name="Text 33"/>
+          <p:cNvPr id="37" name="Text 35"/>
           <p:cNvSpPr/>
           <p:nvPr/>
         </p:nvSpPr>
@@ -16067,7 +16199,7 @@
       </p:sp>
       <p:sp>
         <p:nvSpPr>
-          <p:cNvPr id="36" name="Text 34"/>
+          <p:cNvPr id="38" name="Text 36"/>
           <p:cNvSpPr/>
           <p:nvPr/>
         </p:nvSpPr>
@@ -16106,7 +16238,7 @@
       </p:sp>
       <p:sp>
         <p:nvSpPr>
-          <p:cNvPr id="37" name="Shape 35"/>
+          <p:cNvPr id="39" name="Shape 37"/>
           <p:cNvSpPr/>
           <p:nvPr/>
         </p:nvSpPr>
@@ -16133,7 +16265,7 @@
       </p:sp>
       <p:sp>
         <p:nvSpPr>
-          <p:cNvPr id="38" name="Text 36"/>
+          <p:cNvPr id="40" name="Text 38"/>
           <p:cNvSpPr/>
           <p:nvPr/>
         </p:nvSpPr>
@@ -16172,7 +16304,7 @@
       </p:sp>
       <p:sp>
         <p:nvSpPr>
-          <p:cNvPr id="39" name="Text 37"/>
+          <p:cNvPr id="41" name="Text 39"/>
           <p:cNvSpPr/>
           <p:nvPr/>
         </p:nvSpPr>
@@ -16211,7 +16343,7 @@
       </p:sp>
       <p:sp>
         <p:nvSpPr>
-          <p:cNvPr id="40" name="Text 38"/>
+          <p:cNvPr id="42" name="Text 40"/>
           <p:cNvSpPr/>
           <p:nvPr/>
         </p:nvSpPr>
@@ -16250,7 +16382,7 @@
       </p:sp>
       <p:sp>
         <p:nvSpPr>
-          <p:cNvPr id="41" name="Shape 39"/>
+          <p:cNvPr id="43" name="Shape 41"/>
           <p:cNvSpPr/>
           <p:nvPr/>
         </p:nvSpPr>
@@ -16277,7 +16409,7 @@
       </p:sp>
       <p:sp>
         <p:nvSpPr>
-          <p:cNvPr id="42" name="Text 40"/>
+          <p:cNvPr id="44" name="Text 42"/>
           <p:cNvSpPr/>
           <p:nvPr/>
         </p:nvSpPr>
@@ -16316,7 +16448,7 @@
       </p:sp>
       <p:sp>
         <p:nvSpPr>
-          <p:cNvPr id="43" name="Text 41"/>
+          <p:cNvPr id="45" name="Text 43"/>
           <p:cNvSpPr/>
           <p:nvPr/>
         </p:nvSpPr>
@@ -16355,7 +16487,7 @@
       </p:sp>
       <p:sp>
         <p:nvSpPr>
-          <p:cNvPr id="44" name="Text 42"/>
+          <p:cNvPr id="46" name="Text 44"/>
           <p:cNvSpPr/>
           <p:nvPr/>
         </p:nvSpPr>
@@ -16394,7 +16526,7 @@
       </p:sp>
       <p:sp>
         <p:nvSpPr>
-          <p:cNvPr id="45" name="Shape 43"/>
+          <p:cNvPr id="47" name="Shape 45"/>
           <p:cNvSpPr/>
           <p:nvPr/>
         </p:nvSpPr>
@@ -16421,7 +16553,7 @@
       </p:sp>
       <p:sp>
         <p:nvSpPr>
-          <p:cNvPr id="46" name="Text 44"/>
+          <p:cNvPr id="48" name="Text 46"/>
           <p:cNvSpPr/>
           <p:nvPr/>
         </p:nvSpPr>
@@ -16460,7 +16592,7 @@
       </p:sp>
       <p:sp>
         <p:nvSpPr>
-          <p:cNvPr id="47" name="Text 45"/>
+          <p:cNvPr id="49" name="Text 47"/>
           <p:cNvSpPr/>
           <p:nvPr/>
         </p:nvSpPr>
@@ -16499,7 +16631,7 @@
       </p:sp>
       <p:sp>
         <p:nvSpPr>
-          <p:cNvPr id="48" name="Text 46"/>
+          <p:cNvPr id="50" name="Text 48"/>
           <p:cNvSpPr/>
           <p:nvPr/>
         </p:nvSpPr>
@@ -16538,7 +16670,7 @@
       </p:sp>
       <p:sp>
         <p:nvSpPr>
-          <p:cNvPr id="49" name="Shape 47"/>
+          <p:cNvPr id="51" name="Shape 49"/>
           <p:cNvSpPr/>
           <p:nvPr/>
         </p:nvSpPr>
@@ -16565,7 +16697,7 @@
       </p:sp>
       <p:sp>
         <p:nvSpPr>
-          <p:cNvPr id="50" name="Text 48"/>
+          <p:cNvPr id="52" name="Text 50"/>
           <p:cNvSpPr/>
           <p:nvPr/>
         </p:nvSpPr>
@@ -16604,7 +16736,7 @@
       </p:sp>
       <p:sp>
         <p:nvSpPr>
-          <p:cNvPr id="51" name="Shape 49"/>
+          <p:cNvPr id="53" name="Shape 51"/>
           <p:cNvSpPr/>
           <p:nvPr/>
         </p:nvSpPr>
@@ -16631,7 +16763,7 @@
       </p:sp>
       <p:sp>
         <p:nvSpPr>
-          <p:cNvPr id="52" name="Text 50"/>
+          <p:cNvPr id="54" name="Text 52"/>
           <p:cNvSpPr/>
           <p:nvPr/>
         </p:nvSpPr>
@@ -16670,7 +16802,7 @@
       </p:sp>
       <p:sp>
         <p:nvSpPr>
-          <p:cNvPr id="53" name="Shape 51"/>
+          <p:cNvPr id="55" name="Shape 53"/>
           <p:cNvSpPr/>
           <p:nvPr/>
         </p:nvSpPr>
@@ -16697,7 +16829,7 @@
       </p:sp>
       <p:sp>
         <p:nvSpPr>
-          <p:cNvPr id="54" name="Text 52"/>
+          <p:cNvPr id="56" name="Text 54"/>
           <p:cNvSpPr/>
           <p:nvPr/>
         </p:nvSpPr>
@@ -16736,7 +16868,7 @@
       </p:sp>
       <p:sp>
         <p:nvSpPr>
-          <p:cNvPr id="55" name="Shape 53"/>
+          <p:cNvPr id="57" name="Shape 55"/>
           <p:cNvSpPr/>
           <p:nvPr/>
         </p:nvSpPr>
@@ -16763,7 +16895,7 @@
       </p:sp>
       <p:sp>
         <p:nvSpPr>
-          <p:cNvPr id="56" name="Text 54"/>
+          <p:cNvPr id="58" name="Text 56"/>
           <p:cNvSpPr/>
           <p:nvPr/>
         </p:nvSpPr>
@@ -16802,7 +16934,7 @@
       </p:sp>
       <p:sp>
         <p:nvSpPr>
-          <p:cNvPr id="57" name="Shape 55"/>
+          <p:cNvPr id="59" name="Shape 57"/>
           <p:cNvSpPr/>
           <p:nvPr/>
         </p:nvSpPr>
@@ -16829,7 +16961,7 @@
       </p:sp>
       <p:sp>
         <p:nvSpPr>
-          <p:cNvPr id="58" name="Text 56"/>
+          <p:cNvPr id="60" name="Text 58"/>
           <p:cNvSpPr/>
           <p:nvPr/>
         </p:nvSpPr>
@@ -16868,7 +17000,7 @@
       </p:sp>
       <p:sp>
         <p:nvSpPr>
-          <p:cNvPr id="59" name="Shape 57"/>
+          <p:cNvPr id="61" name="Shape 59"/>
           <p:cNvSpPr/>
           <p:nvPr/>
         </p:nvSpPr>
@@ -16895,7 +17027,7 @@
       </p:sp>
       <p:sp>
         <p:nvSpPr>
-          <p:cNvPr id="60" name="Text 58"/>
+          <p:cNvPr id="62" name="Text 60"/>
           <p:cNvSpPr/>
           <p:nvPr/>
         </p:nvSpPr>
@@ -16934,7 +17066,7 @@
       </p:sp>
       <p:sp>
         <p:nvSpPr>
-          <p:cNvPr id="61" name="Shape 59"/>
+          <p:cNvPr id="63" name="Shape 61"/>
           <p:cNvSpPr/>
           <p:nvPr/>
         </p:nvSpPr>
@@ -16961,7 +17093,7 @@
       </p:sp>
       <p:sp>
         <p:nvSpPr>
-          <p:cNvPr id="62" name="Text 60"/>
+          <p:cNvPr id="64" name="Text 62"/>
           <p:cNvSpPr/>
           <p:nvPr/>
         </p:nvSpPr>
@@ -17000,7 +17132,7 @@
       </p:sp>
       <p:sp>
         <p:nvSpPr>
-          <p:cNvPr id="63" name="Shape 61"/>
+          <p:cNvPr id="65" name="Shape 63"/>
           <p:cNvSpPr/>
           <p:nvPr/>
         </p:nvSpPr>
@@ -17027,7 +17159,7 @@
       </p:sp>
       <p:sp>
         <p:nvSpPr>
-          <p:cNvPr id="64" name="Text 62"/>
+          <p:cNvPr id="66" name="Text 64"/>
           <p:cNvSpPr/>
           <p:nvPr/>
         </p:nvSpPr>
@@ -17066,7 +17198,7 @@
       </p:sp>
       <p:sp>
         <p:nvSpPr>
-          <p:cNvPr id="65" name="Text 63"/>
+          <p:cNvPr id="67" name="Text 65"/>
           <p:cNvSpPr/>
           <p:nvPr/>
         </p:nvSpPr>
